--- a/paper/presentacion_OCT.pptx
+++ b/paper/presentacion_OCT.pptx
@@ -75,9 +75,9 @@
         </a:solidFill>
         <a:effectLst/>
         <a:uFillTx/>
-        <a:latin typeface="+mn-lt"/>
-        <a:ea typeface="+mn-ea"/>
-        <a:cs typeface="+mn-cs"/>
+        <a:latin typeface="+mj-lt"/>
+        <a:ea typeface="+mj-ea"/>
+        <a:cs typeface="+mj-cs"/>
         <a:sym typeface="Calibri"/>
       </a:defRPr>
     </a:lvl1pPr>
@@ -105,9 +105,9 @@
         </a:solidFill>
         <a:effectLst/>
         <a:uFillTx/>
-        <a:latin typeface="+mn-lt"/>
-        <a:ea typeface="+mn-ea"/>
-        <a:cs typeface="+mn-cs"/>
+        <a:latin typeface="+mj-lt"/>
+        <a:ea typeface="+mj-ea"/>
+        <a:cs typeface="+mj-cs"/>
         <a:sym typeface="Calibri"/>
       </a:defRPr>
     </a:lvl2pPr>
@@ -135,9 +135,9 @@
         </a:solidFill>
         <a:effectLst/>
         <a:uFillTx/>
-        <a:latin typeface="+mn-lt"/>
-        <a:ea typeface="+mn-ea"/>
-        <a:cs typeface="+mn-cs"/>
+        <a:latin typeface="+mj-lt"/>
+        <a:ea typeface="+mj-ea"/>
+        <a:cs typeface="+mj-cs"/>
         <a:sym typeface="Calibri"/>
       </a:defRPr>
     </a:lvl3pPr>
@@ -165,9 +165,9 @@
         </a:solidFill>
         <a:effectLst/>
         <a:uFillTx/>
-        <a:latin typeface="+mn-lt"/>
-        <a:ea typeface="+mn-ea"/>
-        <a:cs typeface="+mn-cs"/>
+        <a:latin typeface="+mj-lt"/>
+        <a:ea typeface="+mj-ea"/>
+        <a:cs typeface="+mj-cs"/>
         <a:sym typeface="Calibri"/>
       </a:defRPr>
     </a:lvl4pPr>
@@ -195,9 +195,9 @@
         </a:solidFill>
         <a:effectLst/>
         <a:uFillTx/>
-        <a:latin typeface="+mn-lt"/>
-        <a:ea typeface="+mn-ea"/>
-        <a:cs typeface="+mn-cs"/>
+        <a:latin typeface="+mj-lt"/>
+        <a:ea typeface="+mj-ea"/>
+        <a:cs typeface="+mj-cs"/>
         <a:sym typeface="Calibri"/>
       </a:defRPr>
     </a:lvl5pPr>
@@ -225,9 +225,9 @@
         </a:solidFill>
         <a:effectLst/>
         <a:uFillTx/>
-        <a:latin typeface="+mn-lt"/>
-        <a:ea typeface="+mn-ea"/>
-        <a:cs typeface="+mn-cs"/>
+        <a:latin typeface="+mj-lt"/>
+        <a:ea typeface="+mj-ea"/>
+        <a:cs typeface="+mj-cs"/>
         <a:sym typeface="Calibri"/>
       </a:defRPr>
     </a:lvl6pPr>
@@ -255,9 +255,9 @@
         </a:solidFill>
         <a:effectLst/>
         <a:uFillTx/>
-        <a:latin typeface="+mn-lt"/>
-        <a:ea typeface="+mn-ea"/>
-        <a:cs typeface="+mn-cs"/>
+        <a:latin typeface="+mj-lt"/>
+        <a:ea typeface="+mj-ea"/>
+        <a:cs typeface="+mj-cs"/>
         <a:sym typeface="Calibri"/>
       </a:defRPr>
     </a:lvl7pPr>
@@ -285,9 +285,9 @@
         </a:solidFill>
         <a:effectLst/>
         <a:uFillTx/>
-        <a:latin typeface="+mn-lt"/>
-        <a:ea typeface="+mn-ea"/>
-        <a:cs typeface="+mn-cs"/>
+        <a:latin typeface="+mj-lt"/>
+        <a:ea typeface="+mj-ea"/>
+        <a:cs typeface="+mj-cs"/>
         <a:sym typeface="Calibri"/>
       </a:defRPr>
     </a:lvl8pPr>
@@ -315,9 +315,9 @@
         </a:solidFill>
         <a:effectLst/>
         <a:uFillTx/>
-        <a:latin typeface="+mn-lt"/>
-        <a:ea typeface="+mn-ea"/>
-        <a:cs typeface="+mn-cs"/>
+        <a:latin typeface="+mj-lt"/>
+        <a:ea typeface="+mj-ea"/>
+        <a:cs typeface="+mj-cs"/>
         <a:sym typeface="Calibri"/>
       </a:defRPr>
     </a:lvl9pPr>
@@ -402,73 +402,73 @@
   <p:notesStyle>
     <a:lvl1pPr defTabSz="457200" latinLnBrk="0">
       <a:defRPr sz="1200">
-        <a:latin typeface="+mn-lt"/>
-        <a:ea typeface="+mn-ea"/>
-        <a:cs typeface="+mn-cs"/>
+        <a:latin typeface="+mj-lt"/>
+        <a:ea typeface="+mj-ea"/>
+        <a:cs typeface="+mj-cs"/>
         <a:sym typeface="Calibri"/>
       </a:defRPr>
     </a:lvl1pPr>
     <a:lvl2pPr indent="228600" defTabSz="457200" latinLnBrk="0">
       <a:defRPr sz="1200">
-        <a:latin typeface="+mn-lt"/>
-        <a:ea typeface="+mn-ea"/>
-        <a:cs typeface="+mn-cs"/>
+        <a:latin typeface="+mj-lt"/>
+        <a:ea typeface="+mj-ea"/>
+        <a:cs typeface="+mj-cs"/>
         <a:sym typeface="Calibri"/>
       </a:defRPr>
     </a:lvl2pPr>
     <a:lvl3pPr indent="457200" defTabSz="457200" latinLnBrk="0">
       <a:defRPr sz="1200">
-        <a:latin typeface="+mn-lt"/>
-        <a:ea typeface="+mn-ea"/>
-        <a:cs typeface="+mn-cs"/>
+        <a:latin typeface="+mj-lt"/>
+        <a:ea typeface="+mj-ea"/>
+        <a:cs typeface="+mj-cs"/>
         <a:sym typeface="Calibri"/>
       </a:defRPr>
     </a:lvl3pPr>
     <a:lvl4pPr indent="685800" defTabSz="457200" latinLnBrk="0">
       <a:defRPr sz="1200">
-        <a:latin typeface="+mn-lt"/>
-        <a:ea typeface="+mn-ea"/>
-        <a:cs typeface="+mn-cs"/>
+        <a:latin typeface="+mj-lt"/>
+        <a:ea typeface="+mj-ea"/>
+        <a:cs typeface="+mj-cs"/>
         <a:sym typeface="Calibri"/>
       </a:defRPr>
     </a:lvl4pPr>
     <a:lvl5pPr indent="914400" defTabSz="457200" latinLnBrk="0">
       <a:defRPr sz="1200">
-        <a:latin typeface="+mn-lt"/>
-        <a:ea typeface="+mn-ea"/>
-        <a:cs typeface="+mn-cs"/>
+        <a:latin typeface="+mj-lt"/>
+        <a:ea typeface="+mj-ea"/>
+        <a:cs typeface="+mj-cs"/>
         <a:sym typeface="Calibri"/>
       </a:defRPr>
     </a:lvl5pPr>
     <a:lvl6pPr indent="1143000" defTabSz="457200" latinLnBrk="0">
       <a:defRPr sz="1200">
-        <a:latin typeface="+mn-lt"/>
-        <a:ea typeface="+mn-ea"/>
-        <a:cs typeface="+mn-cs"/>
+        <a:latin typeface="+mj-lt"/>
+        <a:ea typeface="+mj-ea"/>
+        <a:cs typeface="+mj-cs"/>
         <a:sym typeface="Calibri"/>
       </a:defRPr>
     </a:lvl6pPr>
     <a:lvl7pPr indent="1371600" defTabSz="457200" latinLnBrk="0">
       <a:defRPr sz="1200">
-        <a:latin typeface="+mn-lt"/>
-        <a:ea typeface="+mn-ea"/>
-        <a:cs typeface="+mn-cs"/>
+        <a:latin typeface="+mj-lt"/>
+        <a:ea typeface="+mj-ea"/>
+        <a:cs typeface="+mj-cs"/>
         <a:sym typeface="Calibri"/>
       </a:defRPr>
     </a:lvl7pPr>
     <a:lvl8pPr indent="1600200" defTabSz="457200" latinLnBrk="0">
       <a:defRPr sz="1200">
-        <a:latin typeface="+mn-lt"/>
-        <a:ea typeface="+mn-ea"/>
-        <a:cs typeface="+mn-cs"/>
+        <a:latin typeface="+mj-lt"/>
+        <a:ea typeface="+mj-ea"/>
+        <a:cs typeface="+mj-cs"/>
         <a:sym typeface="Calibri"/>
       </a:defRPr>
     </a:lvl8pPr>
     <a:lvl9pPr indent="1828800" defTabSz="457200" latinLnBrk="0">
       <a:defRPr sz="1200">
-        <a:latin typeface="+mn-lt"/>
-        <a:ea typeface="+mn-ea"/>
-        <a:cs typeface="+mn-cs"/>
+        <a:latin typeface="+mj-lt"/>
+        <a:ea typeface="+mj-ea"/>
+        <a:cs typeface="+mj-cs"/>
         <a:sym typeface="Calibri"/>
       </a:defRPr>
     </a:lvl9pPr>
@@ -1876,7 +1876,7 @@
         <p:spPr>
           <a:xfrm>
             <a:off x="608965" y="92074"/>
-            <a:ext cx="10961370" cy="1508126"/>
+            <a:ext cx="10961370" cy="1508127"/>
           </a:xfrm>
           <a:prstGeom prst="rect">
             <a:avLst/>
@@ -2041,9 +2041,9 @@
             <a:srgbClr val="000000"/>
           </a:solidFill>
           <a:uFillTx/>
-          <a:latin typeface="+mn-lt"/>
-          <a:ea typeface="+mn-ea"/>
-          <a:cs typeface="+mn-cs"/>
+          <a:latin typeface="+mj-lt"/>
+          <a:ea typeface="+mj-ea"/>
+          <a:cs typeface="+mj-cs"/>
           <a:sym typeface="Calibri"/>
         </a:defRPr>
       </a:lvl1pPr>
@@ -2067,9 +2067,9 @@
             <a:srgbClr val="000000"/>
           </a:solidFill>
           <a:uFillTx/>
-          <a:latin typeface="+mn-lt"/>
-          <a:ea typeface="+mn-ea"/>
-          <a:cs typeface="+mn-cs"/>
+          <a:latin typeface="+mj-lt"/>
+          <a:ea typeface="+mj-ea"/>
+          <a:cs typeface="+mj-cs"/>
           <a:sym typeface="Calibri"/>
         </a:defRPr>
       </a:lvl2pPr>
@@ -2093,9 +2093,9 @@
             <a:srgbClr val="000000"/>
           </a:solidFill>
           <a:uFillTx/>
-          <a:latin typeface="+mn-lt"/>
-          <a:ea typeface="+mn-ea"/>
-          <a:cs typeface="+mn-cs"/>
+          <a:latin typeface="+mj-lt"/>
+          <a:ea typeface="+mj-ea"/>
+          <a:cs typeface="+mj-cs"/>
           <a:sym typeface="Calibri"/>
         </a:defRPr>
       </a:lvl3pPr>
@@ -2119,9 +2119,9 @@
             <a:srgbClr val="000000"/>
           </a:solidFill>
           <a:uFillTx/>
-          <a:latin typeface="+mn-lt"/>
-          <a:ea typeface="+mn-ea"/>
-          <a:cs typeface="+mn-cs"/>
+          <a:latin typeface="+mj-lt"/>
+          <a:ea typeface="+mj-ea"/>
+          <a:cs typeface="+mj-cs"/>
           <a:sym typeface="Calibri"/>
         </a:defRPr>
       </a:lvl4pPr>
@@ -2145,9 +2145,9 @@
             <a:srgbClr val="000000"/>
           </a:solidFill>
           <a:uFillTx/>
-          <a:latin typeface="+mn-lt"/>
-          <a:ea typeface="+mn-ea"/>
-          <a:cs typeface="+mn-cs"/>
+          <a:latin typeface="+mj-lt"/>
+          <a:ea typeface="+mj-ea"/>
+          <a:cs typeface="+mj-cs"/>
           <a:sym typeface="Calibri"/>
         </a:defRPr>
       </a:lvl5pPr>
@@ -2171,9 +2171,9 @@
             <a:srgbClr val="000000"/>
           </a:solidFill>
           <a:uFillTx/>
-          <a:latin typeface="+mn-lt"/>
-          <a:ea typeface="+mn-ea"/>
-          <a:cs typeface="+mn-cs"/>
+          <a:latin typeface="+mj-lt"/>
+          <a:ea typeface="+mj-ea"/>
+          <a:cs typeface="+mj-cs"/>
           <a:sym typeface="Calibri"/>
         </a:defRPr>
       </a:lvl6pPr>
@@ -2197,9 +2197,9 @@
             <a:srgbClr val="000000"/>
           </a:solidFill>
           <a:uFillTx/>
-          <a:latin typeface="+mn-lt"/>
-          <a:ea typeface="+mn-ea"/>
-          <a:cs typeface="+mn-cs"/>
+          <a:latin typeface="+mj-lt"/>
+          <a:ea typeface="+mj-ea"/>
+          <a:cs typeface="+mj-cs"/>
           <a:sym typeface="Calibri"/>
         </a:defRPr>
       </a:lvl7pPr>
@@ -2223,9 +2223,9 @@
             <a:srgbClr val="000000"/>
           </a:solidFill>
           <a:uFillTx/>
-          <a:latin typeface="+mn-lt"/>
-          <a:ea typeface="+mn-ea"/>
-          <a:cs typeface="+mn-cs"/>
+          <a:latin typeface="+mj-lt"/>
+          <a:ea typeface="+mj-ea"/>
+          <a:cs typeface="+mj-cs"/>
           <a:sym typeface="Calibri"/>
         </a:defRPr>
       </a:lvl8pPr>
@@ -2249,9 +2249,9 @@
             <a:srgbClr val="000000"/>
           </a:solidFill>
           <a:uFillTx/>
-          <a:latin typeface="+mn-lt"/>
-          <a:ea typeface="+mn-ea"/>
-          <a:cs typeface="+mn-cs"/>
+          <a:latin typeface="+mj-lt"/>
+          <a:ea typeface="+mj-ea"/>
+          <a:cs typeface="+mj-cs"/>
           <a:sym typeface="Calibri"/>
         </a:defRPr>
       </a:lvl9pPr>
@@ -2277,9 +2277,9 @@
             <a:srgbClr val="000000"/>
           </a:solidFill>
           <a:uFillTx/>
-          <a:latin typeface="+mn-lt"/>
-          <a:ea typeface="+mn-ea"/>
-          <a:cs typeface="+mn-cs"/>
+          <a:latin typeface="+mj-lt"/>
+          <a:ea typeface="+mj-ea"/>
+          <a:cs typeface="+mj-cs"/>
           <a:sym typeface="Calibri"/>
         </a:defRPr>
       </a:lvl1pPr>
@@ -2303,9 +2303,9 @@
             <a:srgbClr val="000000"/>
           </a:solidFill>
           <a:uFillTx/>
-          <a:latin typeface="+mn-lt"/>
-          <a:ea typeface="+mn-ea"/>
-          <a:cs typeface="+mn-cs"/>
+          <a:latin typeface="+mj-lt"/>
+          <a:ea typeface="+mj-ea"/>
+          <a:cs typeface="+mj-cs"/>
           <a:sym typeface="Calibri"/>
         </a:defRPr>
       </a:lvl2pPr>
@@ -2329,9 +2329,9 @@
             <a:srgbClr val="000000"/>
           </a:solidFill>
           <a:uFillTx/>
-          <a:latin typeface="+mn-lt"/>
-          <a:ea typeface="+mn-ea"/>
-          <a:cs typeface="+mn-cs"/>
+          <a:latin typeface="+mj-lt"/>
+          <a:ea typeface="+mj-ea"/>
+          <a:cs typeface="+mj-cs"/>
           <a:sym typeface="Calibri"/>
         </a:defRPr>
       </a:lvl3pPr>
@@ -2355,9 +2355,9 @@
             <a:srgbClr val="000000"/>
           </a:solidFill>
           <a:uFillTx/>
-          <a:latin typeface="+mn-lt"/>
-          <a:ea typeface="+mn-ea"/>
-          <a:cs typeface="+mn-cs"/>
+          <a:latin typeface="+mj-lt"/>
+          <a:ea typeface="+mj-ea"/>
+          <a:cs typeface="+mj-cs"/>
           <a:sym typeface="Calibri"/>
         </a:defRPr>
       </a:lvl4pPr>
@@ -2381,9 +2381,9 @@
             <a:srgbClr val="000000"/>
           </a:solidFill>
           <a:uFillTx/>
-          <a:latin typeface="+mn-lt"/>
-          <a:ea typeface="+mn-ea"/>
-          <a:cs typeface="+mn-cs"/>
+          <a:latin typeface="+mj-lt"/>
+          <a:ea typeface="+mj-ea"/>
+          <a:cs typeface="+mj-cs"/>
           <a:sym typeface="Calibri"/>
         </a:defRPr>
       </a:lvl5pPr>
@@ -2407,9 +2407,9 @@
             <a:srgbClr val="000000"/>
           </a:solidFill>
           <a:uFillTx/>
-          <a:latin typeface="+mn-lt"/>
-          <a:ea typeface="+mn-ea"/>
-          <a:cs typeface="+mn-cs"/>
+          <a:latin typeface="+mj-lt"/>
+          <a:ea typeface="+mj-ea"/>
+          <a:cs typeface="+mj-cs"/>
           <a:sym typeface="Calibri"/>
         </a:defRPr>
       </a:lvl6pPr>
@@ -2433,9 +2433,9 @@
             <a:srgbClr val="000000"/>
           </a:solidFill>
           <a:uFillTx/>
-          <a:latin typeface="+mn-lt"/>
-          <a:ea typeface="+mn-ea"/>
-          <a:cs typeface="+mn-cs"/>
+          <a:latin typeface="+mj-lt"/>
+          <a:ea typeface="+mj-ea"/>
+          <a:cs typeface="+mj-cs"/>
           <a:sym typeface="Calibri"/>
         </a:defRPr>
       </a:lvl7pPr>
@@ -2459,9 +2459,9 @@
             <a:srgbClr val="000000"/>
           </a:solidFill>
           <a:uFillTx/>
-          <a:latin typeface="+mn-lt"/>
-          <a:ea typeface="+mn-ea"/>
-          <a:cs typeface="+mn-cs"/>
+          <a:latin typeface="+mj-lt"/>
+          <a:ea typeface="+mj-ea"/>
+          <a:cs typeface="+mj-cs"/>
           <a:sym typeface="Calibri"/>
         </a:defRPr>
       </a:lvl8pPr>
@@ -2485,9 +2485,9 @@
             <a:srgbClr val="000000"/>
           </a:solidFill>
           <a:uFillTx/>
-          <a:latin typeface="+mn-lt"/>
-          <a:ea typeface="+mn-ea"/>
-          <a:cs typeface="+mn-cs"/>
+          <a:latin typeface="+mj-lt"/>
+          <a:ea typeface="+mj-ea"/>
+          <a:cs typeface="+mj-cs"/>
           <a:sym typeface="Calibri"/>
         </a:defRPr>
       </a:lvl9pPr>
@@ -2806,8 +2806,8 @@
         </p:nvSpPr>
         <p:spPr>
           <a:xfrm>
-            <a:off x="1417320" y="1371600"/>
-            <a:ext cx="9326880" cy="1666935"/>
+            <a:off x="1417320" y="1371599"/>
+            <a:ext cx="9326880" cy="1666936"/>
           </a:xfrm>
           <a:prstGeom prst="rect">
             <a:avLst/>
@@ -2969,7 +2969,7 @@
           <a:p>
             <a:pPr/>
             <a:r>
-              <a:t>Vision por Computadora II  -  CEIA  -  2026</a:t>
+              <a:t>Visión por Computadora II  -  CEIA  -  2026</a:t>
             </a:r>
           </a:p>
         </p:txBody>
@@ -3002,7 +3002,7 @@
       </p:grpSpPr>
       <p:sp>
         <p:nvSpPr>
-          <p:cNvPr id="290" name="Rectangle 1"/>
+          <p:cNvPr id="291" name="Rectangle 1"/>
           <p:cNvSpPr/>
           <p:nvPr/>
         </p:nvSpPr>
@@ -3044,14 +3044,14 @@
       </p:sp>
       <p:sp>
         <p:nvSpPr>
-          <p:cNvPr id="291" name="TextBox 2"/>
-          <p:cNvSpPr txBox="1"/>
-          <p:nvPr/>
-        </p:nvSpPr>
-        <p:spPr>
-          <a:xfrm>
-            <a:off x="777239" y="457200"/>
-            <a:ext cx="9052561" cy="542241"/>
+          <p:cNvPr id="292" name="TextBox 2"/>
+          <p:cNvSpPr txBox="1"/>
+          <p:nvPr/>
+        </p:nvSpPr>
+        <p:spPr>
+          <a:xfrm>
+            <a:off x="777239" y="457199"/>
+            <a:ext cx="9052561" cy="542242"/>
           </a:xfrm>
           <a:prstGeom prst="rect">
             <a:avLst/>
@@ -3088,7 +3088,7 @@
       </p:sp>
       <p:sp>
         <p:nvSpPr>
-          <p:cNvPr id="292" name="Rectangle 3"/>
+          <p:cNvPr id="293" name="Rectangle 3"/>
           <p:cNvSpPr/>
           <p:nvPr/>
         </p:nvSpPr>
@@ -3130,7 +3130,7 @@
       </p:sp>
       <p:sp>
         <p:nvSpPr>
-          <p:cNvPr id="293" name="Rectangle 4"/>
+          <p:cNvPr id="294" name="Rectangle 4"/>
           <p:cNvSpPr/>
           <p:nvPr/>
         </p:nvSpPr>
@@ -3143,7 +3143,7 @@
             <a:avLst/>
           </a:prstGeom>
           <a:solidFill>
-            <a:srgbClr val="F96167"/>
+            <a:srgbClr val="1E2761"/>
           </a:solidFill>
           <a:ln w="12700">
             <a:miter lim="400000"/>
@@ -3172,7 +3172,7 @@
       </p:sp>
       <p:sp>
         <p:nvSpPr>
-          <p:cNvPr id="294" name="Oval 5"/>
+          <p:cNvPr id="295" name="Oval 5"/>
           <p:cNvSpPr/>
           <p:nvPr/>
         </p:nvSpPr>
@@ -3185,7 +3185,7 @@
             <a:avLst/>
           </a:prstGeom>
           <a:solidFill>
-            <a:srgbClr val="F96167"/>
+            <a:srgbClr val="1E2761"/>
           </a:solidFill>
           <a:ln w="12700">
             <a:miter lim="400000"/>
@@ -3214,7 +3214,7 @@
       </p:sp>
       <p:sp>
         <p:nvSpPr>
-          <p:cNvPr id="295" name="TextBox 6"/>
+          <p:cNvPr id="296" name="TextBox 6"/>
           <p:cNvSpPr txBox="1"/>
           <p:nvPr/>
         </p:nvSpPr>
@@ -3258,14 +3258,14 @@
       </p:sp>
       <p:sp>
         <p:nvSpPr>
-          <p:cNvPr id="296" name="TextBox 7"/>
+          <p:cNvPr id="297" name="TextBox 7"/>
           <p:cNvSpPr txBox="1"/>
           <p:nvPr/>
         </p:nvSpPr>
         <p:spPr>
           <a:xfrm>
             <a:off x="1691640" y="1536191"/>
-            <a:ext cx="9509760" cy="300595"/>
+            <a:ext cx="9509761" cy="300595"/>
           </a:xfrm>
           <a:prstGeom prst="rect">
             <a:avLst/>
@@ -3295,21 +3295,21 @@
           <a:p>
             <a:pPr/>
             <a:r>
-              <a:t>Perdida de información discriminativa</a:t>
-            </a:r>
-          </a:p>
-        </p:txBody>
-      </p:sp>
-      <p:sp>
-        <p:nvSpPr>
-          <p:cNvPr id="297" name="TextBox 8"/>
+              <a:t>Información de segmentación redundante</a:t>
+            </a:r>
+          </a:p>
+        </p:txBody>
+      </p:sp>
+      <p:sp>
+        <p:nvSpPr>
+          <p:cNvPr id="298" name="TextBox 8"/>
           <p:cNvSpPr txBox="1"/>
           <p:nvPr/>
         </p:nvSpPr>
         <p:spPr>
           <a:xfrm>
             <a:off x="1691640" y="1920239"/>
-            <a:ext cx="9509760" cy="461403"/>
+            <a:ext cx="9509761" cy="461403"/>
           </a:xfrm>
           <a:prstGeom prst="rect">
             <a:avLst/>
@@ -3339,14 +3339,14 @@
           <a:p>
             <a:pPr/>
             <a:r>
-              <a:t>La segmentación reduce la imagen a etiquetas discretas (0-7), descartando textura, intensidad y contraste fundamentales para distinguir patologías.</a:t>
-            </a:r>
-          </a:p>
-        </p:txBody>
-      </p:sp>
-      <p:sp>
-        <p:nvSpPr>
-          <p:cNvPr id="298" name="Rectangle 9"/>
+              <a:t>El Modelo 3 (imagen+mascara, 92%) iguala al Modelo 1 (solo imagen, 92%). La segmentación no agrega información que ResNet50 no extraiga ya de la imagen original.</a:t>
+            </a:r>
+          </a:p>
+        </p:txBody>
+      </p:sp>
+      <p:sp>
+        <p:nvSpPr>
+          <p:cNvPr id="299" name="Rectangle 9"/>
           <p:cNvSpPr/>
           <p:nvPr/>
         </p:nvSpPr>
@@ -3388,7 +3388,7 @@
       </p:sp>
       <p:sp>
         <p:nvSpPr>
-          <p:cNvPr id="299" name="Rectangle 10"/>
+          <p:cNvPr id="300" name="Rectangle 10"/>
           <p:cNvSpPr/>
           <p:nvPr/>
         </p:nvSpPr>
@@ -3401,7 +3401,7 @@
             <a:avLst/>
           </a:prstGeom>
           <a:solidFill>
-            <a:srgbClr val="F9C74F"/>
+            <a:srgbClr val="F96167"/>
           </a:solidFill>
           <a:ln w="12700">
             <a:miter lim="400000"/>
@@ -3430,7 +3430,7 @@
       </p:sp>
       <p:sp>
         <p:nvSpPr>
-          <p:cNvPr id="300" name="Oval 11"/>
+          <p:cNvPr id="301" name="Oval 11"/>
           <p:cNvSpPr/>
           <p:nvPr/>
         </p:nvSpPr>
@@ -3443,7 +3443,7 @@
             <a:avLst/>
           </a:prstGeom>
           <a:solidFill>
-            <a:srgbClr val="F9C74F"/>
+            <a:srgbClr val="F96167"/>
           </a:solidFill>
           <a:ln w="12700">
             <a:miter lim="400000"/>
@@ -3472,7 +3472,7 @@
       </p:sp>
       <p:sp>
         <p:nvSpPr>
-          <p:cNvPr id="301" name="TextBox 12"/>
+          <p:cNvPr id="302" name="TextBox 12"/>
           <p:cNvSpPr txBox="1"/>
           <p:nvPr/>
         </p:nvSpPr>
@@ -3516,14 +3516,14 @@
       </p:sp>
       <p:sp>
         <p:nvSpPr>
-          <p:cNvPr id="302" name="TextBox 13"/>
+          <p:cNvPr id="303" name="TextBox 13"/>
           <p:cNvSpPr txBox="1"/>
           <p:nvPr/>
         </p:nvSpPr>
         <p:spPr>
           <a:xfrm>
             <a:off x="1691640" y="2770632"/>
-            <a:ext cx="9509760" cy="300594"/>
+            <a:ext cx="9509761" cy="300594"/>
           </a:xfrm>
           <a:prstGeom prst="rect">
             <a:avLst/>
@@ -3553,21 +3553,21 @@
           <a:p>
             <a:pPr/>
             <a:r>
-              <a:t>Discrepancia de dominios</a:t>
-            </a:r>
-          </a:p>
-        </p:txBody>
-      </p:sp>
-      <p:sp>
-        <p:nvSpPr>
-          <p:cNvPr id="303" name="TextBox 14"/>
+              <a:t>Perdida de textura en máscaras puras</a:t>
+            </a:r>
+          </a:p>
+        </p:txBody>
+      </p:sp>
+      <p:sp>
+        <p:nvSpPr>
+          <p:cNvPr id="304" name="TextBox 14"/>
           <p:cNvSpPr txBox="1"/>
           <p:nvPr/>
         </p:nvSpPr>
         <p:spPr>
           <a:xfrm>
             <a:off x="1691640" y="3154679"/>
-            <a:ext cx="9509760" cy="461403"/>
+            <a:ext cx="9509761" cy="461403"/>
           </a:xfrm>
           <a:prstGeom prst="rect">
             <a:avLst/>
@@ -3597,14 +3597,14 @@
           <a:p>
             <a:pPr/>
             <a:r>
-              <a:t>El modelo de segmentación fue entrenado con un dataset distinto al de clasificación. Diferencias en equipos OCT y resolución generan mascaras subóptimas.</a:t>
-            </a:r>
-          </a:p>
-        </p:txBody>
-      </p:sp>
-      <p:sp>
-        <p:nvSpPr>
-          <p:cNvPr id="304" name="Rectangle 15"/>
+              <a:t>El Modelo 2 (solo máscaras, 72%) pierde textura, intensidad y contraste al reducir a etiquetas discretas 0-7. Información crítica para distinguir patologías.</a:t>
+            </a:r>
+          </a:p>
+        </p:txBody>
+      </p:sp>
+      <p:sp>
+        <p:nvSpPr>
+          <p:cNvPr id="305" name="Rectangle 15"/>
           <p:cNvSpPr/>
           <p:nvPr/>
         </p:nvSpPr>
@@ -3646,7 +3646,7 @@
       </p:sp>
       <p:sp>
         <p:nvSpPr>
-          <p:cNvPr id="305" name="Rectangle 16"/>
+          <p:cNvPr id="306" name="Rectangle 16"/>
           <p:cNvSpPr/>
           <p:nvPr/>
         </p:nvSpPr>
@@ -3688,7 +3688,7 @@
       </p:sp>
       <p:sp>
         <p:nvSpPr>
-          <p:cNvPr id="306" name="Oval 17"/>
+          <p:cNvPr id="307" name="Oval 17"/>
           <p:cNvSpPr/>
           <p:nvPr/>
         </p:nvSpPr>
@@ -3730,7 +3730,7 @@
       </p:sp>
       <p:sp>
         <p:nvSpPr>
-          <p:cNvPr id="307" name="TextBox 18"/>
+          <p:cNvPr id="308" name="TextBox 18"/>
           <p:cNvSpPr txBox="1"/>
           <p:nvPr/>
         </p:nvSpPr>
@@ -3774,14 +3774,14 @@
       </p:sp>
       <p:sp>
         <p:nvSpPr>
-          <p:cNvPr id="308" name="TextBox 19"/>
+          <p:cNvPr id="309" name="TextBox 19"/>
           <p:cNvSpPr txBox="1"/>
           <p:nvPr/>
         </p:nvSpPr>
         <p:spPr>
           <a:xfrm>
             <a:off x="1691640" y="4005071"/>
-            <a:ext cx="9509760" cy="300594"/>
+            <a:ext cx="9509761" cy="300594"/>
           </a:xfrm>
           <a:prstGeom prst="rect">
             <a:avLst/>
@@ -3811,21 +3811,21 @@
           <a:p>
             <a:pPr/>
             <a:r>
-              <a:t>DRUSEN: la clase más afectada (F1: 0.92 -&gt; 0.59)</a:t>
-            </a:r>
-          </a:p>
-        </p:txBody>
-      </p:sp>
-      <p:sp>
-        <p:nvSpPr>
-          <p:cNvPr id="309" name="TextBox 20"/>
+              <a:t>DRUSEN: la clase más afectada (F1: 0.89 -&gt; 0.54)</a:t>
+            </a:r>
+          </a:p>
+        </p:txBody>
+      </p:sp>
+      <p:sp>
+        <p:nvSpPr>
+          <p:cNvPr id="310" name="TextBox 20"/>
           <p:cNvSpPr txBox="1"/>
           <p:nvPr/>
         </p:nvSpPr>
         <p:spPr>
           <a:xfrm>
             <a:off x="1691640" y="4389120"/>
-            <a:ext cx="9509760" cy="461402"/>
+            <a:ext cx="9509761" cy="461402"/>
           </a:xfrm>
           <a:prstGeom prst="rect">
             <a:avLst/>
@@ -3855,14 +3855,14 @@
           <a:p>
             <a:pPr/>
             <a:r>
-              <a:t>Los drusen son depósitos sub-retinales cuya detección depende de textura e intensidad visual, información que se pierde completamente en la máscara.</a:t>
-            </a:r>
-          </a:p>
-        </p:txBody>
-      </p:sp>
-      <p:sp>
-        <p:nvSpPr>
-          <p:cNvPr id="310" name="Rectangle 21"/>
+              <a:t>Los drusen son depósitos sub-retinales cuya detección depende de textura visual. El Mod. 3 híbrido recupera F1=0.89, confirmando que la imagen es la clave.</a:t>
+            </a:r>
+          </a:p>
+        </p:txBody>
+      </p:sp>
+      <p:sp>
+        <p:nvSpPr>
+          <p:cNvPr id="311" name="Rectangle 21"/>
           <p:cNvSpPr/>
           <p:nvPr/>
         </p:nvSpPr>
@@ -3904,7 +3904,7 @@
       </p:sp>
       <p:sp>
         <p:nvSpPr>
-          <p:cNvPr id="311" name="Rectangle 22"/>
+          <p:cNvPr id="312" name="Rectangle 22"/>
           <p:cNvSpPr/>
           <p:nvPr/>
         </p:nvSpPr>
@@ -3917,7 +3917,7 @@
             <a:avLst/>
           </a:prstGeom>
           <a:solidFill>
-            <a:srgbClr val="00A896"/>
+            <a:srgbClr val="F9C74F"/>
           </a:solidFill>
           <a:ln w="12700">
             <a:miter lim="400000"/>
@@ -3946,7 +3946,7 @@
       </p:sp>
       <p:sp>
         <p:nvSpPr>
-          <p:cNvPr id="312" name="Oval 23"/>
+          <p:cNvPr id="313" name="Oval 23"/>
           <p:cNvSpPr/>
           <p:nvPr/>
         </p:nvSpPr>
@@ -3959,7 +3959,7 @@
             <a:avLst/>
           </a:prstGeom>
           <a:solidFill>
-            <a:srgbClr val="00A896"/>
+            <a:srgbClr val="F9C74F"/>
           </a:solidFill>
           <a:ln w="12700">
             <a:miter lim="400000"/>
@@ -3988,7 +3988,7 @@
       </p:sp>
       <p:sp>
         <p:nvSpPr>
-          <p:cNvPr id="313" name="TextBox 24"/>
+          <p:cNvPr id="314" name="TextBox 24"/>
           <p:cNvSpPr txBox="1"/>
           <p:nvPr/>
         </p:nvSpPr>
@@ -4032,14 +4032,14 @@
       </p:sp>
       <p:sp>
         <p:nvSpPr>
-          <p:cNvPr id="314" name="TextBox 25"/>
+          <p:cNvPr id="315" name="TextBox 25"/>
           <p:cNvSpPr txBox="1"/>
           <p:nvPr/>
         </p:nvSpPr>
         <p:spPr>
           <a:xfrm>
             <a:off x="1691640" y="5239511"/>
-            <a:ext cx="9509760" cy="300595"/>
+            <a:ext cx="9509761" cy="300595"/>
           </a:xfrm>
           <a:prstGeom prst="rect">
             <a:avLst/>
@@ -4069,21 +4069,21 @@
           <a:p>
             <a:pPr/>
             <a:r>
-              <a:t>Segmentación excelente (Dice=0.98) pero insuficiente</a:t>
-            </a:r>
-          </a:p>
-        </p:txBody>
-      </p:sp>
-      <p:sp>
-        <p:nvSpPr>
-          <p:cNvPr id="315" name="TextBox 26"/>
+              <a:t>Discrepancia de dominios entre datasets</a:t>
+            </a:r>
+          </a:p>
+        </p:txBody>
+      </p:sp>
+      <p:sp>
+        <p:nvSpPr>
+          <p:cNvPr id="316" name="TextBox 26"/>
           <p:cNvSpPr txBox="1"/>
           <p:nvPr/>
         </p:nvSpPr>
         <p:spPr>
           <a:xfrm>
             <a:off x="1691640" y="5623559"/>
-            <a:ext cx="9509760" cy="461403"/>
+            <a:ext cx="9509761" cy="461403"/>
           </a:xfrm>
           <a:prstGeom prst="rect">
             <a:avLst/>
@@ -4113,7 +4113,7 @@
           <a:p>
             <a:pPr/>
             <a:r>
-              <a:t>El problema no es la calidad de la segmentación, sino que la información estructural pura no es suficiente para clasificar. Saber dónde están las capas no dice cómo se ven.</a:t>
+              <a:t>El modelo de segmentación fue entrenado con un dataset distinto al de clasificación. Diferencias en equipos OCT y resolución amplifican la degradación del Mod. 2.</a:t>
             </a:r>
           </a:p>
         </p:txBody>
@@ -4146,7 +4146,7 @@
       </p:grpSpPr>
       <p:sp>
         <p:nvSpPr>
-          <p:cNvPr id="317" name="Rectangle 1"/>
+          <p:cNvPr id="318" name="Rectangle 1"/>
           <p:cNvSpPr/>
           <p:nvPr/>
         </p:nvSpPr>
@@ -4188,14 +4188,14 @@
       </p:sp>
       <p:sp>
         <p:nvSpPr>
-          <p:cNvPr id="318" name="TextBox 2"/>
-          <p:cNvSpPr txBox="1"/>
-          <p:nvPr/>
-        </p:nvSpPr>
-        <p:spPr>
-          <a:xfrm>
-            <a:off x="777239" y="457200"/>
-            <a:ext cx="9052561" cy="542241"/>
+          <p:cNvPr id="319" name="TextBox 2"/>
+          <p:cNvSpPr txBox="1"/>
+          <p:nvPr/>
+        </p:nvSpPr>
+        <p:spPr>
+          <a:xfrm>
+            <a:off x="777239" y="457199"/>
+            <a:ext cx="9052561" cy="542242"/>
           </a:xfrm>
           <a:prstGeom prst="rect">
             <a:avLst/>
@@ -4225,14 +4225,14 @@
           <a:p>
             <a:pPr/>
             <a:r>
-              <a:t>Prototipo funcional: app Streamlit</a:t>
-            </a:r>
-          </a:p>
-        </p:txBody>
-      </p:sp>
-      <p:sp>
-        <p:nvSpPr>
-          <p:cNvPr id="319" name="TextBox 3"/>
+              <a:t>Prototipo funcional: app demo</a:t>
+            </a:r>
+          </a:p>
+        </p:txBody>
+      </p:sp>
+      <p:sp>
+        <p:nvSpPr>
+          <p:cNvPr id="320" name="TextBox 3"/>
           <p:cNvSpPr txBox="1"/>
           <p:nvPr/>
         </p:nvSpPr>
@@ -4276,7 +4276,7 @@
       </p:sp>
       <p:sp>
         <p:nvSpPr>
-          <p:cNvPr id="320" name="Rectangle 4"/>
+          <p:cNvPr id="321" name="Rectangle 4"/>
           <p:cNvSpPr/>
           <p:nvPr/>
         </p:nvSpPr>
@@ -4318,7 +4318,7 @@
       </p:sp>
       <p:sp>
         <p:nvSpPr>
-          <p:cNvPr id="321" name="TextBox 5"/>
+          <p:cNvPr id="322" name="TextBox 5"/>
           <p:cNvSpPr txBox="1"/>
           <p:nvPr/>
         </p:nvSpPr>
@@ -4362,7 +4362,7 @@
       </p:sp>
       <p:sp>
         <p:nvSpPr>
-          <p:cNvPr id="322" name="TextBox 6"/>
+          <p:cNvPr id="323" name="TextBox 6"/>
           <p:cNvSpPr txBox="1"/>
           <p:nvPr/>
         </p:nvSpPr>
@@ -4406,7 +4406,7 @@
       </p:sp>
       <p:sp>
         <p:nvSpPr>
-          <p:cNvPr id="323" name="Rectangle 7"/>
+          <p:cNvPr id="324" name="Rectangle 7"/>
           <p:cNvSpPr/>
           <p:nvPr/>
         </p:nvSpPr>
@@ -4448,7 +4448,7 @@
       </p:sp>
       <p:sp>
         <p:nvSpPr>
-          <p:cNvPr id="324" name="TextBox 8"/>
+          <p:cNvPr id="325" name="TextBox 8"/>
           <p:cNvSpPr txBox="1"/>
           <p:nvPr/>
         </p:nvSpPr>
@@ -4492,7 +4492,7 @@
       </p:sp>
       <p:sp>
         <p:nvSpPr>
-          <p:cNvPr id="325" name="TextBox 9"/>
+          <p:cNvPr id="326" name="TextBox 9"/>
           <p:cNvSpPr txBox="1"/>
           <p:nvPr/>
         </p:nvSpPr>
@@ -4536,14 +4536,14 @@
       </p:sp>
       <p:sp>
         <p:nvSpPr>
-          <p:cNvPr id="326" name="Rectangle 10"/>
+          <p:cNvPr id="327" name="Rectangle 10"/>
           <p:cNvSpPr/>
           <p:nvPr/>
         </p:nvSpPr>
         <p:spPr>
           <a:xfrm>
-            <a:off x="731519" y="4114800"/>
-            <a:ext cx="54865" cy="822961"/>
+            <a:off x="731519" y="4114799"/>
+            <a:ext cx="54865" cy="822962"/>
           </a:xfrm>
           <a:prstGeom prst="rect">
             <a:avLst/>
@@ -4578,14 +4578,14 @@
       </p:sp>
       <p:sp>
         <p:nvSpPr>
-          <p:cNvPr id="327" name="TextBox 11"/>
-          <p:cNvSpPr txBox="1"/>
-          <p:nvPr/>
-        </p:nvSpPr>
-        <p:spPr>
-          <a:xfrm>
-            <a:off x="1143000" y="4114800"/>
-            <a:ext cx="4663440" cy="300594"/>
+          <p:cNvPr id="328" name="TextBox 11"/>
+          <p:cNvSpPr txBox="1"/>
+          <p:nvPr/>
+        </p:nvSpPr>
+        <p:spPr>
+          <a:xfrm>
+            <a:off x="1143000" y="4114799"/>
+            <a:ext cx="4663440" cy="300595"/>
           </a:xfrm>
           <a:prstGeom prst="rect">
             <a:avLst/>
@@ -4622,7 +4622,7 @@
       </p:sp>
       <p:sp>
         <p:nvSpPr>
-          <p:cNvPr id="328" name="TextBox 12"/>
+          <p:cNvPr id="329" name="TextBox 12"/>
           <p:cNvSpPr txBox="1"/>
           <p:nvPr/>
         </p:nvSpPr>
@@ -4666,7 +4666,7 @@
       </p:sp>
       <p:sp>
         <p:nvSpPr>
-          <p:cNvPr id="329" name="Rectangle 13"/>
+          <p:cNvPr id="330" name="Rectangle 13"/>
           <p:cNvSpPr/>
           <p:nvPr/>
         </p:nvSpPr>
@@ -4708,7 +4708,7 @@
       </p:sp>
       <p:sp>
         <p:nvSpPr>
-          <p:cNvPr id="330" name="TextBox 14"/>
+          <p:cNvPr id="331" name="TextBox 14"/>
           <p:cNvSpPr txBox="1"/>
           <p:nvPr/>
         </p:nvSpPr>
@@ -4752,7 +4752,7 @@
       </p:sp>
       <p:sp>
         <p:nvSpPr>
-          <p:cNvPr id="331" name="TextBox 15"/>
+          <p:cNvPr id="332" name="TextBox 15"/>
           <p:cNvSpPr txBox="1"/>
           <p:nvPr/>
         </p:nvSpPr>
@@ -4796,14 +4796,14 @@
       </p:sp>
       <p:sp>
         <p:nvSpPr>
-          <p:cNvPr id="332" name="Rectangle 16"/>
+          <p:cNvPr id="333" name="Rectangle 16"/>
           <p:cNvSpPr/>
           <p:nvPr/>
         </p:nvSpPr>
         <p:spPr>
           <a:xfrm>
-            <a:off x="6622303" y="2090214"/>
-            <a:ext cx="4846321" cy="3230414"/>
+            <a:off x="6339064" y="2044022"/>
+            <a:ext cx="4846321" cy="3322798"/>
           </a:xfrm>
           <a:prstGeom prst="rect">
             <a:avLst/>
@@ -4838,13 +4838,13 @@
       </p:sp>
       <p:sp>
         <p:nvSpPr>
-          <p:cNvPr id="333" name="Rectangle 17"/>
+          <p:cNvPr id="334" name="Rectangle 17"/>
           <p:cNvSpPr/>
           <p:nvPr/>
         </p:nvSpPr>
         <p:spPr>
           <a:xfrm>
-            <a:off x="6622303" y="2090214"/>
+            <a:off x="6339064" y="2044022"/>
             <a:ext cx="4846321" cy="548641"/>
           </a:xfrm>
           <a:prstGeom prst="rect">
@@ -4880,13 +4880,13 @@
       </p:sp>
       <p:sp>
         <p:nvSpPr>
-          <p:cNvPr id="334" name="TextBox 18"/>
-          <p:cNvSpPr txBox="1"/>
-          <p:nvPr/>
-        </p:nvSpPr>
-        <p:spPr>
-          <a:xfrm>
-            <a:off x="6942343" y="2197991"/>
+          <p:cNvPr id="335" name="TextBox 18"/>
+          <p:cNvSpPr txBox="1"/>
+          <p:nvPr/>
+        </p:nvSpPr>
+        <p:spPr>
+          <a:xfrm>
+            <a:off x="6659104" y="2151798"/>
             <a:ext cx="4206241" cy="333088"/>
           </a:xfrm>
           <a:prstGeom prst="rect">
@@ -4924,13 +4924,13 @@
       </p:sp>
       <p:sp>
         <p:nvSpPr>
-          <p:cNvPr id="335" name="TextBox 19"/>
-          <p:cNvSpPr txBox="1"/>
-          <p:nvPr/>
-        </p:nvSpPr>
-        <p:spPr>
-          <a:xfrm>
-            <a:off x="6942343" y="2913174"/>
+          <p:cNvPr id="336" name="TextBox 19"/>
+          <p:cNvSpPr txBox="1"/>
+          <p:nvPr/>
+        </p:nvSpPr>
+        <p:spPr>
+          <a:xfrm>
+            <a:off x="6659104" y="2866982"/>
             <a:ext cx="4206241" cy="258203"/>
           </a:xfrm>
           <a:prstGeom prst="rect">
@@ -4968,13 +4968,13 @@
       </p:sp>
       <p:sp>
         <p:nvSpPr>
-          <p:cNvPr id="336" name="TextBox 20"/>
-          <p:cNvSpPr txBox="1"/>
-          <p:nvPr/>
-        </p:nvSpPr>
-        <p:spPr>
-          <a:xfrm>
-            <a:off x="6942343" y="3370374"/>
+          <p:cNvPr id="337" name="TextBox 20"/>
+          <p:cNvSpPr txBox="1"/>
+          <p:nvPr/>
+        </p:nvSpPr>
+        <p:spPr>
+          <a:xfrm>
+            <a:off x="6659104" y="3324182"/>
             <a:ext cx="4206241" cy="258203"/>
           </a:xfrm>
           <a:prstGeom prst="rect">
@@ -5005,20 +5005,20 @@
           <a:p>
             <a:pPr/>
             <a:r>
-              <a:t>Segmentación: PyTorch + SMP (UNet++)</a:t>
-            </a:r>
-          </a:p>
-        </p:txBody>
-      </p:sp>
-      <p:sp>
-        <p:nvSpPr>
-          <p:cNvPr id="337" name="TextBox 21"/>
-          <p:cNvSpPr txBox="1"/>
-          <p:nvPr/>
-        </p:nvSpPr>
-        <p:spPr>
-          <a:xfrm>
-            <a:off x="6942343" y="3827574"/>
+              <a:t>Segmentacion: PyTorch + SMP (UNet++)</a:t>
+            </a:r>
+          </a:p>
+        </p:txBody>
+      </p:sp>
+      <p:sp>
+        <p:nvSpPr>
+          <p:cNvPr id="338" name="TextBox 21"/>
+          <p:cNvSpPr txBox="1"/>
+          <p:nvPr/>
+        </p:nvSpPr>
+        <p:spPr>
+          <a:xfrm>
+            <a:off x="6659104" y="3781382"/>
             <a:ext cx="4206241" cy="258203"/>
           </a:xfrm>
           <a:prstGeom prst="rect">
@@ -5056,13 +5056,13 @@
       </p:sp>
       <p:sp>
         <p:nvSpPr>
-          <p:cNvPr id="338" name="TextBox 22"/>
-          <p:cNvSpPr txBox="1"/>
-          <p:nvPr/>
-        </p:nvSpPr>
-        <p:spPr>
-          <a:xfrm>
-            <a:off x="6942343" y="4284774"/>
+          <p:cNvPr id="339" name="TextBox 22"/>
+          <p:cNvSpPr txBox="1"/>
+          <p:nvPr/>
+        </p:nvSpPr>
+        <p:spPr>
+          <a:xfrm>
+            <a:off x="6659104" y="4238582"/>
             <a:ext cx="4206241" cy="258203"/>
           </a:xfrm>
           <a:prstGeom prst="rect">
@@ -5100,13 +5100,13 @@
       </p:sp>
       <p:sp>
         <p:nvSpPr>
-          <p:cNvPr id="339" name="TextBox 23"/>
-          <p:cNvSpPr txBox="1"/>
-          <p:nvPr/>
-        </p:nvSpPr>
-        <p:spPr>
-          <a:xfrm>
-            <a:off x="6942343" y="4741974"/>
+          <p:cNvPr id="340" name="TextBox 23"/>
+          <p:cNvSpPr txBox="1"/>
+          <p:nvPr/>
+        </p:nvSpPr>
+        <p:spPr>
+          <a:xfrm>
+            <a:off x="6659104" y="4695782"/>
             <a:ext cx="4206241" cy="258203"/>
           </a:xfrm>
           <a:prstGeom prst="rect">
@@ -5177,7 +5177,7 @@
       </p:grpSpPr>
       <p:sp>
         <p:nvSpPr>
-          <p:cNvPr id="341" name="Rectangle 1"/>
+          <p:cNvPr id="342" name="Rectangle 1"/>
           <p:cNvSpPr/>
           <p:nvPr/>
         </p:nvSpPr>
@@ -5219,7 +5219,7 @@
       </p:sp>
       <p:sp>
         <p:nvSpPr>
-          <p:cNvPr id="342" name="TextBox 2"/>
+          <p:cNvPr id="343" name="TextBox 2"/>
           <p:cNvSpPr txBox="1"/>
           <p:nvPr/>
         </p:nvSpPr>
@@ -5263,7 +5263,7 @@
       </p:sp>
       <p:sp>
         <p:nvSpPr>
-          <p:cNvPr id="343" name="Oval 3"/>
+          <p:cNvPr id="344" name="Oval 3"/>
           <p:cNvSpPr/>
           <p:nvPr/>
         </p:nvSpPr>
@@ -5305,14 +5305,14 @@
       </p:sp>
       <p:sp>
         <p:nvSpPr>
-          <p:cNvPr id="344" name="TextBox 4"/>
+          <p:cNvPr id="345" name="TextBox 4"/>
           <p:cNvSpPr txBox="1"/>
           <p:nvPr/>
         </p:nvSpPr>
         <p:spPr>
           <a:xfrm>
             <a:off x="777239" y="1325880"/>
-            <a:ext cx="274321" cy="280800"/>
+            <a:ext cx="274321" cy="280799"/>
           </a:xfrm>
           <a:prstGeom prst="rect">
             <a:avLst/>
@@ -5349,14 +5349,14 @@
       </p:sp>
       <p:sp>
         <p:nvSpPr>
-          <p:cNvPr id="345" name="TextBox 5"/>
-          <p:cNvSpPr txBox="1"/>
-          <p:nvPr/>
-        </p:nvSpPr>
-        <p:spPr>
-          <a:xfrm>
-            <a:off x="1417319" y="1280160"/>
-            <a:ext cx="9966961" cy="277997"/>
+          <p:cNvPr id="346" name="TextBox 5"/>
+          <p:cNvSpPr txBox="1"/>
+          <p:nvPr/>
+        </p:nvSpPr>
+        <p:spPr>
+          <a:xfrm>
+            <a:off x="1417319" y="1290200"/>
+            <a:ext cx="9966962" cy="506597"/>
           </a:xfrm>
           <a:prstGeom prst="rect">
             <a:avLst/>
@@ -5386,21 +5386,21 @@
           <a:p>
             <a:pPr/>
             <a:r>
-              <a:t>El clasificador sobre imágenes OCT originales (94%) supera significativamente al pipeline con segmentación previa (70%)</a:t>
-            </a:r>
-          </a:p>
-        </p:txBody>
-      </p:sp>
-      <p:sp>
-        <p:nvSpPr>
-          <p:cNvPr id="346" name="Oval 6"/>
+              <a:t>Mod. 1 (imágenes, 92%) y Mod. 3 (híbrido, 92%) superan al Mod. 2 (máscaras, 72%). La segmentación no mejora la clasificación.</a:t>
+            </a:r>
+          </a:p>
+        </p:txBody>
+      </p:sp>
+      <p:sp>
+        <p:nvSpPr>
+          <p:cNvPr id="347" name="Oval 6"/>
           <p:cNvSpPr/>
           <p:nvPr/>
         </p:nvSpPr>
         <p:spPr>
           <a:xfrm>
-            <a:off x="731519" y="2057400"/>
-            <a:ext cx="365761" cy="365761"/>
+            <a:off x="731519" y="2057399"/>
+            <a:ext cx="365761" cy="365762"/>
           </a:xfrm>
           <a:prstGeom prst="ellipse">
             <a:avLst/>
@@ -5435,14 +5435,14 @@
       </p:sp>
       <p:sp>
         <p:nvSpPr>
-          <p:cNvPr id="347" name="TextBox 7"/>
-          <p:cNvSpPr txBox="1"/>
-          <p:nvPr/>
-        </p:nvSpPr>
-        <p:spPr>
-          <a:xfrm>
-            <a:off x="777239" y="2057400"/>
-            <a:ext cx="274321" cy="280799"/>
+          <p:cNvPr id="348" name="TextBox 7"/>
+          <p:cNvSpPr txBox="1"/>
+          <p:nvPr/>
+        </p:nvSpPr>
+        <p:spPr>
+          <a:xfrm>
+            <a:off x="777239" y="2057399"/>
+            <a:ext cx="274321" cy="280800"/>
           </a:xfrm>
           <a:prstGeom prst="rect">
             <a:avLst/>
@@ -5479,14 +5479,14 @@
       </p:sp>
       <p:sp>
         <p:nvSpPr>
-          <p:cNvPr id="348" name="TextBox 8"/>
+          <p:cNvPr id="349" name="TextBox 8"/>
           <p:cNvSpPr txBox="1"/>
           <p:nvPr/>
         </p:nvSpPr>
         <p:spPr>
           <a:xfrm>
             <a:off x="1417319" y="2011679"/>
-            <a:ext cx="9966961" cy="277997"/>
+            <a:ext cx="9966962" cy="277997"/>
           </a:xfrm>
           <a:prstGeom prst="rect">
             <a:avLst/>
@@ -5516,14 +5516,14 @@
           <a:p>
             <a:pPr/>
             <a:r>
-              <a:t>La información de textura y contraste es mas discriminativa que la información puramente estructural de las máscaras</a:t>
-            </a:r>
-          </a:p>
-        </p:txBody>
-      </p:sp>
-      <p:sp>
-        <p:nvSpPr>
-          <p:cNvPr id="349" name="Oval 9"/>
+              <a:t>El Mod. 3 híbrido (imagen+máscara) iguala al Mod. 1 (solo imagen): la segmentación es información redundante para ResNet50.</a:t>
+            </a:r>
+          </a:p>
+        </p:txBody>
+      </p:sp>
+      <p:sp>
+        <p:nvSpPr>
+          <p:cNvPr id="350" name="Oval 9"/>
           <p:cNvSpPr/>
           <p:nvPr/>
         </p:nvSpPr>
@@ -5565,7 +5565,7 @@
       </p:sp>
       <p:sp>
         <p:nvSpPr>
-          <p:cNvPr id="350" name="TextBox 10"/>
+          <p:cNvPr id="351" name="TextBox 10"/>
           <p:cNvSpPr txBox="1"/>
           <p:nvPr/>
         </p:nvSpPr>
@@ -5609,14 +5609,14 @@
       </p:sp>
       <p:sp>
         <p:nvSpPr>
-          <p:cNvPr id="351" name="TextBox 11"/>
-          <p:cNvSpPr txBox="1"/>
-          <p:nvPr/>
-        </p:nvSpPr>
-        <p:spPr>
-          <a:xfrm>
-            <a:off x="1417319" y="2743200"/>
-            <a:ext cx="9966961" cy="506597"/>
+          <p:cNvPr id="352" name="TextBox 11"/>
+          <p:cNvSpPr txBox="1"/>
+          <p:nvPr/>
+        </p:nvSpPr>
+        <p:spPr>
+          <a:xfrm>
+            <a:off x="1417319" y="2743199"/>
+            <a:ext cx="9966962" cy="506598"/>
           </a:xfrm>
           <a:prstGeom prst="rect">
             <a:avLst/>
@@ -5646,14 +5646,14 @@
           <a:p>
             <a:pPr/>
             <a:r>
-              <a:t>UNet++ con ResNet34 logra segmentación precisa (Dice = 0.98, IoU = 0.96), validando su utilidad como herramienta independiente</a:t>
-            </a:r>
-          </a:p>
-        </p:txBody>
-      </p:sp>
-      <p:sp>
-        <p:nvSpPr>
-          <p:cNvPr id="352" name="Oval 12"/>
+              <a:t>UNet++ con ResNet34 logra segmentación precisa (Dice=0.98, IoU=0.96), validando su utilidad como herramienta independiente.</a:t>
+            </a:r>
+          </a:p>
+        </p:txBody>
+      </p:sp>
+      <p:sp>
+        <p:nvSpPr>
+          <p:cNvPr id="353" name="Oval 12"/>
           <p:cNvSpPr/>
           <p:nvPr/>
         </p:nvSpPr>
@@ -5695,7 +5695,7 @@
       </p:sp>
       <p:sp>
         <p:nvSpPr>
-          <p:cNvPr id="353" name="TextBox 13"/>
+          <p:cNvPr id="354" name="TextBox 13"/>
           <p:cNvSpPr txBox="1"/>
           <p:nvPr/>
         </p:nvSpPr>
@@ -5739,14 +5739,14 @@
       </p:sp>
       <p:sp>
         <p:nvSpPr>
-          <p:cNvPr id="354" name="TextBox 14"/>
+          <p:cNvPr id="355" name="TextBox 14"/>
           <p:cNvSpPr txBox="1"/>
           <p:nvPr/>
         </p:nvSpPr>
         <p:spPr>
           <a:xfrm>
             <a:off x="1417319" y="3474720"/>
-            <a:ext cx="9966961" cy="277997"/>
+            <a:ext cx="9966962" cy="277997"/>
           </a:xfrm>
           <a:prstGeom prst="rect">
             <a:avLst/>
@@ -5776,14 +5776,14 @@
           <a:p>
             <a:pPr/>
             <a:r>
-              <a:t>La discrepancia de dominios entre datasets contribuye a la degradación del pipeline combinado</a:t>
-            </a:r>
-          </a:p>
-        </p:txBody>
-      </p:sp>
-      <p:sp>
-        <p:nvSpPr>
-          <p:cNvPr id="355" name="Oval 15"/>
+              <a:t>DRUSEN es la clase mas sensible a la perdida de textura (F1: 0.89 -&gt; 0.54 con máscaras). El híbrido lo recupera (F1=0.89).</a:t>
+            </a:r>
+          </a:p>
+        </p:txBody>
+      </p:sp>
+      <p:sp>
+        <p:nvSpPr>
+          <p:cNvPr id="356" name="Oval 15"/>
           <p:cNvSpPr/>
           <p:nvPr/>
         </p:nvSpPr>
@@ -5825,7 +5825,7 @@
       </p:sp>
       <p:sp>
         <p:nvSpPr>
-          <p:cNvPr id="356" name="TextBox 16"/>
+          <p:cNvPr id="357" name="TextBox 16"/>
           <p:cNvSpPr txBox="1"/>
           <p:nvPr/>
         </p:nvSpPr>
@@ -5869,14 +5869,14 @@
       </p:sp>
       <p:sp>
         <p:nvSpPr>
-          <p:cNvPr id="357" name="TextBox 17"/>
+          <p:cNvPr id="358" name="TextBox 17"/>
           <p:cNvSpPr txBox="1"/>
           <p:nvPr/>
         </p:nvSpPr>
         <p:spPr>
           <a:xfrm>
             <a:off x="1417319" y="4206240"/>
-            <a:ext cx="9966961" cy="277997"/>
+            <a:ext cx="9966962" cy="277997"/>
           </a:xfrm>
           <a:prstGeom prst="rect">
             <a:avLst/>
@@ -5906,14 +5906,14 @@
           <a:p>
             <a:pPr/>
             <a:r>
-              <a:t>DRUSEN es la clase mas sensible a la perdida visual (F1: 0.92 -&gt; 0.59), coherente con su naturaleza</a:t>
-            </a:r>
-          </a:p>
-        </p:txBody>
-      </p:sp>
-      <p:sp>
-        <p:nvSpPr>
-          <p:cNvPr id="358" name="Oval 18"/>
+              <a:t>La discrepancia de dominios entre datasets de segmentación y clasificación amplifica la degradación del Mod. 2.</a:t>
+            </a:r>
+          </a:p>
+        </p:txBody>
+      </p:sp>
+      <p:sp>
+        <p:nvSpPr>
+          <p:cNvPr id="359" name="Oval 18"/>
           <p:cNvSpPr/>
           <p:nvPr/>
         </p:nvSpPr>
@@ -5955,7 +5955,7 @@
       </p:sp>
       <p:sp>
         <p:nvSpPr>
-          <p:cNvPr id="359" name="TextBox 19"/>
+          <p:cNvPr id="360" name="TextBox 19"/>
           <p:cNvSpPr txBox="1"/>
           <p:nvPr/>
         </p:nvSpPr>
@@ -5999,14 +5999,14 @@
       </p:sp>
       <p:sp>
         <p:nvSpPr>
-          <p:cNvPr id="360" name="TextBox 20"/>
+          <p:cNvPr id="361" name="TextBox 20"/>
           <p:cNvSpPr txBox="1"/>
           <p:nvPr/>
         </p:nvSpPr>
         <p:spPr>
           <a:xfrm>
             <a:off x="1417319" y="4937759"/>
-            <a:ext cx="9966961" cy="277997"/>
+            <a:ext cx="9966962" cy="277997"/>
           </a:xfrm>
           <a:prstGeom prst="rect">
             <a:avLst/>
@@ -6036,21 +6036,21 @@
           <a:p>
             <a:pPr/>
             <a:r>
-              <a:t>La segmentación aporta valor clínico como herramienta de interpretabilidad, complementando al clasificador</a:t>
-            </a:r>
-          </a:p>
-        </p:txBody>
-      </p:sp>
-      <p:sp>
-        <p:nvSpPr>
-          <p:cNvPr id="361" name="Oval 21"/>
+              <a:t>La segmentación aporta valor clínico como herramienta de interpretabilidad, complementando al clasificador.</a:t>
+            </a:r>
+          </a:p>
+        </p:txBody>
+      </p:sp>
+      <p:sp>
+        <p:nvSpPr>
+          <p:cNvPr id="362" name="Oval 21"/>
           <p:cNvSpPr/>
           <p:nvPr/>
         </p:nvSpPr>
         <p:spPr>
           <a:xfrm>
-            <a:off x="731519" y="5715000"/>
-            <a:ext cx="365761" cy="365761"/>
+            <a:off x="731519" y="5714999"/>
+            <a:ext cx="365761" cy="365762"/>
           </a:xfrm>
           <a:prstGeom prst="ellipse">
             <a:avLst/>
@@ -6085,14 +6085,14 @@
       </p:sp>
       <p:sp>
         <p:nvSpPr>
-          <p:cNvPr id="362" name="TextBox 22"/>
-          <p:cNvSpPr txBox="1"/>
-          <p:nvPr/>
-        </p:nvSpPr>
-        <p:spPr>
-          <a:xfrm>
-            <a:off x="777239" y="5715000"/>
-            <a:ext cx="274321" cy="280799"/>
+          <p:cNvPr id="363" name="TextBox 22"/>
+          <p:cNvSpPr txBox="1"/>
+          <p:nvPr/>
+        </p:nvSpPr>
+        <p:spPr>
+          <a:xfrm>
+            <a:off x="777239" y="5714999"/>
+            <a:ext cx="274321" cy="280800"/>
           </a:xfrm>
           <a:prstGeom prst="rect">
             <a:avLst/>
@@ -6129,14 +6129,14 @@
       </p:sp>
       <p:sp>
         <p:nvSpPr>
-          <p:cNvPr id="363" name="TextBox 23"/>
+          <p:cNvPr id="364" name="TextBox 23"/>
           <p:cNvSpPr txBox="1"/>
           <p:nvPr/>
         </p:nvSpPr>
         <p:spPr>
           <a:xfrm>
             <a:off x="1417319" y="5669279"/>
-            <a:ext cx="9966961" cy="277997"/>
+            <a:ext cx="9966962" cy="277997"/>
           </a:xfrm>
           <a:prstGeom prst="rect">
             <a:avLst/>
@@ -6166,7 +6166,7 @@
           <a:p>
             <a:pPr/>
             <a:r>
-              <a:t>La app Streamlit demuestra la factibilidad de un sistema de apoyo al diagnóstico oftalmológico con DL</a:t>
+              <a:t>La app demo demuestra la factibilidad de un sistema de apoyo al diagnostico oftalmológico con DL.</a:t>
             </a:r>
           </a:p>
         </p:txBody>
@@ -6206,7 +6206,7 @@
       </p:grpSpPr>
       <p:sp>
         <p:nvSpPr>
-          <p:cNvPr id="365" name="Rectangle 1"/>
+          <p:cNvPr id="366" name="Rectangle 1"/>
           <p:cNvSpPr/>
           <p:nvPr/>
         </p:nvSpPr>
@@ -6248,7 +6248,7 @@
       </p:sp>
       <p:sp>
         <p:nvSpPr>
-          <p:cNvPr id="366" name="TextBox 2"/>
+          <p:cNvPr id="367" name="TextBox 2"/>
           <p:cNvSpPr txBox="1"/>
           <p:nvPr/>
         </p:nvSpPr>
@@ -6292,14 +6292,14 @@
       </p:sp>
       <p:sp>
         <p:nvSpPr>
-          <p:cNvPr id="367" name="Rectangle 3"/>
+          <p:cNvPr id="368" name="Rectangle 3"/>
           <p:cNvSpPr/>
           <p:nvPr/>
         </p:nvSpPr>
         <p:spPr>
           <a:xfrm>
-            <a:off x="4572000" y="3017520"/>
-            <a:ext cx="3017521" cy="36577"/>
+            <a:off x="4571999" y="3017520"/>
+            <a:ext cx="3017522" cy="36577"/>
           </a:xfrm>
           <a:prstGeom prst="rect">
             <a:avLst/>
@@ -6334,7 +6334,7 @@
       </p:sp>
       <p:sp>
         <p:nvSpPr>
-          <p:cNvPr id="368" name="TextBox 4"/>
+          <p:cNvPr id="369" name="TextBox 4"/>
           <p:cNvSpPr txBox="1"/>
           <p:nvPr/>
         </p:nvSpPr>
@@ -6378,7 +6378,7 @@
       </p:sp>
       <p:sp>
         <p:nvSpPr>
-          <p:cNvPr id="369" name="TextBox 5"/>
+          <p:cNvPr id="370" name="TextBox 5"/>
           <p:cNvSpPr txBox="1"/>
           <p:nvPr/>
         </p:nvSpPr>
@@ -6422,7 +6422,7 @@
       </p:sp>
       <p:sp>
         <p:nvSpPr>
-          <p:cNvPr id="370" name="TextBox 6"/>
+          <p:cNvPr id="371" name="TextBox 6"/>
           <p:cNvSpPr txBox="1"/>
           <p:nvPr/>
         </p:nvSpPr>
@@ -6459,7 +6459,7 @@
           <a:p>
             <a:pPr/>
             <a:r>
-              <a:t>Vision por Computadora II  -  CEIA  -  2026</a:t>
+              <a:t>Visión por Computadora II  -  CEIA  -  2026</a:t>
             </a:r>
           </a:p>
         </p:txBody>
@@ -6540,8 +6540,8 @@
         </p:nvSpPr>
         <p:spPr>
           <a:xfrm>
-            <a:off x="777239" y="457200"/>
-            <a:ext cx="9052561" cy="542241"/>
+            <a:off x="777239" y="457199"/>
+            <a:ext cx="9052561" cy="542242"/>
           </a:xfrm>
           <a:prstGeom prst="rect">
             <a:avLst/>
@@ -6671,7 +6671,7 @@
         <p:spPr>
           <a:xfrm>
             <a:off x="1142999" y="2103120"/>
-            <a:ext cx="4572001" cy="506597"/>
+            <a:ext cx="4572002" cy="506597"/>
           </a:xfrm>
           <a:prstGeom prst="rect">
             <a:avLst/>
@@ -6757,7 +6757,7 @@
         <p:spPr>
           <a:xfrm>
             <a:off x="1142999" y="3017520"/>
-            <a:ext cx="4572001" cy="506597"/>
+            <a:ext cx="4572002" cy="506597"/>
           </a:xfrm>
           <a:prstGeom prst="rect">
             <a:avLst/>
@@ -6787,7 +6787,7 @@
           <a:p>
             <a:pPr/>
             <a:r>
-              <a:t>La Tomografía de Coherencia Óptica (OCT) es el estándar de imagen para diagnóstico oftalmológico</a:t>
+              <a:t>La Tomografía de Coherencia Óptica (OCT) es el estándar de imagen para diagnostico oftalmológico</a:t>
             </a:r>
           </a:p>
         </p:txBody>
@@ -6843,7 +6843,7 @@
         <p:spPr>
           <a:xfrm>
             <a:off x="1142999" y="3931920"/>
-            <a:ext cx="4572001" cy="506597"/>
+            <a:ext cx="4572002" cy="506597"/>
           </a:xfrm>
           <a:prstGeom prst="rect">
             <a:avLst/>
@@ -6873,7 +6873,7 @@
           <a:p>
             <a:pPr/>
             <a:r>
-              <a:t>Se requieren herramientas automatizadas que asistan al especialista en el diagnóstico temprano</a:t>
+              <a:t>Se requieren herramientas automatizadas que asistan al especialista en el diagnostico temprano</a:t>
             </a:r>
           </a:p>
         </p:txBody>
@@ -6887,7 +6887,7 @@
         <p:spPr>
           <a:xfrm>
             <a:off x="6629400" y="1463039"/>
-            <a:ext cx="4480560" cy="385377"/>
+            <a:ext cx="4480561" cy="385377"/>
           </a:xfrm>
           <a:prstGeom prst="rect">
             <a:avLst/>
@@ -7014,7 +7014,7 @@
         </p:nvSpPr>
         <p:spPr>
           <a:xfrm>
-            <a:off x="6995159" y="2148838"/>
+            <a:off x="6995160" y="2148838"/>
             <a:ext cx="1737361" cy="333089"/>
           </a:xfrm>
           <a:prstGeom prst="rect">
@@ -7058,7 +7058,7 @@
         </p:nvSpPr>
         <p:spPr>
           <a:xfrm>
-            <a:off x="6995159" y="2468878"/>
+            <a:off x="6995160" y="2468878"/>
             <a:ext cx="4023361" cy="258203"/>
           </a:xfrm>
           <a:prstGeom prst="rect">
@@ -7103,7 +7103,7 @@
         <p:spPr>
           <a:xfrm>
             <a:off x="6583680" y="3063238"/>
-            <a:ext cx="4846321" cy="777242"/>
+            <a:ext cx="4846321" cy="777241"/>
           </a:xfrm>
           <a:prstGeom prst="rect">
             <a:avLst/>
@@ -7145,7 +7145,7 @@
         <p:spPr>
           <a:xfrm>
             <a:off x="6583680" y="3063238"/>
-            <a:ext cx="73153" cy="777242"/>
+            <a:ext cx="73153" cy="777241"/>
           </a:xfrm>
           <a:prstGeom prst="rect">
             <a:avLst/>
@@ -7186,7 +7186,7 @@
         </p:nvSpPr>
         <p:spPr>
           <a:xfrm>
-            <a:off x="6995159" y="3108959"/>
+            <a:off x="6995160" y="3108959"/>
             <a:ext cx="1737361" cy="333088"/>
           </a:xfrm>
           <a:prstGeom prst="rect">
@@ -7230,7 +7230,7 @@
         </p:nvSpPr>
         <p:spPr>
           <a:xfrm>
-            <a:off x="6995159" y="3428998"/>
+            <a:off x="6995160" y="3428998"/>
             <a:ext cx="4023361" cy="258203"/>
           </a:xfrm>
           <a:prstGeom prst="rect">
@@ -7358,7 +7358,7 @@
         </p:nvSpPr>
         <p:spPr>
           <a:xfrm>
-            <a:off x="6995159" y="4069079"/>
+            <a:off x="6995160" y="4069079"/>
             <a:ext cx="1737361" cy="333089"/>
           </a:xfrm>
           <a:prstGeom prst="rect">
@@ -7402,7 +7402,7 @@
         </p:nvSpPr>
         <p:spPr>
           <a:xfrm>
-            <a:off x="6995159" y="4389120"/>
+            <a:off x="6995160" y="4389120"/>
             <a:ext cx="4023361" cy="258202"/>
           </a:xfrm>
           <a:prstGeom prst="rect">
@@ -7433,7 +7433,7 @@
           <a:p>
             <a:pPr/>
             <a:r>
-              <a:t>Depósitos sub-retinales</a:t>
+              <a:t>Depositos sub-retinales</a:t>
             </a:r>
           </a:p>
         </p:txBody>
@@ -7530,8 +7530,8 @@
         </p:nvSpPr>
         <p:spPr>
           <a:xfrm>
-            <a:off x="6995159" y="5029200"/>
-            <a:ext cx="1737361" cy="333088"/>
+            <a:off x="6995160" y="5029199"/>
+            <a:ext cx="1737361" cy="333089"/>
           </a:xfrm>
           <a:prstGeom prst="rect">
             <a:avLst/>
@@ -7574,7 +7574,7 @@
         </p:nvSpPr>
         <p:spPr>
           <a:xfrm>
-            <a:off x="6995159" y="5349240"/>
+            <a:off x="6995160" y="5349240"/>
             <a:ext cx="4023361" cy="258203"/>
           </a:xfrm>
           <a:prstGeom prst="rect">
@@ -7686,8 +7686,8 @@
         </p:nvSpPr>
         <p:spPr>
           <a:xfrm>
-            <a:off x="777239" y="457200"/>
-            <a:ext cx="9052561" cy="542241"/>
+            <a:off x="777239" y="457199"/>
+            <a:ext cx="9052561" cy="542242"/>
           </a:xfrm>
           <a:prstGeom prst="rect">
             <a:avLst/>
@@ -7905,7 +7905,7 @@
         <p:spPr>
           <a:xfrm>
             <a:off x="6629400" y="3291840"/>
-            <a:ext cx="4937760" cy="385376"/>
+            <a:ext cx="4937761" cy="385376"/>
           </a:xfrm>
           <a:prstGeom prst="rect">
             <a:avLst/>
@@ -7949,7 +7949,7 @@
         <p:spPr>
           <a:xfrm>
             <a:off x="6629400" y="3840479"/>
-            <a:ext cx="4937760" cy="277997"/>
+            <a:ext cx="4937761" cy="277997"/>
           </a:xfrm>
           <a:prstGeom prst="rect">
             <a:avLst/>
@@ -7993,7 +7993,7 @@
         <p:spPr>
           <a:xfrm>
             <a:off x="6629400" y="4343400"/>
-            <a:ext cx="4937760" cy="277997"/>
+            <a:ext cx="4937761" cy="277997"/>
           </a:xfrm>
           <a:prstGeom prst="rect">
             <a:avLst/>
@@ -8037,7 +8037,7 @@
         <p:spPr>
           <a:xfrm>
             <a:off x="6629400" y="4846320"/>
-            <a:ext cx="4937760" cy="277997"/>
+            <a:ext cx="4937761" cy="277997"/>
           </a:xfrm>
           <a:prstGeom prst="rect">
             <a:avLst/>
@@ -8081,7 +8081,7 @@
         <p:spPr>
           <a:xfrm>
             <a:off x="6629400" y="5349240"/>
-            <a:ext cx="4937760" cy="277997"/>
+            <a:ext cx="4937761" cy="277997"/>
           </a:xfrm>
           <a:prstGeom prst="rect">
             <a:avLst/>
@@ -8192,8 +8192,8 @@
         </p:nvSpPr>
         <p:spPr>
           <a:xfrm>
-            <a:off x="777239" y="457200"/>
-            <a:ext cx="9052561" cy="542241"/>
+            <a:off x="777239" y="457199"/>
+            <a:ext cx="9052561" cy="542242"/>
           </a:xfrm>
           <a:prstGeom prst="rect">
             <a:avLst/>
@@ -8364,8 +8364,8 @@
         </p:nvSpPr>
         <p:spPr>
           <a:xfrm>
-            <a:off x="1051559" y="2286000"/>
-            <a:ext cx="4480561" cy="280799"/>
+            <a:off x="1051559" y="2285999"/>
+            <a:ext cx="4480561" cy="280800"/>
           </a:xfrm>
           <a:prstGeom prst="rect">
             <a:avLst/>
@@ -8668,8 +8668,8 @@
         </p:nvSpPr>
         <p:spPr>
           <a:xfrm>
-            <a:off x="6629400" y="1570816"/>
-            <a:ext cx="4480560" cy="333088"/>
+            <a:off x="6629399" y="1570816"/>
+            <a:ext cx="4480561" cy="333088"/>
           </a:xfrm>
           <a:prstGeom prst="rect">
             <a:avLst/>
@@ -8712,8 +8712,8 @@
         </p:nvSpPr>
         <p:spPr>
           <a:xfrm>
-            <a:off x="6629400" y="2286000"/>
-            <a:ext cx="4480560" cy="280799"/>
+            <a:off x="6629400" y="2285999"/>
+            <a:ext cx="4480561" cy="280800"/>
           </a:xfrm>
           <a:prstGeom prst="rect">
             <a:avLst/>
@@ -8757,7 +8757,7 @@
         <p:spPr>
           <a:xfrm>
             <a:off x="6629400" y="2926079"/>
-            <a:ext cx="4480560" cy="280800"/>
+            <a:ext cx="4480561" cy="280800"/>
           </a:xfrm>
           <a:prstGeom prst="rect">
             <a:avLst/>
@@ -8801,7 +8801,7 @@
         <p:spPr>
           <a:xfrm>
             <a:off x="6629400" y="3566159"/>
-            <a:ext cx="4480560" cy="280800"/>
+            <a:ext cx="4480561" cy="280800"/>
           </a:xfrm>
           <a:prstGeom prst="rect">
             <a:avLst/>
@@ -8845,7 +8845,7 @@
         <p:spPr>
           <a:xfrm>
             <a:off x="6629400" y="4206240"/>
-            <a:ext cx="4480560" cy="280800"/>
+            <a:ext cx="4480561" cy="280800"/>
           </a:xfrm>
           <a:prstGeom prst="rect">
             <a:avLst/>
@@ -8889,7 +8889,7 @@
         <p:spPr>
           <a:xfrm>
             <a:off x="6629400" y="4846320"/>
-            <a:ext cx="4480560" cy="280800"/>
+            <a:ext cx="4480561" cy="280800"/>
           </a:xfrm>
           <a:prstGeom prst="rect">
             <a:avLst/>
@@ -9000,8 +9000,8 @@
         </p:nvSpPr>
         <p:spPr>
           <a:xfrm>
-            <a:off x="777239" y="457200"/>
-            <a:ext cx="9052561" cy="542241"/>
+            <a:off x="777239" y="457199"/>
+            <a:ext cx="9052561" cy="542242"/>
           </a:xfrm>
           <a:prstGeom prst="rect">
             <a:avLst/>
@@ -9130,8 +9130,8 @@
         </p:nvSpPr>
         <p:spPr>
           <a:xfrm>
-            <a:off x="868680" y="2103120"/>
-            <a:ext cx="2011681" cy="300594"/>
+            <a:off x="868679" y="2227232"/>
+            <a:ext cx="2011682" cy="300594"/>
           </a:xfrm>
           <a:prstGeom prst="rect">
             <a:avLst/>
@@ -9174,8 +9174,8 @@
         </p:nvSpPr>
         <p:spPr>
           <a:xfrm>
-            <a:off x="868680" y="2468879"/>
-            <a:ext cx="2011681" cy="248306"/>
+            <a:off x="868679" y="2592992"/>
+            <a:ext cx="2011682" cy="248306"/>
           </a:xfrm>
           <a:prstGeom prst="rect">
             <a:avLst/>
@@ -9218,8 +9218,8 @@
         </p:nvSpPr>
         <p:spPr>
           <a:xfrm>
-            <a:off x="3200400" y="2468879"/>
-            <a:ext cx="731521" cy="54865"/>
+            <a:off x="3200399" y="2468879"/>
+            <a:ext cx="731522" cy="54865"/>
           </a:xfrm>
           <a:prstGeom prst="rect">
             <a:avLst/>
@@ -9260,8 +9260,8 @@
         </p:nvSpPr>
         <p:spPr>
           <a:xfrm>
-            <a:off x="4114800" y="2011679"/>
-            <a:ext cx="2560321" cy="1097281"/>
+            <a:off x="4114799" y="2011679"/>
+            <a:ext cx="2560322" cy="1097281"/>
           </a:xfrm>
           <a:prstGeom prst="rect">
             <a:avLst/>
@@ -9302,7 +9302,7 @@
         </p:nvSpPr>
         <p:spPr>
           <a:xfrm>
-            <a:off x="4251960" y="2103120"/>
+            <a:off x="4251960" y="2246848"/>
             <a:ext cx="2286001" cy="333088"/>
           </a:xfrm>
           <a:prstGeom prst="rect">
@@ -9346,7 +9346,7 @@
         </p:nvSpPr>
         <p:spPr>
           <a:xfrm>
-            <a:off x="4251960" y="2468879"/>
+            <a:off x="4251960" y="2612607"/>
             <a:ext cx="2286001" cy="248306"/>
           </a:xfrm>
           <a:prstGeom prst="rect">
@@ -9390,8 +9390,8 @@
         </p:nvSpPr>
         <p:spPr>
           <a:xfrm>
-            <a:off x="6858000" y="2468879"/>
-            <a:ext cx="731521" cy="54865"/>
+            <a:off x="6857999" y="2468879"/>
+            <a:ext cx="731522" cy="54865"/>
           </a:xfrm>
           <a:prstGeom prst="rect">
             <a:avLst/>
@@ -9474,8 +9474,8 @@
         </p:nvSpPr>
         <p:spPr>
           <a:xfrm>
-            <a:off x="7909559" y="2148839"/>
-            <a:ext cx="2926081" cy="333089"/>
+            <a:off x="7909560" y="2250003"/>
+            <a:ext cx="2926081" cy="333088"/>
           </a:xfrm>
           <a:prstGeom prst="rect">
             <a:avLst/>
@@ -9518,7 +9518,7 @@
         </p:nvSpPr>
         <p:spPr>
           <a:xfrm>
-            <a:off x="7909559" y="2514600"/>
+            <a:off x="7909559" y="2570043"/>
             <a:ext cx="2926081" cy="300594"/>
           </a:xfrm>
           <a:prstGeom prst="rect">
@@ -9549,7 +9549,7 @@
           <a:p>
             <a:pPr/>
             <a:r>
-              <a:t>Accuracy: 94%</a:t>
+              <a:t>Accuracy: 92%</a:t>
             </a:r>
           </a:p>
         </p:txBody>
@@ -9593,7 +9593,7 @@
           <a:p>
             <a:pPr/>
             <a:r>
-              <a:t>Camino 2: Segmentacion + Clasificacion</a:t>
+              <a:t>Camino 2: segmentación + clasificación</a:t>
             </a:r>
           </a:p>
         </p:txBody>
@@ -9606,8 +9606,8 @@
         </p:nvSpPr>
         <p:spPr>
           <a:xfrm>
-            <a:off x="731519" y="4114800"/>
-            <a:ext cx="1828801" cy="1097281"/>
+            <a:off x="731519" y="4114799"/>
+            <a:ext cx="1828801" cy="1097282"/>
           </a:xfrm>
           <a:prstGeom prst="rect">
             <a:avLst/>
@@ -9648,8 +9648,8 @@
         </p:nvSpPr>
         <p:spPr>
           <a:xfrm>
-            <a:off x="822959" y="4206240"/>
-            <a:ext cx="1645922" cy="280800"/>
+            <a:off x="822959" y="4320540"/>
+            <a:ext cx="1645922" cy="280799"/>
           </a:xfrm>
           <a:prstGeom prst="rect">
             <a:avLst/>
@@ -9692,8 +9692,8 @@
         </p:nvSpPr>
         <p:spPr>
           <a:xfrm>
-            <a:off x="822959" y="4572000"/>
-            <a:ext cx="1645922" cy="225708"/>
+            <a:off x="822959" y="4686299"/>
+            <a:ext cx="1645922" cy="225709"/>
           </a:xfrm>
           <a:prstGeom prst="rect">
             <a:avLst/>
@@ -9778,8 +9778,8 @@
         </p:nvSpPr>
         <p:spPr>
           <a:xfrm>
-            <a:off x="3291840" y="4114800"/>
-            <a:ext cx="2103121" cy="1097281"/>
+            <a:off x="3291840" y="4114799"/>
+            <a:ext cx="2103121" cy="1097282"/>
           </a:xfrm>
           <a:prstGeom prst="rect">
             <a:avLst/>
@@ -9820,7 +9820,7 @@
         </p:nvSpPr>
         <p:spPr>
           <a:xfrm>
-            <a:off x="3383279" y="4206240"/>
+            <a:off x="3383279" y="4320540"/>
             <a:ext cx="1920240" cy="300594"/>
           </a:xfrm>
           <a:prstGeom prst="rect">
@@ -9864,8 +9864,8 @@
         </p:nvSpPr>
         <p:spPr>
           <a:xfrm>
-            <a:off x="3383279" y="4572000"/>
-            <a:ext cx="1920240" cy="225708"/>
+            <a:off x="3383279" y="4686299"/>
+            <a:ext cx="1920240" cy="225709"/>
           </a:xfrm>
           <a:prstGeom prst="rect">
             <a:avLst/>
@@ -9950,8 +9950,8 @@
         </p:nvSpPr>
         <p:spPr>
           <a:xfrm>
-            <a:off x="6126479" y="4114800"/>
-            <a:ext cx="1645921" cy="1097281"/>
+            <a:off x="6126479" y="4114799"/>
+            <a:ext cx="1645921" cy="1097282"/>
           </a:xfrm>
           <a:prstGeom prst="rect">
             <a:avLst/>
@@ -9992,8 +9992,8 @@
         </p:nvSpPr>
         <p:spPr>
           <a:xfrm>
-            <a:off x="6217920" y="4206240"/>
-            <a:ext cx="1463041" cy="280800"/>
+            <a:off x="6217919" y="4328004"/>
+            <a:ext cx="1463042" cy="280800"/>
           </a:xfrm>
           <a:prstGeom prst="rect">
             <a:avLst/>
@@ -10036,8 +10036,8 @@
         </p:nvSpPr>
         <p:spPr>
           <a:xfrm>
-            <a:off x="6217920" y="4572000"/>
-            <a:ext cx="1463041" cy="225708"/>
+            <a:off x="6217919" y="4693764"/>
+            <a:ext cx="1463042" cy="225708"/>
           </a:xfrm>
           <a:prstGeom prst="rect">
             <a:avLst/>
@@ -10122,8 +10122,8 @@
         </p:nvSpPr>
         <p:spPr>
           <a:xfrm>
-            <a:off x="8503919" y="4114800"/>
-            <a:ext cx="1828801" cy="1097281"/>
+            <a:off x="8503919" y="4114799"/>
+            <a:ext cx="1828801" cy="1097282"/>
           </a:xfrm>
           <a:prstGeom prst="rect">
             <a:avLst/>
@@ -10164,7 +10164,7 @@
         </p:nvSpPr>
         <p:spPr>
           <a:xfrm>
-            <a:off x="8595359" y="4206240"/>
+            <a:off x="8595359" y="4303698"/>
             <a:ext cx="1645921" cy="300594"/>
           </a:xfrm>
           <a:prstGeom prst="rect">
@@ -10208,7 +10208,7 @@
         </p:nvSpPr>
         <p:spPr>
           <a:xfrm>
-            <a:off x="8595359" y="4572000"/>
+            <a:off x="8595359" y="4669458"/>
             <a:ext cx="1645921" cy="225708"/>
           </a:xfrm>
           <a:prstGeom prst="rect">
@@ -10294,8 +10294,8 @@
         </p:nvSpPr>
         <p:spPr>
           <a:xfrm>
-            <a:off x="10058400" y="5486400"/>
-            <a:ext cx="1371600" cy="731521"/>
+            <a:off x="10058400" y="5486399"/>
+            <a:ext cx="1371600" cy="731522"/>
           </a:xfrm>
           <a:prstGeom prst="rect">
             <a:avLst/>
@@ -10336,8 +10336,8 @@
         </p:nvSpPr>
         <p:spPr>
           <a:xfrm>
-            <a:off x="10149839" y="5532120"/>
-            <a:ext cx="1188721" cy="258202"/>
+            <a:off x="10149839" y="5564703"/>
+            <a:ext cx="1188721" cy="258203"/>
           </a:xfrm>
           <a:prstGeom prst="rect">
             <a:avLst/>
@@ -10380,7 +10380,7 @@
         </p:nvSpPr>
         <p:spPr>
           <a:xfrm>
-            <a:off x="10149839" y="5806440"/>
+            <a:off x="10149839" y="5839023"/>
             <a:ext cx="1188721" cy="300594"/>
           </a:xfrm>
           <a:prstGeom prst="rect">
@@ -10411,7 +10411,7 @@
           <a:p>
             <a:pPr/>
             <a:r>
-              <a:t>70%</a:t>
+              <a:t>72%</a:t>
             </a:r>
           </a:p>
         </p:txBody>
@@ -10424,8 +10424,8 @@
         </p:nvSpPr>
         <p:spPr>
           <a:xfrm>
-            <a:off x="731519" y="5943600"/>
-            <a:ext cx="8686801" cy="640081"/>
+            <a:off x="731519" y="5943599"/>
+            <a:ext cx="8686801" cy="640082"/>
           </a:xfrm>
           <a:prstGeom prst="rect">
             <a:avLst/>
@@ -10466,8 +10466,8 @@
         </p:nvSpPr>
         <p:spPr>
           <a:xfrm>
-            <a:off x="731519" y="5943600"/>
-            <a:ext cx="54865" cy="640081"/>
+            <a:off x="731519" y="5943599"/>
+            <a:ext cx="54865" cy="640082"/>
           </a:xfrm>
           <a:prstGeom prst="rect">
             <a:avLst/>
@@ -10508,7 +10508,7 @@
         </p:nvSpPr>
         <p:spPr>
           <a:xfrm>
-            <a:off x="1051559" y="5989320"/>
+            <a:off x="1005839" y="6123240"/>
             <a:ext cx="8138161" cy="280800"/>
           </a:xfrm>
           <a:prstGeom prst="rect">
@@ -10620,8 +10620,8 @@
         </p:nvSpPr>
         <p:spPr>
           <a:xfrm>
-            <a:off x="777239" y="457200"/>
-            <a:ext cx="9052561" cy="542241"/>
+            <a:off x="777239" y="457199"/>
+            <a:ext cx="9052561" cy="542242"/>
           </a:xfrm>
           <a:prstGeom prst="rect">
             <a:avLst/>
@@ -10753,7 +10753,7 @@
         <p:spPr>
           <a:xfrm>
             <a:off x="2606040" y="2103120"/>
-            <a:ext cx="3566160" cy="280800"/>
+            <a:ext cx="3566161" cy="280800"/>
           </a:xfrm>
           <a:prstGeom prst="rect">
             <a:avLst/>
@@ -10841,7 +10841,7 @@
         <p:spPr>
           <a:xfrm>
             <a:off x="2606040" y="2560320"/>
-            <a:ext cx="3566160" cy="280800"/>
+            <a:ext cx="3566161" cy="280800"/>
           </a:xfrm>
           <a:prstGeom prst="rect">
             <a:avLst/>
@@ -10929,7 +10929,7 @@
         <p:spPr>
           <a:xfrm>
             <a:off x="2606040" y="3017520"/>
-            <a:ext cx="3566160" cy="280800"/>
+            <a:ext cx="3566161" cy="280800"/>
           </a:xfrm>
           <a:prstGeom prst="rect">
             <a:avLst/>
@@ -11017,7 +11017,7 @@
         <p:spPr>
           <a:xfrm>
             <a:off x="2606040" y="3474720"/>
-            <a:ext cx="3566160" cy="280800"/>
+            <a:ext cx="3566161" cy="280800"/>
           </a:xfrm>
           <a:prstGeom prst="rect">
             <a:avLst/>
@@ -11105,7 +11105,7 @@
         <p:spPr>
           <a:xfrm>
             <a:off x="2606040" y="3931920"/>
-            <a:ext cx="3566160" cy="280800"/>
+            <a:ext cx="3566161" cy="280800"/>
           </a:xfrm>
           <a:prstGeom prst="rect">
             <a:avLst/>
@@ -11193,7 +11193,7 @@
         <p:spPr>
           <a:xfrm>
             <a:off x="2606040" y="4389120"/>
-            <a:ext cx="3566160" cy="280800"/>
+            <a:ext cx="3566161" cy="280800"/>
           </a:xfrm>
           <a:prstGeom prst="rect">
             <a:avLst/>
@@ -11281,7 +11281,7 @@
         <p:spPr>
           <a:xfrm>
             <a:off x="2606040" y="4846320"/>
-            <a:ext cx="3566160" cy="280800"/>
+            <a:ext cx="3566161" cy="280800"/>
           </a:xfrm>
           <a:prstGeom prst="rect">
             <a:avLst/>
@@ -11369,7 +11369,7 @@
         <p:spPr>
           <a:xfrm>
             <a:off x="2606040" y="5303520"/>
-            <a:ext cx="3566160" cy="280800"/>
+            <a:ext cx="3566161" cy="280800"/>
           </a:xfrm>
           <a:prstGeom prst="rect">
             <a:avLst/>
@@ -11413,7 +11413,7 @@
         <p:spPr>
           <a:xfrm>
             <a:off x="6903719" y="1463039"/>
-            <a:ext cx="4480561" cy="340183"/>
+            <a:ext cx="4480562" cy="340183"/>
           </a:xfrm>
           <a:prstGeom prst="rect">
             <a:avLst/>
@@ -11540,8 +11540,8 @@
         </p:nvSpPr>
         <p:spPr>
           <a:xfrm>
-            <a:off x="7178039" y="2362549"/>
-            <a:ext cx="4023361" cy="277997"/>
+            <a:off x="7132319" y="2287138"/>
+            <a:ext cx="4023362" cy="277997"/>
           </a:xfrm>
           <a:prstGeom prst="rect">
             <a:avLst/>
@@ -11584,8 +11584,8 @@
         </p:nvSpPr>
         <p:spPr>
           <a:xfrm>
-            <a:off x="7178039" y="2728309"/>
-            <a:ext cx="4023361" cy="461403"/>
+            <a:off x="7132319" y="2652898"/>
+            <a:ext cx="4023362" cy="461403"/>
           </a:xfrm>
           <a:prstGeom prst="rect">
             <a:avLst/>
@@ -11712,7 +11712,7 @@
         </p:nvSpPr>
         <p:spPr>
           <a:xfrm>
-            <a:off x="7178039" y="4003654"/>
+            <a:off x="7132319" y="3963977"/>
             <a:ext cx="4023361" cy="277997"/>
           </a:xfrm>
           <a:prstGeom prst="rect">
@@ -11756,7 +11756,7 @@
         </p:nvSpPr>
         <p:spPr>
           <a:xfrm>
-            <a:off x="7178039" y="4369414"/>
+            <a:off x="7132319" y="4373355"/>
             <a:ext cx="4023361" cy="461403"/>
           </a:xfrm>
           <a:prstGeom prst="rect">
@@ -11787,7 +11787,7 @@
           <a:p>
             <a:pPr/>
             <a:r>
-              <a:t>Balance entre capacidad de representación y costo computacional para imágenes médicas de un solo canal.</a:t>
+              <a:t>Balance entre capacidad de representación y costo computacional para imágenes medicas de un solo canal.</a:t>
             </a:r>
           </a:p>
         </p:txBody>
@@ -11868,8 +11868,8 @@
         </p:nvSpPr>
         <p:spPr>
           <a:xfrm>
-            <a:off x="777239" y="457200"/>
-            <a:ext cx="9052561" cy="542241"/>
+            <a:off x="777239" y="457199"/>
+            <a:ext cx="9052561" cy="542242"/>
           </a:xfrm>
           <a:prstGeom prst="rect">
             <a:avLst/>
@@ -11912,8 +11912,8 @@
         </p:nvSpPr>
         <p:spPr>
           <a:xfrm>
-            <a:off x="777239" y="1371600"/>
-            <a:ext cx="3108961" cy="745788"/>
+            <a:off x="777239" y="1371599"/>
+            <a:ext cx="3108961" cy="745789"/>
           </a:xfrm>
           <a:prstGeom prst="rect">
             <a:avLst/>
@@ -12000,8 +12000,8 @@
         </p:nvSpPr>
         <p:spPr>
           <a:xfrm>
-            <a:off x="4617720" y="1371600"/>
-            <a:ext cx="3108961" cy="745788"/>
+            <a:off x="4617719" y="1371599"/>
+            <a:ext cx="3108962" cy="745789"/>
           </a:xfrm>
           <a:prstGeom prst="rect">
             <a:avLst/>
@@ -12044,8 +12044,8 @@
         </p:nvSpPr>
         <p:spPr>
           <a:xfrm>
-            <a:off x="4617720" y="2103120"/>
-            <a:ext cx="3108961" cy="300594"/>
+            <a:off x="4617719" y="2103120"/>
+            <a:ext cx="3108962" cy="300594"/>
           </a:xfrm>
           <a:prstGeom prst="rect">
             <a:avLst/>
@@ -12088,8 +12088,8 @@
         </p:nvSpPr>
         <p:spPr>
           <a:xfrm>
-            <a:off x="8458200" y="1371600"/>
-            <a:ext cx="3108961" cy="745788"/>
+            <a:off x="8458200" y="1371599"/>
+            <a:ext cx="3108961" cy="745789"/>
           </a:xfrm>
           <a:prstGeom prst="rect">
             <a:avLst/>
@@ -13606,8 +13606,8 @@
         </p:nvSpPr>
         <p:spPr>
           <a:xfrm>
-            <a:off x="777239" y="457200"/>
-            <a:ext cx="9052561" cy="542241"/>
+            <a:off x="777239" y="457199"/>
+            <a:ext cx="9052561" cy="542242"/>
           </a:xfrm>
           <a:prstGeom prst="rect">
             <a:avLst/>
@@ -13637,7 +13637,7 @@
           <a:p>
             <a:pPr/>
             <a:r>
-              <a:t>Clasificación: diseño experimental</a:t>
+              <a:t>Clasificación: 3 estrategias</a:t>
             </a:r>
           </a:p>
         </p:txBody>
@@ -13650,8 +13650,8 @@
         </p:nvSpPr>
         <p:spPr>
           <a:xfrm>
-            <a:off x="731519" y="1463039"/>
-            <a:ext cx="5120642" cy="4572001"/>
+            <a:off x="731520" y="1371600"/>
+            <a:ext cx="3383280" cy="4754880"/>
           </a:xfrm>
           <a:prstGeom prst="rect">
             <a:avLst/>
@@ -13692,8 +13692,8 @@
         </p:nvSpPr>
         <p:spPr>
           <a:xfrm>
-            <a:off x="731519" y="1463039"/>
-            <a:ext cx="5120642" cy="640081"/>
+            <a:off x="731520" y="1371599"/>
+            <a:ext cx="3383280" cy="548642"/>
           </a:xfrm>
           <a:prstGeom prst="rect">
             <a:avLst/>
@@ -13734,8 +13734,8 @@
         </p:nvSpPr>
         <p:spPr>
           <a:xfrm>
-            <a:off x="1051559" y="1612989"/>
-            <a:ext cx="4480561" cy="340182"/>
+            <a:off x="868679" y="1506921"/>
+            <a:ext cx="3108961" cy="277998"/>
           </a:xfrm>
           <a:prstGeom prst="rect">
             <a:avLst/>
@@ -13755,7 +13755,7 @@
           </a:bodyPr>
           <a:lstStyle>
             <a:lvl1pPr>
-              <a:defRPr b="1" sz="2000">
+              <a:defRPr b="1" sz="1500">
                 <a:solidFill>
                   <a:srgbClr val="FFFFFF"/>
                 </a:solidFill>
@@ -13778,8 +13778,8 @@
         </p:nvSpPr>
         <p:spPr>
           <a:xfrm>
-            <a:off x="1051559" y="2377439"/>
-            <a:ext cx="1554482" cy="258203"/>
+            <a:off x="960119" y="2103120"/>
+            <a:ext cx="2926082" cy="248305"/>
           </a:xfrm>
           <a:prstGeom prst="rect">
             <a:avLst/>
@@ -13799,9 +13799,9 @@
           </a:bodyPr>
           <a:lstStyle>
             <a:lvl1pPr>
-              <a:defRPr b="1" sz="1300">
-                <a:solidFill>
-                  <a:srgbClr val="1E2761"/>
+              <a:defRPr sz="1200">
+                <a:solidFill>
+                  <a:srgbClr val="1A1A2E"/>
                 </a:solidFill>
               </a:defRPr>
             </a:lvl1pPr>
@@ -13809,7 +13809,7 @@
           <a:p>
             <a:pPr/>
             <a:r>
-              <a:t>Input:</a:t>
+              <a:t>Input: OCT RGB (224x224)</a:t>
             </a:r>
           </a:p>
         </p:txBody>
@@ -13822,8 +13822,8 @@
         </p:nvSpPr>
         <p:spPr>
           <a:xfrm>
-            <a:off x="2697479" y="2377439"/>
-            <a:ext cx="2926082" cy="258203"/>
+            <a:off x="960119" y="2560320"/>
+            <a:ext cx="2926082" cy="248305"/>
           </a:xfrm>
           <a:prstGeom prst="rect">
             <a:avLst/>
@@ -13843,7 +13843,7 @@
           </a:bodyPr>
           <a:lstStyle>
             <a:lvl1pPr>
-              <a:defRPr sz="1300">
+              <a:defRPr sz="1200">
                 <a:solidFill>
                   <a:srgbClr val="1A1A2E"/>
                 </a:solidFill>
@@ -13853,7 +13853,7 @@
           <a:p>
             <a:pPr/>
             <a:r>
-              <a:t>imágenes OCT originales (224x224, RGB)</a:t>
+              <a:t>ResNet50 (ImageNet V2)</a:t>
             </a:r>
           </a:p>
         </p:txBody>
@@ -13866,8 +13866,8 @@
         </p:nvSpPr>
         <p:spPr>
           <a:xfrm>
-            <a:off x="1051559" y="2880360"/>
-            <a:ext cx="1554482" cy="258202"/>
+            <a:off x="960119" y="3017520"/>
+            <a:ext cx="2926082" cy="248305"/>
           </a:xfrm>
           <a:prstGeom prst="rect">
             <a:avLst/>
@@ -13887,9 +13887,9 @@
           </a:bodyPr>
           <a:lstStyle>
             <a:lvl1pPr>
-              <a:defRPr b="1" sz="1300">
-                <a:solidFill>
-                  <a:srgbClr val="1E2761"/>
+              <a:defRPr sz="1200">
+                <a:solidFill>
+                  <a:srgbClr val="1A1A2E"/>
                 </a:solidFill>
               </a:defRPr>
             </a:lvl1pPr>
@@ -13897,7 +13897,7 @@
           <a:p>
             <a:pPr/>
             <a:r>
-              <a:t>Modelo:</a:t>
+              <a:t>FC(2048 -&gt; 4 clases)</a:t>
             </a:r>
           </a:p>
         </p:txBody>
@@ -13910,8 +13910,8 @@
         </p:nvSpPr>
         <p:spPr>
           <a:xfrm>
-            <a:off x="2697479" y="2880360"/>
-            <a:ext cx="2926082" cy="258202"/>
+            <a:off x="960119" y="3474720"/>
+            <a:ext cx="2926082" cy="248305"/>
           </a:xfrm>
           <a:prstGeom prst="rect">
             <a:avLst/>
@@ -13931,7 +13931,7 @@
           </a:bodyPr>
           <a:lstStyle>
             <a:lvl1pPr>
-              <a:defRPr sz="1300">
+              <a:defRPr sz="1200">
                 <a:solidFill>
                   <a:srgbClr val="1A1A2E"/>
                 </a:solidFill>
@@ -13941,7 +13941,7 @@
           <a:p>
             <a:pPr/>
             <a:r>
-              <a:t>ResNet50 (ImageNet V2 pretrained)</a:t>
+              <a:t>Adam, lr = 1e-4</a:t>
             </a:r>
           </a:p>
         </p:txBody>
@@ -13954,8 +13954,8 @@
         </p:nvSpPr>
         <p:spPr>
           <a:xfrm>
-            <a:off x="1051559" y="3383279"/>
-            <a:ext cx="1554482" cy="258203"/>
+            <a:off x="960119" y="3931920"/>
+            <a:ext cx="2926082" cy="248305"/>
           </a:xfrm>
           <a:prstGeom prst="rect">
             <a:avLst/>
@@ -13975,9 +13975,9 @@
           </a:bodyPr>
           <a:lstStyle>
             <a:lvl1pPr>
-              <a:defRPr b="1" sz="1300">
-                <a:solidFill>
-                  <a:srgbClr val="1E2761"/>
+              <a:defRPr sz="1200">
+                <a:solidFill>
+                  <a:srgbClr val="1A1A2E"/>
                 </a:solidFill>
               </a:defRPr>
             </a:lvl1pPr>
@@ -13985,7 +13985,7 @@
           <a:p>
             <a:pPr/>
             <a:r>
-              <a:t>Capa final:</a:t>
+              <a:t>30 epochs, patience = 5</a:t>
             </a:r>
           </a:p>
         </p:txBody>
@@ -13998,8 +13998,8 @@
         </p:nvSpPr>
         <p:spPr>
           <a:xfrm>
-            <a:off x="2697479" y="3383279"/>
-            <a:ext cx="2926082" cy="258203"/>
+            <a:off x="960119" y="4389120"/>
+            <a:ext cx="2926082" cy="248305"/>
           </a:xfrm>
           <a:prstGeom prst="rect">
             <a:avLst/>
@@ -14019,7 +14019,7 @@
           </a:bodyPr>
           <a:lstStyle>
             <a:lvl1pPr>
-              <a:defRPr sz="1300">
+              <a:defRPr sz="1200">
                 <a:solidFill>
                   <a:srgbClr val="1A1A2E"/>
                 </a:solidFill>
@@ -14029,7 +14029,7 @@
           <a:p>
             <a:pPr/>
             <a:r>
-              <a:t>FC(2048 -&gt; 4 clases)</a:t>
+              <a:t>ColorJitter (+-0.2)</a:t>
             </a:r>
           </a:p>
         </p:txBody>
@@ -14042,8 +14042,8 @@
         </p:nvSpPr>
         <p:spPr>
           <a:xfrm>
-            <a:off x="1051559" y="3886200"/>
-            <a:ext cx="1554482" cy="258202"/>
+            <a:off x="960119" y="4846320"/>
+            <a:ext cx="2926082" cy="248305"/>
           </a:xfrm>
           <a:prstGeom prst="rect">
             <a:avLst/>
@@ -14063,9 +14063,9 @@
           </a:bodyPr>
           <a:lstStyle>
             <a:lvl1pPr>
-              <a:defRPr b="1" sz="1300">
-                <a:solidFill>
-                  <a:srgbClr val="1E2761"/>
+              <a:defRPr sz="1200">
+                <a:solidFill>
+                  <a:srgbClr val="1A1A2E"/>
                 </a:solidFill>
               </a:defRPr>
             </a:lvl1pPr>
@@ -14073,314 +14073,6 @@
           <a:p>
             <a:pPr/>
             <a:r>
-              <a:t>Optimizer:</a:t>
-            </a:r>
-          </a:p>
-        </p:txBody>
-      </p:sp>
-      <p:sp>
-        <p:nvSpPr>
-          <p:cNvPr id="250" name="TextBox 13"/>
-          <p:cNvSpPr txBox="1"/>
-          <p:nvPr/>
-        </p:nvSpPr>
-        <p:spPr>
-          <a:xfrm>
-            <a:off x="2697479" y="3886200"/>
-            <a:ext cx="2926082" cy="258202"/>
-          </a:xfrm>
-          <a:prstGeom prst="rect">
-            <a:avLst/>
-          </a:prstGeom>
-          <a:ln w="12700">
-            <a:miter lim="400000"/>
-          </a:ln>
-          <a:extLst>
-            <a:ext uri="{C572A759-6A51-4108-AA02-DFA0A04FC94B}">
-              <ma14:wrappingTextBoxFlag xmlns:ma14="http://schemas.microsoft.com/office/mac/drawingml/2011/main" val="1"/>
-            </a:ext>
-          </a:extLst>
-        </p:spPr>
-        <p:txBody>
-          <a:bodyPr lIns="45719" rIns="45719">
-            <a:spAutoFit/>
-          </a:bodyPr>
-          <a:lstStyle>
-            <a:lvl1pPr>
-              <a:defRPr sz="1300">
-                <a:solidFill>
-                  <a:srgbClr val="1A1A2E"/>
-                </a:solidFill>
-              </a:defRPr>
-            </a:lvl1pPr>
-          </a:lstStyle>
-          <a:p>
-            <a:pPr/>
-            <a:r>
-              <a:t>Adam (lr = 1e-4)</a:t>
-            </a:r>
-          </a:p>
-        </p:txBody>
-      </p:sp>
-      <p:sp>
-        <p:nvSpPr>
-          <p:cNvPr id="251" name="TextBox 14"/>
-          <p:cNvSpPr txBox="1"/>
-          <p:nvPr/>
-        </p:nvSpPr>
-        <p:spPr>
-          <a:xfrm>
-            <a:off x="1051559" y="4389120"/>
-            <a:ext cx="1554482" cy="258202"/>
-          </a:xfrm>
-          <a:prstGeom prst="rect">
-            <a:avLst/>
-          </a:prstGeom>
-          <a:ln w="12700">
-            <a:miter lim="400000"/>
-          </a:ln>
-          <a:extLst>
-            <a:ext uri="{C572A759-6A51-4108-AA02-DFA0A04FC94B}">
-              <ma14:wrappingTextBoxFlag xmlns:ma14="http://schemas.microsoft.com/office/mac/drawingml/2011/main" val="1"/>
-            </a:ext>
-          </a:extLst>
-        </p:spPr>
-        <p:txBody>
-          <a:bodyPr lIns="45719" rIns="45719">
-            <a:spAutoFit/>
-          </a:bodyPr>
-          <a:lstStyle>
-            <a:lvl1pPr>
-              <a:defRPr b="1" sz="1300">
-                <a:solidFill>
-                  <a:srgbClr val="1E2761"/>
-                </a:solidFill>
-              </a:defRPr>
-            </a:lvl1pPr>
-          </a:lstStyle>
-          <a:p>
-            <a:pPr/>
-            <a:r>
-              <a:t>Epochs:</a:t>
-            </a:r>
-          </a:p>
-        </p:txBody>
-      </p:sp>
-      <p:sp>
-        <p:nvSpPr>
-          <p:cNvPr id="252" name="TextBox 15"/>
-          <p:cNvSpPr txBox="1"/>
-          <p:nvPr/>
-        </p:nvSpPr>
-        <p:spPr>
-          <a:xfrm>
-            <a:off x="2697479" y="4389120"/>
-            <a:ext cx="2926082" cy="258202"/>
-          </a:xfrm>
-          <a:prstGeom prst="rect">
-            <a:avLst/>
-          </a:prstGeom>
-          <a:ln w="12700">
-            <a:miter lim="400000"/>
-          </a:ln>
-          <a:extLst>
-            <a:ext uri="{C572A759-6A51-4108-AA02-DFA0A04FC94B}">
-              <ma14:wrappingTextBoxFlag xmlns:ma14="http://schemas.microsoft.com/office/mac/drawingml/2011/main" val="1"/>
-            </a:ext>
-          </a:extLst>
-        </p:spPr>
-        <p:txBody>
-          <a:bodyPr lIns="45719" rIns="45719">
-            <a:spAutoFit/>
-          </a:bodyPr>
-          <a:lstStyle>
-            <a:lvl1pPr>
-              <a:defRPr sz="1300">
-                <a:solidFill>
-                  <a:srgbClr val="1A1A2E"/>
-                </a:solidFill>
-              </a:defRPr>
-            </a:lvl1pPr>
-          </a:lstStyle>
-          <a:p>
-            <a:pPr/>
-            <a:r>
-              <a:t>30 (early stopping, patience = 5)</a:t>
-            </a:r>
-          </a:p>
-        </p:txBody>
-      </p:sp>
-      <p:sp>
-        <p:nvSpPr>
-          <p:cNvPr id="253" name="TextBox 16"/>
-          <p:cNvSpPr txBox="1"/>
-          <p:nvPr/>
-        </p:nvSpPr>
-        <p:spPr>
-          <a:xfrm>
-            <a:off x="1051559" y="4892040"/>
-            <a:ext cx="1554482" cy="258203"/>
-          </a:xfrm>
-          <a:prstGeom prst="rect">
-            <a:avLst/>
-          </a:prstGeom>
-          <a:ln w="12700">
-            <a:miter lim="400000"/>
-          </a:ln>
-          <a:extLst>
-            <a:ext uri="{C572A759-6A51-4108-AA02-DFA0A04FC94B}">
-              <ma14:wrappingTextBoxFlag xmlns:ma14="http://schemas.microsoft.com/office/mac/drawingml/2011/main" val="1"/>
-            </a:ext>
-          </a:extLst>
-        </p:spPr>
-        <p:txBody>
-          <a:bodyPr lIns="45719" rIns="45719">
-            <a:spAutoFit/>
-          </a:bodyPr>
-          <a:lstStyle>
-            <a:lvl1pPr>
-              <a:defRPr b="1" sz="1300">
-                <a:solidFill>
-                  <a:srgbClr val="1E2761"/>
-                </a:solidFill>
-              </a:defRPr>
-            </a:lvl1pPr>
-          </a:lstStyle>
-          <a:p>
-            <a:pPr/>
-            <a:r>
-              <a:t>Augmentation:</a:t>
-            </a:r>
-          </a:p>
-        </p:txBody>
-      </p:sp>
-      <p:sp>
-        <p:nvSpPr>
-          <p:cNvPr id="254" name="TextBox 17"/>
-          <p:cNvSpPr txBox="1"/>
-          <p:nvPr/>
-        </p:nvSpPr>
-        <p:spPr>
-          <a:xfrm>
-            <a:off x="2697479" y="4892040"/>
-            <a:ext cx="2926082" cy="258203"/>
-          </a:xfrm>
-          <a:prstGeom prst="rect">
-            <a:avLst/>
-          </a:prstGeom>
-          <a:ln w="12700">
-            <a:miter lim="400000"/>
-          </a:ln>
-          <a:extLst>
-            <a:ext uri="{C572A759-6A51-4108-AA02-DFA0A04FC94B}">
-              <ma14:wrappingTextBoxFlag xmlns:ma14="http://schemas.microsoft.com/office/mac/drawingml/2011/main" val="1"/>
-            </a:ext>
-          </a:extLst>
-        </p:spPr>
-        <p:txBody>
-          <a:bodyPr lIns="45719" rIns="45719">
-            <a:spAutoFit/>
-          </a:bodyPr>
-          <a:lstStyle>
-            <a:lvl1pPr>
-              <a:defRPr sz="1300">
-                <a:solidFill>
-                  <a:srgbClr val="1A1A2E"/>
-                </a:solidFill>
-              </a:defRPr>
-            </a:lvl1pPr>
-          </a:lstStyle>
-          <a:p>
-            <a:pPr/>
-            <a:r>
-              <a:t>ColorJitter (brillo, contraste +-0.2)</a:t>
-            </a:r>
-          </a:p>
-        </p:txBody>
-      </p:sp>
-      <p:sp>
-        <p:nvSpPr>
-          <p:cNvPr id="255" name="TextBox 18"/>
-          <p:cNvSpPr txBox="1"/>
-          <p:nvPr/>
-        </p:nvSpPr>
-        <p:spPr>
-          <a:xfrm>
-            <a:off x="1051559" y="5394959"/>
-            <a:ext cx="1554482" cy="258203"/>
-          </a:xfrm>
-          <a:prstGeom prst="rect">
-            <a:avLst/>
-          </a:prstGeom>
-          <a:ln w="12700">
-            <a:miter lim="400000"/>
-          </a:ln>
-          <a:extLst>
-            <a:ext uri="{C572A759-6A51-4108-AA02-DFA0A04FC94B}">
-              <ma14:wrappingTextBoxFlag xmlns:ma14="http://schemas.microsoft.com/office/mac/drawingml/2011/main" val="1"/>
-            </a:ext>
-          </a:extLst>
-        </p:spPr>
-        <p:txBody>
-          <a:bodyPr lIns="45719" rIns="45719">
-            <a:spAutoFit/>
-          </a:bodyPr>
-          <a:lstStyle>
-            <a:lvl1pPr>
-              <a:defRPr b="1" sz="1300">
-                <a:solidFill>
-                  <a:srgbClr val="1E2761"/>
-                </a:solidFill>
-              </a:defRPr>
-            </a:lvl1pPr>
-          </a:lstStyle>
-          <a:p>
-            <a:pPr/>
-            <a:r>
-              <a:t>Sampling:</a:t>
-            </a:r>
-          </a:p>
-        </p:txBody>
-      </p:sp>
-      <p:sp>
-        <p:nvSpPr>
-          <p:cNvPr id="256" name="TextBox 19"/>
-          <p:cNvSpPr txBox="1"/>
-          <p:nvPr/>
-        </p:nvSpPr>
-        <p:spPr>
-          <a:xfrm>
-            <a:off x="2697479" y="5394959"/>
-            <a:ext cx="2926082" cy="258203"/>
-          </a:xfrm>
-          <a:prstGeom prst="rect">
-            <a:avLst/>
-          </a:prstGeom>
-          <a:ln w="12700">
-            <a:miter lim="400000"/>
-          </a:ln>
-          <a:extLst>
-            <a:ext uri="{C572A759-6A51-4108-AA02-DFA0A04FC94B}">
-              <ma14:wrappingTextBoxFlag xmlns:ma14="http://schemas.microsoft.com/office/mac/drawingml/2011/main" val="1"/>
-            </a:ext>
-          </a:extLst>
-        </p:spPr>
-        <p:txBody>
-          <a:bodyPr lIns="45719" rIns="45719">
-            <a:spAutoFit/>
-          </a:bodyPr>
-          <a:lstStyle>
-            <a:lvl1pPr>
-              <a:defRPr sz="1300">
-                <a:solidFill>
-                  <a:srgbClr val="1A1A2E"/>
-                </a:solidFill>
-              </a:defRPr>
-            </a:lvl1pPr>
-          </a:lstStyle>
-          <a:p>
-            <a:pPr/>
-            <a:r>
               <a:t>WeightedRandomSampler</a:t>
             </a:r>
           </a:p>
@@ -14388,14 +14080,14 @@
       </p:sp>
       <p:sp>
         <p:nvSpPr>
-          <p:cNvPr id="257" name="Rectangle 20"/>
+          <p:cNvPr id="250" name="Rectangle 13"/>
           <p:cNvSpPr/>
           <p:nvPr/>
         </p:nvSpPr>
         <p:spPr>
           <a:xfrm>
-            <a:off x="6309359" y="1463039"/>
-            <a:ext cx="5120641" cy="4572001"/>
+            <a:off x="4389120" y="1371600"/>
+            <a:ext cx="3383281" cy="4754880"/>
           </a:xfrm>
           <a:prstGeom prst="rect">
             <a:avLst/>
@@ -14430,14 +14122,14 @@
       </p:sp>
       <p:sp>
         <p:nvSpPr>
-          <p:cNvPr id="258" name="Rectangle 21"/>
+          <p:cNvPr id="251" name="Rectangle 14"/>
           <p:cNvSpPr/>
           <p:nvPr/>
         </p:nvSpPr>
         <p:spPr>
           <a:xfrm>
-            <a:off x="6309359" y="1463039"/>
-            <a:ext cx="5120641" cy="640081"/>
+            <a:off x="4389120" y="1371599"/>
+            <a:ext cx="3383281" cy="548642"/>
           </a:xfrm>
           <a:prstGeom prst="rect">
             <a:avLst/>
@@ -14472,14 +14164,14 @@
       </p:sp>
       <p:sp>
         <p:nvSpPr>
-          <p:cNvPr id="259" name="TextBox 22"/>
-          <p:cNvSpPr txBox="1"/>
-          <p:nvPr/>
-        </p:nvSpPr>
-        <p:spPr>
-          <a:xfrm>
-            <a:off x="6629400" y="1612989"/>
-            <a:ext cx="4480560" cy="340182"/>
+          <p:cNvPr id="252" name="TextBox 15"/>
+          <p:cNvSpPr txBox="1"/>
+          <p:nvPr/>
+        </p:nvSpPr>
+        <p:spPr>
+          <a:xfrm>
+            <a:off x="4526280" y="1506921"/>
+            <a:ext cx="3108961" cy="277998"/>
           </a:xfrm>
           <a:prstGeom prst="rect">
             <a:avLst/>
@@ -14499,7 +14191,7 @@
           </a:bodyPr>
           <a:lstStyle>
             <a:lvl1pPr>
-              <a:defRPr b="1" sz="2000">
+              <a:defRPr b="1" sz="1500">
                 <a:solidFill>
                   <a:srgbClr val="FFFFFF"/>
                 </a:solidFill>
@@ -14509,21 +14201,21 @@
           <a:p>
             <a:pPr/>
             <a:r>
-              <a:t>Modelo 2: con segmentación</a:t>
-            </a:r>
-          </a:p>
-        </p:txBody>
-      </p:sp>
-      <p:sp>
-        <p:nvSpPr>
-          <p:cNvPr id="260" name="TextBox 23"/>
-          <p:cNvSpPr txBox="1"/>
-          <p:nvPr/>
-        </p:nvSpPr>
-        <p:spPr>
-          <a:xfrm>
-            <a:off x="6629400" y="2377439"/>
-            <a:ext cx="1554481" cy="258203"/>
+              <a:t>Modelo 2: solo máscaras</a:t>
+            </a:r>
+          </a:p>
+        </p:txBody>
+      </p:sp>
+      <p:sp>
+        <p:nvSpPr>
+          <p:cNvPr id="253" name="TextBox 16"/>
+          <p:cNvSpPr txBox="1"/>
+          <p:nvPr/>
+        </p:nvSpPr>
+        <p:spPr>
+          <a:xfrm>
+            <a:off x="4617719" y="2103120"/>
+            <a:ext cx="2926082" cy="248305"/>
           </a:xfrm>
           <a:prstGeom prst="rect">
             <a:avLst/>
@@ -14543,9 +14235,9 @@
           </a:bodyPr>
           <a:lstStyle>
             <a:lvl1pPr>
-              <a:defRPr b="1" sz="1300">
-                <a:solidFill>
-                  <a:srgbClr val="1E2761"/>
+              <a:defRPr sz="1200">
+                <a:solidFill>
+                  <a:srgbClr val="1A1A2E"/>
                 </a:solidFill>
               </a:defRPr>
             </a:lvl1pPr>
@@ -14553,21 +14245,21 @@
           <a:p>
             <a:pPr/>
             <a:r>
-              <a:t>Input:</a:t>
-            </a:r>
-          </a:p>
-        </p:txBody>
-      </p:sp>
-      <p:sp>
-        <p:nvSpPr>
-          <p:cNvPr id="261" name="TextBox 24"/>
-          <p:cNvSpPr txBox="1"/>
-          <p:nvPr/>
-        </p:nvSpPr>
-        <p:spPr>
-          <a:xfrm>
-            <a:off x="8275319" y="2377439"/>
-            <a:ext cx="2926081" cy="461403"/>
+              <a:t>Input: mascara UNet++ (frozen)</a:t>
+            </a:r>
+          </a:p>
+        </p:txBody>
+      </p:sp>
+      <p:sp>
+        <p:nvSpPr>
+          <p:cNvPr id="254" name="TextBox 17"/>
+          <p:cNvSpPr txBox="1"/>
+          <p:nvPr/>
+        </p:nvSpPr>
+        <p:spPr>
+          <a:xfrm>
+            <a:off x="4617719" y="2560320"/>
+            <a:ext cx="2926082" cy="248305"/>
           </a:xfrm>
           <a:prstGeom prst="rect">
             <a:avLst/>
@@ -14587,7 +14279,7 @@
           </a:bodyPr>
           <a:lstStyle>
             <a:lvl1pPr>
-              <a:defRPr sz="1300">
+              <a:defRPr sz="1200">
                 <a:solidFill>
                   <a:srgbClr val="1A1A2E"/>
                 </a:solidFill>
@@ -14597,21 +14289,21 @@
           <a:p>
             <a:pPr/>
             <a:r>
-              <a:t>Máscara de segmentación (UNet++ frozen)</a:t>
-            </a:r>
-          </a:p>
-        </p:txBody>
-      </p:sp>
-      <p:sp>
-        <p:nvSpPr>
-          <p:cNvPr id="262" name="TextBox 25"/>
-          <p:cNvSpPr txBox="1"/>
-          <p:nvPr/>
-        </p:nvSpPr>
-        <p:spPr>
-          <a:xfrm>
-            <a:off x="6629400" y="2880360"/>
-            <a:ext cx="1554481" cy="258202"/>
+              <a:t>OCT -&gt; gray -&gt; UNet++ -&gt; mask</a:t>
+            </a:r>
+          </a:p>
+        </p:txBody>
+      </p:sp>
+      <p:sp>
+        <p:nvSpPr>
+          <p:cNvPr id="255" name="TextBox 18"/>
+          <p:cNvSpPr txBox="1"/>
+          <p:nvPr/>
+        </p:nvSpPr>
+        <p:spPr>
+          <a:xfrm>
+            <a:off x="4617719" y="3017520"/>
+            <a:ext cx="2926082" cy="248305"/>
           </a:xfrm>
           <a:prstGeom prst="rect">
             <a:avLst/>
@@ -14631,9 +14323,9 @@
           </a:bodyPr>
           <a:lstStyle>
             <a:lvl1pPr>
-              <a:defRPr b="1" sz="1300">
-                <a:solidFill>
-                  <a:srgbClr val="1E2761"/>
+              <a:defRPr sz="1200">
+                <a:solidFill>
+                  <a:srgbClr val="1A1A2E"/>
                 </a:solidFill>
               </a:defRPr>
             </a:lvl1pPr>
@@ -14641,21 +14333,21 @@
           <a:p>
             <a:pPr/>
             <a:r>
-              <a:t>Pipeline:</a:t>
-            </a:r>
-          </a:p>
-        </p:txBody>
-      </p:sp>
-      <p:sp>
-        <p:nvSpPr>
-          <p:cNvPr id="263" name="TextBox 26"/>
-          <p:cNvSpPr txBox="1"/>
-          <p:nvPr/>
-        </p:nvSpPr>
-        <p:spPr>
-          <a:xfrm>
-            <a:off x="8275319" y="2880360"/>
-            <a:ext cx="2926081" cy="258202"/>
+              <a:t>Valores 0-7/7, 3 canales</a:t>
+            </a:r>
+          </a:p>
+        </p:txBody>
+      </p:sp>
+      <p:sp>
+        <p:nvSpPr>
+          <p:cNvPr id="256" name="TextBox 19"/>
+          <p:cNvSpPr txBox="1"/>
+          <p:nvPr/>
+        </p:nvSpPr>
+        <p:spPr>
+          <a:xfrm>
+            <a:off x="4617719" y="3474720"/>
+            <a:ext cx="2926082" cy="248305"/>
           </a:xfrm>
           <a:prstGeom prst="rect">
             <a:avLst/>
@@ -14675,7 +14367,7 @@
           </a:bodyPr>
           <a:lstStyle>
             <a:lvl1pPr>
-              <a:defRPr sz="1300">
+              <a:defRPr sz="1200">
                 <a:solidFill>
                   <a:srgbClr val="1A1A2E"/>
                 </a:solidFill>
@@ -14685,21 +14377,21 @@
           <a:p>
             <a:pPr/>
             <a:r>
-              <a:t>OCT -&gt; grayscale -&gt; UNet++ -&gt; máscara</a:t>
-            </a:r>
-          </a:p>
-        </p:txBody>
-      </p:sp>
-      <p:sp>
-        <p:nvSpPr>
-          <p:cNvPr id="264" name="TextBox 27"/>
-          <p:cNvSpPr txBox="1"/>
-          <p:nvPr/>
-        </p:nvSpPr>
-        <p:spPr>
-          <a:xfrm>
-            <a:off x="6629400" y="3383279"/>
-            <a:ext cx="1554481" cy="258203"/>
+              <a:t>ResNet50 (ImageNet V2)</a:t>
+            </a:r>
+          </a:p>
+        </p:txBody>
+      </p:sp>
+      <p:sp>
+        <p:nvSpPr>
+          <p:cNvPr id="257" name="TextBox 20"/>
+          <p:cNvSpPr txBox="1"/>
+          <p:nvPr/>
+        </p:nvSpPr>
+        <p:spPr>
+          <a:xfrm>
+            <a:off x="4617719" y="3931920"/>
+            <a:ext cx="2926082" cy="248305"/>
           </a:xfrm>
           <a:prstGeom prst="rect">
             <a:avLst/>
@@ -14719,9 +14411,9 @@
           </a:bodyPr>
           <a:lstStyle>
             <a:lvl1pPr>
-              <a:defRPr b="1" sz="1300">
-                <a:solidFill>
-                  <a:srgbClr val="1E2761"/>
+              <a:defRPr sz="1200">
+                <a:solidFill>
+                  <a:srgbClr val="1A1A2E"/>
                 </a:solidFill>
               </a:defRPr>
             </a:lvl1pPr>
@@ -14729,21 +14421,21 @@
           <a:p>
             <a:pPr/>
             <a:r>
-              <a:t>Mascara:</a:t>
-            </a:r>
-          </a:p>
-        </p:txBody>
-      </p:sp>
-      <p:sp>
-        <p:nvSpPr>
-          <p:cNvPr id="265" name="TextBox 28"/>
-          <p:cNvSpPr txBox="1"/>
-          <p:nvPr/>
-        </p:nvSpPr>
-        <p:spPr>
-          <a:xfrm>
-            <a:off x="8275319" y="3383279"/>
-            <a:ext cx="2926081" cy="258203"/>
+              <a:t>20 epochs, patience = 5</a:t>
+            </a:r>
+          </a:p>
+        </p:txBody>
+      </p:sp>
+      <p:sp>
+        <p:nvSpPr>
+          <p:cNvPr id="258" name="TextBox 21"/>
+          <p:cNvSpPr txBox="1"/>
+          <p:nvPr/>
+        </p:nvSpPr>
+        <p:spPr>
+          <a:xfrm>
+            <a:off x="4617719" y="4389120"/>
+            <a:ext cx="2926082" cy="248305"/>
           </a:xfrm>
           <a:prstGeom prst="rect">
             <a:avLst/>
@@ -14763,7 +14455,7 @@
           </a:bodyPr>
           <a:lstStyle>
             <a:lvl1pPr>
-              <a:defRPr sz="1300">
+              <a:defRPr sz="1200">
                 <a:solidFill>
                   <a:srgbClr val="1A1A2E"/>
                 </a:solidFill>
@@ -14773,21 +14465,21 @@
           <a:p>
             <a:pPr/>
             <a:r>
-              <a:t>Valores 0-7, normalizada, 3 canales</a:t>
-            </a:r>
-          </a:p>
-        </p:txBody>
-      </p:sp>
-      <p:sp>
-        <p:nvSpPr>
-          <p:cNvPr id="266" name="TextBox 29"/>
-          <p:cNvSpPr txBox="1"/>
-          <p:nvPr/>
-        </p:nvSpPr>
-        <p:spPr>
-          <a:xfrm>
-            <a:off x="6629400" y="3886200"/>
-            <a:ext cx="1554481" cy="258202"/>
+              <a:t>HFlip + VFlip</a:t>
+            </a:r>
+          </a:p>
+        </p:txBody>
+      </p:sp>
+      <p:sp>
+        <p:nvSpPr>
+          <p:cNvPr id="259" name="TextBox 22"/>
+          <p:cNvSpPr txBox="1"/>
+          <p:nvPr/>
+        </p:nvSpPr>
+        <p:spPr>
+          <a:xfrm>
+            <a:off x="4617719" y="4846320"/>
+            <a:ext cx="2926082" cy="248305"/>
           </a:xfrm>
           <a:prstGeom prst="rect">
             <a:avLst/>
@@ -14807,9 +14499,9 @@
           </a:bodyPr>
           <a:lstStyle>
             <a:lvl1pPr>
-              <a:defRPr b="1" sz="1300">
-                <a:solidFill>
-                  <a:srgbClr val="1E2761"/>
+              <a:defRPr sz="1200">
+                <a:solidFill>
+                  <a:srgbClr val="1A1A2E"/>
                 </a:solidFill>
               </a:defRPr>
             </a:lvl1pPr>
@@ -14817,21 +14509,105 @@
           <a:p>
             <a:pPr/>
             <a:r>
-              <a:t>Modelo:</a:t>
-            </a:r>
-          </a:p>
-        </p:txBody>
-      </p:sp>
-      <p:sp>
-        <p:nvSpPr>
-          <p:cNvPr id="267" name="TextBox 30"/>
-          <p:cNvSpPr txBox="1"/>
-          <p:nvPr/>
-        </p:nvSpPr>
-        <p:spPr>
-          <a:xfrm>
-            <a:off x="8275319" y="3886200"/>
-            <a:ext cx="2926081" cy="258202"/>
+              <a:t>Batch size: 16</a:t>
+            </a:r>
+          </a:p>
+        </p:txBody>
+      </p:sp>
+      <p:sp>
+        <p:nvSpPr>
+          <p:cNvPr id="260" name="Rectangle 23"/>
+          <p:cNvSpPr/>
+          <p:nvPr/>
+        </p:nvSpPr>
+        <p:spPr>
+          <a:xfrm>
+            <a:off x="8046719" y="1371600"/>
+            <a:ext cx="3383281" cy="4754880"/>
+          </a:xfrm>
+          <a:prstGeom prst="rect">
+            <a:avLst/>
+          </a:prstGeom>
+          <a:solidFill>
+            <a:srgbClr val="F5F5F5"/>
+          </a:solidFill>
+          <a:ln w="12700">
+            <a:miter lim="400000"/>
+          </a:ln>
+          <a:effectLst>
+            <a:outerShdw sx="100000" sy="100000" kx="0" ky="0" algn="b" rotWithShape="0" blurRad="38100" dist="23000" dir="5400000">
+              <a:srgbClr val="000000">
+                <a:alpha val="35000"/>
+              </a:srgbClr>
+            </a:outerShdw>
+          </a:effectLst>
+        </p:spPr>
+        <p:txBody>
+          <a:bodyPr lIns="45719" rIns="45719" anchor="ctr"/>
+          <a:lstStyle/>
+          <a:p>
+            <a:pPr algn="ctr">
+              <a:defRPr>
+                <a:solidFill>
+                  <a:srgbClr val="FFFFFF"/>
+                </a:solidFill>
+              </a:defRPr>
+            </a:pPr>
+          </a:p>
+        </p:txBody>
+      </p:sp>
+      <p:sp>
+        <p:nvSpPr>
+          <p:cNvPr id="261" name="Rectangle 24"/>
+          <p:cNvSpPr/>
+          <p:nvPr/>
+        </p:nvSpPr>
+        <p:spPr>
+          <a:xfrm>
+            <a:off x="8046719" y="1371599"/>
+            <a:ext cx="3383281" cy="548642"/>
+          </a:xfrm>
+          <a:prstGeom prst="rect">
+            <a:avLst/>
+          </a:prstGeom>
+          <a:solidFill>
+            <a:srgbClr val="1E2761"/>
+          </a:solidFill>
+          <a:ln w="12700">
+            <a:miter lim="400000"/>
+          </a:ln>
+          <a:effectLst>
+            <a:outerShdw sx="100000" sy="100000" kx="0" ky="0" algn="b" rotWithShape="0" blurRad="38100" dist="23000" dir="5400000">
+              <a:srgbClr val="000000">
+                <a:alpha val="35000"/>
+              </a:srgbClr>
+            </a:outerShdw>
+          </a:effectLst>
+        </p:spPr>
+        <p:txBody>
+          <a:bodyPr lIns="45719" rIns="45719" anchor="ctr"/>
+          <a:lstStyle/>
+          <a:p>
+            <a:pPr algn="ctr">
+              <a:defRPr>
+                <a:solidFill>
+                  <a:srgbClr val="FFFFFF"/>
+                </a:solidFill>
+              </a:defRPr>
+            </a:pPr>
+          </a:p>
+        </p:txBody>
+      </p:sp>
+      <p:sp>
+        <p:nvSpPr>
+          <p:cNvPr id="262" name="TextBox 25"/>
+          <p:cNvSpPr txBox="1"/>
+          <p:nvPr/>
+        </p:nvSpPr>
+        <p:spPr>
+          <a:xfrm>
+            <a:off x="8183880" y="1506921"/>
+            <a:ext cx="3108961" cy="277998"/>
           </a:xfrm>
           <a:prstGeom prst="rect">
             <a:avLst/>
@@ -14851,9 +14627,9 @@
           </a:bodyPr>
           <a:lstStyle>
             <a:lvl1pPr>
-              <a:defRPr sz="1300">
-                <a:solidFill>
-                  <a:srgbClr val="1A1A2E"/>
+              <a:defRPr b="1" sz="1500">
+                <a:solidFill>
+                  <a:srgbClr val="FFFFFF"/>
                 </a:solidFill>
               </a:defRPr>
             </a:lvl1pPr>
@@ -14861,21 +14637,21 @@
           <a:p>
             <a:pPr/>
             <a:r>
-              <a:t>ResNet50 (ImageNet V2 pretrained)</a:t>
-            </a:r>
-          </a:p>
-        </p:txBody>
-      </p:sp>
-      <p:sp>
-        <p:nvSpPr>
-          <p:cNvPr id="268" name="TextBox 31"/>
-          <p:cNvSpPr txBox="1"/>
-          <p:nvPr/>
-        </p:nvSpPr>
-        <p:spPr>
-          <a:xfrm>
-            <a:off x="6629400" y="4389120"/>
-            <a:ext cx="1554481" cy="258202"/>
+              <a:t>Modelo 3: híbrido 4-ch</a:t>
+            </a:r>
+          </a:p>
+        </p:txBody>
+      </p:sp>
+      <p:sp>
+        <p:nvSpPr>
+          <p:cNvPr id="263" name="TextBox 26"/>
+          <p:cNvSpPr txBox="1"/>
+          <p:nvPr/>
+        </p:nvSpPr>
+        <p:spPr>
+          <a:xfrm>
+            <a:off x="8275319" y="2103120"/>
+            <a:ext cx="2926082" cy="248305"/>
           </a:xfrm>
           <a:prstGeom prst="rect">
             <a:avLst/>
@@ -14895,9 +14671,9 @@
           </a:bodyPr>
           <a:lstStyle>
             <a:lvl1pPr>
-              <a:defRPr b="1" sz="1300">
-                <a:solidFill>
-                  <a:srgbClr val="1E2761"/>
+              <a:defRPr sz="1200">
+                <a:solidFill>
+                  <a:srgbClr val="1A1A2E"/>
                 </a:solidFill>
               </a:defRPr>
             </a:lvl1pPr>
@@ -14905,21 +14681,21 @@
           <a:p>
             <a:pPr/>
             <a:r>
-              <a:t>Capa final:</a:t>
-            </a:r>
-          </a:p>
-        </p:txBody>
-      </p:sp>
-      <p:sp>
-        <p:nvSpPr>
-          <p:cNvPr id="269" name="TextBox 32"/>
-          <p:cNvSpPr txBox="1"/>
-          <p:nvPr/>
-        </p:nvSpPr>
-        <p:spPr>
-          <a:xfrm>
-            <a:off x="8275319" y="4389120"/>
-            <a:ext cx="2926081" cy="258202"/>
+              <a:t>Input: RGB + máscara (4 ch)</a:t>
+            </a:r>
+          </a:p>
+        </p:txBody>
+      </p:sp>
+      <p:sp>
+        <p:nvSpPr>
+          <p:cNvPr id="264" name="TextBox 27"/>
+          <p:cNvSpPr txBox="1"/>
+          <p:nvPr/>
+        </p:nvSpPr>
+        <p:spPr>
+          <a:xfrm>
+            <a:off x="8275319" y="2560320"/>
+            <a:ext cx="2926082" cy="248305"/>
           </a:xfrm>
           <a:prstGeom prst="rect">
             <a:avLst/>
@@ -14939,7 +14715,7 @@
           </a:bodyPr>
           <a:lstStyle>
             <a:lvl1pPr>
-              <a:defRPr sz="1300">
+              <a:defRPr sz="1200">
                 <a:solidFill>
                   <a:srgbClr val="1A1A2E"/>
                 </a:solidFill>
@@ -14949,21 +14725,21 @@
           <a:p>
             <a:pPr/>
             <a:r>
-              <a:t>FC(2048 -&gt; 4 clases)</a:t>
-            </a:r>
-          </a:p>
-        </p:txBody>
-      </p:sp>
-      <p:sp>
-        <p:nvSpPr>
-          <p:cNvPr id="270" name="TextBox 33"/>
-          <p:cNvSpPr txBox="1"/>
-          <p:nvPr/>
-        </p:nvSpPr>
-        <p:spPr>
-          <a:xfrm>
-            <a:off x="6629400" y="4892040"/>
-            <a:ext cx="1554481" cy="258203"/>
+              <a:t>Conv1 adaptada a 4 canales</a:t>
+            </a:r>
+          </a:p>
+        </p:txBody>
+      </p:sp>
+      <p:sp>
+        <p:nvSpPr>
+          <p:cNvPr id="265" name="TextBox 28"/>
+          <p:cNvSpPr txBox="1"/>
+          <p:nvPr/>
+        </p:nvSpPr>
+        <p:spPr>
+          <a:xfrm>
+            <a:off x="8275319" y="3017520"/>
+            <a:ext cx="2926082" cy="248305"/>
           </a:xfrm>
           <a:prstGeom prst="rect">
             <a:avLst/>
@@ -14983,9 +14759,9 @@
           </a:bodyPr>
           <a:lstStyle>
             <a:lvl1pPr>
-              <a:defRPr b="1" sz="1300">
-                <a:solidFill>
-                  <a:srgbClr val="1E2761"/>
+              <a:defRPr sz="1200">
+                <a:solidFill>
+                  <a:srgbClr val="1A1A2E"/>
                 </a:solidFill>
               </a:defRPr>
             </a:lvl1pPr>
@@ -14993,21 +14769,21 @@
           <a:p>
             <a:pPr/>
             <a:r>
-              <a:t>Optimizer:</a:t>
-            </a:r>
-          </a:p>
-        </p:txBody>
-      </p:sp>
-      <p:sp>
-        <p:nvSpPr>
-          <p:cNvPr id="271" name="TextBox 34"/>
-          <p:cNvSpPr txBox="1"/>
-          <p:nvPr/>
-        </p:nvSpPr>
-        <p:spPr>
-          <a:xfrm>
-            <a:off x="8275319" y="4892040"/>
-            <a:ext cx="2926081" cy="258203"/>
+              <a:t>4to filtro = promedio RGB</a:t>
+            </a:r>
+          </a:p>
+        </p:txBody>
+      </p:sp>
+      <p:sp>
+        <p:nvSpPr>
+          <p:cNvPr id="266" name="TextBox 29"/>
+          <p:cNvSpPr txBox="1"/>
+          <p:nvPr/>
+        </p:nvSpPr>
+        <p:spPr>
+          <a:xfrm>
+            <a:off x="8275319" y="3474720"/>
+            <a:ext cx="2926082" cy="248305"/>
           </a:xfrm>
           <a:prstGeom prst="rect">
             <a:avLst/>
@@ -15027,7 +14803,7 @@
           </a:bodyPr>
           <a:lstStyle>
             <a:lvl1pPr>
-              <a:defRPr sz="1300">
+              <a:defRPr sz="1200">
                 <a:solidFill>
                   <a:srgbClr val="1A1A2E"/>
                 </a:solidFill>
@@ -15037,21 +14813,21 @@
           <a:p>
             <a:pPr/>
             <a:r>
-              <a:t>Adam (lr = 1e-4)</a:t>
-            </a:r>
-          </a:p>
-        </p:txBody>
-      </p:sp>
-      <p:sp>
-        <p:nvSpPr>
-          <p:cNvPr id="272" name="TextBox 35"/>
-          <p:cNvSpPr txBox="1"/>
-          <p:nvPr/>
-        </p:nvSpPr>
-        <p:spPr>
-          <a:xfrm>
-            <a:off x="6629400" y="5394959"/>
-            <a:ext cx="1554481" cy="258203"/>
+              <a:t>ResNet50 (ImageNet V2)</a:t>
+            </a:r>
+          </a:p>
+        </p:txBody>
+      </p:sp>
+      <p:sp>
+        <p:nvSpPr>
+          <p:cNvPr id="267" name="TextBox 30"/>
+          <p:cNvSpPr txBox="1"/>
+          <p:nvPr/>
+        </p:nvSpPr>
+        <p:spPr>
+          <a:xfrm>
+            <a:off x="8275319" y="3931920"/>
+            <a:ext cx="2926082" cy="248305"/>
           </a:xfrm>
           <a:prstGeom prst="rect">
             <a:avLst/>
@@ -15071,9 +14847,9 @@
           </a:bodyPr>
           <a:lstStyle>
             <a:lvl1pPr>
-              <a:defRPr b="1" sz="1300">
-                <a:solidFill>
-                  <a:srgbClr val="1E2761"/>
+              <a:defRPr sz="1200">
+                <a:solidFill>
+                  <a:srgbClr val="1A1A2E"/>
                 </a:solidFill>
               </a:defRPr>
             </a:lvl1pPr>
@@ -15081,21 +14857,21 @@
           <a:p>
             <a:pPr/>
             <a:r>
-              <a:t>Epochs:</a:t>
-            </a:r>
-          </a:p>
-        </p:txBody>
-      </p:sp>
-      <p:sp>
-        <p:nvSpPr>
-          <p:cNvPr id="273" name="TextBox 36"/>
-          <p:cNvSpPr txBox="1"/>
-          <p:nvPr/>
-        </p:nvSpPr>
-        <p:spPr>
-          <a:xfrm>
-            <a:off x="8275319" y="5394959"/>
-            <a:ext cx="2926081" cy="258203"/>
+              <a:t>20 epochs, patience = 5</a:t>
+            </a:r>
+          </a:p>
+        </p:txBody>
+      </p:sp>
+      <p:sp>
+        <p:nvSpPr>
+          <p:cNvPr id="268" name="TextBox 31"/>
+          <p:cNvSpPr txBox="1"/>
+          <p:nvPr/>
+        </p:nvSpPr>
+        <p:spPr>
+          <a:xfrm>
+            <a:off x="8275319" y="4389120"/>
+            <a:ext cx="2926082" cy="248305"/>
           </a:xfrm>
           <a:prstGeom prst="rect">
             <a:avLst/>
@@ -15115,7 +14891,7 @@
           </a:bodyPr>
           <a:lstStyle>
             <a:lvl1pPr>
-              <a:defRPr sz="1300">
+              <a:defRPr sz="1200">
                 <a:solidFill>
                   <a:srgbClr val="1A1A2E"/>
                 </a:solidFill>
@@ -15125,20 +14901,64 @@
           <a:p>
             <a:pPr/>
             <a:r>
-              <a:t>20 (early stopping, patience = 5)</a:t>
-            </a:r>
-          </a:p>
-        </p:txBody>
-      </p:sp>
-      <p:sp>
-        <p:nvSpPr>
-          <p:cNvPr id="274" name="Rectangle 37"/>
+              <a:t>HFlip + VFlip coherentes</a:t>
+            </a:r>
+          </a:p>
+        </p:txBody>
+      </p:sp>
+      <p:sp>
+        <p:nvSpPr>
+          <p:cNvPr id="269" name="TextBox 32"/>
+          <p:cNvSpPr txBox="1"/>
+          <p:nvPr/>
+        </p:nvSpPr>
+        <p:spPr>
+          <a:xfrm>
+            <a:off x="8275319" y="4846320"/>
+            <a:ext cx="2926082" cy="248305"/>
+          </a:xfrm>
+          <a:prstGeom prst="rect">
+            <a:avLst/>
+          </a:prstGeom>
+          <a:ln w="12700">
+            <a:miter lim="400000"/>
+          </a:ln>
+          <a:extLst>
+            <a:ext uri="{C572A759-6A51-4108-AA02-DFA0A04FC94B}">
+              <ma14:wrappingTextBoxFlag xmlns:ma14="http://schemas.microsoft.com/office/mac/drawingml/2011/main" val="1"/>
+            </a:ext>
+          </a:extLst>
+        </p:spPr>
+        <p:txBody>
+          <a:bodyPr lIns="45719" rIns="45719">
+            <a:spAutoFit/>
+          </a:bodyPr>
+          <a:lstStyle>
+            <a:lvl1pPr>
+              <a:defRPr sz="1200">
+                <a:solidFill>
+                  <a:srgbClr val="1A1A2E"/>
+                </a:solidFill>
+              </a:defRPr>
+            </a:lvl1pPr>
+          </a:lstStyle>
+          <a:p>
+            <a:pPr/>
+            <a:r>
+              <a:t>WeightedRandom, 8K/epoch</a:t>
+            </a:r>
+          </a:p>
+        </p:txBody>
+      </p:sp>
+      <p:sp>
+        <p:nvSpPr>
+          <p:cNvPr id="270" name="Rectangle 33"/>
           <p:cNvSpPr/>
           <p:nvPr/>
         </p:nvSpPr>
         <p:spPr>
           <a:xfrm>
-            <a:off x="731519" y="6217920"/>
+            <a:off x="731519" y="6309359"/>
             <a:ext cx="10698482" cy="54865"/>
           </a:xfrm>
           <a:prstGeom prst="rect">
@@ -15200,7 +15020,7 @@
       </p:grpSpPr>
       <p:sp>
         <p:nvSpPr>
-          <p:cNvPr id="276" name="Rectangle 1"/>
+          <p:cNvPr id="272" name="Rectangle 1"/>
           <p:cNvSpPr/>
           <p:nvPr/>
         </p:nvSpPr>
@@ -15242,14 +15062,14 @@
       </p:sp>
       <p:sp>
         <p:nvSpPr>
-          <p:cNvPr id="277" name="TextBox 2"/>
-          <p:cNvSpPr txBox="1"/>
-          <p:nvPr/>
-        </p:nvSpPr>
-        <p:spPr>
-          <a:xfrm>
-            <a:off x="777239" y="457200"/>
-            <a:ext cx="9052561" cy="542241"/>
+          <p:cNvPr id="273" name="TextBox 2"/>
+          <p:cNvSpPr txBox="1"/>
+          <p:nvPr/>
+        </p:nvSpPr>
+        <p:spPr>
+          <a:xfrm>
+            <a:off x="777239" y="457199"/>
+            <a:ext cx="9052561" cy="542242"/>
           </a:xfrm>
           <a:prstGeom prst="rect">
             <a:avLst/>
@@ -15286,14 +15106,14 @@
       </p:sp>
       <p:sp>
         <p:nvSpPr>
-          <p:cNvPr id="278" name="Rectangle 3"/>
+          <p:cNvPr id="274" name="Rectangle 3"/>
           <p:cNvSpPr/>
           <p:nvPr/>
         </p:nvSpPr>
         <p:spPr>
           <a:xfrm>
-            <a:off x="731519" y="1371600"/>
-            <a:ext cx="5120642" cy="1828800"/>
+            <a:off x="731520" y="1280160"/>
+            <a:ext cx="3383280" cy="1828801"/>
           </a:xfrm>
           <a:prstGeom prst="rect">
             <a:avLst/>
@@ -15328,14 +15148,14 @@
       </p:sp>
       <p:sp>
         <p:nvSpPr>
-          <p:cNvPr id="279" name="TextBox 4"/>
-          <p:cNvSpPr txBox="1"/>
-          <p:nvPr/>
-        </p:nvSpPr>
-        <p:spPr>
-          <a:xfrm>
-            <a:off x="960120" y="1417319"/>
-            <a:ext cx="4663440" cy="300595"/>
+          <p:cNvPr id="275" name="TextBox 4"/>
+          <p:cNvSpPr txBox="1"/>
+          <p:nvPr/>
+        </p:nvSpPr>
+        <p:spPr>
+          <a:xfrm>
+            <a:off x="868679" y="1453187"/>
+            <a:ext cx="3108961" cy="280800"/>
           </a:xfrm>
           <a:prstGeom prst="rect">
             <a:avLst/>
@@ -15355,7 +15175,7 @@
           </a:bodyPr>
           <a:lstStyle>
             <a:lvl1pPr algn="ctr">
-              <a:defRPr sz="1600">
+              <a:defRPr sz="1400">
                 <a:solidFill>
                   <a:srgbClr val="6B7B8D"/>
                 </a:solidFill>
@@ -15365,21 +15185,21 @@
           <a:p>
             <a:pPr/>
             <a:r>
-              <a:t>Modelo 1: imágenes originales</a:t>
-            </a:r>
-          </a:p>
-        </p:txBody>
-      </p:sp>
-      <p:sp>
-        <p:nvSpPr>
-          <p:cNvPr id="280" name="TextBox 5"/>
-          <p:cNvSpPr txBox="1"/>
-          <p:nvPr/>
-        </p:nvSpPr>
-        <p:spPr>
-          <a:xfrm>
-            <a:off x="960120" y="1828800"/>
-            <a:ext cx="4663440" cy="1007230"/>
+              <a:t>Mod. 1: originales</a:t>
+            </a:r>
+          </a:p>
+        </p:txBody>
+      </p:sp>
+      <p:sp>
+        <p:nvSpPr>
+          <p:cNvPr id="276" name="TextBox 5"/>
+          <p:cNvSpPr txBox="1"/>
+          <p:nvPr/>
+        </p:nvSpPr>
+        <p:spPr>
+          <a:xfrm>
+            <a:off x="868679" y="1773227"/>
+            <a:ext cx="3108961" cy="850365"/>
           </a:xfrm>
           <a:prstGeom prst="rect">
             <a:avLst/>
@@ -15399,7 +15219,7 @@
           </a:bodyPr>
           <a:lstStyle>
             <a:lvl1pPr algn="ctr">
-              <a:defRPr b="1" sz="7200">
+              <a:defRPr b="1" sz="6000">
                 <a:solidFill>
                   <a:srgbClr val="2ECC71"/>
                 </a:solidFill>
@@ -15409,21 +15229,21 @@
           <a:p>
             <a:pPr/>
             <a:r>
-              <a:t>94%</a:t>
-            </a:r>
-          </a:p>
-        </p:txBody>
-      </p:sp>
-      <p:sp>
-        <p:nvSpPr>
-          <p:cNvPr id="281" name="TextBox 6"/>
-          <p:cNvSpPr txBox="1"/>
-          <p:nvPr/>
-        </p:nvSpPr>
-        <p:spPr>
-          <a:xfrm>
-            <a:off x="960120" y="2651760"/>
-            <a:ext cx="4663440" cy="258202"/>
+              <a:t>92%</a:t>
+            </a:r>
+          </a:p>
+        </p:txBody>
+      </p:sp>
+      <p:sp>
+        <p:nvSpPr>
+          <p:cNvPr id="277" name="TextBox 6"/>
+          <p:cNvSpPr txBox="1"/>
+          <p:nvPr/>
+        </p:nvSpPr>
+        <p:spPr>
+          <a:xfrm>
+            <a:off x="868679" y="2687627"/>
+            <a:ext cx="3108961" cy="248306"/>
           </a:xfrm>
           <a:prstGeom prst="rect">
             <a:avLst/>
@@ -15443,7 +15263,7 @@
           </a:bodyPr>
           <a:lstStyle>
             <a:lvl1pPr algn="ctr">
-              <a:defRPr sz="1300">
+              <a:defRPr sz="1200">
                 <a:solidFill>
                   <a:srgbClr val="6B7B8D"/>
                 </a:solidFill>
@@ -15453,21 +15273,21 @@
           <a:p>
             <a:pPr/>
             <a:r>
-              <a:t>Accuracy en test (4,015 imágenes)</a:t>
-            </a:r>
-          </a:p>
-        </p:txBody>
-      </p:sp>
-      <p:sp>
-        <p:nvSpPr>
-          <p:cNvPr id="282" name="Rectangle 7"/>
+              <a:t>Accuracy test</a:t>
+            </a:r>
+          </a:p>
+        </p:txBody>
+      </p:sp>
+      <p:sp>
+        <p:nvSpPr>
+          <p:cNvPr id="278" name="Rectangle 7"/>
           <p:cNvSpPr/>
           <p:nvPr/>
         </p:nvSpPr>
         <p:spPr>
           <a:xfrm>
-            <a:off x="6309359" y="1371600"/>
-            <a:ext cx="5120641" cy="1828800"/>
+            <a:off x="4389120" y="1280160"/>
+            <a:ext cx="3383281" cy="1828801"/>
           </a:xfrm>
           <a:prstGeom prst="rect">
             <a:avLst/>
@@ -15502,14 +15322,14 @@
       </p:sp>
       <p:sp>
         <p:nvSpPr>
-          <p:cNvPr id="283" name="TextBox 8"/>
-          <p:cNvSpPr txBox="1"/>
-          <p:nvPr/>
-        </p:nvSpPr>
-        <p:spPr>
-          <a:xfrm>
-            <a:off x="6537959" y="1417319"/>
-            <a:ext cx="4663441" cy="300595"/>
+          <p:cNvPr id="279" name="TextBox 8"/>
+          <p:cNvSpPr txBox="1"/>
+          <p:nvPr/>
+        </p:nvSpPr>
+        <p:spPr>
+          <a:xfrm>
+            <a:off x="4526279" y="1453187"/>
+            <a:ext cx="3108961" cy="280800"/>
           </a:xfrm>
           <a:prstGeom prst="rect">
             <a:avLst/>
@@ -15529,7 +15349,7 @@
           </a:bodyPr>
           <a:lstStyle>
             <a:lvl1pPr algn="ctr">
-              <a:defRPr sz="1600">
+              <a:defRPr sz="1400">
                 <a:solidFill>
                   <a:srgbClr val="6B7B8D"/>
                 </a:solidFill>
@@ -15539,21 +15359,21 @@
           <a:p>
             <a:pPr/>
             <a:r>
-              <a:t>Modelo 2: con segmentación</a:t>
-            </a:r>
-          </a:p>
-        </p:txBody>
-      </p:sp>
-      <p:sp>
-        <p:nvSpPr>
-          <p:cNvPr id="284" name="TextBox 9"/>
-          <p:cNvSpPr txBox="1"/>
-          <p:nvPr/>
-        </p:nvSpPr>
-        <p:spPr>
-          <a:xfrm>
-            <a:off x="6537959" y="1828800"/>
-            <a:ext cx="4663441" cy="1007230"/>
+              <a:t>Mod. 2: solo máscaras</a:t>
+            </a:r>
+          </a:p>
+        </p:txBody>
+      </p:sp>
+      <p:sp>
+        <p:nvSpPr>
+          <p:cNvPr id="280" name="TextBox 9"/>
+          <p:cNvSpPr txBox="1"/>
+          <p:nvPr/>
+        </p:nvSpPr>
+        <p:spPr>
+          <a:xfrm>
+            <a:off x="4526279" y="1773227"/>
+            <a:ext cx="3108961" cy="850365"/>
           </a:xfrm>
           <a:prstGeom prst="rect">
             <a:avLst/>
@@ -15573,7 +15393,7 @@
           </a:bodyPr>
           <a:lstStyle>
             <a:lvl1pPr algn="ctr">
-              <a:defRPr b="1" sz="7200">
+              <a:defRPr b="1" sz="6000">
                 <a:solidFill>
                   <a:srgbClr val="E74C3C"/>
                 </a:solidFill>
@@ -15583,21 +15403,21 @@
           <a:p>
             <a:pPr/>
             <a:r>
-              <a:t>70%</a:t>
-            </a:r>
-          </a:p>
-        </p:txBody>
-      </p:sp>
-      <p:sp>
-        <p:nvSpPr>
-          <p:cNvPr id="285" name="TextBox 10"/>
-          <p:cNvSpPr txBox="1"/>
-          <p:nvPr/>
-        </p:nvSpPr>
-        <p:spPr>
-          <a:xfrm>
-            <a:off x="6537959" y="2651760"/>
-            <a:ext cx="4663441" cy="258202"/>
+              <a:t>72%</a:t>
+            </a:r>
+          </a:p>
+        </p:txBody>
+      </p:sp>
+      <p:sp>
+        <p:nvSpPr>
+          <p:cNvPr id="281" name="TextBox 10"/>
+          <p:cNvSpPr txBox="1"/>
+          <p:nvPr/>
+        </p:nvSpPr>
+        <p:spPr>
+          <a:xfrm>
+            <a:off x="4526279" y="2687627"/>
+            <a:ext cx="3108961" cy="248306"/>
           </a:xfrm>
           <a:prstGeom prst="rect">
             <a:avLst/>
@@ -15617,7 +15437,7 @@
           </a:bodyPr>
           <a:lstStyle>
             <a:lvl1pPr algn="ctr">
-              <a:defRPr sz="1300">
+              <a:defRPr sz="1200">
                 <a:solidFill>
                   <a:srgbClr val="6B7B8D"/>
                 </a:solidFill>
@@ -15627,21 +15447,63 @@
           <a:p>
             <a:pPr/>
             <a:r>
-              <a:t>Accuracy en test (4,015 imágenes)</a:t>
-            </a:r>
-          </a:p>
-        </p:txBody>
-      </p:sp>
-      <p:sp>
-        <p:nvSpPr>
-          <p:cNvPr id="286" name="TextBox 11"/>
-          <p:cNvSpPr txBox="1"/>
-          <p:nvPr/>
-        </p:nvSpPr>
-        <p:spPr>
-          <a:xfrm>
-            <a:off x="4077970" y="3425651"/>
-            <a:ext cx="4023360" cy="444759"/>
+              <a:t>Accuracy test</a:t>
+            </a:r>
+          </a:p>
+        </p:txBody>
+      </p:sp>
+      <p:sp>
+        <p:nvSpPr>
+          <p:cNvPr id="282" name="Rectangle 11"/>
+          <p:cNvSpPr/>
+          <p:nvPr/>
+        </p:nvSpPr>
+        <p:spPr>
+          <a:xfrm>
+            <a:off x="8046719" y="1280160"/>
+            <a:ext cx="3383281" cy="1828801"/>
+          </a:xfrm>
+          <a:prstGeom prst="rect">
+            <a:avLst/>
+          </a:prstGeom>
+          <a:solidFill>
+            <a:srgbClr val="F5F5F5"/>
+          </a:solidFill>
+          <a:ln w="12700">
+            <a:miter lim="400000"/>
+          </a:ln>
+          <a:effectLst>
+            <a:outerShdw sx="100000" sy="100000" kx="0" ky="0" algn="b" rotWithShape="0" blurRad="38100" dist="23000" dir="5400000">
+              <a:srgbClr val="000000">
+                <a:alpha val="35000"/>
+              </a:srgbClr>
+            </a:outerShdw>
+          </a:effectLst>
+        </p:spPr>
+        <p:txBody>
+          <a:bodyPr lIns="45719" rIns="45719" anchor="ctr"/>
+          <a:lstStyle/>
+          <a:p>
+            <a:pPr algn="ctr">
+              <a:defRPr>
+                <a:solidFill>
+                  <a:srgbClr val="FFFFFF"/>
+                </a:solidFill>
+              </a:defRPr>
+            </a:pPr>
+          </a:p>
+        </p:txBody>
+      </p:sp>
+      <p:sp>
+        <p:nvSpPr>
+          <p:cNvPr id="283" name="TextBox 12"/>
+          <p:cNvSpPr txBox="1"/>
+          <p:nvPr/>
+        </p:nvSpPr>
+        <p:spPr>
+          <a:xfrm>
+            <a:off x="8183879" y="1453187"/>
+            <a:ext cx="3108961" cy="280800"/>
           </a:xfrm>
           <a:prstGeom prst="rect">
             <a:avLst/>
@@ -15661,9 +15523,9 @@
           </a:bodyPr>
           <a:lstStyle>
             <a:lvl1pPr algn="ctr">
-              <a:defRPr b="1" sz="2800">
-                <a:solidFill>
-                  <a:srgbClr val="E74C3C"/>
+              <a:defRPr sz="1400">
+                <a:solidFill>
+                  <a:srgbClr val="6B7B8D"/>
                 </a:solidFill>
               </a:defRPr>
             </a:lvl1pPr>
@@ -15671,21 +15533,195 @@
           <a:p>
             <a:pPr/>
             <a:r>
-              <a:t>-24pp</a:t>
-            </a:r>
-          </a:p>
-        </p:txBody>
-      </p:sp>
-      <p:sp>
-        <p:nvSpPr>
-          <p:cNvPr id="287" name="TextBox 12"/>
-          <p:cNvSpPr txBox="1"/>
-          <p:nvPr/>
-        </p:nvSpPr>
-        <p:spPr>
-          <a:xfrm>
-            <a:off x="786129" y="3843808"/>
-            <a:ext cx="9052561" cy="340183"/>
+              <a:t>Mod. 3: híbrido 4-ch</a:t>
+            </a:r>
+          </a:p>
+        </p:txBody>
+      </p:sp>
+      <p:sp>
+        <p:nvSpPr>
+          <p:cNvPr id="284" name="TextBox 13"/>
+          <p:cNvSpPr txBox="1"/>
+          <p:nvPr/>
+        </p:nvSpPr>
+        <p:spPr>
+          <a:xfrm>
+            <a:off x="8183879" y="1773227"/>
+            <a:ext cx="3108961" cy="850365"/>
+          </a:xfrm>
+          <a:prstGeom prst="rect">
+            <a:avLst/>
+          </a:prstGeom>
+          <a:ln w="12700">
+            <a:miter lim="400000"/>
+          </a:ln>
+          <a:extLst>
+            <a:ext uri="{C572A759-6A51-4108-AA02-DFA0A04FC94B}">
+              <ma14:wrappingTextBoxFlag xmlns:ma14="http://schemas.microsoft.com/office/mac/drawingml/2011/main" val="1"/>
+            </a:ext>
+          </a:extLst>
+        </p:spPr>
+        <p:txBody>
+          <a:bodyPr lIns="45719" rIns="45719">
+            <a:spAutoFit/>
+          </a:bodyPr>
+          <a:lstStyle>
+            <a:lvl1pPr algn="ctr">
+              <a:defRPr b="1" sz="6000">
+                <a:solidFill>
+                  <a:srgbClr val="2ECC71"/>
+                </a:solidFill>
+              </a:defRPr>
+            </a:lvl1pPr>
+          </a:lstStyle>
+          <a:p>
+            <a:pPr/>
+            <a:r>
+              <a:t>92%</a:t>
+            </a:r>
+          </a:p>
+        </p:txBody>
+      </p:sp>
+      <p:sp>
+        <p:nvSpPr>
+          <p:cNvPr id="285" name="TextBox 14"/>
+          <p:cNvSpPr txBox="1"/>
+          <p:nvPr/>
+        </p:nvSpPr>
+        <p:spPr>
+          <a:xfrm>
+            <a:off x="8183879" y="2687627"/>
+            <a:ext cx="3108961" cy="248306"/>
+          </a:xfrm>
+          <a:prstGeom prst="rect">
+            <a:avLst/>
+          </a:prstGeom>
+          <a:ln w="12700">
+            <a:miter lim="400000"/>
+          </a:ln>
+          <a:extLst>
+            <a:ext uri="{C572A759-6A51-4108-AA02-DFA0A04FC94B}">
+              <ma14:wrappingTextBoxFlag xmlns:ma14="http://schemas.microsoft.com/office/mac/drawingml/2011/main" val="1"/>
+            </a:ext>
+          </a:extLst>
+        </p:spPr>
+        <p:txBody>
+          <a:bodyPr lIns="45719" rIns="45719">
+            <a:spAutoFit/>
+          </a:bodyPr>
+          <a:lstStyle>
+            <a:lvl1pPr algn="ctr">
+              <a:defRPr sz="1200">
+                <a:solidFill>
+                  <a:srgbClr val="6B7B8D"/>
+                </a:solidFill>
+              </a:defRPr>
+            </a:lvl1pPr>
+          </a:lstStyle>
+          <a:p>
+            <a:pPr/>
+            <a:r>
+              <a:t>Accuracy test</a:t>
+            </a:r>
+          </a:p>
+        </p:txBody>
+      </p:sp>
+      <p:sp>
+        <p:nvSpPr>
+          <p:cNvPr id="286" name="Rectangle 15"/>
+          <p:cNvSpPr/>
+          <p:nvPr/>
+        </p:nvSpPr>
+        <p:spPr>
+          <a:xfrm>
+            <a:off x="731519" y="3200399"/>
+            <a:ext cx="10698482" cy="548642"/>
+          </a:xfrm>
+          <a:prstGeom prst="rect">
+            <a:avLst/>
+          </a:prstGeom>
+          <a:solidFill>
+            <a:srgbClr val="1E2761"/>
+          </a:solidFill>
+          <a:ln w="12700">
+            <a:miter lim="400000"/>
+          </a:ln>
+          <a:effectLst>
+            <a:outerShdw sx="100000" sy="100000" kx="0" ky="0" algn="b" rotWithShape="0" blurRad="38100" dist="23000" dir="5400000">
+              <a:srgbClr val="000000">
+                <a:alpha val="35000"/>
+              </a:srgbClr>
+            </a:outerShdw>
+          </a:effectLst>
+        </p:spPr>
+        <p:txBody>
+          <a:bodyPr lIns="45719" rIns="45719" anchor="ctr"/>
+          <a:lstStyle/>
+          <a:p>
+            <a:pPr algn="ctr">
+              <a:defRPr>
+                <a:solidFill>
+                  <a:srgbClr val="FFFFFF"/>
+                </a:solidFill>
+              </a:defRPr>
+            </a:pPr>
+          </a:p>
+        </p:txBody>
+      </p:sp>
+      <p:sp>
+        <p:nvSpPr>
+          <p:cNvPr id="287" name="TextBox 16"/>
+          <p:cNvSpPr txBox="1"/>
+          <p:nvPr/>
+        </p:nvSpPr>
+        <p:spPr>
+          <a:xfrm>
+            <a:off x="1051559" y="3288600"/>
+            <a:ext cx="10058402" cy="280800"/>
+          </a:xfrm>
+          <a:prstGeom prst="rect">
+            <a:avLst/>
+          </a:prstGeom>
+          <a:ln w="12700">
+            <a:miter lim="400000"/>
+          </a:ln>
+          <a:extLst>
+            <a:ext uri="{C572A759-6A51-4108-AA02-DFA0A04FC94B}">
+              <ma14:wrappingTextBoxFlag xmlns:ma14="http://schemas.microsoft.com/office/mac/drawingml/2011/main" val="1"/>
+            </a:ext>
+          </a:extLst>
+        </p:spPr>
+        <p:txBody>
+          <a:bodyPr lIns="45719" rIns="45719">
+            <a:spAutoFit/>
+          </a:bodyPr>
+          <a:lstStyle>
+            <a:lvl1pPr algn="ctr">
+              <a:defRPr b="1" sz="1400">
+                <a:solidFill>
+                  <a:srgbClr val="FFFFFF"/>
+                </a:solidFill>
+              </a:defRPr>
+            </a:lvl1pPr>
+          </a:lstStyle>
+          <a:p>
+            <a:pPr/>
+            <a:r>
+              <a:t>El Modelo 3 (imagen + máscara) iguala al Modelo 1 (solo imagen). La segmentación no aporta información adicional.</a:t>
+            </a:r>
+          </a:p>
+        </p:txBody>
+      </p:sp>
+      <p:sp>
+        <p:nvSpPr>
+          <p:cNvPr id="288" name="TextBox 17"/>
+          <p:cNvSpPr txBox="1"/>
+          <p:nvPr/>
+        </p:nvSpPr>
+        <p:spPr>
+          <a:xfrm>
+            <a:off x="777239" y="3931920"/>
+            <a:ext cx="9052561" cy="340182"/>
           </a:xfrm>
           <a:prstGeom prst="rect">
             <a:avLst/>
@@ -15722,13 +15758,13 @@
       </p:sp>
       <p:graphicFrame>
         <p:nvGraphicFramePr>
-          <p:cNvPr id="288" name="Table 13"/>
+          <p:cNvPr id="289" name="Table 18"/>
           <p:cNvGraphicFramePr/>
           <p:nvPr/>
         </p:nvGraphicFramePr>
         <p:xfrm>
-          <a:off x="740409" y="4341648"/>
-          <a:ext cx="10698482" cy="2286001"/>
+          <a:off x="731519" y="4480559"/>
+          <a:ext cx="10698482" cy="2103121"/>
         </p:xfrm>
         <a:graphic xmlns:a="http://schemas.openxmlformats.org/drawingml/2006/main">
           <a:graphicData uri="http://schemas.openxmlformats.org/drawingml/2006/table">
@@ -15737,12 +15773,13 @@
                 <a:tableStyleId>{4C3C2611-4C71-4FC5-86AE-919BDF0F9419}</a:tableStyleId>
               </a:tblPr>
               <a:tblGrid>
-                <a:gridCol w="2674620"/>
-                <a:gridCol w="2674620"/>
-                <a:gridCol w="2674620"/>
-                <a:gridCol w="2674620"/>
+                <a:gridCol w="2139696"/>
+                <a:gridCol w="2139696"/>
+                <a:gridCol w="2139696"/>
+                <a:gridCol w="2139696"/>
+                <a:gridCol w="2139696"/>
               </a:tblGrid>
-              <a:tr h="457200">
+              <a:tr h="420624">
                 <a:tc>
                   <a:txBody>
                     <a:bodyPr/>
@@ -15756,7 +15793,7 @@
                         </a:defRPr>
                       </a:pPr>
                       <a:r>
-                        <a:rPr b="1" sz="1300">
+                        <a:rPr b="1" sz="1200">
                           <a:solidFill>
                             <a:srgbClr val="FFFFFF"/>
                           </a:solidFill>
@@ -15784,12 +15821,12 @@
                         </a:defRPr>
                       </a:pPr>
                       <a:r>
-                        <a:rPr b="1" sz="1300">
+                        <a:rPr b="1" sz="1200">
                           <a:solidFill>
                             <a:srgbClr val="FFFFFF"/>
                           </a:solidFill>
                         </a:rPr>
-                        <a:t>F1 Modelo 1 (original)</a:t>
+                        <a:t>Mod. 1 (original)</a:t>
                       </a:r>
                     </a:p>
                   </a:txBody>
@@ -15812,12 +15849,12 @@
                         </a:defRPr>
                       </a:pPr>
                       <a:r>
-                        <a:rPr b="1" sz="1300">
+                        <a:rPr b="1" sz="1200">
                           <a:solidFill>
                             <a:srgbClr val="FFFFFF"/>
                           </a:solidFill>
                         </a:rPr>
-                        <a:t>F1 Modelo 2 (segmentación)</a:t>
+                        <a:t>Mod. 2 (mascara)</a:t>
                       </a:r>
                     </a:p>
                   </a:txBody>
@@ -15840,12 +15877,40 @@
                         </a:defRPr>
                       </a:pPr>
                       <a:r>
-                        <a:rPr b="1" sz="1300">
+                        <a:rPr b="1" sz="1200">
                           <a:solidFill>
                             <a:srgbClr val="FFFFFF"/>
                           </a:solidFill>
                         </a:rPr>
-                        <a:t>Diferencia</a:t>
+                        <a:t>Mod. 3 (hibrido)</a:t>
+                      </a:r>
+                    </a:p>
+                  </a:txBody>
+                  <a:tcPr marL="45720" marR="45720" marT="45720" marB="45720" anchor="t" anchorCtr="0" horzOverflow="overflow">
+                    <a:solidFill>
+                      <a:srgbClr val="1E2761"/>
+                    </a:solidFill>
+                  </a:tcPr>
+                </a:tc>
+                <a:tc>
+                  <a:txBody>
+                    <a:bodyPr/>
+                    <a:lstStyle/>
+                    <a:p>
+                      <a:pPr algn="ctr">
+                        <a:defRPr b="0" sz="1800">
+                          <a:solidFill>
+                            <a:srgbClr val="000000"/>
+                          </a:solidFill>
+                        </a:defRPr>
+                      </a:pPr>
+                      <a:r>
+                        <a:rPr b="1" sz="1200">
+                          <a:solidFill>
+                            <a:srgbClr val="FFFFFF"/>
+                          </a:solidFill>
+                        </a:rPr>
+                        <a:t>Delta 1 vs 2</a:t>
                       </a:r>
                     </a:p>
                   </a:txBody>
@@ -15856,7 +15921,7 @@
                   </a:tcPr>
                 </a:tc>
               </a:tr>
-              <a:tr h="457200">
+              <a:tr h="420624">
                 <a:tc>
                   <a:txBody>
                     <a:bodyPr/>
@@ -15866,7 +15931,7 @@
                         <a:defRPr sz="1800"/>
                       </a:pPr>
                       <a:r>
-                        <a:rPr b="1" sz="1400">
+                        <a:rPr b="1" sz="1300">
                           <a:solidFill>
                             <a:srgbClr val="1A1A2E"/>
                           </a:solidFill>
@@ -15890,12 +15955,12 @@
                         <a:defRPr sz="1800"/>
                       </a:pPr>
                       <a:r>
-                        <a:rPr b="1" sz="1400">
+                        <a:rPr b="1" sz="1300">
                           <a:solidFill>
                             <a:srgbClr val="2ECC71"/>
                           </a:solidFill>
                         </a:rPr>
-                        <a:t>0.95</a:t>
+                        <a:t>0.94</a:t>
                       </a:r>
                     </a:p>
                   </a:txBody>
@@ -15914,12 +15979,12 @@
                         <a:defRPr sz="1800"/>
                       </a:pPr>
                       <a:r>
-                        <a:rPr b="1" sz="1400">
+                        <a:rPr b="1" sz="1300">
                           <a:solidFill>
                             <a:srgbClr val="F96167"/>
                           </a:solidFill>
                         </a:rPr>
-                        <a:t>0.81</a:t>
+                        <a:t>0.82</a:t>
                       </a:r>
                     </a:p>
                   </a:txBody>
@@ -15938,12 +16003,36 @@
                         <a:defRPr sz="1800"/>
                       </a:pPr>
                       <a:r>
-                        <a:rPr b="1" sz="1400">
+                        <a:rPr b="1" sz="1300">
+                          <a:solidFill>
+                            <a:srgbClr val="2ECC71"/>
+                          </a:solidFill>
+                        </a:rPr>
+                        <a:t>0.93</a:t>
+                      </a:r>
+                    </a:p>
+                  </a:txBody>
+                  <a:tcPr marL="45720" marR="45720" marT="45720" marB="45720" anchor="t" anchorCtr="0" horzOverflow="overflow">
+                    <a:solidFill>
+                      <a:srgbClr val="F5F5F5"/>
+                    </a:solidFill>
+                  </a:tcPr>
+                </a:tc>
+                <a:tc>
+                  <a:txBody>
+                    <a:bodyPr/>
+                    <a:lstStyle/>
+                    <a:p>
+                      <a:pPr algn="ctr">
+                        <a:defRPr sz="1800"/>
+                      </a:pPr>
+                      <a:r>
+                        <a:rPr b="1" sz="1300">
                           <a:solidFill>
                             <a:srgbClr val="E74C3C"/>
                           </a:solidFill>
                         </a:rPr>
-                        <a:t>-0.14</a:t>
+                        <a:t>-0.12</a:t>
                       </a:r>
                     </a:p>
                   </a:txBody>
@@ -15954,7 +16043,7 @@
                   </a:tcPr>
                 </a:tc>
               </a:tr>
-              <a:tr h="457200">
+              <a:tr h="420624">
                 <a:tc>
                   <a:txBody>
                     <a:bodyPr/>
@@ -15964,7 +16053,7 @@
                         <a:defRPr sz="1800"/>
                       </a:pPr>
                       <a:r>
-                        <a:rPr b="1" sz="1400">
+                        <a:rPr b="1" sz="1300">
                           <a:solidFill>
                             <a:srgbClr val="1A1A2E"/>
                           </a:solidFill>
@@ -15988,7 +16077,7 @@
                         <a:defRPr sz="1800"/>
                       </a:pPr>
                       <a:r>
-                        <a:rPr b="1" sz="1400">
+                        <a:rPr b="1" sz="1300">
                           <a:solidFill>
                             <a:srgbClr val="2ECC71"/>
                           </a:solidFill>
@@ -16012,12 +16101,12 @@
                         <a:defRPr sz="1800"/>
                       </a:pPr>
                       <a:r>
-                        <a:rPr b="1" sz="1400">
+                        <a:rPr b="1" sz="1300">
                           <a:solidFill>
                             <a:srgbClr val="F96167"/>
                           </a:solidFill>
                         </a:rPr>
-                        <a:t>0.76</a:t>
+                        <a:t>0.78</a:t>
                       </a:r>
                     </a:p>
                   </a:txBody>
@@ -16036,12 +16125,36 @@
                         <a:defRPr sz="1800"/>
                       </a:pPr>
                       <a:r>
-                        <a:rPr b="1" sz="1400">
+                        <a:rPr b="1" sz="1300">
+                          <a:solidFill>
+                            <a:srgbClr val="2ECC71"/>
+                          </a:solidFill>
+                        </a:rPr>
+                        <a:t>0.93</a:t>
+                      </a:r>
+                    </a:p>
+                  </a:txBody>
+                  <a:tcPr marL="45720" marR="45720" marT="45720" marB="45720" anchor="t" anchorCtr="0" horzOverflow="overflow">
+                    <a:solidFill>
+                      <a:srgbClr val="FFFFFF"/>
+                    </a:solidFill>
+                  </a:tcPr>
+                </a:tc>
+                <a:tc>
+                  <a:txBody>
+                    <a:bodyPr/>
+                    <a:lstStyle/>
+                    <a:p>
+                      <a:pPr algn="ctr">
+                        <a:defRPr sz="1800"/>
+                      </a:pPr>
+                      <a:r>
+                        <a:rPr b="1" sz="1300">
                           <a:solidFill>
                             <a:srgbClr val="E74C3C"/>
                           </a:solidFill>
                         </a:rPr>
-                        <a:t>-0.18</a:t>
+                        <a:t>-0.16</a:t>
                       </a:r>
                     </a:p>
                   </a:txBody>
@@ -16052,7 +16165,7 @@
                   </a:tcPr>
                 </a:tc>
               </a:tr>
-              <a:tr h="457200">
+              <a:tr h="420624">
                 <a:tc>
                   <a:txBody>
                     <a:bodyPr/>
@@ -16062,7 +16175,7 @@
                         <a:defRPr sz="1800"/>
                       </a:pPr>
                       <a:r>
-                        <a:rPr b="1" sz="1400">
+                        <a:rPr b="1" sz="1300">
                           <a:solidFill>
                             <a:srgbClr val="1A1A2E"/>
                           </a:solidFill>
@@ -16086,12 +16199,12 @@
                         <a:defRPr sz="1800"/>
                       </a:pPr>
                       <a:r>
-                        <a:rPr b="1" sz="1400">
+                        <a:rPr b="1" sz="1300">
                           <a:solidFill>
                             <a:srgbClr val="2ECC71"/>
                           </a:solidFill>
                         </a:rPr>
-                        <a:t>0.92</a:t>
+                        <a:t>0.89</a:t>
                       </a:r>
                     </a:p>
                   </a:txBody>
@@ -16110,12 +16223,12 @@
                         <a:defRPr sz="1800"/>
                       </a:pPr>
                       <a:r>
-                        <a:rPr b="1" sz="1400">
+                        <a:rPr b="1" sz="1300">
                           <a:solidFill>
                             <a:srgbClr val="F96167"/>
                           </a:solidFill>
                         </a:rPr>
-                        <a:t>0.59</a:t>
+                        <a:t>0.54</a:t>
                       </a:r>
                     </a:p>
                   </a:txBody>
@@ -16134,12 +16247,36 @@
                         <a:defRPr sz="1800"/>
                       </a:pPr>
                       <a:r>
-                        <a:rPr b="1" sz="1400">
+                        <a:rPr b="1" sz="1300">
+                          <a:solidFill>
+                            <a:srgbClr val="2ECC71"/>
+                          </a:solidFill>
+                        </a:rPr>
+                        <a:t>0.89</a:t>
+                      </a:r>
+                    </a:p>
+                  </a:txBody>
+                  <a:tcPr marL="45720" marR="45720" marT="45720" marB="45720" anchor="t" anchorCtr="0" horzOverflow="overflow">
+                    <a:solidFill>
+                      <a:srgbClr val="F5F5F5"/>
+                    </a:solidFill>
+                  </a:tcPr>
+                </a:tc>
+                <a:tc>
+                  <a:txBody>
+                    <a:bodyPr/>
+                    <a:lstStyle/>
+                    <a:p>
+                      <a:pPr algn="ctr">
+                        <a:defRPr sz="1800"/>
+                      </a:pPr>
+                      <a:r>
+                        <a:rPr b="1" sz="1300">
                           <a:solidFill>
                             <a:srgbClr val="E74C3C"/>
                           </a:solidFill>
                         </a:rPr>
-                        <a:t>-0.33</a:t>
+                        <a:t>-0.35</a:t>
                       </a:r>
                     </a:p>
                   </a:txBody>
@@ -16150,7 +16287,7 @@
                   </a:tcPr>
                 </a:tc>
               </a:tr>
-              <a:tr h="457200">
+              <a:tr h="420624">
                 <a:tc>
                   <a:txBody>
                     <a:bodyPr/>
@@ -16160,7 +16297,7 @@
                         <a:defRPr sz="1800"/>
                       </a:pPr>
                       <a:r>
-                        <a:rPr b="1" sz="1400">
+                        <a:rPr b="1" sz="1300">
                           <a:solidFill>
                             <a:srgbClr val="1A1A2E"/>
                           </a:solidFill>
@@ -16184,12 +16321,12 @@
                         <a:defRPr sz="1800"/>
                       </a:pPr>
                       <a:r>
-                        <a:rPr b="1" sz="1400">
+                        <a:rPr b="1" sz="1300">
                           <a:solidFill>
                             <a:srgbClr val="2ECC71"/>
                           </a:solidFill>
                         </a:rPr>
-                        <a:t>0.94</a:t>
+                        <a:t>0.91</a:t>
                       </a:r>
                     </a:p>
                   </a:txBody>
@@ -16208,12 +16345,12 @@
                         <a:defRPr sz="1800"/>
                       </a:pPr>
                       <a:r>
-                        <a:rPr b="1" sz="1400">
+                        <a:rPr b="1" sz="1300">
                           <a:solidFill>
                             <a:srgbClr val="F96167"/>
                           </a:solidFill>
                         </a:rPr>
-                        <a:t>0.66</a:t>
+                        <a:t>0.71</a:t>
                       </a:r>
                     </a:p>
                   </a:txBody>
@@ -16232,12 +16369,36 @@
                         <a:defRPr sz="1800"/>
                       </a:pPr>
                       <a:r>
-                        <a:rPr b="1" sz="1400">
+                        <a:rPr b="1" sz="1300">
+                          <a:solidFill>
+                            <a:srgbClr val="2ECC71"/>
+                          </a:solidFill>
+                        </a:rPr>
+                        <a:t>0.92</a:t>
+                      </a:r>
+                    </a:p>
+                  </a:txBody>
+                  <a:tcPr marL="45720" marR="45720" marT="45720" marB="45720" anchor="t" anchorCtr="0" horzOverflow="overflow">
+                    <a:solidFill>
+                      <a:srgbClr val="FFFFFF"/>
+                    </a:solidFill>
+                  </a:tcPr>
+                </a:tc>
+                <a:tc>
+                  <a:txBody>
+                    <a:bodyPr/>
+                    <a:lstStyle/>
+                    <a:p>
+                      <a:pPr algn="ctr">
+                        <a:defRPr sz="1800"/>
+                      </a:pPr>
+                      <a:r>
+                        <a:rPr b="1" sz="1300">
                           <a:solidFill>
                             <a:srgbClr val="E74C3C"/>
                           </a:solidFill>
                         </a:rPr>
-                        <a:t>-0.28</a:t>
+                        <a:t>-0.20</a:t>
                       </a:r>
                     </a:p>
                   </a:txBody>
@@ -16304,14 +16465,14 @@
     </a:clrScheme>
     <a:fontScheme name="Office Theme">
       <a:majorFont>
+        <a:latin typeface="Calibri"/>
+        <a:ea typeface="Calibri"/>
+        <a:cs typeface="Calibri"/>
+      </a:majorFont>
+      <a:minorFont>
         <a:latin typeface="Helvetica"/>
         <a:ea typeface="Helvetica"/>
         <a:cs typeface="Helvetica"/>
-      </a:majorFont>
-      <a:minorFont>
-        <a:latin typeface="Calibri"/>
-        <a:ea typeface="Calibri"/>
-        <a:cs typeface="Calibri"/>
       </a:minorFont>
     </a:fontScheme>
     <a:fmtScheme name="Office Theme">
@@ -16516,9 +16677,9 @@
             </a:solidFill>
             <a:effectLst/>
             <a:uFillTx/>
-            <a:latin typeface="+mn-lt"/>
-            <a:ea typeface="+mn-ea"/>
-            <a:cs typeface="+mn-cs"/>
+            <a:latin typeface="+mj-lt"/>
+            <a:ea typeface="+mj-ea"/>
+            <a:cs typeface="+mj-cs"/>
             <a:sym typeface="Calibri"/>
           </a:defRPr>
         </a:defPPr>
@@ -17093,9 +17254,9 @@
             </a:solidFill>
             <a:effectLst/>
             <a:uFillTx/>
-            <a:latin typeface="+mn-lt"/>
-            <a:ea typeface="+mn-ea"/>
-            <a:cs typeface="+mn-cs"/>
+            <a:latin typeface="+mj-lt"/>
+            <a:ea typeface="+mj-ea"/>
+            <a:cs typeface="+mj-cs"/>
             <a:sym typeface="Calibri"/>
           </a:defRPr>
         </a:defPPr>
@@ -17388,14 +17549,14 @@
     </a:clrScheme>
     <a:fontScheme name="Office Theme">
       <a:majorFont>
+        <a:latin typeface="Calibri"/>
+        <a:ea typeface="Calibri"/>
+        <a:cs typeface="Calibri"/>
+      </a:majorFont>
+      <a:minorFont>
         <a:latin typeface="Helvetica"/>
         <a:ea typeface="Helvetica"/>
         <a:cs typeface="Helvetica"/>
-      </a:majorFont>
-      <a:minorFont>
-        <a:latin typeface="Calibri"/>
-        <a:ea typeface="Calibri"/>
-        <a:cs typeface="Calibri"/>
       </a:minorFont>
     </a:fontScheme>
     <a:fmtScheme name="Office Theme">
@@ -17600,9 +17761,9 @@
             </a:solidFill>
             <a:effectLst/>
             <a:uFillTx/>
-            <a:latin typeface="+mn-lt"/>
-            <a:ea typeface="+mn-ea"/>
-            <a:cs typeface="+mn-cs"/>
+            <a:latin typeface="+mj-lt"/>
+            <a:ea typeface="+mj-ea"/>
+            <a:cs typeface="+mj-cs"/>
             <a:sym typeface="Calibri"/>
           </a:defRPr>
         </a:defPPr>
@@ -18177,9 +18338,9 @@
             </a:solidFill>
             <a:effectLst/>
             <a:uFillTx/>
-            <a:latin typeface="+mn-lt"/>
-            <a:ea typeface="+mn-ea"/>
-            <a:cs typeface="+mn-cs"/>
+            <a:latin typeface="+mj-lt"/>
+            <a:ea typeface="+mj-ea"/>
+            <a:cs typeface="+mj-cs"/>
             <a:sym typeface="Calibri"/>
           </a:defRPr>
         </a:defPPr>

--- a/paper/presentacion_OCT.pptx
+++ b/paper/presentacion_OCT.pptx
@@ -78,10 +78,10 @@
         <a:latin typeface="+mj-lt"/>
         <a:ea typeface="+mj-ea"/>
         <a:cs typeface="+mj-cs"/>
-        <a:sym typeface="Calibri"/>
+        <a:sym typeface="Helvetica"/>
       </a:defRPr>
     </a:lvl1pPr>
-    <a:lvl2pPr marL="0" marR="0" indent="457200" algn="l" defTabSz="457200" rtl="0" fontAlgn="auto" latinLnBrk="0" hangingPunct="0">
+    <a:lvl2pPr marL="0" marR="0" indent="0" algn="l" defTabSz="457200" rtl="0" fontAlgn="auto" latinLnBrk="0" hangingPunct="0">
       <a:lnSpc>
         <a:spcPct val="100000"/>
       </a:lnSpc>
@@ -108,10 +108,10 @@
         <a:latin typeface="+mj-lt"/>
         <a:ea typeface="+mj-ea"/>
         <a:cs typeface="+mj-cs"/>
-        <a:sym typeface="Calibri"/>
+        <a:sym typeface="Helvetica"/>
       </a:defRPr>
     </a:lvl2pPr>
-    <a:lvl3pPr marL="0" marR="0" indent="914400" algn="l" defTabSz="457200" rtl="0" fontAlgn="auto" latinLnBrk="0" hangingPunct="0">
+    <a:lvl3pPr marL="0" marR="0" indent="0" algn="l" defTabSz="457200" rtl="0" fontAlgn="auto" latinLnBrk="0" hangingPunct="0">
       <a:lnSpc>
         <a:spcPct val="100000"/>
       </a:lnSpc>
@@ -138,10 +138,10 @@
         <a:latin typeface="+mj-lt"/>
         <a:ea typeface="+mj-ea"/>
         <a:cs typeface="+mj-cs"/>
-        <a:sym typeface="Calibri"/>
+        <a:sym typeface="Helvetica"/>
       </a:defRPr>
     </a:lvl3pPr>
-    <a:lvl4pPr marL="0" marR="0" indent="1371600" algn="l" defTabSz="457200" rtl="0" fontAlgn="auto" latinLnBrk="0" hangingPunct="0">
+    <a:lvl4pPr marL="0" marR="0" indent="0" algn="l" defTabSz="457200" rtl="0" fontAlgn="auto" latinLnBrk="0" hangingPunct="0">
       <a:lnSpc>
         <a:spcPct val="100000"/>
       </a:lnSpc>
@@ -168,10 +168,10 @@
         <a:latin typeface="+mj-lt"/>
         <a:ea typeface="+mj-ea"/>
         <a:cs typeface="+mj-cs"/>
-        <a:sym typeface="Calibri"/>
+        <a:sym typeface="Helvetica"/>
       </a:defRPr>
     </a:lvl4pPr>
-    <a:lvl5pPr marL="0" marR="0" indent="1828800" algn="l" defTabSz="457200" rtl="0" fontAlgn="auto" latinLnBrk="0" hangingPunct="0">
+    <a:lvl5pPr marL="0" marR="0" indent="0" algn="l" defTabSz="457200" rtl="0" fontAlgn="auto" latinLnBrk="0" hangingPunct="0">
       <a:lnSpc>
         <a:spcPct val="100000"/>
       </a:lnSpc>
@@ -198,10 +198,10 @@
         <a:latin typeface="+mj-lt"/>
         <a:ea typeface="+mj-ea"/>
         <a:cs typeface="+mj-cs"/>
-        <a:sym typeface="Calibri"/>
+        <a:sym typeface="Helvetica"/>
       </a:defRPr>
     </a:lvl5pPr>
-    <a:lvl6pPr marL="0" marR="0" indent="2286000" algn="l" defTabSz="457200" rtl="0" fontAlgn="auto" latinLnBrk="0" hangingPunct="0">
+    <a:lvl6pPr marL="0" marR="0" indent="0" algn="l" defTabSz="457200" rtl="0" fontAlgn="auto" latinLnBrk="0" hangingPunct="0">
       <a:lnSpc>
         <a:spcPct val="100000"/>
       </a:lnSpc>
@@ -228,10 +228,10 @@
         <a:latin typeface="+mj-lt"/>
         <a:ea typeface="+mj-ea"/>
         <a:cs typeface="+mj-cs"/>
-        <a:sym typeface="Calibri"/>
+        <a:sym typeface="Helvetica"/>
       </a:defRPr>
     </a:lvl6pPr>
-    <a:lvl7pPr marL="0" marR="0" indent="2743200" algn="l" defTabSz="457200" rtl="0" fontAlgn="auto" latinLnBrk="0" hangingPunct="0">
+    <a:lvl7pPr marL="0" marR="0" indent="0" algn="l" defTabSz="457200" rtl="0" fontAlgn="auto" latinLnBrk="0" hangingPunct="0">
       <a:lnSpc>
         <a:spcPct val="100000"/>
       </a:lnSpc>
@@ -258,10 +258,10 @@
         <a:latin typeface="+mj-lt"/>
         <a:ea typeface="+mj-ea"/>
         <a:cs typeface="+mj-cs"/>
-        <a:sym typeface="Calibri"/>
+        <a:sym typeface="Helvetica"/>
       </a:defRPr>
     </a:lvl7pPr>
-    <a:lvl8pPr marL="0" marR="0" indent="3200400" algn="l" defTabSz="457200" rtl="0" fontAlgn="auto" latinLnBrk="0" hangingPunct="0">
+    <a:lvl8pPr marL="0" marR="0" indent="0" algn="l" defTabSz="457200" rtl="0" fontAlgn="auto" latinLnBrk="0" hangingPunct="0">
       <a:lnSpc>
         <a:spcPct val="100000"/>
       </a:lnSpc>
@@ -288,10 +288,10 @@
         <a:latin typeface="+mj-lt"/>
         <a:ea typeface="+mj-ea"/>
         <a:cs typeface="+mj-cs"/>
-        <a:sym typeface="Calibri"/>
+        <a:sym typeface="Helvetica"/>
       </a:defRPr>
     </a:lvl8pPr>
-    <a:lvl9pPr marL="0" marR="0" indent="3657600" algn="l" defTabSz="457200" rtl="0" fontAlgn="auto" latinLnBrk="0" hangingPunct="0">
+    <a:lvl9pPr marL="0" marR="0" indent="0" algn="l" defTabSz="457200" rtl="0" fontAlgn="auto" latinLnBrk="0" hangingPunct="0">
       <a:lnSpc>
         <a:spcPct val="100000"/>
       </a:lnSpc>
@@ -318,7 +318,7 @@
         <a:latin typeface="+mj-lt"/>
         <a:ea typeface="+mj-ea"/>
         <a:cs typeface="+mj-cs"/>
-        <a:sym typeface="Calibri"/>
+        <a:sym typeface="Helvetica"/>
       </a:defRPr>
     </a:lvl9pPr>
   </p:defaultTextStyle>
@@ -402,73 +402,73 @@
   <p:notesStyle>
     <a:lvl1pPr defTabSz="457200" latinLnBrk="0">
       <a:defRPr sz="1200">
-        <a:latin typeface="+mj-lt"/>
-        <a:ea typeface="+mj-ea"/>
-        <a:cs typeface="+mj-cs"/>
+        <a:latin typeface="+mn-lt"/>
+        <a:ea typeface="+mn-ea"/>
+        <a:cs typeface="+mn-cs"/>
         <a:sym typeface="Calibri"/>
       </a:defRPr>
     </a:lvl1pPr>
     <a:lvl2pPr indent="228600" defTabSz="457200" latinLnBrk="0">
       <a:defRPr sz="1200">
-        <a:latin typeface="+mj-lt"/>
-        <a:ea typeface="+mj-ea"/>
-        <a:cs typeface="+mj-cs"/>
+        <a:latin typeface="+mn-lt"/>
+        <a:ea typeface="+mn-ea"/>
+        <a:cs typeface="+mn-cs"/>
         <a:sym typeface="Calibri"/>
       </a:defRPr>
     </a:lvl2pPr>
     <a:lvl3pPr indent="457200" defTabSz="457200" latinLnBrk="0">
       <a:defRPr sz="1200">
-        <a:latin typeface="+mj-lt"/>
-        <a:ea typeface="+mj-ea"/>
-        <a:cs typeface="+mj-cs"/>
+        <a:latin typeface="+mn-lt"/>
+        <a:ea typeface="+mn-ea"/>
+        <a:cs typeface="+mn-cs"/>
         <a:sym typeface="Calibri"/>
       </a:defRPr>
     </a:lvl3pPr>
     <a:lvl4pPr indent="685800" defTabSz="457200" latinLnBrk="0">
       <a:defRPr sz="1200">
-        <a:latin typeface="+mj-lt"/>
-        <a:ea typeface="+mj-ea"/>
-        <a:cs typeface="+mj-cs"/>
+        <a:latin typeface="+mn-lt"/>
+        <a:ea typeface="+mn-ea"/>
+        <a:cs typeface="+mn-cs"/>
         <a:sym typeface="Calibri"/>
       </a:defRPr>
     </a:lvl4pPr>
     <a:lvl5pPr indent="914400" defTabSz="457200" latinLnBrk="0">
       <a:defRPr sz="1200">
-        <a:latin typeface="+mj-lt"/>
-        <a:ea typeface="+mj-ea"/>
-        <a:cs typeface="+mj-cs"/>
+        <a:latin typeface="+mn-lt"/>
+        <a:ea typeface="+mn-ea"/>
+        <a:cs typeface="+mn-cs"/>
         <a:sym typeface="Calibri"/>
       </a:defRPr>
     </a:lvl5pPr>
     <a:lvl6pPr indent="1143000" defTabSz="457200" latinLnBrk="0">
       <a:defRPr sz="1200">
-        <a:latin typeface="+mj-lt"/>
-        <a:ea typeface="+mj-ea"/>
-        <a:cs typeface="+mj-cs"/>
+        <a:latin typeface="+mn-lt"/>
+        <a:ea typeface="+mn-ea"/>
+        <a:cs typeface="+mn-cs"/>
         <a:sym typeface="Calibri"/>
       </a:defRPr>
     </a:lvl6pPr>
     <a:lvl7pPr indent="1371600" defTabSz="457200" latinLnBrk="0">
       <a:defRPr sz="1200">
-        <a:latin typeface="+mj-lt"/>
-        <a:ea typeface="+mj-ea"/>
-        <a:cs typeface="+mj-cs"/>
+        <a:latin typeface="+mn-lt"/>
+        <a:ea typeface="+mn-ea"/>
+        <a:cs typeface="+mn-cs"/>
         <a:sym typeface="Calibri"/>
       </a:defRPr>
     </a:lvl7pPr>
     <a:lvl8pPr indent="1600200" defTabSz="457200" latinLnBrk="0">
       <a:defRPr sz="1200">
-        <a:latin typeface="+mj-lt"/>
-        <a:ea typeface="+mj-ea"/>
-        <a:cs typeface="+mj-cs"/>
+        <a:latin typeface="+mn-lt"/>
+        <a:ea typeface="+mn-ea"/>
+        <a:cs typeface="+mn-cs"/>
         <a:sym typeface="Calibri"/>
       </a:defRPr>
     </a:lvl8pPr>
     <a:lvl9pPr indent="1828800" defTabSz="457200" latinLnBrk="0">
       <a:defRPr sz="1200">
-        <a:latin typeface="+mj-lt"/>
-        <a:ea typeface="+mj-ea"/>
-        <a:cs typeface="+mj-cs"/>
+        <a:latin typeface="+mn-lt"/>
+        <a:ea typeface="+mn-ea"/>
+        <a:cs typeface="+mn-cs"/>
         <a:sym typeface="Calibri"/>
       </a:defRPr>
     </a:lvl9pPr>
@@ -551,7 +551,7 @@
                 </a:solidFill>
               </a:defRPr>
             </a:lvl1pPr>
-            <a:lvl2pPr marL="0" indent="457200" algn="ctr">
+            <a:lvl2pPr marL="0" indent="0" algn="ctr">
               <a:buSzTx/>
               <a:buFontTx/>
               <a:buNone/>
@@ -561,7 +561,7 @@
                 </a:solidFill>
               </a:defRPr>
             </a:lvl2pPr>
-            <a:lvl3pPr marL="0" indent="914400" algn="ctr">
+            <a:lvl3pPr marL="0" indent="0" algn="ctr">
               <a:buSzTx/>
               <a:buFontTx/>
               <a:buNone/>
@@ -571,7 +571,7 @@
                 </a:solidFill>
               </a:defRPr>
             </a:lvl3pPr>
-            <a:lvl4pPr marL="0" indent="1371600" algn="ctr">
+            <a:lvl4pPr marL="0" indent="0" algn="ctr">
               <a:buSzTx/>
               <a:buFontTx/>
               <a:buNone/>
@@ -581,7 +581,7 @@
                 </a:solidFill>
               </a:defRPr>
             </a:lvl4pPr>
-            <a:lvl5pPr marL="0" indent="1828800" algn="ctr">
+            <a:lvl5pPr marL="0" indent="0" algn="ctr">
               <a:buSzTx/>
               <a:buFontTx/>
               <a:buNone/>
@@ -681,10 +681,6 @@
           </p:nvPr>
         </p:nvSpPr>
         <p:spPr>
-          <a:xfrm>
-            <a:off x="457200" y="274638"/>
-            <a:ext cx="8229600" cy="1143001"/>
-          </a:xfrm>
           <a:prstGeom prst="rect">
             <a:avLst/>
           </a:prstGeom>
@@ -709,10 +705,6 @@
           </p:nvPr>
         </p:nvSpPr>
         <p:spPr>
-          <a:xfrm>
-            <a:off x="457200" y="1600200"/>
-            <a:ext cx="8229600" cy="4525963"/>
-          </a:xfrm>
           <a:prstGeom prst="rect">
             <a:avLst/>
           </a:prstGeom>
@@ -843,7 +835,7 @@
         <p:spPr>
           <a:xfrm>
             <a:off x="722312" y="2906713"/>
-            <a:ext cx="7772401" cy="1500188"/>
+            <a:ext cx="7772401" cy="1500189"/>
           </a:xfrm>
           <a:prstGeom prst="rect">
             <a:avLst/>
@@ -865,7 +857,7 @@
                 </a:solidFill>
               </a:defRPr>
             </a:lvl1pPr>
-            <a:lvl2pPr marL="0" indent="457200">
+            <a:lvl2pPr marL="0" indent="0">
               <a:spcBef>
                 <a:spcPts val="400"/>
               </a:spcBef>
@@ -878,7 +870,7 @@
                 </a:solidFill>
               </a:defRPr>
             </a:lvl2pPr>
-            <a:lvl3pPr marL="0" indent="914400">
+            <a:lvl3pPr marL="0" indent="0">
               <a:spcBef>
                 <a:spcPts val="400"/>
               </a:spcBef>
@@ -891,7 +883,7 @@
                 </a:solidFill>
               </a:defRPr>
             </a:lvl3pPr>
-            <a:lvl4pPr marL="0" indent="1371600">
+            <a:lvl4pPr marL="0" indent="0">
               <a:spcBef>
                 <a:spcPts val="400"/>
               </a:spcBef>
@@ -904,7 +896,7 @@
                 </a:solidFill>
               </a:defRPr>
             </a:lvl4pPr>
-            <a:lvl5pPr marL="0" indent="1828800">
+            <a:lvl5pPr marL="0" indent="0">
               <a:spcBef>
                 <a:spcPts val="400"/>
               </a:spcBef>
@@ -1007,10 +999,6 @@
           </p:nvPr>
         </p:nvSpPr>
         <p:spPr>
-          <a:xfrm>
-            <a:off x="457200" y="274638"/>
-            <a:ext cx="8229600" cy="1143001"/>
-          </a:xfrm>
           <a:prstGeom prst="rect">
             <a:avLst/>
           </a:prstGeom>
@@ -1058,7 +1046,7 @@
               </a:spcBef>
               <a:defRPr sz="2800"/>
             </a:lvl2pPr>
-            <a:lvl3pPr marL="1234439" indent="-320039">
+            <a:lvl3pPr marL="1234438" indent="-320038">
               <a:spcBef>
                 <a:spcPts val="600"/>
               </a:spcBef>
@@ -1166,10 +1154,6 @@
           </p:nvPr>
         </p:nvSpPr>
         <p:spPr>
-          <a:xfrm>
-            <a:off x="457200" y="274638"/>
-            <a:ext cx="8229600" cy="1143001"/>
-          </a:xfrm>
           <a:prstGeom prst="rect">
             <a:avLst/>
           </a:prstGeom>
@@ -1214,7 +1198,7 @@
               <a:buNone/>
               <a:defRPr b="1" sz="2400"/>
             </a:lvl1pPr>
-            <a:lvl2pPr marL="0" indent="457200">
+            <a:lvl2pPr marL="0" indent="0">
               <a:spcBef>
                 <a:spcPts val="500"/>
               </a:spcBef>
@@ -1223,7 +1207,7 @@
               <a:buNone/>
               <a:defRPr b="1" sz="2400"/>
             </a:lvl2pPr>
-            <a:lvl3pPr marL="0" indent="914400">
+            <a:lvl3pPr marL="0" indent="0">
               <a:spcBef>
                 <a:spcPts val="500"/>
               </a:spcBef>
@@ -1232,7 +1216,7 @@
               <a:buNone/>
               <a:defRPr b="1" sz="2400"/>
             </a:lvl3pPr>
-            <a:lvl4pPr marL="0" indent="1371600">
+            <a:lvl4pPr marL="0" indent="0">
               <a:spcBef>
                 <a:spcPts val="500"/>
               </a:spcBef>
@@ -1241,7 +1225,7 @@
               <a:buNone/>
               <a:defRPr b="1" sz="2400"/>
             </a:lvl4pPr>
-            <a:lvl5pPr marL="0" indent="1828800">
+            <a:lvl5pPr marL="0" indent="0">
               <a:spcBef>
                 <a:spcPts val="500"/>
               </a:spcBef>
@@ -1293,8 +1277,8 @@
         </p:nvSpPr>
         <p:spPr>
           <a:xfrm>
-            <a:off x="4645025" y="1535112"/>
-            <a:ext cx="4041775" cy="639763"/>
+            <a:off x="4645025" y="1535111"/>
+            <a:ext cx="4041775" cy="639765"/>
           </a:xfrm>
           <a:prstGeom prst="rect">
             <a:avLst/>
@@ -1304,15 +1288,7 @@
           <a:bodyPr anchor="b"/>
           <a:lstStyle/>
           <a:p>
-            <a:pPr marL="0" indent="0">
-              <a:spcBef>
-                <a:spcPts val="500"/>
-              </a:spcBef>
-              <a:buSzTx/>
-              <a:buFontTx/>
-              <a:buNone/>
-              <a:defRPr b="1" sz="2400"/>
-            </a:pPr>
+            <a:pPr/>
           </a:p>
         </p:txBody>
       </p:sp>
@@ -1373,10 +1349,6 @@
           </p:nvPr>
         </p:nvSpPr>
         <p:spPr>
-          <a:xfrm>
-            <a:off x="457200" y="274638"/>
-            <a:ext cx="8229600" cy="1143001"/>
-          </a:xfrm>
           <a:prstGeom prst="rect">
             <a:avLst/>
           </a:prstGeom>
@@ -1499,7 +1471,7 @@
         <p:spPr>
           <a:xfrm>
             <a:off x="457200" y="273050"/>
-            <a:ext cx="3008314" cy="1162050"/>
+            <a:ext cx="3008315" cy="1162050"/>
           </a:xfrm>
           <a:prstGeom prst="rect">
             <a:avLst/>
@@ -1582,8 +1554,8 @@
         </p:nvSpPr>
         <p:spPr>
           <a:xfrm>
-            <a:off x="457199" y="1435100"/>
-            <a:ext cx="3008315" cy="4691063"/>
+            <a:off x="457198" y="1435100"/>
+            <a:ext cx="3008316" cy="4691063"/>
           </a:xfrm>
           <a:prstGeom prst="rect">
             <a:avLst/>
@@ -1593,15 +1565,7 @@
           <a:bodyPr/>
           <a:lstStyle/>
           <a:p>
-            <a:pPr marL="0" indent="0">
-              <a:spcBef>
-                <a:spcPts val="300"/>
-              </a:spcBef>
-              <a:buSzTx/>
-              <a:buFontTx/>
-              <a:buNone/>
-              <a:defRPr sz="1400"/>
-            </a:pPr>
+            <a:pPr/>
           </a:p>
         </p:txBody>
       </p:sp>
@@ -1664,7 +1628,7 @@
         <p:spPr>
           <a:xfrm>
             <a:off x="1792288" y="4800600"/>
-            <a:ext cx="5486401" cy="566738"/>
+            <a:ext cx="5486402" cy="566738"/>
           </a:xfrm>
           <a:prstGeom prst="rect">
             <a:avLst/>
@@ -1696,14 +1660,14 @@
         <p:spPr>
           <a:xfrm>
             <a:off x="1792288" y="612775"/>
-            <a:ext cx="5486401" cy="4114800"/>
-          </a:xfrm>
-          <a:prstGeom prst="rect">
-            <a:avLst/>
-          </a:prstGeom>
-        </p:spPr>
-        <p:txBody>
-          <a:bodyPr lIns="91439" rIns="91439">
+            <a:ext cx="5486402" cy="4114800"/>
+          </a:xfrm>
+          <a:prstGeom prst="rect">
+            <a:avLst/>
+          </a:prstGeom>
+        </p:spPr>
+        <p:txBody>
+          <a:bodyPr lIns="91439" tIns="45719" rIns="91439" bIns="45719">
             <a:noAutofit/>
           </a:bodyPr>
           <a:lstStyle/>
@@ -1723,7 +1687,7 @@
         <p:spPr>
           <a:xfrm>
             <a:off x="1792288" y="5367337"/>
-            <a:ext cx="5486401" cy="804863"/>
+            <a:ext cx="5486402" cy="804864"/>
           </a:xfrm>
           <a:prstGeom prst="rect">
             <a:avLst/>
@@ -1741,7 +1705,7 @@
               <a:buNone/>
               <a:defRPr sz="1400"/>
             </a:lvl1pPr>
-            <a:lvl2pPr marL="0" indent="457200">
+            <a:lvl2pPr marL="0" indent="0">
               <a:spcBef>
                 <a:spcPts val="300"/>
               </a:spcBef>
@@ -1750,7 +1714,7 @@
               <a:buNone/>
               <a:defRPr sz="1400"/>
             </a:lvl2pPr>
-            <a:lvl3pPr marL="0" indent="914400">
+            <a:lvl3pPr marL="0" indent="0">
               <a:spcBef>
                 <a:spcPts val="300"/>
               </a:spcBef>
@@ -1759,7 +1723,7 @@
               <a:buNone/>
               <a:defRPr sz="1400"/>
             </a:lvl3pPr>
-            <a:lvl4pPr marL="0" indent="1371600">
+            <a:lvl4pPr marL="0" indent="0">
               <a:spcBef>
                 <a:spcPts val="300"/>
               </a:spcBef>
@@ -1768,7 +1732,7 @@
               <a:buNone/>
               <a:defRPr sz="1400"/>
             </a:lvl4pPr>
-            <a:lvl5pPr marL="0" indent="1828800">
+            <a:lvl5pPr marL="0" indent="0">
               <a:spcBef>
                 <a:spcPts val="300"/>
               </a:spcBef>
@@ -1875,8 +1839,8 @@
         </p:nvSpPr>
         <p:spPr>
           <a:xfrm>
-            <a:off x="608965" y="92074"/>
-            <a:ext cx="10961370" cy="1508127"/>
+            <a:off x="457200" y="274638"/>
+            <a:ext cx="8229600" cy="1143001"/>
           </a:xfrm>
           <a:prstGeom prst="rect">
             <a:avLst/>
@@ -1891,7 +1855,7 @@
           </a:extLst>
         </p:spPr>
         <p:txBody>
-          <a:bodyPr lIns="45719" rIns="45719" anchor="ctr">
+          <a:bodyPr lIns="45718" tIns="45718" rIns="45718" bIns="45718" anchor="ctr">
             <a:normAutofit fontScale="100000" lnSpcReduction="0"/>
           </a:bodyPr>
           <a:lstStyle/>
@@ -1913,8 +1877,8 @@
         </p:nvSpPr>
         <p:spPr>
           <a:xfrm>
-            <a:off x="608965" y="1600200"/>
-            <a:ext cx="10961370" cy="5257800"/>
+            <a:off x="457200" y="1600200"/>
+            <a:ext cx="8229600" cy="4525963"/>
           </a:xfrm>
           <a:prstGeom prst="rect">
             <a:avLst/>
@@ -1929,7 +1893,7 @@
           </a:extLst>
         </p:spPr>
         <p:txBody>
-          <a:bodyPr lIns="45719" rIns="45719">
+          <a:bodyPr lIns="45718" tIns="45718" rIns="45718" bIns="45718">
             <a:normAutofit fontScale="100000" lnSpcReduction="0"/>
           </a:bodyPr>
           <a:lstStyle/>
@@ -1975,18 +1939,18 @@
         </p:nvSpPr>
         <p:spPr>
           <a:xfrm>
-            <a:off x="8428176" y="6414760"/>
-            <a:ext cx="258624" cy="248305"/>
-          </a:xfrm>
-          <a:prstGeom prst="rect">
-            <a:avLst/>
-          </a:prstGeom>
-          <a:ln w="12700">
-            <a:miter lim="400000"/>
-          </a:ln>
-        </p:spPr>
-        <p:txBody>
-          <a:bodyPr wrap="none" lIns="45719" rIns="45719" anchor="ctr">
+            <a:off x="8428178" y="6414761"/>
+            <a:ext cx="258623" cy="248303"/>
+          </a:xfrm>
+          <a:prstGeom prst="rect">
+            <a:avLst/>
+          </a:prstGeom>
+          <a:ln w="12700">
+            <a:miter lim="400000"/>
+          </a:ln>
+        </p:spPr>
+        <p:txBody>
+          <a:bodyPr wrap="none" lIns="45718" tIns="45718" rIns="45718" bIns="45718" anchor="ctr">
             <a:spAutoFit/>
           </a:bodyPr>
           <a:lstStyle>
@@ -1995,6 +1959,10 @@
                 <a:solidFill>
                   <a:srgbClr val="888888"/>
                 </a:solidFill>
+                <a:latin typeface="+mn-lt"/>
+                <a:ea typeface="+mn-ea"/>
+                <a:cs typeface="+mn-cs"/>
+                <a:sym typeface="Calibri"/>
               </a:defRPr>
             </a:lvl1pPr>
           </a:lstStyle>
@@ -2041,9 +2009,9 @@
             <a:srgbClr val="000000"/>
           </a:solidFill>
           <a:uFillTx/>
-          <a:latin typeface="+mj-lt"/>
-          <a:ea typeface="+mj-ea"/>
-          <a:cs typeface="+mj-cs"/>
+          <a:latin typeface="+mn-lt"/>
+          <a:ea typeface="+mn-ea"/>
+          <a:cs typeface="+mn-cs"/>
           <a:sym typeface="Calibri"/>
         </a:defRPr>
       </a:lvl1pPr>
@@ -2067,9 +2035,9 @@
             <a:srgbClr val="000000"/>
           </a:solidFill>
           <a:uFillTx/>
-          <a:latin typeface="+mj-lt"/>
-          <a:ea typeface="+mj-ea"/>
-          <a:cs typeface="+mj-cs"/>
+          <a:latin typeface="+mn-lt"/>
+          <a:ea typeface="+mn-ea"/>
+          <a:cs typeface="+mn-cs"/>
           <a:sym typeface="Calibri"/>
         </a:defRPr>
       </a:lvl2pPr>
@@ -2093,9 +2061,9 @@
             <a:srgbClr val="000000"/>
           </a:solidFill>
           <a:uFillTx/>
-          <a:latin typeface="+mj-lt"/>
-          <a:ea typeface="+mj-ea"/>
-          <a:cs typeface="+mj-cs"/>
+          <a:latin typeface="+mn-lt"/>
+          <a:ea typeface="+mn-ea"/>
+          <a:cs typeface="+mn-cs"/>
           <a:sym typeface="Calibri"/>
         </a:defRPr>
       </a:lvl3pPr>
@@ -2119,9 +2087,9 @@
             <a:srgbClr val="000000"/>
           </a:solidFill>
           <a:uFillTx/>
-          <a:latin typeface="+mj-lt"/>
-          <a:ea typeface="+mj-ea"/>
-          <a:cs typeface="+mj-cs"/>
+          <a:latin typeface="+mn-lt"/>
+          <a:ea typeface="+mn-ea"/>
+          <a:cs typeface="+mn-cs"/>
           <a:sym typeface="Calibri"/>
         </a:defRPr>
       </a:lvl4pPr>
@@ -2145,9 +2113,9 @@
             <a:srgbClr val="000000"/>
           </a:solidFill>
           <a:uFillTx/>
-          <a:latin typeface="+mj-lt"/>
-          <a:ea typeface="+mj-ea"/>
-          <a:cs typeface="+mj-cs"/>
+          <a:latin typeface="+mn-lt"/>
+          <a:ea typeface="+mn-ea"/>
+          <a:cs typeface="+mn-cs"/>
           <a:sym typeface="Calibri"/>
         </a:defRPr>
       </a:lvl5pPr>
@@ -2171,9 +2139,9 @@
             <a:srgbClr val="000000"/>
           </a:solidFill>
           <a:uFillTx/>
-          <a:latin typeface="+mj-lt"/>
-          <a:ea typeface="+mj-ea"/>
-          <a:cs typeface="+mj-cs"/>
+          <a:latin typeface="+mn-lt"/>
+          <a:ea typeface="+mn-ea"/>
+          <a:cs typeface="+mn-cs"/>
           <a:sym typeface="Calibri"/>
         </a:defRPr>
       </a:lvl6pPr>
@@ -2197,9 +2165,9 @@
             <a:srgbClr val="000000"/>
           </a:solidFill>
           <a:uFillTx/>
-          <a:latin typeface="+mj-lt"/>
-          <a:ea typeface="+mj-ea"/>
-          <a:cs typeface="+mj-cs"/>
+          <a:latin typeface="+mn-lt"/>
+          <a:ea typeface="+mn-ea"/>
+          <a:cs typeface="+mn-cs"/>
           <a:sym typeface="Calibri"/>
         </a:defRPr>
       </a:lvl7pPr>
@@ -2223,9 +2191,9 @@
             <a:srgbClr val="000000"/>
           </a:solidFill>
           <a:uFillTx/>
-          <a:latin typeface="+mj-lt"/>
-          <a:ea typeface="+mj-ea"/>
-          <a:cs typeface="+mj-cs"/>
+          <a:latin typeface="+mn-lt"/>
+          <a:ea typeface="+mn-ea"/>
+          <a:cs typeface="+mn-cs"/>
           <a:sym typeface="Calibri"/>
         </a:defRPr>
       </a:lvl8pPr>
@@ -2249,9 +2217,9 @@
             <a:srgbClr val="000000"/>
           </a:solidFill>
           <a:uFillTx/>
-          <a:latin typeface="+mj-lt"/>
-          <a:ea typeface="+mj-ea"/>
-          <a:cs typeface="+mj-cs"/>
+          <a:latin typeface="+mn-lt"/>
+          <a:ea typeface="+mn-ea"/>
+          <a:cs typeface="+mn-cs"/>
           <a:sym typeface="Calibri"/>
         </a:defRPr>
       </a:lvl9pPr>
@@ -2277,9 +2245,9 @@
             <a:srgbClr val="000000"/>
           </a:solidFill>
           <a:uFillTx/>
-          <a:latin typeface="+mj-lt"/>
-          <a:ea typeface="+mj-ea"/>
-          <a:cs typeface="+mj-cs"/>
+          <a:latin typeface="+mn-lt"/>
+          <a:ea typeface="+mn-ea"/>
+          <a:cs typeface="+mn-cs"/>
           <a:sym typeface="Calibri"/>
         </a:defRPr>
       </a:lvl1pPr>
@@ -2303,9 +2271,9 @@
             <a:srgbClr val="000000"/>
           </a:solidFill>
           <a:uFillTx/>
-          <a:latin typeface="+mj-lt"/>
-          <a:ea typeface="+mj-ea"/>
-          <a:cs typeface="+mj-cs"/>
+          <a:latin typeface="+mn-lt"/>
+          <a:ea typeface="+mn-ea"/>
+          <a:cs typeface="+mn-cs"/>
           <a:sym typeface="Calibri"/>
         </a:defRPr>
       </a:lvl2pPr>
@@ -2329,9 +2297,9 @@
             <a:srgbClr val="000000"/>
           </a:solidFill>
           <a:uFillTx/>
-          <a:latin typeface="+mj-lt"/>
-          <a:ea typeface="+mj-ea"/>
-          <a:cs typeface="+mj-cs"/>
+          <a:latin typeface="+mn-lt"/>
+          <a:ea typeface="+mn-ea"/>
+          <a:cs typeface="+mn-cs"/>
           <a:sym typeface="Calibri"/>
         </a:defRPr>
       </a:lvl3pPr>
@@ -2355,9 +2323,9 @@
             <a:srgbClr val="000000"/>
           </a:solidFill>
           <a:uFillTx/>
-          <a:latin typeface="+mj-lt"/>
-          <a:ea typeface="+mj-ea"/>
-          <a:cs typeface="+mj-cs"/>
+          <a:latin typeface="+mn-lt"/>
+          <a:ea typeface="+mn-ea"/>
+          <a:cs typeface="+mn-cs"/>
           <a:sym typeface="Calibri"/>
         </a:defRPr>
       </a:lvl4pPr>
@@ -2381,9 +2349,9 @@
             <a:srgbClr val="000000"/>
           </a:solidFill>
           <a:uFillTx/>
-          <a:latin typeface="+mj-lt"/>
-          <a:ea typeface="+mj-ea"/>
-          <a:cs typeface="+mj-cs"/>
+          <a:latin typeface="+mn-lt"/>
+          <a:ea typeface="+mn-ea"/>
+          <a:cs typeface="+mn-cs"/>
           <a:sym typeface="Calibri"/>
         </a:defRPr>
       </a:lvl5pPr>
@@ -2407,9 +2375,9 @@
             <a:srgbClr val="000000"/>
           </a:solidFill>
           <a:uFillTx/>
-          <a:latin typeface="+mj-lt"/>
-          <a:ea typeface="+mj-ea"/>
-          <a:cs typeface="+mj-cs"/>
+          <a:latin typeface="+mn-lt"/>
+          <a:ea typeface="+mn-ea"/>
+          <a:cs typeface="+mn-cs"/>
           <a:sym typeface="Calibri"/>
         </a:defRPr>
       </a:lvl6pPr>
@@ -2433,9 +2401,9 @@
             <a:srgbClr val="000000"/>
           </a:solidFill>
           <a:uFillTx/>
-          <a:latin typeface="+mj-lt"/>
-          <a:ea typeface="+mj-ea"/>
-          <a:cs typeface="+mj-cs"/>
+          <a:latin typeface="+mn-lt"/>
+          <a:ea typeface="+mn-ea"/>
+          <a:cs typeface="+mn-cs"/>
           <a:sym typeface="Calibri"/>
         </a:defRPr>
       </a:lvl7pPr>
@@ -2459,9 +2427,9 @@
             <a:srgbClr val="000000"/>
           </a:solidFill>
           <a:uFillTx/>
-          <a:latin typeface="+mj-lt"/>
-          <a:ea typeface="+mj-ea"/>
-          <a:cs typeface="+mj-cs"/>
+          <a:latin typeface="+mn-lt"/>
+          <a:ea typeface="+mn-ea"/>
+          <a:cs typeface="+mn-cs"/>
           <a:sym typeface="Calibri"/>
         </a:defRPr>
       </a:lvl8pPr>
@@ -2485,9 +2453,9 @@
             <a:srgbClr val="000000"/>
           </a:solidFill>
           <a:uFillTx/>
-          <a:latin typeface="+mj-lt"/>
-          <a:ea typeface="+mj-ea"/>
-          <a:cs typeface="+mj-cs"/>
+          <a:latin typeface="+mn-lt"/>
+          <a:ea typeface="+mn-ea"/>
+          <a:cs typeface="+mn-cs"/>
           <a:sym typeface="Calibri"/>
         </a:defRPr>
       </a:lvl9pPr>
@@ -2519,7 +2487,7 @@
           <a:sym typeface="Calibri"/>
         </a:defRPr>
       </a:lvl1pPr>
-      <a:lvl2pPr marL="0" marR="0" indent="457200" algn="r" defTabSz="457200" rtl="0" latinLnBrk="0">
+      <a:lvl2pPr marL="0" marR="0" indent="0" algn="r" defTabSz="457200" rtl="0" latinLnBrk="0">
         <a:lnSpc>
           <a:spcPct val="100000"/>
         </a:lnSpc>
@@ -2545,7 +2513,7 @@
           <a:sym typeface="Calibri"/>
         </a:defRPr>
       </a:lvl2pPr>
-      <a:lvl3pPr marL="0" marR="0" indent="914400" algn="r" defTabSz="457200" rtl="0" latinLnBrk="0">
+      <a:lvl3pPr marL="0" marR="0" indent="0" algn="r" defTabSz="457200" rtl="0" latinLnBrk="0">
         <a:lnSpc>
           <a:spcPct val="100000"/>
         </a:lnSpc>
@@ -2571,7 +2539,7 @@
           <a:sym typeface="Calibri"/>
         </a:defRPr>
       </a:lvl3pPr>
-      <a:lvl4pPr marL="0" marR="0" indent="1371600" algn="r" defTabSz="457200" rtl="0" latinLnBrk="0">
+      <a:lvl4pPr marL="0" marR="0" indent="0" algn="r" defTabSz="457200" rtl="0" latinLnBrk="0">
         <a:lnSpc>
           <a:spcPct val="100000"/>
         </a:lnSpc>
@@ -2597,7 +2565,7 @@
           <a:sym typeface="Calibri"/>
         </a:defRPr>
       </a:lvl4pPr>
-      <a:lvl5pPr marL="0" marR="0" indent="1828800" algn="r" defTabSz="457200" rtl="0" latinLnBrk="0">
+      <a:lvl5pPr marL="0" marR="0" indent="0" algn="r" defTabSz="457200" rtl="0" latinLnBrk="0">
         <a:lnSpc>
           <a:spcPct val="100000"/>
         </a:lnSpc>
@@ -2623,7 +2591,7 @@
           <a:sym typeface="Calibri"/>
         </a:defRPr>
       </a:lvl5pPr>
-      <a:lvl6pPr marL="0" marR="0" indent="2286000" algn="r" defTabSz="457200" rtl="0" latinLnBrk="0">
+      <a:lvl6pPr marL="0" marR="0" indent="0" algn="r" defTabSz="457200" rtl="0" latinLnBrk="0">
         <a:lnSpc>
           <a:spcPct val="100000"/>
         </a:lnSpc>
@@ -2649,7 +2617,7 @@
           <a:sym typeface="Calibri"/>
         </a:defRPr>
       </a:lvl6pPr>
-      <a:lvl7pPr marL="0" marR="0" indent="2743200" algn="r" defTabSz="457200" rtl="0" latinLnBrk="0">
+      <a:lvl7pPr marL="0" marR="0" indent="0" algn="r" defTabSz="457200" rtl="0" latinLnBrk="0">
         <a:lnSpc>
           <a:spcPct val="100000"/>
         </a:lnSpc>
@@ -2675,7 +2643,7 @@
           <a:sym typeface="Calibri"/>
         </a:defRPr>
       </a:lvl7pPr>
-      <a:lvl8pPr marL="0" marR="0" indent="3200400" algn="r" defTabSz="457200" rtl="0" latinLnBrk="0">
+      <a:lvl8pPr marL="0" marR="0" indent="0" algn="r" defTabSz="457200" rtl="0" latinLnBrk="0">
         <a:lnSpc>
           <a:spcPct val="100000"/>
         </a:lnSpc>
@@ -2701,7 +2669,7 @@
           <a:sym typeface="Calibri"/>
         </a:defRPr>
       </a:lvl8pPr>
-      <a:lvl9pPr marL="0" marR="0" indent="3657600" algn="r" defTabSz="457200" rtl="0" latinLnBrk="0">
+      <a:lvl9pPr marL="0" marR="0" indent="0" algn="r" defTabSz="457200" rtl="0" latinLnBrk="0">
         <a:lnSpc>
           <a:spcPct val="100000"/>
         </a:lnSpc>
@@ -2764,8 +2732,8 @@
         </p:nvSpPr>
         <p:spPr>
           <a:xfrm>
-            <a:off x="-1" y="-1"/>
-            <a:ext cx="12191697" cy="73154"/>
+            <a:off x="-1" y="-2"/>
+            <a:ext cx="12191697" cy="73156"/>
           </a:xfrm>
           <a:prstGeom prst="rect">
             <a:avLst/>
@@ -2785,7 +2753,7 @@
           </a:effectLst>
         </p:spPr>
         <p:txBody>
-          <a:bodyPr lIns="45719" rIns="45719" anchor="ctr"/>
+          <a:bodyPr lIns="45718" tIns="45718" rIns="45718" bIns="45718" anchor="ctr"/>
           <a:lstStyle/>
           <a:p>
             <a:pPr algn="ctr">
@@ -2793,6 +2761,10 @@
                 <a:solidFill>
                   <a:srgbClr val="FFFFFF"/>
                 </a:solidFill>
+                <a:latin typeface="+mn-lt"/>
+                <a:ea typeface="+mn-ea"/>
+                <a:cs typeface="+mn-cs"/>
+                <a:sym typeface="Calibri"/>
               </a:defRPr>
             </a:pPr>
           </a:p>
@@ -2806,8 +2778,8 @@
         </p:nvSpPr>
         <p:spPr>
           <a:xfrm>
-            <a:off x="1417320" y="1371599"/>
-            <a:ext cx="9326880" cy="1666936"/>
+            <a:off x="1417319" y="1371600"/>
+            <a:ext cx="9326882" cy="1666933"/>
           </a:xfrm>
           <a:prstGeom prst="rect">
             <a:avLst/>
@@ -2822,7 +2794,7 @@
           </a:extLst>
         </p:spPr>
         <p:txBody>
-          <a:bodyPr lIns="45719" rIns="45719">
+          <a:bodyPr lIns="45718" tIns="45718" rIns="45718" bIns="45718">
             <a:spAutoFit/>
           </a:bodyPr>
           <a:lstStyle/>
@@ -2832,6 +2804,10 @@
                 <a:solidFill>
                   <a:srgbClr val="FFFFFF"/>
                 </a:solidFill>
+                <a:latin typeface="+mn-lt"/>
+                <a:ea typeface="+mn-ea"/>
+                <a:cs typeface="+mn-cs"/>
+                <a:sym typeface="Calibri"/>
               </a:defRPr>
             </a:pPr>
             <a:r>
@@ -2852,8 +2828,8 @@
         </p:nvSpPr>
         <p:spPr>
           <a:xfrm>
-            <a:off x="1371600" y="3749038"/>
-            <a:ext cx="2743200" cy="36577"/>
+            <a:off x="1371600" y="3749037"/>
+            <a:ext cx="2743200" cy="36578"/>
           </a:xfrm>
           <a:prstGeom prst="rect">
             <a:avLst/>
@@ -2873,7 +2849,7 @@
           </a:effectLst>
         </p:spPr>
         <p:txBody>
-          <a:bodyPr lIns="45719" rIns="45719" anchor="ctr"/>
+          <a:bodyPr lIns="45718" tIns="45718" rIns="45718" bIns="45718" anchor="ctr"/>
           <a:lstStyle/>
           <a:p>
             <a:pPr algn="ctr">
@@ -2881,6 +2857,10 @@
                 <a:solidFill>
                   <a:srgbClr val="FFFFFF"/>
                 </a:solidFill>
+                <a:latin typeface="+mn-lt"/>
+                <a:ea typeface="+mn-ea"/>
+                <a:cs typeface="+mn-cs"/>
+                <a:sym typeface="Calibri"/>
               </a:defRPr>
             </a:pPr>
           </a:p>
@@ -2894,8 +2874,8 @@
         </p:nvSpPr>
         <p:spPr>
           <a:xfrm>
-            <a:off x="1417320" y="4114800"/>
-            <a:ext cx="9326880" cy="300594"/>
+            <a:off x="1417319" y="4114800"/>
+            <a:ext cx="9326882" cy="300593"/>
           </a:xfrm>
           <a:prstGeom prst="rect">
             <a:avLst/>
@@ -2910,7 +2890,7 @@
           </a:extLst>
         </p:spPr>
         <p:txBody>
-          <a:bodyPr lIns="45719" rIns="45719">
+          <a:bodyPr lIns="45718" tIns="45718" rIns="45718" bIns="45718">
             <a:spAutoFit/>
           </a:bodyPr>
           <a:lstStyle>
@@ -2919,6 +2899,10 @@
                 <a:solidFill>
                   <a:srgbClr val="CADCFC"/>
                 </a:solidFill>
+                <a:latin typeface="+mn-lt"/>
+                <a:ea typeface="+mn-ea"/>
+                <a:cs typeface="+mn-cs"/>
+                <a:sym typeface="Calibri"/>
               </a:defRPr>
             </a:lvl1pPr>
           </a:lstStyle>
@@ -2938,8 +2922,8 @@
         </p:nvSpPr>
         <p:spPr>
           <a:xfrm>
-            <a:off x="1417320" y="4846320"/>
-            <a:ext cx="9326880" cy="280800"/>
+            <a:off x="1417319" y="4846321"/>
+            <a:ext cx="9326882" cy="280798"/>
           </a:xfrm>
           <a:prstGeom prst="rect">
             <a:avLst/>
@@ -2954,7 +2938,7 @@
           </a:extLst>
         </p:spPr>
         <p:txBody>
-          <a:bodyPr lIns="45719" rIns="45719">
+          <a:bodyPr lIns="45718" tIns="45718" rIns="45718" bIns="45718">
             <a:spAutoFit/>
           </a:bodyPr>
           <a:lstStyle>
@@ -2963,6 +2947,10 @@
                 <a:solidFill>
                   <a:srgbClr val="6B7B8D"/>
                 </a:solidFill>
+                <a:latin typeface="+mn-lt"/>
+                <a:ea typeface="+mn-ea"/>
+                <a:cs typeface="+mn-cs"/>
+                <a:sym typeface="Calibri"/>
               </a:defRPr>
             </a:lvl1pPr>
           </a:lstStyle>
@@ -3008,8 +2996,8 @@
         </p:nvSpPr>
         <p:spPr>
           <a:xfrm>
-            <a:off x="-1" y="-1"/>
-            <a:ext cx="12191697" cy="73154"/>
+            <a:off x="-1" y="-2"/>
+            <a:ext cx="12191697" cy="73156"/>
           </a:xfrm>
           <a:prstGeom prst="rect">
             <a:avLst/>
@@ -3029,7 +3017,7 @@
           </a:effectLst>
         </p:spPr>
         <p:txBody>
-          <a:bodyPr lIns="45719" rIns="45719" anchor="ctr"/>
+          <a:bodyPr lIns="45718" tIns="45718" rIns="45718" bIns="45718" anchor="ctr"/>
           <a:lstStyle/>
           <a:p>
             <a:pPr algn="ctr">
@@ -3037,6 +3025,10 @@
                 <a:solidFill>
                   <a:srgbClr val="FFFFFF"/>
                 </a:solidFill>
+                <a:latin typeface="+mn-lt"/>
+                <a:ea typeface="+mn-ea"/>
+                <a:cs typeface="+mn-cs"/>
+                <a:sym typeface="Calibri"/>
               </a:defRPr>
             </a:pPr>
           </a:p>
@@ -3051,7 +3043,7 @@
         <p:spPr>
           <a:xfrm>
             <a:off x="777239" y="457199"/>
-            <a:ext cx="9052561" cy="542242"/>
+            <a:ext cx="9052561" cy="542240"/>
           </a:xfrm>
           <a:prstGeom prst="rect">
             <a:avLst/>
@@ -3066,7 +3058,7 @@
           </a:extLst>
         </p:spPr>
         <p:txBody>
-          <a:bodyPr lIns="45719" rIns="45719">
+          <a:bodyPr lIns="45718" tIns="45718" rIns="45718" bIns="45718">
             <a:spAutoFit/>
           </a:bodyPr>
           <a:lstStyle>
@@ -3075,6 +3067,10 @@
                 <a:solidFill>
                   <a:srgbClr val="1E2761"/>
                 </a:solidFill>
+                <a:latin typeface="+mn-lt"/>
+                <a:ea typeface="+mn-ea"/>
+                <a:cs typeface="+mn-cs"/>
+                <a:sym typeface="Calibri"/>
               </a:defRPr>
             </a:lvl1pPr>
           </a:lstStyle>
@@ -3094,8 +3090,8 @@
         </p:nvSpPr>
         <p:spPr>
           <a:xfrm>
-            <a:off x="731519" y="1463039"/>
-            <a:ext cx="10698482" cy="1051561"/>
+            <a:off x="731519" y="1463038"/>
+            <a:ext cx="10698482" cy="1051562"/>
           </a:xfrm>
           <a:prstGeom prst="rect">
             <a:avLst/>
@@ -3115,7 +3111,7 @@
           </a:effectLst>
         </p:spPr>
         <p:txBody>
-          <a:bodyPr lIns="45719" rIns="45719" anchor="ctr"/>
+          <a:bodyPr lIns="45718" tIns="45718" rIns="45718" bIns="45718" anchor="ctr"/>
           <a:lstStyle/>
           <a:p>
             <a:pPr algn="ctr">
@@ -3123,6 +3119,10 @@
                 <a:solidFill>
                   <a:srgbClr val="FFFFFF"/>
                 </a:solidFill>
+                <a:latin typeface="+mn-lt"/>
+                <a:ea typeface="+mn-ea"/>
+                <a:cs typeface="+mn-cs"/>
+                <a:sym typeface="Calibri"/>
               </a:defRPr>
             </a:pPr>
           </a:p>
@@ -3136,8 +3136,8 @@
         </p:nvSpPr>
         <p:spPr>
           <a:xfrm>
-            <a:off x="731519" y="1463039"/>
-            <a:ext cx="73153" cy="1051561"/>
+            <a:off x="731519" y="1463038"/>
+            <a:ext cx="73154" cy="1051562"/>
           </a:xfrm>
           <a:prstGeom prst="rect">
             <a:avLst/>
@@ -3157,7 +3157,7 @@
           </a:effectLst>
         </p:spPr>
         <p:txBody>
-          <a:bodyPr lIns="45719" rIns="45719" anchor="ctr"/>
+          <a:bodyPr lIns="45718" tIns="45718" rIns="45718" bIns="45718" anchor="ctr"/>
           <a:lstStyle/>
           <a:p>
             <a:pPr algn="ctr">
@@ -3165,6 +3165,10 @@
                 <a:solidFill>
                   <a:srgbClr val="FFFFFF"/>
                 </a:solidFill>
+                <a:latin typeface="+mn-lt"/>
+                <a:ea typeface="+mn-ea"/>
+                <a:cs typeface="+mn-cs"/>
+                <a:sym typeface="Calibri"/>
               </a:defRPr>
             </a:pPr>
           </a:p>
@@ -3178,8 +3182,8 @@
         </p:nvSpPr>
         <p:spPr>
           <a:xfrm>
-            <a:off x="1005839" y="1645920"/>
-            <a:ext cx="457201" cy="457201"/>
+            <a:off x="1005838" y="1645920"/>
+            <a:ext cx="457203" cy="457203"/>
           </a:xfrm>
           <a:prstGeom prst="ellipse">
             <a:avLst/>
@@ -3199,7 +3203,7 @@
           </a:effectLst>
         </p:spPr>
         <p:txBody>
-          <a:bodyPr lIns="45719" rIns="45719" anchor="ctr"/>
+          <a:bodyPr lIns="45718" tIns="45718" rIns="45718" bIns="45718" anchor="ctr"/>
           <a:lstStyle/>
           <a:p>
             <a:pPr algn="ctr">
@@ -3207,6 +3211,10 @@
                 <a:solidFill>
                   <a:srgbClr val="FFFFFF"/>
                 </a:solidFill>
+                <a:latin typeface="+mn-lt"/>
+                <a:ea typeface="+mn-ea"/>
+                <a:cs typeface="+mn-cs"/>
+                <a:sym typeface="Calibri"/>
               </a:defRPr>
             </a:pPr>
           </a:p>
@@ -3220,8 +3228,8 @@
         </p:nvSpPr>
         <p:spPr>
           <a:xfrm>
-            <a:off x="1051559" y="1645920"/>
-            <a:ext cx="365761" cy="333088"/>
+            <a:off x="1051558" y="1645921"/>
+            <a:ext cx="365762" cy="333086"/>
           </a:xfrm>
           <a:prstGeom prst="rect">
             <a:avLst/>
@@ -3236,7 +3244,7 @@
           </a:extLst>
         </p:spPr>
         <p:txBody>
-          <a:bodyPr lIns="45719" rIns="45719">
+          <a:bodyPr lIns="45718" tIns="45718" rIns="45718" bIns="45718">
             <a:spAutoFit/>
           </a:bodyPr>
           <a:lstStyle>
@@ -3245,6 +3253,10 @@
                 <a:solidFill>
                   <a:srgbClr val="FFFFFF"/>
                 </a:solidFill>
+                <a:latin typeface="+mn-lt"/>
+                <a:ea typeface="+mn-ea"/>
+                <a:cs typeface="+mn-cs"/>
+                <a:sym typeface="Calibri"/>
               </a:defRPr>
             </a:lvl1pPr>
           </a:lstStyle>
@@ -3264,8 +3276,8 @@
         </p:nvSpPr>
         <p:spPr>
           <a:xfrm>
-            <a:off x="1691640" y="1536191"/>
-            <a:ext cx="9509761" cy="300595"/>
+            <a:off x="1691640" y="1536192"/>
+            <a:ext cx="9509761" cy="300592"/>
           </a:xfrm>
           <a:prstGeom prst="rect">
             <a:avLst/>
@@ -3280,7 +3292,7 @@
           </a:extLst>
         </p:spPr>
         <p:txBody>
-          <a:bodyPr lIns="45719" rIns="45719">
+          <a:bodyPr lIns="45718" tIns="45718" rIns="45718" bIns="45718">
             <a:spAutoFit/>
           </a:bodyPr>
           <a:lstStyle>
@@ -3289,6 +3301,10 @@
                 <a:solidFill>
                   <a:srgbClr val="1E2761"/>
                 </a:solidFill>
+                <a:latin typeface="+mn-lt"/>
+                <a:ea typeface="+mn-ea"/>
+                <a:cs typeface="+mn-cs"/>
+                <a:sym typeface="Calibri"/>
               </a:defRPr>
             </a:lvl1pPr>
           </a:lstStyle>
@@ -3309,7 +3325,7 @@
         <p:spPr>
           <a:xfrm>
             <a:off x="1691640" y="1920239"/>
-            <a:ext cx="9509761" cy="461403"/>
+            <a:ext cx="9509761" cy="461401"/>
           </a:xfrm>
           <a:prstGeom prst="rect">
             <a:avLst/>
@@ -3324,7 +3340,7 @@
           </a:extLst>
         </p:spPr>
         <p:txBody>
-          <a:bodyPr lIns="45719" rIns="45719">
+          <a:bodyPr lIns="45718" tIns="45718" rIns="45718" bIns="45718">
             <a:spAutoFit/>
           </a:bodyPr>
           <a:lstStyle>
@@ -3333,6 +3349,10 @@
                 <a:solidFill>
                   <a:srgbClr val="1A1A2E"/>
                 </a:solidFill>
+                <a:latin typeface="+mn-lt"/>
+                <a:ea typeface="+mn-ea"/>
+                <a:cs typeface="+mn-cs"/>
+                <a:sym typeface="Calibri"/>
               </a:defRPr>
             </a:lvl1pPr>
           </a:lstStyle>
@@ -3352,8 +3372,8 @@
         </p:nvSpPr>
         <p:spPr>
           <a:xfrm>
-            <a:off x="731519" y="2697479"/>
-            <a:ext cx="10698482" cy="1051561"/>
+            <a:off x="731519" y="2697478"/>
+            <a:ext cx="10698482" cy="1051562"/>
           </a:xfrm>
           <a:prstGeom prst="rect">
             <a:avLst/>
@@ -3373,7 +3393,7 @@
           </a:effectLst>
         </p:spPr>
         <p:txBody>
-          <a:bodyPr lIns="45719" rIns="45719" anchor="ctr"/>
+          <a:bodyPr lIns="45718" tIns="45718" rIns="45718" bIns="45718" anchor="ctr"/>
           <a:lstStyle/>
           <a:p>
             <a:pPr algn="ctr">
@@ -3381,6 +3401,10 @@
                 <a:solidFill>
                   <a:srgbClr val="FFFFFF"/>
                 </a:solidFill>
+                <a:latin typeface="+mn-lt"/>
+                <a:ea typeface="+mn-ea"/>
+                <a:cs typeface="+mn-cs"/>
+                <a:sym typeface="Calibri"/>
               </a:defRPr>
             </a:pPr>
           </a:p>
@@ -3394,8 +3418,8 @@
         </p:nvSpPr>
         <p:spPr>
           <a:xfrm>
-            <a:off x="731519" y="2697479"/>
-            <a:ext cx="73153" cy="1051561"/>
+            <a:off x="731519" y="2697478"/>
+            <a:ext cx="73154" cy="1051562"/>
           </a:xfrm>
           <a:prstGeom prst="rect">
             <a:avLst/>
@@ -3415,7 +3439,7 @@
           </a:effectLst>
         </p:spPr>
         <p:txBody>
-          <a:bodyPr lIns="45719" rIns="45719" anchor="ctr"/>
+          <a:bodyPr lIns="45718" tIns="45718" rIns="45718" bIns="45718" anchor="ctr"/>
           <a:lstStyle/>
           <a:p>
             <a:pPr algn="ctr">
@@ -3423,6 +3447,10 @@
                 <a:solidFill>
                   <a:srgbClr val="FFFFFF"/>
                 </a:solidFill>
+                <a:latin typeface="+mn-lt"/>
+                <a:ea typeface="+mn-ea"/>
+                <a:cs typeface="+mn-cs"/>
+                <a:sym typeface="Calibri"/>
               </a:defRPr>
             </a:pPr>
           </a:p>
@@ -3436,8 +3464,8 @@
         </p:nvSpPr>
         <p:spPr>
           <a:xfrm>
-            <a:off x="1005839" y="2880360"/>
-            <a:ext cx="457201" cy="457201"/>
+            <a:off x="1005838" y="2880360"/>
+            <a:ext cx="457203" cy="457203"/>
           </a:xfrm>
           <a:prstGeom prst="ellipse">
             <a:avLst/>
@@ -3457,7 +3485,7 @@
           </a:effectLst>
         </p:spPr>
         <p:txBody>
-          <a:bodyPr lIns="45719" rIns="45719" anchor="ctr"/>
+          <a:bodyPr lIns="45718" tIns="45718" rIns="45718" bIns="45718" anchor="ctr"/>
           <a:lstStyle/>
           <a:p>
             <a:pPr algn="ctr">
@@ -3465,6 +3493,10 @@
                 <a:solidFill>
                   <a:srgbClr val="FFFFFF"/>
                 </a:solidFill>
+                <a:latin typeface="+mn-lt"/>
+                <a:ea typeface="+mn-ea"/>
+                <a:cs typeface="+mn-cs"/>
+                <a:sym typeface="Calibri"/>
               </a:defRPr>
             </a:pPr>
           </a:p>
@@ -3478,8 +3510,8 @@
         </p:nvSpPr>
         <p:spPr>
           <a:xfrm>
-            <a:off x="1051559" y="2880360"/>
-            <a:ext cx="365761" cy="333088"/>
+            <a:off x="1051558" y="2880361"/>
+            <a:ext cx="365762" cy="333086"/>
           </a:xfrm>
           <a:prstGeom prst="rect">
             <a:avLst/>
@@ -3494,7 +3526,7 @@
           </a:extLst>
         </p:spPr>
         <p:txBody>
-          <a:bodyPr lIns="45719" rIns="45719">
+          <a:bodyPr lIns="45718" tIns="45718" rIns="45718" bIns="45718">
             <a:spAutoFit/>
           </a:bodyPr>
           <a:lstStyle>
@@ -3503,6 +3535,10 @@
                 <a:solidFill>
                   <a:srgbClr val="FFFFFF"/>
                 </a:solidFill>
+                <a:latin typeface="+mn-lt"/>
+                <a:ea typeface="+mn-ea"/>
+                <a:cs typeface="+mn-cs"/>
+                <a:sym typeface="Calibri"/>
               </a:defRPr>
             </a:lvl1pPr>
           </a:lstStyle>
@@ -3522,8 +3558,8 @@
         </p:nvSpPr>
         <p:spPr>
           <a:xfrm>
-            <a:off x="1691640" y="2770632"/>
-            <a:ext cx="9509761" cy="300594"/>
+            <a:off x="1691640" y="2770633"/>
+            <a:ext cx="9509761" cy="300592"/>
           </a:xfrm>
           <a:prstGeom prst="rect">
             <a:avLst/>
@@ -3538,7 +3574,7 @@
           </a:extLst>
         </p:spPr>
         <p:txBody>
-          <a:bodyPr lIns="45719" rIns="45719">
+          <a:bodyPr lIns="45718" tIns="45718" rIns="45718" bIns="45718">
             <a:spAutoFit/>
           </a:bodyPr>
           <a:lstStyle>
@@ -3547,6 +3583,10 @@
                 <a:solidFill>
                   <a:srgbClr val="1E2761"/>
                 </a:solidFill>
+                <a:latin typeface="+mn-lt"/>
+                <a:ea typeface="+mn-ea"/>
+                <a:cs typeface="+mn-cs"/>
+                <a:sym typeface="Calibri"/>
               </a:defRPr>
             </a:lvl1pPr>
           </a:lstStyle>
@@ -3567,7 +3607,7 @@
         <p:spPr>
           <a:xfrm>
             <a:off x="1691640" y="3154679"/>
-            <a:ext cx="9509761" cy="461403"/>
+            <a:ext cx="9509761" cy="461401"/>
           </a:xfrm>
           <a:prstGeom prst="rect">
             <a:avLst/>
@@ -3582,7 +3622,7 @@
           </a:extLst>
         </p:spPr>
         <p:txBody>
-          <a:bodyPr lIns="45719" rIns="45719">
+          <a:bodyPr lIns="45718" tIns="45718" rIns="45718" bIns="45718">
             <a:spAutoFit/>
           </a:bodyPr>
           <a:lstStyle>
@@ -3591,6 +3631,10 @@
                 <a:solidFill>
                   <a:srgbClr val="1A1A2E"/>
                 </a:solidFill>
+                <a:latin typeface="+mn-lt"/>
+                <a:ea typeface="+mn-ea"/>
+                <a:cs typeface="+mn-cs"/>
+                <a:sym typeface="Calibri"/>
               </a:defRPr>
             </a:lvl1pPr>
           </a:lstStyle>
@@ -3611,7 +3655,7 @@
         <p:spPr>
           <a:xfrm>
             <a:off x="731519" y="3931920"/>
-            <a:ext cx="10698482" cy="1051561"/>
+            <a:ext cx="10698482" cy="1051562"/>
           </a:xfrm>
           <a:prstGeom prst="rect">
             <a:avLst/>
@@ -3631,7 +3675,7 @@
           </a:effectLst>
         </p:spPr>
         <p:txBody>
-          <a:bodyPr lIns="45719" rIns="45719" anchor="ctr"/>
+          <a:bodyPr lIns="45718" tIns="45718" rIns="45718" bIns="45718" anchor="ctr"/>
           <a:lstStyle/>
           <a:p>
             <a:pPr algn="ctr">
@@ -3639,6 +3683,10 @@
                 <a:solidFill>
                   <a:srgbClr val="FFFFFF"/>
                 </a:solidFill>
+                <a:latin typeface="+mn-lt"/>
+                <a:ea typeface="+mn-ea"/>
+                <a:cs typeface="+mn-cs"/>
+                <a:sym typeface="Calibri"/>
               </a:defRPr>
             </a:pPr>
           </a:p>
@@ -3653,7 +3701,7 @@
         <p:spPr>
           <a:xfrm>
             <a:off x="731519" y="3931920"/>
-            <a:ext cx="73153" cy="1051561"/>
+            <a:ext cx="73154" cy="1051562"/>
           </a:xfrm>
           <a:prstGeom prst="rect">
             <a:avLst/>
@@ -3673,7 +3721,7 @@
           </a:effectLst>
         </p:spPr>
         <p:txBody>
-          <a:bodyPr lIns="45719" rIns="45719" anchor="ctr"/>
+          <a:bodyPr lIns="45718" tIns="45718" rIns="45718" bIns="45718" anchor="ctr"/>
           <a:lstStyle/>
           <a:p>
             <a:pPr algn="ctr">
@@ -3681,6 +3729,10 @@
                 <a:solidFill>
                   <a:srgbClr val="FFFFFF"/>
                 </a:solidFill>
+                <a:latin typeface="+mn-lt"/>
+                <a:ea typeface="+mn-ea"/>
+                <a:cs typeface="+mn-cs"/>
+                <a:sym typeface="Calibri"/>
               </a:defRPr>
             </a:pPr>
           </a:p>
@@ -3694,8 +3746,8 @@
         </p:nvSpPr>
         <p:spPr>
           <a:xfrm>
-            <a:off x="1005839" y="4114800"/>
-            <a:ext cx="457201" cy="457200"/>
+            <a:off x="1005838" y="4114800"/>
+            <a:ext cx="457203" cy="457200"/>
           </a:xfrm>
           <a:prstGeom prst="ellipse">
             <a:avLst/>
@@ -3715,7 +3767,7 @@
           </a:effectLst>
         </p:spPr>
         <p:txBody>
-          <a:bodyPr lIns="45719" rIns="45719" anchor="ctr"/>
+          <a:bodyPr lIns="45718" tIns="45718" rIns="45718" bIns="45718" anchor="ctr"/>
           <a:lstStyle/>
           <a:p>
             <a:pPr algn="ctr">
@@ -3723,6 +3775,10 @@
                 <a:solidFill>
                   <a:srgbClr val="FFFFFF"/>
                 </a:solidFill>
+                <a:latin typeface="+mn-lt"/>
+                <a:ea typeface="+mn-ea"/>
+                <a:cs typeface="+mn-cs"/>
+                <a:sym typeface="Calibri"/>
               </a:defRPr>
             </a:pPr>
           </a:p>
@@ -3736,8 +3792,8 @@
         </p:nvSpPr>
         <p:spPr>
           <a:xfrm>
-            <a:off x="1051559" y="4114800"/>
-            <a:ext cx="365761" cy="333088"/>
+            <a:off x="1051558" y="4114800"/>
+            <a:ext cx="365762" cy="333087"/>
           </a:xfrm>
           <a:prstGeom prst="rect">
             <a:avLst/>
@@ -3752,7 +3808,7 @@
           </a:extLst>
         </p:spPr>
         <p:txBody>
-          <a:bodyPr lIns="45719" rIns="45719">
+          <a:bodyPr lIns="45718" tIns="45718" rIns="45718" bIns="45718">
             <a:spAutoFit/>
           </a:bodyPr>
           <a:lstStyle>
@@ -3761,6 +3817,10 @@
                 <a:solidFill>
                   <a:srgbClr val="FFFFFF"/>
                 </a:solidFill>
+                <a:latin typeface="+mn-lt"/>
+                <a:ea typeface="+mn-ea"/>
+                <a:cs typeface="+mn-cs"/>
+                <a:sym typeface="Calibri"/>
               </a:defRPr>
             </a:lvl1pPr>
           </a:lstStyle>
@@ -3780,8 +3840,8 @@
         </p:nvSpPr>
         <p:spPr>
           <a:xfrm>
-            <a:off x="1691640" y="4005071"/>
-            <a:ext cx="9509761" cy="300594"/>
+            <a:off x="1691640" y="4005072"/>
+            <a:ext cx="9509761" cy="300592"/>
           </a:xfrm>
           <a:prstGeom prst="rect">
             <a:avLst/>
@@ -3796,7 +3856,7 @@
           </a:extLst>
         </p:spPr>
         <p:txBody>
-          <a:bodyPr lIns="45719" rIns="45719">
+          <a:bodyPr lIns="45718" tIns="45718" rIns="45718" bIns="45718">
             <a:spAutoFit/>
           </a:bodyPr>
           <a:lstStyle>
@@ -3805,6 +3865,10 @@
                 <a:solidFill>
                   <a:srgbClr val="1E2761"/>
                 </a:solidFill>
+                <a:latin typeface="+mn-lt"/>
+                <a:ea typeface="+mn-ea"/>
+                <a:cs typeface="+mn-cs"/>
+                <a:sym typeface="Calibri"/>
               </a:defRPr>
             </a:lvl1pPr>
           </a:lstStyle>
@@ -3824,8 +3888,8 @@
         </p:nvSpPr>
         <p:spPr>
           <a:xfrm>
-            <a:off x="1691640" y="4389120"/>
-            <a:ext cx="9509761" cy="461402"/>
+            <a:off x="1691640" y="4389121"/>
+            <a:ext cx="9509761" cy="461400"/>
           </a:xfrm>
           <a:prstGeom prst="rect">
             <a:avLst/>
@@ -3840,7 +3904,7 @@
           </a:extLst>
         </p:spPr>
         <p:txBody>
-          <a:bodyPr lIns="45719" rIns="45719">
+          <a:bodyPr lIns="45718" tIns="45718" rIns="45718" bIns="45718">
             <a:spAutoFit/>
           </a:bodyPr>
           <a:lstStyle>
@@ -3849,6 +3913,10 @@
                 <a:solidFill>
                   <a:srgbClr val="1A1A2E"/>
                 </a:solidFill>
+                <a:latin typeface="+mn-lt"/>
+                <a:ea typeface="+mn-ea"/>
+                <a:cs typeface="+mn-cs"/>
+                <a:sym typeface="Calibri"/>
               </a:defRPr>
             </a:lvl1pPr>
           </a:lstStyle>
@@ -3869,7 +3937,7 @@
         <p:spPr>
           <a:xfrm>
             <a:off x="731519" y="5166359"/>
-            <a:ext cx="10698482" cy="1051561"/>
+            <a:ext cx="10698482" cy="1051562"/>
           </a:xfrm>
           <a:prstGeom prst="rect">
             <a:avLst/>
@@ -3889,7 +3957,7 @@
           </a:effectLst>
         </p:spPr>
         <p:txBody>
-          <a:bodyPr lIns="45719" rIns="45719" anchor="ctr"/>
+          <a:bodyPr lIns="45718" tIns="45718" rIns="45718" bIns="45718" anchor="ctr"/>
           <a:lstStyle/>
           <a:p>
             <a:pPr algn="ctr">
@@ -3897,6 +3965,10 @@
                 <a:solidFill>
                   <a:srgbClr val="FFFFFF"/>
                 </a:solidFill>
+                <a:latin typeface="+mn-lt"/>
+                <a:ea typeface="+mn-ea"/>
+                <a:cs typeface="+mn-cs"/>
+                <a:sym typeface="Calibri"/>
               </a:defRPr>
             </a:pPr>
           </a:p>
@@ -3911,7 +3983,7 @@
         <p:spPr>
           <a:xfrm>
             <a:off x="731519" y="5166359"/>
-            <a:ext cx="73153" cy="1051561"/>
+            <a:ext cx="73154" cy="1051562"/>
           </a:xfrm>
           <a:prstGeom prst="rect">
             <a:avLst/>
@@ -3931,7 +4003,7 @@
           </a:effectLst>
         </p:spPr>
         <p:txBody>
-          <a:bodyPr lIns="45719" rIns="45719" anchor="ctr"/>
+          <a:bodyPr lIns="45718" tIns="45718" rIns="45718" bIns="45718" anchor="ctr"/>
           <a:lstStyle/>
           <a:p>
             <a:pPr algn="ctr">
@@ -3939,6 +4011,10 @@
                 <a:solidFill>
                   <a:srgbClr val="FFFFFF"/>
                 </a:solidFill>
+                <a:latin typeface="+mn-lt"/>
+                <a:ea typeface="+mn-ea"/>
+                <a:cs typeface="+mn-cs"/>
+                <a:sym typeface="Calibri"/>
               </a:defRPr>
             </a:pPr>
           </a:p>
@@ -3952,8 +4028,8 @@
         </p:nvSpPr>
         <p:spPr>
           <a:xfrm>
-            <a:off x="1005839" y="5349240"/>
-            <a:ext cx="457201" cy="457201"/>
+            <a:off x="1005838" y="5349240"/>
+            <a:ext cx="457203" cy="457203"/>
           </a:xfrm>
           <a:prstGeom prst="ellipse">
             <a:avLst/>
@@ -3973,7 +4049,7 @@
           </a:effectLst>
         </p:spPr>
         <p:txBody>
-          <a:bodyPr lIns="45719" rIns="45719" anchor="ctr"/>
+          <a:bodyPr lIns="45718" tIns="45718" rIns="45718" bIns="45718" anchor="ctr"/>
           <a:lstStyle/>
           <a:p>
             <a:pPr algn="ctr">
@@ -3981,6 +4057,10 @@
                 <a:solidFill>
                   <a:srgbClr val="FFFFFF"/>
                 </a:solidFill>
+                <a:latin typeface="+mn-lt"/>
+                <a:ea typeface="+mn-ea"/>
+                <a:cs typeface="+mn-cs"/>
+                <a:sym typeface="Calibri"/>
               </a:defRPr>
             </a:pPr>
           </a:p>
@@ -3994,8 +4074,8 @@
         </p:nvSpPr>
         <p:spPr>
           <a:xfrm>
-            <a:off x="1051559" y="5349240"/>
-            <a:ext cx="365761" cy="333088"/>
+            <a:off x="1051558" y="5349241"/>
+            <a:ext cx="365762" cy="333086"/>
           </a:xfrm>
           <a:prstGeom prst="rect">
             <a:avLst/>
@@ -4010,7 +4090,7 @@
           </a:extLst>
         </p:spPr>
         <p:txBody>
-          <a:bodyPr lIns="45719" rIns="45719">
+          <a:bodyPr lIns="45718" tIns="45718" rIns="45718" bIns="45718">
             <a:spAutoFit/>
           </a:bodyPr>
           <a:lstStyle>
@@ -4019,6 +4099,10 @@
                 <a:solidFill>
                   <a:srgbClr val="FFFFFF"/>
                 </a:solidFill>
+                <a:latin typeface="+mn-lt"/>
+                <a:ea typeface="+mn-ea"/>
+                <a:cs typeface="+mn-cs"/>
+                <a:sym typeface="Calibri"/>
               </a:defRPr>
             </a:lvl1pPr>
           </a:lstStyle>
@@ -4039,7 +4123,7 @@
         <p:spPr>
           <a:xfrm>
             <a:off x="1691640" y="5239511"/>
-            <a:ext cx="9509761" cy="300595"/>
+            <a:ext cx="9509761" cy="300592"/>
           </a:xfrm>
           <a:prstGeom prst="rect">
             <a:avLst/>
@@ -4054,7 +4138,7 @@
           </a:extLst>
         </p:spPr>
         <p:txBody>
-          <a:bodyPr lIns="45719" rIns="45719">
+          <a:bodyPr lIns="45718" tIns="45718" rIns="45718" bIns="45718">
             <a:spAutoFit/>
           </a:bodyPr>
           <a:lstStyle>
@@ -4063,6 +4147,10 @@
                 <a:solidFill>
                   <a:srgbClr val="1E2761"/>
                 </a:solidFill>
+                <a:latin typeface="+mn-lt"/>
+                <a:ea typeface="+mn-ea"/>
+                <a:cs typeface="+mn-cs"/>
+                <a:sym typeface="Calibri"/>
               </a:defRPr>
             </a:lvl1pPr>
           </a:lstStyle>
@@ -4082,8 +4170,8 @@
         </p:nvSpPr>
         <p:spPr>
           <a:xfrm>
-            <a:off x="1691640" y="5623559"/>
-            <a:ext cx="9509761" cy="461403"/>
+            <a:off x="1691640" y="5623560"/>
+            <a:ext cx="9509761" cy="461400"/>
           </a:xfrm>
           <a:prstGeom prst="rect">
             <a:avLst/>
@@ -4098,7 +4186,7 @@
           </a:extLst>
         </p:spPr>
         <p:txBody>
-          <a:bodyPr lIns="45719" rIns="45719">
+          <a:bodyPr lIns="45718" tIns="45718" rIns="45718" bIns="45718">
             <a:spAutoFit/>
           </a:bodyPr>
           <a:lstStyle>
@@ -4107,13 +4195,17 @@
                 <a:solidFill>
                   <a:srgbClr val="1A1A2E"/>
                 </a:solidFill>
+                <a:latin typeface="+mn-lt"/>
+                <a:ea typeface="+mn-ea"/>
+                <a:cs typeface="+mn-cs"/>
+                <a:sym typeface="Calibri"/>
               </a:defRPr>
             </a:lvl1pPr>
           </a:lstStyle>
           <a:p>
             <a:pPr/>
             <a:r>
-              <a:t>El modelo de segmentación fue entrenado con un dataset distinto al de clasificación. Diferencias en equipos OCT y resolución amplifican la degradación del Mod. 2.</a:t>
+              <a:t>El modelo de segmentación fue entrenado con un dataset distinto al de clasificación. Diferencias en equipos OCT y resolución amplifican la degradación del Modelo 2.</a:t>
             </a:r>
           </a:p>
         </p:txBody>
@@ -4152,8 +4244,8 @@
         </p:nvSpPr>
         <p:spPr>
           <a:xfrm>
-            <a:off x="-1" y="-1"/>
-            <a:ext cx="12191697" cy="73154"/>
+            <a:off x="-1" y="-2"/>
+            <a:ext cx="12191697" cy="73156"/>
           </a:xfrm>
           <a:prstGeom prst="rect">
             <a:avLst/>
@@ -4173,7 +4265,7 @@
           </a:effectLst>
         </p:spPr>
         <p:txBody>
-          <a:bodyPr lIns="45719" rIns="45719" anchor="ctr"/>
+          <a:bodyPr lIns="45718" tIns="45718" rIns="45718" bIns="45718" anchor="ctr"/>
           <a:lstStyle/>
           <a:p>
             <a:pPr algn="ctr">
@@ -4181,6 +4273,10 @@
                 <a:solidFill>
                   <a:srgbClr val="FFFFFF"/>
                 </a:solidFill>
+                <a:latin typeface="+mn-lt"/>
+                <a:ea typeface="+mn-ea"/>
+                <a:cs typeface="+mn-cs"/>
+                <a:sym typeface="Calibri"/>
               </a:defRPr>
             </a:pPr>
           </a:p>
@@ -4195,7 +4291,7 @@
         <p:spPr>
           <a:xfrm>
             <a:off x="777239" y="457199"/>
-            <a:ext cx="9052561" cy="542242"/>
+            <a:ext cx="9052561" cy="542240"/>
           </a:xfrm>
           <a:prstGeom prst="rect">
             <a:avLst/>
@@ -4210,7 +4306,7 @@
           </a:extLst>
         </p:spPr>
         <p:txBody>
-          <a:bodyPr lIns="45719" rIns="45719">
+          <a:bodyPr lIns="45718" tIns="45718" rIns="45718" bIns="45718">
             <a:spAutoFit/>
           </a:bodyPr>
           <a:lstStyle>
@@ -4219,6 +4315,10 @@
                 <a:solidFill>
                   <a:srgbClr val="1E2761"/>
                 </a:solidFill>
+                <a:latin typeface="+mn-lt"/>
+                <a:ea typeface="+mn-ea"/>
+                <a:cs typeface="+mn-cs"/>
+                <a:sym typeface="Calibri"/>
               </a:defRPr>
             </a:lvl1pPr>
           </a:lstStyle>
@@ -4238,8 +4338,8 @@
         </p:nvSpPr>
         <p:spPr>
           <a:xfrm>
-            <a:off x="777239" y="1463039"/>
-            <a:ext cx="5394961" cy="385377"/>
+            <a:off x="777238" y="1463039"/>
+            <a:ext cx="5394962" cy="385375"/>
           </a:xfrm>
           <a:prstGeom prst="rect">
             <a:avLst/>
@@ -4254,7 +4354,7 @@
           </a:extLst>
         </p:spPr>
         <p:txBody>
-          <a:bodyPr lIns="45719" rIns="45719">
+          <a:bodyPr lIns="45718" tIns="45718" rIns="45718" bIns="45718">
             <a:spAutoFit/>
           </a:bodyPr>
           <a:lstStyle>
@@ -4263,6 +4363,10 @@
                 <a:solidFill>
                   <a:srgbClr val="00A896"/>
                 </a:solidFill>
+                <a:latin typeface="+mn-lt"/>
+                <a:ea typeface="+mn-ea"/>
+                <a:cs typeface="+mn-cs"/>
+                <a:sym typeface="Calibri"/>
               </a:defRPr>
             </a:lvl1pPr>
           </a:lstStyle>
@@ -4283,7 +4387,7 @@
         <p:spPr>
           <a:xfrm>
             <a:off x="731519" y="2103120"/>
-            <a:ext cx="54865" cy="822961"/>
+            <a:ext cx="54866" cy="822962"/>
           </a:xfrm>
           <a:prstGeom prst="rect">
             <a:avLst/>
@@ -4303,7 +4407,7 @@
           </a:effectLst>
         </p:spPr>
         <p:txBody>
-          <a:bodyPr lIns="45719" rIns="45719" anchor="ctr"/>
+          <a:bodyPr lIns="45718" tIns="45718" rIns="45718" bIns="45718" anchor="ctr"/>
           <a:lstStyle/>
           <a:p>
             <a:pPr algn="ctr">
@@ -4311,6 +4415,10 @@
                 <a:solidFill>
                   <a:srgbClr val="FFFFFF"/>
                 </a:solidFill>
+                <a:latin typeface="+mn-lt"/>
+                <a:ea typeface="+mn-ea"/>
+                <a:cs typeface="+mn-cs"/>
+                <a:sym typeface="Calibri"/>
               </a:defRPr>
             </a:pPr>
           </a:p>
@@ -4324,8 +4432,8 @@
         </p:nvSpPr>
         <p:spPr>
           <a:xfrm>
-            <a:off x="1143000" y="2103120"/>
-            <a:ext cx="4663440" cy="300594"/>
+            <a:off x="1142999" y="2103121"/>
+            <a:ext cx="4663442" cy="300592"/>
           </a:xfrm>
           <a:prstGeom prst="rect">
             <a:avLst/>
@@ -4340,7 +4448,7 @@
           </a:extLst>
         </p:spPr>
         <p:txBody>
-          <a:bodyPr lIns="45719" rIns="45719">
+          <a:bodyPr lIns="45718" tIns="45718" rIns="45718" bIns="45718">
             <a:spAutoFit/>
           </a:bodyPr>
           <a:lstStyle>
@@ -4349,6 +4457,10 @@
                 <a:solidFill>
                   <a:srgbClr val="1E2761"/>
                 </a:solidFill>
+                <a:latin typeface="+mn-lt"/>
+                <a:ea typeface="+mn-ea"/>
+                <a:cs typeface="+mn-cs"/>
+                <a:sym typeface="Calibri"/>
               </a:defRPr>
             </a:lvl1pPr>
           </a:lstStyle>
@@ -4368,8 +4480,8 @@
         </p:nvSpPr>
         <p:spPr>
           <a:xfrm>
-            <a:off x="1143000" y="2468878"/>
-            <a:ext cx="4663440" cy="461403"/>
+            <a:off x="1142999" y="2468878"/>
+            <a:ext cx="4663442" cy="461401"/>
           </a:xfrm>
           <a:prstGeom prst="rect">
             <a:avLst/>
@@ -4384,7 +4496,7 @@
           </a:extLst>
         </p:spPr>
         <p:txBody>
-          <a:bodyPr lIns="45719" rIns="45719">
+          <a:bodyPr lIns="45718" tIns="45718" rIns="45718" bIns="45718">
             <a:spAutoFit/>
           </a:bodyPr>
           <a:lstStyle>
@@ -4393,6 +4505,10 @@
                 <a:solidFill>
                   <a:srgbClr val="1A1A2E"/>
                 </a:solidFill>
+                <a:latin typeface="+mn-lt"/>
+                <a:ea typeface="+mn-ea"/>
+                <a:cs typeface="+mn-cs"/>
+                <a:sym typeface="Calibri"/>
               </a:defRPr>
             </a:lvl1pPr>
           </a:lstStyle>
@@ -4413,7 +4529,7 @@
         <p:spPr>
           <a:xfrm>
             <a:off x="731519" y="3108960"/>
-            <a:ext cx="54865" cy="822961"/>
+            <a:ext cx="54866" cy="822962"/>
           </a:xfrm>
           <a:prstGeom prst="rect">
             <a:avLst/>
@@ -4433,7 +4549,7 @@
           </a:effectLst>
         </p:spPr>
         <p:txBody>
-          <a:bodyPr lIns="45719" rIns="45719" anchor="ctr"/>
+          <a:bodyPr lIns="45718" tIns="45718" rIns="45718" bIns="45718" anchor="ctr"/>
           <a:lstStyle/>
           <a:p>
             <a:pPr algn="ctr">
@@ -4441,6 +4557,10 @@
                 <a:solidFill>
                   <a:srgbClr val="FFFFFF"/>
                 </a:solidFill>
+                <a:latin typeface="+mn-lt"/>
+                <a:ea typeface="+mn-ea"/>
+                <a:cs typeface="+mn-cs"/>
+                <a:sym typeface="Calibri"/>
               </a:defRPr>
             </a:pPr>
           </a:p>
@@ -4454,8 +4574,8 @@
         </p:nvSpPr>
         <p:spPr>
           <a:xfrm>
-            <a:off x="1143000" y="3108960"/>
-            <a:ext cx="4663440" cy="300594"/>
+            <a:off x="1142999" y="3108961"/>
+            <a:ext cx="4663442" cy="300592"/>
           </a:xfrm>
           <a:prstGeom prst="rect">
             <a:avLst/>
@@ -4470,7 +4590,7 @@
           </a:extLst>
         </p:spPr>
         <p:txBody>
-          <a:bodyPr lIns="45719" rIns="45719">
+          <a:bodyPr lIns="45718" tIns="45718" rIns="45718" bIns="45718">
             <a:spAutoFit/>
           </a:bodyPr>
           <a:lstStyle>
@@ -4479,6 +4599,10 @@
                 <a:solidFill>
                   <a:srgbClr val="1E2761"/>
                 </a:solidFill>
+                <a:latin typeface="+mn-lt"/>
+                <a:ea typeface="+mn-ea"/>
+                <a:cs typeface="+mn-cs"/>
+                <a:sym typeface="Calibri"/>
               </a:defRPr>
             </a:lvl1pPr>
           </a:lstStyle>
@@ -4498,8 +4622,8 @@
         </p:nvSpPr>
         <p:spPr>
           <a:xfrm>
-            <a:off x="1143000" y="3474720"/>
-            <a:ext cx="4663440" cy="461402"/>
+            <a:off x="1142999" y="3474721"/>
+            <a:ext cx="4663442" cy="461400"/>
           </a:xfrm>
           <a:prstGeom prst="rect">
             <a:avLst/>
@@ -4514,7 +4638,7 @@
           </a:extLst>
         </p:spPr>
         <p:txBody>
-          <a:bodyPr lIns="45719" rIns="45719">
+          <a:bodyPr lIns="45718" tIns="45718" rIns="45718" bIns="45718">
             <a:spAutoFit/>
           </a:bodyPr>
           <a:lstStyle>
@@ -4523,6 +4647,10 @@
                 <a:solidFill>
                   <a:srgbClr val="1A1A2E"/>
                 </a:solidFill>
+                <a:latin typeface="+mn-lt"/>
+                <a:ea typeface="+mn-ea"/>
+                <a:cs typeface="+mn-cs"/>
+                <a:sym typeface="Calibri"/>
               </a:defRPr>
             </a:lvl1pPr>
           </a:lstStyle>
@@ -4542,8 +4670,8 @@
         </p:nvSpPr>
         <p:spPr>
           <a:xfrm>
-            <a:off x="731519" y="4114799"/>
-            <a:ext cx="54865" cy="822962"/>
+            <a:off x="731519" y="4114798"/>
+            <a:ext cx="54866" cy="822963"/>
           </a:xfrm>
           <a:prstGeom prst="rect">
             <a:avLst/>
@@ -4563,7 +4691,7 @@
           </a:effectLst>
         </p:spPr>
         <p:txBody>
-          <a:bodyPr lIns="45719" rIns="45719" anchor="ctr"/>
+          <a:bodyPr lIns="45718" tIns="45718" rIns="45718" bIns="45718" anchor="ctr"/>
           <a:lstStyle/>
           <a:p>
             <a:pPr algn="ctr">
@@ -4571,6 +4699,10 @@
                 <a:solidFill>
                   <a:srgbClr val="FFFFFF"/>
                 </a:solidFill>
+                <a:latin typeface="+mn-lt"/>
+                <a:ea typeface="+mn-ea"/>
+                <a:cs typeface="+mn-cs"/>
+                <a:sym typeface="Calibri"/>
               </a:defRPr>
             </a:pPr>
           </a:p>
@@ -4584,8 +4716,8 @@
         </p:nvSpPr>
         <p:spPr>
           <a:xfrm>
-            <a:off x="1143000" y="4114799"/>
-            <a:ext cx="4663440" cy="300595"/>
+            <a:off x="1142999" y="4114799"/>
+            <a:ext cx="4663442" cy="300592"/>
           </a:xfrm>
           <a:prstGeom prst="rect">
             <a:avLst/>
@@ -4600,7 +4732,7 @@
           </a:extLst>
         </p:spPr>
         <p:txBody>
-          <a:bodyPr lIns="45719" rIns="45719">
+          <a:bodyPr lIns="45718" tIns="45718" rIns="45718" bIns="45718">
             <a:spAutoFit/>
           </a:bodyPr>
           <a:lstStyle>
@@ -4609,6 +4741,10 @@
                 <a:solidFill>
                   <a:srgbClr val="1E2761"/>
                 </a:solidFill>
+                <a:latin typeface="+mn-lt"/>
+                <a:ea typeface="+mn-ea"/>
+                <a:cs typeface="+mn-cs"/>
+                <a:sym typeface="Calibri"/>
               </a:defRPr>
             </a:lvl1pPr>
           </a:lstStyle>
@@ -4628,8 +4764,8 @@
         </p:nvSpPr>
         <p:spPr>
           <a:xfrm>
-            <a:off x="1143000" y="4480559"/>
-            <a:ext cx="4663440" cy="461403"/>
+            <a:off x="1142999" y="4480560"/>
+            <a:ext cx="4663442" cy="461400"/>
           </a:xfrm>
           <a:prstGeom prst="rect">
             <a:avLst/>
@@ -4644,7 +4780,7 @@
           </a:extLst>
         </p:spPr>
         <p:txBody>
-          <a:bodyPr lIns="45719" rIns="45719">
+          <a:bodyPr lIns="45718" tIns="45718" rIns="45718" bIns="45718">
             <a:spAutoFit/>
           </a:bodyPr>
           <a:lstStyle>
@@ -4653,6 +4789,10 @@
                 <a:solidFill>
                   <a:srgbClr val="1A1A2E"/>
                 </a:solidFill>
+                <a:latin typeface="+mn-lt"/>
+                <a:ea typeface="+mn-ea"/>
+                <a:cs typeface="+mn-cs"/>
+                <a:sym typeface="Calibri"/>
               </a:defRPr>
             </a:lvl1pPr>
           </a:lstStyle>
@@ -4673,7 +4813,7 @@
         <p:spPr>
           <a:xfrm>
             <a:off x="731519" y="5120640"/>
-            <a:ext cx="54865" cy="822961"/>
+            <a:ext cx="54866" cy="822962"/>
           </a:xfrm>
           <a:prstGeom prst="rect">
             <a:avLst/>
@@ -4693,7 +4833,7 @@
           </a:effectLst>
         </p:spPr>
         <p:txBody>
-          <a:bodyPr lIns="45719" rIns="45719" anchor="ctr"/>
+          <a:bodyPr lIns="45718" tIns="45718" rIns="45718" bIns="45718" anchor="ctr"/>
           <a:lstStyle/>
           <a:p>
             <a:pPr algn="ctr">
@@ -4701,6 +4841,10 @@
                 <a:solidFill>
                   <a:srgbClr val="FFFFFF"/>
                 </a:solidFill>
+                <a:latin typeface="+mn-lt"/>
+                <a:ea typeface="+mn-ea"/>
+                <a:cs typeface="+mn-cs"/>
+                <a:sym typeface="Calibri"/>
               </a:defRPr>
             </a:pPr>
           </a:p>
@@ -4714,8 +4858,8 @@
         </p:nvSpPr>
         <p:spPr>
           <a:xfrm>
-            <a:off x="1143000" y="5120640"/>
-            <a:ext cx="4663440" cy="300594"/>
+            <a:off x="1142999" y="5120641"/>
+            <a:ext cx="4663442" cy="300592"/>
           </a:xfrm>
           <a:prstGeom prst="rect">
             <a:avLst/>
@@ -4730,7 +4874,7 @@
           </a:extLst>
         </p:spPr>
         <p:txBody>
-          <a:bodyPr lIns="45719" rIns="45719">
+          <a:bodyPr lIns="45718" tIns="45718" rIns="45718" bIns="45718">
             <a:spAutoFit/>
           </a:bodyPr>
           <a:lstStyle>
@@ -4739,6 +4883,10 @@
                 <a:solidFill>
                   <a:srgbClr val="1E2761"/>
                 </a:solidFill>
+                <a:latin typeface="+mn-lt"/>
+                <a:ea typeface="+mn-ea"/>
+                <a:cs typeface="+mn-cs"/>
+                <a:sym typeface="Calibri"/>
               </a:defRPr>
             </a:lvl1pPr>
           </a:lstStyle>
@@ -4758,8 +4906,8 @@
         </p:nvSpPr>
         <p:spPr>
           <a:xfrm>
-            <a:off x="1143000" y="5486400"/>
-            <a:ext cx="4663440" cy="461402"/>
+            <a:off x="1142999" y="5486400"/>
+            <a:ext cx="4663442" cy="461401"/>
           </a:xfrm>
           <a:prstGeom prst="rect">
             <a:avLst/>
@@ -4774,7 +4922,7 @@
           </a:extLst>
         </p:spPr>
         <p:txBody>
-          <a:bodyPr lIns="45719" rIns="45719">
+          <a:bodyPr lIns="45718" tIns="45718" rIns="45718" bIns="45718">
             <a:spAutoFit/>
           </a:bodyPr>
           <a:lstStyle>
@@ -4783,6 +4931,10 @@
                 <a:solidFill>
                   <a:srgbClr val="1A1A2E"/>
                 </a:solidFill>
+                <a:latin typeface="+mn-lt"/>
+                <a:ea typeface="+mn-ea"/>
+                <a:cs typeface="+mn-cs"/>
+                <a:sym typeface="Calibri"/>
               </a:defRPr>
             </a:lvl1pPr>
           </a:lstStyle>
@@ -4802,8 +4954,8 @@
         </p:nvSpPr>
         <p:spPr>
           <a:xfrm>
-            <a:off x="6339064" y="2044022"/>
-            <a:ext cx="4846321" cy="3322798"/>
+            <a:off x="6339063" y="2044021"/>
+            <a:ext cx="4846322" cy="3322799"/>
           </a:xfrm>
           <a:prstGeom prst="rect">
             <a:avLst/>
@@ -4823,7 +4975,7 @@
           </a:effectLst>
         </p:spPr>
         <p:txBody>
-          <a:bodyPr lIns="45719" rIns="45719" anchor="ctr"/>
+          <a:bodyPr lIns="45718" tIns="45718" rIns="45718" bIns="45718" anchor="ctr"/>
           <a:lstStyle/>
           <a:p>
             <a:pPr algn="ctr">
@@ -4831,6 +4983,10 @@
                 <a:solidFill>
                   <a:srgbClr val="FFFFFF"/>
                 </a:solidFill>
+                <a:latin typeface="+mn-lt"/>
+                <a:ea typeface="+mn-ea"/>
+                <a:cs typeface="+mn-cs"/>
+                <a:sym typeface="Calibri"/>
               </a:defRPr>
             </a:pPr>
           </a:p>
@@ -4844,8 +5000,8 @@
         </p:nvSpPr>
         <p:spPr>
           <a:xfrm>
-            <a:off x="6339064" y="2044022"/>
-            <a:ext cx="4846321" cy="548641"/>
+            <a:off x="6339063" y="2044021"/>
+            <a:ext cx="4846322" cy="548642"/>
           </a:xfrm>
           <a:prstGeom prst="rect">
             <a:avLst/>
@@ -4865,7 +5021,7 @@
           </a:effectLst>
         </p:spPr>
         <p:txBody>
-          <a:bodyPr lIns="45719" rIns="45719" anchor="ctr"/>
+          <a:bodyPr lIns="45718" tIns="45718" rIns="45718" bIns="45718" anchor="ctr"/>
           <a:lstStyle/>
           <a:p>
             <a:pPr algn="ctr">
@@ -4873,6 +5029,10 @@
                 <a:solidFill>
                   <a:srgbClr val="FFFFFF"/>
                 </a:solidFill>
+                <a:latin typeface="+mn-lt"/>
+                <a:ea typeface="+mn-ea"/>
+                <a:cs typeface="+mn-cs"/>
+                <a:sym typeface="Calibri"/>
               </a:defRPr>
             </a:pPr>
           </a:p>
@@ -4886,8 +5046,8 @@
         </p:nvSpPr>
         <p:spPr>
           <a:xfrm>
-            <a:off x="6659104" y="2151798"/>
-            <a:ext cx="4206241" cy="333088"/>
+            <a:off x="6659103" y="2151798"/>
+            <a:ext cx="4206242" cy="333087"/>
           </a:xfrm>
           <a:prstGeom prst="rect">
             <a:avLst/>
@@ -4902,7 +5062,7 @@
           </a:extLst>
         </p:spPr>
         <p:txBody>
-          <a:bodyPr lIns="45719" rIns="45719">
+          <a:bodyPr lIns="45718" tIns="45718" rIns="45718" bIns="45718">
             <a:spAutoFit/>
           </a:bodyPr>
           <a:lstStyle>
@@ -4911,6 +5071,10 @@
                 <a:solidFill>
                   <a:srgbClr val="FFFFFF"/>
                 </a:solidFill>
+                <a:latin typeface="+mn-lt"/>
+                <a:ea typeface="+mn-ea"/>
+                <a:cs typeface="+mn-cs"/>
+                <a:sym typeface="Calibri"/>
               </a:defRPr>
             </a:lvl1pPr>
           </a:lstStyle>
@@ -4930,8 +5094,8 @@
         </p:nvSpPr>
         <p:spPr>
           <a:xfrm>
-            <a:off x="6659104" y="2866982"/>
-            <a:ext cx="4206241" cy="258203"/>
+            <a:off x="6659103" y="2866982"/>
+            <a:ext cx="4206242" cy="258201"/>
           </a:xfrm>
           <a:prstGeom prst="rect">
             <a:avLst/>
@@ -4946,7 +5110,7 @@
           </a:extLst>
         </p:spPr>
         <p:txBody>
-          <a:bodyPr lIns="45719" rIns="45719">
+          <a:bodyPr lIns="45718" tIns="45718" rIns="45718" bIns="45718">
             <a:spAutoFit/>
           </a:bodyPr>
           <a:lstStyle>
@@ -4955,6 +5119,10 @@
                 <a:solidFill>
                   <a:srgbClr val="1A1A2E"/>
                 </a:solidFill>
+                <a:latin typeface="+mn-lt"/>
+                <a:ea typeface="+mn-ea"/>
+                <a:cs typeface="+mn-cs"/>
+                <a:sym typeface="Calibri"/>
               </a:defRPr>
             </a:lvl1pPr>
           </a:lstStyle>
@@ -4974,8 +5142,8 @@
         </p:nvSpPr>
         <p:spPr>
           <a:xfrm>
-            <a:off x="6659104" y="3324182"/>
-            <a:ext cx="4206241" cy="258203"/>
+            <a:off x="6659103" y="3324182"/>
+            <a:ext cx="4206242" cy="258201"/>
           </a:xfrm>
           <a:prstGeom prst="rect">
             <a:avLst/>
@@ -4990,7 +5158,7 @@
           </a:extLst>
         </p:spPr>
         <p:txBody>
-          <a:bodyPr lIns="45719" rIns="45719">
+          <a:bodyPr lIns="45718" tIns="45718" rIns="45718" bIns="45718">
             <a:spAutoFit/>
           </a:bodyPr>
           <a:lstStyle>
@@ -4999,6 +5167,10 @@
                 <a:solidFill>
                   <a:srgbClr val="1A1A2E"/>
                 </a:solidFill>
+                <a:latin typeface="+mn-lt"/>
+                <a:ea typeface="+mn-ea"/>
+                <a:cs typeface="+mn-cs"/>
+                <a:sym typeface="Calibri"/>
               </a:defRPr>
             </a:lvl1pPr>
           </a:lstStyle>
@@ -5018,8 +5190,8 @@
         </p:nvSpPr>
         <p:spPr>
           <a:xfrm>
-            <a:off x="6659104" y="3781382"/>
-            <a:ext cx="4206241" cy="258203"/>
+            <a:off x="6659103" y="3781382"/>
+            <a:ext cx="4206242" cy="258201"/>
           </a:xfrm>
           <a:prstGeom prst="rect">
             <a:avLst/>
@@ -5034,7 +5206,7 @@
           </a:extLst>
         </p:spPr>
         <p:txBody>
-          <a:bodyPr lIns="45719" rIns="45719">
+          <a:bodyPr lIns="45718" tIns="45718" rIns="45718" bIns="45718">
             <a:spAutoFit/>
           </a:bodyPr>
           <a:lstStyle>
@@ -5043,6 +5215,10 @@
                 <a:solidFill>
                   <a:srgbClr val="1A1A2E"/>
                 </a:solidFill>
+                <a:latin typeface="+mn-lt"/>
+                <a:ea typeface="+mn-ea"/>
+                <a:cs typeface="+mn-cs"/>
+                <a:sym typeface="Calibri"/>
               </a:defRPr>
             </a:lvl1pPr>
           </a:lstStyle>
@@ -5062,8 +5238,8 @@
         </p:nvSpPr>
         <p:spPr>
           <a:xfrm>
-            <a:off x="6659104" y="4238582"/>
-            <a:ext cx="4206241" cy="258203"/>
+            <a:off x="6659103" y="4238582"/>
+            <a:ext cx="4206242" cy="258201"/>
           </a:xfrm>
           <a:prstGeom prst="rect">
             <a:avLst/>
@@ -5078,7 +5254,7 @@
           </a:extLst>
         </p:spPr>
         <p:txBody>
-          <a:bodyPr lIns="45719" rIns="45719">
+          <a:bodyPr lIns="45718" tIns="45718" rIns="45718" bIns="45718">
             <a:spAutoFit/>
           </a:bodyPr>
           <a:lstStyle>
@@ -5087,6 +5263,10 @@
                 <a:solidFill>
                   <a:srgbClr val="1A1A2E"/>
                 </a:solidFill>
+                <a:latin typeface="+mn-lt"/>
+                <a:ea typeface="+mn-ea"/>
+                <a:cs typeface="+mn-cs"/>
+                <a:sym typeface="Calibri"/>
               </a:defRPr>
             </a:lvl1pPr>
           </a:lstStyle>
@@ -5106,8 +5286,8 @@
         </p:nvSpPr>
         <p:spPr>
           <a:xfrm>
-            <a:off x="6659104" y="4695782"/>
-            <a:ext cx="4206241" cy="258203"/>
+            <a:off x="6659103" y="4695782"/>
+            <a:ext cx="4206242" cy="258201"/>
           </a:xfrm>
           <a:prstGeom prst="rect">
             <a:avLst/>
@@ -5122,7 +5302,7 @@
           </a:extLst>
         </p:spPr>
         <p:txBody>
-          <a:bodyPr lIns="45719" rIns="45719">
+          <a:bodyPr lIns="45718" tIns="45718" rIns="45718" bIns="45718">
             <a:spAutoFit/>
           </a:bodyPr>
           <a:lstStyle>
@@ -5131,6 +5311,10 @@
                 <a:solidFill>
                   <a:srgbClr val="1A1A2E"/>
                 </a:solidFill>
+                <a:latin typeface="+mn-lt"/>
+                <a:ea typeface="+mn-ea"/>
+                <a:cs typeface="+mn-cs"/>
+                <a:sym typeface="Calibri"/>
               </a:defRPr>
             </a:lvl1pPr>
           </a:lstStyle>
@@ -5183,8 +5367,8 @@
         </p:nvSpPr>
         <p:spPr>
           <a:xfrm>
-            <a:off x="-1" y="-1"/>
-            <a:ext cx="12191697" cy="73154"/>
+            <a:off x="-1" y="-2"/>
+            <a:ext cx="12191697" cy="73156"/>
           </a:xfrm>
           <a:prstGeom prst="rect">
             <a:avLst/>
@@ -5204,7 +5388,7 @@
           </a:effectLst>
         </p:spPr>
         <p:txBody>
-          <a:bodyPr lIns="45719" rIns="45719" anchor="ctr"/>
+          <a:bodyPr lIns="45718" tIns="45718" rIns="45718" bIns="45718" anchor="ctr"/>
           <a:lstStyle/>
           <a:p>
             <a:pPr algn="ctr">
@@ -5212,6 +5396,10 @@
                 <a:solidFill>
                   <a:srgbClr val="FFFFFF"/>
                 </a:solidFill>
+                <a:latin typeface="+mn-lt"/>
+                <a:ea typeface="+mn-ea"/>
+                <a:cs typeface="+mn-cs"/>
+                <a:sym typeface="Calibri"/>
               </a:defRPr>
             </a:pPr>
           </a:p>
@@ -5226,7 +5414,7 @@
         <p:spPr>
           <a:xfrm>
             <a:off x="777239" y="365759"/>
-            <a:ext cx="9052561" cy="549336"/>
+            <a:ext cx="9052561" cy="549334"/>
           </a:xfrm>
           <a:prstGeom prst="rect">
             <a:avLst/>
@@ -5241,7 +5429,7 @@
           </a:extLst>
         </p:spPr>
         <p:txBody>
-          <a:bodyPr lIns="45719" rIns="45719">
+          <a:bodyPr lIns="45718" tIns="45718" rIns="45718" bIns="45718">
             <a:spAutoFit/>
           </a:bodyPr>
           <a:lstStyle>
@@ -5250,6 +5438,10 @@
                 <a:solidFill>
                   <a:srgbClr val="FFFFFF"/>
                 </a:solidFill>
+                <a:latin typeface="+mn-lt"/>
+                <a:ea typeface="+mn-ea"/>
+                <a:cs typeface="+mn-cs"/>
+                <a:sym typeface="Calibri"/>
               </a:defRPr>
             </a:lvl1pPr>
           </a:lstStyle>
@@ -5270,7 +5462,7 @@
         <p:spPr>
           <a:xfrm>
             <a:off x="731519" y="1325880"/>
-            <a:ext cx="365761" cy="365761"/>
+            <a:ext cx="365763" cy="365763"/>
           </a:xfrm>
           <a:prstGeom prst="ellipse">
             <a:avLst/>
@@ -5290,7 +5482,7 @@
           </a:effectLst>
         </p:spPr>
         <p:txBody>
-          <a:bodyPr lIns="45719" rIns="45719" anchor="ctr"/>
+          <a:bodyPr lIns="45718" tIns="45718" rIns="45718" bIns="45718" anchor="ctr"/>
           <a:lstStyle/>
           <a:p>
             <a:pPr algn="ctr">
@@ -5298,6 +5490,10 @@
                 <a:solidFill>
                   <a:srgbClr val="FFFFFF"/>
                 </a:solidFill>
+                <a:latin typeface="+mn-lt"/>
+                <a:ea typeface="+mn-ea"/>
+                <a:cs typeface="+mn-cs"/>
+                <a:sym typeface="Calibri"/>
               </a:defRPr>
             </a:pPr>
           </a:p>
@@ -5311,8 +5507,8 @@
         </p:nvSpPr>
         <p:spPr>
           <a:xfrm>
-            <a:off x="777239" y="1325880"/>
-            <a:ext cx="274321" cy="280799"/>
+            <a:off x="777238" y="1325881"/>
+            <a:ext cx="274322" cy="280798"/>
           </a:xfrm>
           <a:prstGeom prst="rect">
             <a:avLst/>
@@ -5327,7 +5523,7 @@
           </a:extLst>
         </p:spPr>
         <p:txBody>
-          <a:bodyPr lIns="45719" rIns="45719">
+          <a:bodyPr lIns="45718" tIns="45718" rIns="45718" bIns="45718">
             <a:spAutoFit/>
           </a:bodyPr>
           <a:lstStyle>
@@ -5336,6 +5532,10 @@
                 <a:solidFill>
                   <a:srgbClr val="FFFFFF"/>
                 </a:solidFill>
+                <a:latin typeface="+mn-lt"/>
+                <a:ea typeface="+mn-ea"/>
+                <a:cs typeface="+mn-cs"/>
+                <a:sym typeface="Calibri"/>
               </a:defRPr>
             </a:lvl1pPr>
           </a:lstStyle>
@@ -5355,8 +5555,8 @@
         </p:nvSpPr>
         <p:spPr>
           <a:xfrm>
-            <a:off x="1417319" y="1290200"/>
-            <a:ext cx="9966962" cy="506597"/>
+            <a:off x="1417318" y="1290201"/>
+            <a:ext cx="9966964" cy="506595"/>
           </a:xfrm>
           <a:prstGeom prst="rect">
             <a:avLst/>
@@ -5371,7 +5571,7 @@
           </a:extLst>
         </p:spPr>
         <p:txBody>
-          <a:bodyPr lIns="45719" rIns="45719">
+          <a:bodyPr lIns="45718" tIns="45718" rIns="45718" bIns="45718">
             <a:spAutoFit/>
           </a:bodyPr>
           <a:lstStyle>
@@ -5380,13 +5580,17 @@
                 <a:solidFill>
                   <a:srgbClr val="FFFFFF"/>
                 </a:solidFill>
+                <a:latin typeface="+mn-lt"/>
+                <a:ea typeface="+mn-ea"/>
+                <a:cs typeface="+mn-cs"/>
+                <a:sym typeface="Calibri"/>
               </a:defRPr>
             </a:lvl1pPr>
           </a:lstStyle>
           <a:p>
             <a:pPr/>
             <a:r>
-              <a:t>Mod. 1 (imágenes, 92%) y Mod. 3 (híbrido, 92%) superan al Mod. 2 (máscaras, 72%). La segmentación no mejora la clasificación.</a:t>
+              <a:t>Modelo 1 (imágenes, 92%) y Modelo 3 (híbrido, 92%) superan al Modelo 2 (máscaras, 72%). La segmentación no mejora la clasificación.</a:t>
             </a:r>
           </a:p>
         </p:txBody>
@@ -5400,7 +5604,7 @@
         <p:spPr>
           <a:xfrm>
             <a:off x="731519" y="2057399"/>
-            <a:ext cx="365761" cy="365762"/>
+            <a:ext cx="365763" cy="365763"/>
           </a:xfrm>
           <a:prstGeom prst="ellipse">
             <a:avLst/>
@@ -5420,7 +5624,7 @@
           </a:effectLst>
         </p:spPr>
         <p:txBody>
-          <a:bodyPr lIns="45719" rIns="45719" anchor="ctr"/>
+          <a:bodyPr lIns="45718" tIns="45718" rIns="45718" bIns="45718" anchor="ctr"/>
           <a:lstStyle/>
           <a:p>
             <a:pPr algn="ctr">
@@ -5428,6 +5632,10 @@
                 <a:solidFill>
                   <a:srgbClr val="FFFFFF"/>
                 </a:solidFill>
+                <a:latin typeface="+mn-lt"/>
+                <a:ea typeface="+mn-ea"/>
+                <a:cs typeface="+mn-cs"/>
+                <a:sym typeface="Calibri"/>
               </a:defRPr>
             </a:pPr>
           </a:p>
@@ -5441,8 +5649,8 @@
         </p:nvSpPr>
         <p:spPr>
           <a:xfrm>
-            <a:off x="777239" y="2057399"/>
-            <a:ext cx="274321" cy="280800"/>
+            <a:off x="777238" y="2057400"/>
+            <a:ext cx="274322" cy="280798"/>
           </a:xfrm>
           <a:prstGeom prst="rect">
             <a:avLst/>
@@ -5457,7 +5665,7 @@
           </a:extLst>
         </p:spPr>
         <p:txBody>
-          <a:bodyPr lIns="45719" rIns="45719">
+          <a:bodyPr lIns="45718" tIns="45718" rIns="45718" bIns="45718">
             <a:spAutoFit/>
           </a:bodyPr>
           <a:lstStyle>
@@ -5466,6 +5674,10 @@
                 <a:solidFill>
                   <a:srgbClr val="FFFFFF"/>
                 </a:solidFill>
+                <a:latin typeface="+mn-lt"/>
+                <a:ea typeface="+mn-ea"/>
+                <a:cs typeface="+mn-cs"/>
+                <a:sym typeface="Calibri"/>
               </a:defRPr>
             </a:lvl1pPr>
           </a:lstStyle>
@@ -5485,8 +5697,8 @@
         </p:nvSpPr>
         <p:spPr>
           <a:xfrm>
-            <a:off x="1417319" y="2011679"/>
-            <a:ext cx="9966962" cy="277997"/>
+            <a:off x="1417318" y="2011679"/>
+            <a:ext cx="9966964" cy="506596"/>
           </a:xfrm>
           <a:prstGeom prst="rect">
             <a:avLst/>
@@ -5501,7 +5713,7 @@
           </a:extLst>
         </p:spPr>
         <p:txBody>
-          <a:bodyPr lIns="45719" rIns="45719">
+          <a:bodyPr lIns="45718" tIns="45718" rIns="45718" bIns="45718">
             <a:spAutoFit/>
           </a:bodyPr>
           <a:lstStyle>
@@ -5510,13 +5722,17 @@
                 <a:solidFill>
                   <a:srgbClr val="FFFFFF"/>
                 </a:solidFill>
+                <a:latin typeface="+mn-lt"/>
+                <a:ea typeface="+mn-ea"/>
+                <a:cs typeface="+mn-cs"/>
+                <a:sym typeface="Calibri"/>
               </a:defRPr>
             </a:lvl1pPr>
           </a:lstStyle>
           <a:p>
             <a:pPr/>
             <a:r>
-              <a:t>El Mod. 3 híbrido (imagen+máscara) iguala al Mod. 1 (solo imagen): la segmentación es información redundante para ResNet50.</a:t>
+              <a:t>El Modelo 3 híbrido (imagen+máscara) iguala al Modelo 1 (solo imagen): la segmentación es información redundante para ResNet50.</a:t>
             </a:r>
           </a:p>
         </p:txBody>
@@ -5530,7 +5746,7 @@
         <p:spPr>
           <a:xfrm>
             <a:off x="731519" y="2788920"/>
-            <a:ext cx="365761" cy="365761"/>
+            <a:ext cx="365763" cy="365763"/>
           </a:xfrm>
           <a:prstGeom prst="ellipse">
             <a:avLst/>
@@ -5550,7 +5766,7 @@
           </a:effectLst>
         </p:spPr>
         <p:txBody>
-          <a:bodyPr lIns="45719" rIns="45719" anchor="ctr"/>
+          <a:bodyPr lIns="45718" tIns="45718" rIns="45718" bIns="45718" anchor="ctr"/>
           <a:lstStyle/>
           <a:p>
             <a:pPr algn="ctr">
@@ -5558,6 +5774,10 @@
                 <a:solidFill>
                   <a:srgbClr val="FFFFFF"/>
                 </a:solidFill>
+                <a:latin typeface="+mn-lt"/>
+                <a:ea typeface="+mn-ea"/>
+                <a:cs typeface="+mn-cs"/>
+                <a:sym typeface="Calibri"/>
               </a:defRPr>
             </a:pPr>
           </a:p>
@@ -5571,8 +5791,8 @@
         </p:nvSpPr>
         <p:spPr>
           <a:xfrm>
-            <a:off x="777239" y="2788920"/>
-            <a:ext cx="274321" cy="280800"/>
+            <a:off x="777238" y="2788921"/>
+            <a:ext cx="274322" cy="280798"/>
           </a:xfrm>
           <a:prstGeom prst="rect">
             <a:avLst/>
@@ -5587,7 +5807,7 @@
           </a:extLst>
         </p:spPr>
         <p:txBody>
-          <a:bodyPr lIns="45719" rIns="45719">
+          <a:bodyPr lIns="45718" tIns="45718" rIns="45718" bIns="45718">
             <a:spAutoFit/>
           </a:bodyPr>
           <a:lstStyle>
@@ -5596,6 +5816,10 @@
                 <a:solidFill>
                   <a:srgbClr val="FFFFFF"/>
                 </a:solidFill>
+                <a:latin typeface="+mn-lt"/>
+                <a:ea typeface="+mn-ea"/>
+                <a:cs typeface="+mn-cs"/>
+                <a:sym typeface="Calibri"/>
               </a:defRPr>
             </a:lvl1pPr>
           </a:lstStyle>
@@ -5615,8 +5839,8 @@
         </p:nvSpPr>
         <p:spPr>
           <a:xfrm>
-            <a:off x="1417319" y="2743199"/>
-            <a:ext cx="9966962" cy="506598"/>
+            <a:off x="1417318" y="2733157"/>
+            <a:ext cx="9966964" cy="506595"/>
           </a:xfrm>
           <a:prstGeom prst="rect">
             <a:avLst/>
@@ -5631,7 +5855,7 @@
           </a:extLst>
         </p:spPr>
         <p:txBody>
-          <a:bodyPr lIns="45719" rIns="45719">
+          <a:bodyPr lIns="45718" tIns="45718" rIns="45718" bIns="45718">
             <a:spAutoFit/>
           </a:bodyPr>
           <a:lstStyle>
@@ -5640,6 +5864,10 @@
                 <a:solidFill>
                   <a:srgbClr val="FFFFFF"/>
                 </a:solidFill>
+                <a:latin typeface="+mn-lt"/>
+                <a:ea typeface="+mn-ea"/>
+                <a:cs typeface="+mn-cs"/>
+                <a:sym typeface="Calibri"/>
               </a:defRPr>
             </a:lvl1pPr>
           </a:lstStyle>
@@ -5660,7 +5888,7 @@
         <p:spPr>
           <a:xfrm>
             <a:off x="731519" y="3520440"/>
-            <a:ext cx="365761" cy="365761"/>
+            <a:ext cx="365763" cy="365763"/>
           </a:xfrm>
           <a:prstGeom prst="ellipse">
             <a:avLst/>
@@ -5680,7 +5908,7 @@
           </a:effectLst>
         </p:spPr>
         <p:txBody>
-          <a:bodyPr lIns="45719" rIns="45719" anchor="ctr"/>
+          <a:bodyPr lIns="45718" tIns="45718" rIns="45718" bIns="45718" anchor="ctr"/>
           <a:lstStyle/>
           <a:p>
             <a:pPr algn="ctr">
@@ -5688,6 +5916,10 @@
                 <a:solidFill>
                   <a:srgbClr val="FFFFFF"/>
                 </a:solidFill>
+                <a:latin typeface="+mn-lt"/>
+                <a:ea typeface="+mn-ea"/>
+                <a:cs typeface="+mn-cs"/>
+                <a:sym typeface="Calibri"/>
               </a:defRPr>
             </a:pPr>
           </a:p>
@@ -5701,8 +5933,8 @@
         </p:nvSpPr>
         <p:spPr>
           <a:xfrm>
-            <a:off x="777239" y="3520440"/>
-            <a:ext cx="274321" cy="280800"/>
+            <a:off x="777238" y="3520441"/>
+            <a:ext cx="274322" cy="280798"/>
           </a:xfrm>
           <a:prstGeom prst="rect">
             <a:avLst/>
@@ -5717,7 +5949,7 @@
           </a:extLst>
         </p:spPr>
         <p:txBody>
-          <a:bodyPr lIns="45719" rIns="45719">
+          <a:bodyPr lIns="45718" tIns="45718" rIns="45718" bIns="45718">
             <a:spAutoFit/>
           </a:bodyPr>
           <a:lstStyle>
@@ -5726,6 +5958,10 @@
                 <a:solidFill>
                   <a:srgbClr val="FFFFFF"/>
                 </a:solidFill>
+                <a:latin typeface="+mn-lt"/>
+                <a:ea typeface="+mn-ea"/>
+                <a:cs typeface="+mn-cs"/>
+                <a:sym typeface="Calibri"/>
               </a:defRPr>
             </a:lvl1pPr>
           </a:lstStyle>
@@ -5745,8 +5981,8 @@
         </p:nvSpPr>
         <p:spPr>
           <a:xfrm>
-            <a:off x="1417319" y="3474720"/>
-            <a:ext cx="9966962" cy="277997"/>
+            <a:off x="1417318" y="3564323"/>
+            <a:ext cx="9966964" cy="277995"/>
           </a:xfrm>
           <a:prstGeom prst="rect">
             <a:avLst/>
@@ -5761,7 +5997,7 @@
           </a:extLst>
         </p:spPr>
         <p:txBody>
-          <a:bodyPr lIns="45719" rIns="45719">
+          <a:bodyPr lIns="45718" tIns="45718" rIns="45718" bIns="45718">
             <a:spAutoFit/>
           </a:bodyPr>
           <a:lstStyle>
@@ -5770,6 +6006,10 @@
                 <a:solidFill>
                   <a:srgbClr val="FFFFFF"/>
                 </a:solidFill>
+                <a:latin typeface="+mn-lt"/>
+                <a:ea typeface="+mn-ea"/>
+                <a:cs typeface="+mn-cs"/>
+                <a:sym typeface="Calibri"/>
               </a:defRPr>
             </a:lvl1pPr>
           </a:lstStyle>
@@ -5790,7 +6030,7 @@
         <p:spPr>
           <a:xfrm>
             <a:off x="731519" y="4251959"/>
-            <a:ext cx="365761" cy="365761"/>
+            <a:ext cx="365763" cy="365763"/>
           </a:xfrm>
           <a:prstGeom prst="ellipse">
             <a:avLst/>
@@ -5810,7 +6050,7 @@
           </a:effectLst>
         </p:spPr>
         <p:txBody>
-          <a:bodyPr lIns="45719" rIns="45719" anchor="ctr"/>
+          <a:bodyPr lIns="45718" tIns="45718" rIns="45718" bIns="45718" anchor="ctr"/>
           <a:lstStyle/>
           <a:p>
             <a:pPr algn="ctr">
@@ -5818,6 +6058,10 @@
                 <a:solidFill>
                   <a:srgbClr val="FFFFFF"/>
                 </a:solidFill>
+                <a:latin typeface="+mn-lt"/>
+                <a:ea typeface="+mn-ea"/>
+                <a:cs typeface="+mn-cs"/>
+                <a:sym typeface="Calibri"/>
               </a:defRPr>
             </a:pPr>
           </a:p>
@@ -5831,8 +6075,8 @@
         </p:nvSpPr>
         <p:spPr>
           <a:xfrm>
-            <a:off x="777239" y="4251959"/>
-            <a:ext cx="274321" cy="280800"/>
+            <a:off x="777238" y="4251960"/>
+            <a:ext cx="274322" cy="280798"/>
           </a:xfrm>
           <a:prstGeom prst="rect">
             <a:avLst/>
@@ -5847,7 +6091,7 @@
           </a:extLst>
         </p:spPr>
         <p:txBody>
-          <a:bodyPr lIns="45719" rIns="45719">
+          <a:bodyPr lIns="45718" tIns="45718" rIns="45718" bIns="45718">
             <a:spAutoFit/>
           </a:bodyPr>
           <a:lstStyle>
@@ -5856,6 +6100,10 @@
                 <a:solidFill>
                   <a:srgbClr val="FFFFFF"/>
                 </a:solidFill>
+                <a:latin typeface="+mn-lt"/>
+                <a:ea typeface="+mn-ea"/>
+                <a:cs typeface="+mn-cs"/>
+                <a:sym typeface="Calibri"/>
               </a:defRPr>
             </a:lvl1pPr>
           </a:lstStyle>
@@ -5875,8 +6123,8 @@
         </p:nvSpPr>
         <p:spPr>
           <a:xfrm>
-            <a:off x="1417319" y="4206240"/>
-            <a:ext cx="9966962" cy="277997"/>
+            <a:off x="1417318" y="4295842"/>
+            <a:ext cx="9966964" cy="277996"/>
           </a:xfrm>
           <a:prstGeom prst="rect">
             <a:avLst/>
@@ -5891,7 +6139,7 @@
           </a:extLst>
         </p:spPr>
         <p:txBody>
-          <a:bodyPr lIns="45719" rIns="45719">
+          <a:bodyPr lIns="45718" tIns="45718" rIns="45718" bIns="45718">
             <a:spAutoFit/>
           </a:bodyPr>
           <a:lstStyle>
@@ -5900,13 +6148,17 @@
                 <a:solidFill>
                   <a:srgbClr val="FFFFFF"/>
                 </a:solidFill>
+                <a:latin typeface="+mn-lt"/>
+                <a:ea typeface="+mn-ea"/>
+                <a:cs typeface="+mn-cs"/>
+                <a:sym typeface="Calibri"/>
               </a:defRPr>
             </a:lvl1pPr>
           </a:lstStyle>
           <a:p>
             <a:pPr/>
             <a:r>
-              <a:t>La discrepancia de dominios entre datasets de segmentación y clasificación amplifica la degradación del Mod. 2.</a:t>
+              <a:t>La discrepancia de dominios entre datasets de segmentación y clasificación amplifica la degradación del Modelo 2.</a:t>
             </a:r>
           </a:p>
         </p:txBody>
@@ -5920,7 +6172,7 @@
         <p:spPr>
           <a:xfrm>
             <a:off x="731519" y="4983479"/>
-            <a:ext cx="365761" cy="365761"/>
+            <a:ext cx="365763" cy="365763"/>
           </a:xfrm>
           <a:prstGeom prst="ellipse">
             <a:avLst/>
@@ -5940,7 +6192,7 @@
           </a:effectLst>
         </p:spPr>
         <p:txBody>
-          <a:bodyPr lIns="45719" rIns="45719" anchor="ctr"/>
+          <a:bodyPr lIns="45718" tIns="45718" rIns="45718" bIns="45718" anchor="ctr"/>
           <a:lstStyle/>
           <a:p>
             <a:pPr algn="ctr">
@@ -5948,6 +6200,10 @@
                 <a:solidFill>
                   <a:srgbClr val="FFFFFF"/>
                 </a:solidFill>
+                <a:latin typeface="+mn-lt"/>
+                <a:ea typeface="+mn-ea"/>
+                <a:cs typeface="+mn-cs"/>
+                <a:sym typeface="Calibri"/>
               </a:defRPr>
             </a:pPr>
           </a:p>
@@ -5961,8 +6217,8 @@
         </p:nvSpPr>
         <p:spPr>
           <a:xfrm>
-            <a:off x="777239" y="4983479"/>
-            <a:ext cx="274321" cy="280800"/>
+            <a:off x="777238" y="4983480"/>
+            <a:ext cx="274322" cy="280798"/>
           </a:xfrm>
           <a:prstGeom prst="rect">
             <a:avLst/>
@@ -5977,7 +6233,7 @@
           </a:extLst>
         </p:spPr>
         <p:txBody>
-          <a:bodyPr lIns="45719" rIns="45719">
+          <a:bodyPr lIns="45718" tIns="45718" rIns="45718" bIns="45718">
             <a:spAutoFit/>
           </a:bodyPr>
           <a:lstStyle>
@@ -5986,6 +6242,10 @@
                 <a:solidFill>
                   <a:srgbClr val="FFFFFF"/>
                 </a:solidFill>
+                <a:latin typeface="+mn-lt"/>
+                <a:ea typeface="+mn-ea"/>
+                <a:cs typeface="+mn-cs"/>
+                <a:sym typeface="Calibri"/>
               </a:defRPr>
             </a:lvl1pPr>
           </a:lstStyle>
@@ -6005,8 +6265,8 @@
         </p:nvSpPr>
         <p:spPr>
           <a:xfrm>
-            <a:off x="1417319" y="4937759"/>
-            <a:ext cx="9966962" cy="277997"/>
+            <a:off x="1417318" y="5027362"/>
+            <a:ext cx="9966964" cy="277995"/>
           </a:xfrm>
           <a:prstGeom prst="rect">
             <a:avLst/>
@@ -6021,7 +6281,7 @@
           </a:extLst>
         </p:spPr>
         <p:txBody>
-          <a:bodyPr lIns="45719" rIns="45719">
+          <a:bodyPr lIns="45718" tIns="45718" rIns="45718" bIns="45718">
             <a:spAutoFit/>
           </a:bodyPr>
           <a:lstStyle>
@@ -6030,6 +6290,10 @@
                 <a:solidFill>
                   <a:srgbClr val="FFFFFF"/>
                 </a:solidFill>
+                <a:latin typeface="+mn-lt"/>
+                <a:ea typeface="+mn-ea"/>
+                <a:cs typeface="+mn-cs"/>
+                <a:sym typeface="Calibri"/>
               </a:defRPr>
             </a:lvl1pPr>
           </a:lstStyle>
@@ -6049,8 +6313,8 @@
         </p:nvSpPr>
         <p:spPr>
           <a:xfrm>
-            <a:off x="731519" y="5714999"/>
-            <a:ext cx="365761" cy="365762"/>
+            <a:off x="731519" y="5714998"/>
+            <a:ext cx="365763" cy="365763"/>
           </a:xfrm>
           <a:prstGeom prst="ellipse">
             <a:avLst/>
@@ -6070,7 +6334,7 @@
           </a:effectLst>
         </p:spPr>
         <p:txBody>
-          <a:bodyPr lIns="45719" rIns="45719" anchor="ctr"/>
+          <a:bodyPr lIns="45718" tIns="45718" rIns="45718" bIns="45718" anchor="ctr"/>
           <a:lstStyle/>
           <a:p>
             <a:pPr algn="ctr">
@@ -6078,6 +6342,10 @@
                 <a:solidFill>
                   <a:srgbClr val="FFFFFF"/>
                 </a:solidFill>
+                <a:latin typeface="+mn-lt"/>
+                <a:ea typeface="+mn-ea"/>
+                <a:cs typeface="+mn-cs"/>
+                <a:sym typeface="Calibri"/>
               </a:defRPr>
             </a:pPr>
           </a:p>
@@ -6091,8 +6359,8 @@
         </p:nvSpPr>
         <p:spPr>
           <a:xfrm>
-            <a:off x="777239" y="5714999"/>
-            <a:ext cx="274321" cy="280800"/>
+            <a:off x="777238" y="5714999"/>
+            <a:ext cx="274322" cy="280798"/>
           </a:xfrm>
           <a:prstGeom prst="rect">
             <a:avLst/>
@@ -6107,7 +6375,7 @@
           </a:extLst>
         </p:spPr>
         <p:txBody>
-          <a:bodyPr lIns="45719" rIns="45719">
+          <a:bodyPr lIns="45718" tIns="45718" rIns="45718" bIns="45718">
             <a:spAutoFit/>
           </a:bodyPr>
           <a:lstStyle>
@@ -6116,6 +6384,10 @@
                 <a:solidFill>
                   <a:srgbClr val="FFFFFF"/>
                 </a:solidFill>
+                <a:latin typeface="+mn-lt"/>
+                <a:ea typeface="+mn-ea"/>
+                <a:cs typeface="+mn-cs"/>
+                <a:sym typeface="Calibri"/>
               </a:defRPr>
             </a:lvl1pPr>
           </a:lstStyle>
@@ -6135,8 +6407,8 @@
         </p:nvSpPr>
         <p:spPr>
           <a:xfrm>
-            <a:off x="1417319" y="5669279"/>
-            <a:ext cx="9966962" cy="277997"/>
+            <a:off x="1417318" y="5758882"/>
+            <a:ext cx="9966964" cy="277995"/>
           </a:xfrm>
           <a:prstGeom prst="rect">
             <a:avLst/>
@@ -6151,7 +6423,7 @@
           </a:extLst>
         </p:spPr>
         <p:txBody>
-          <a:bodyPr lIns="45719" rIns="45719">
+          <a:bodyPr lIns="45718" tIns="45718" rIns="45718" bIns="45718">
             <a:spAutoFit/>
           </a:bodyPr>
           <a:lstStyle>
@@ -6160,6 +6432,10 @@
                 <a:solidFill>
                   <a:srgbClr val="FFFFFF"/>
                 </a:solidFill>
+                <a:latin typeface="+mn-lt"/>
+                <a:ea typeface="+mn-ea"/>
+                <a:cs typeface="+mn-cs"/>
+                <a:sym typeface="Calibri"/>
               </a:defRPr>
             </a:lvl1pPr>
           </a:lstStyle>
@@ -6212,8 +6488,8 @@
         </p:nvSpPr>
         <p:spPr>
           <a:xfrm>
-            <a:off x="-1" y="-1"/>
-            <a:ext cx="12191697" cy="73154"/>
+            <a:off x="-1" y="-2"/>
+            <a:ext cx="12191697" cy="73156"/>
           </a:xfrm>
           <a:prstGeom prst="rect">
             <a:avLst/>
@@ -6233,7 +6509,7 @@
           </a:effectLst>
         </p:spPr>
         <p:txBody>
-          <a:bodyPr lIns="45719" rIns="45719" anchor="ctr"/>
+          <a:bodyPr lIns="45718" tIns="45718" rIns="45718" bIns="45718" anchor="ctr"/>
           <a:lstStyle/>
           <a:p>
             <a:pPr algn="ctr">
@@ -6241,6 +6517,10 @@
                 <a:solidFill>
                   <a:srgbClr val="FFFFFF"/>
                 </a:solidFill>
+                <a:latin typeface="+mn-lt"/>
+                <a:ea typeface="+mn-ea"/>
+                <a:cs typeface="+mn-cs"/>
+                <a:sym typeface="Calibri"/>
               </a:defRPr>
             </a:pPr>
           </a:p>
@@ -6254,8 +6534,8 @@
         </p:nvSpPr>
         <p:spPr>
           <a:xfrm>
-            <a:off x="1417320" y="1828800"/>
-            <a:ext cx="9326880" cy="706200"/>
+            <a:off x="1417319" y="1828800"/>
+            <a:ext cx="9326882" cy="706199"/>
           </a:xfrm>
           <a:prstGeom prst="rect">
             <a:avLst/>
@@ -6270,7 +6550,7 @@
           </a:extLst>
         </p:spPr>
         <p:txBody>
-          <a:bodyPr lIns="45719" rIns="45719">
+          <a:bodyPr lIns="45718" tIns="45718" rIns="45718" bIns="45718">
             <a:spAutoFit/>
           </a:bodyPr>
           <a:lstStyle>
@@ -6279,6 +6559,10 @@
                 <a:solidFill>
                   <a:srgbClr val="FFFFFF"/>
                 </a:solidFill>
+                <a:latin typeface="+mn-lt"/>
+                <a:ea typeface="+mn-ea"/>
+                <a:cs typeface="+mn-cs"/>
+                <a:sym typeface="Calibri"/>
               </a:defRPr>
             </a:lvl1pPr>
           </a:lstStyle>
@@ -6298,8 +6582,8 @@
         </p:nvSpPr>
         <p:spPr>
           <a:xfrm>
-            <a:off x="4571999" y="3017520"/>
-            <a:ext cx="3017522" cy="36577"/>
+            <a:off x="4571998" y="3017520"/>
+            <a:ext cx="3017523" cy="36578"/>
           </a:xfrm>
           <a:prstGeom prst="rect">
             <a:avLst/>
@@ -6319,7 +6603,7 @@
           </a:effectLst>
         </p:spPr>
         <p:txBody>
-          <a:bodyPr lIns="45719" rIns="45719" anchor="ctr"/>
+          <a:bodyPr lIns="45718" tIns="45718" rIns="45718" bIns="45718" anchor="ctr"/>
           <a:lstStyle/>
           <a:p>
             <a:pPr algn="ctr">
@@ -6327,6 +6611,10 @@
                 <a:solidFill>
                   <a:srgbClr val="FFFFFF"/>
                 </a:solidFill>
+                <a:latin typeface="+mn-lt"/>
+                <a:ea typeface="+mn-ea"/>
+                <a:cs typeface="+mn-cs"/>
+                <a:sym typeface="Calibri"/>
               </a:defRPr>
             </a:pPr>
           </a:p>
@@ -6340,8 +6628,8 @@
         </p:nvSpPr>
         <p:spPr>
           <a:xfrm>
-            <a:off x="1417320" y="3474720"/>
-            <a:ext cx="9326880" cy="444759"/>
+            <a:off x="1417319" y="3474721"/>
+            <a:ext cx="9326882" cy="444757"/>
           </a:xfrm>
           <a:prstGeom prst="rect">
             <a:avLst/>
@@ -6356,7 +6644,7 @@
           </a:extLst>
         </p:spPr>
         <p:txBody>
-          <a:bodyPr lIns="45719" rIns="45719">
+          <a:bodyPr lIns="45718" tIns="45718" rIns="45718" bIns="45718">
             <a:spAutoFit/>
           </a:bodyPr>
           <a:lstStyle>
@@ -6365,6 +6653,10 @@
                 <a:solidFill>
                   <a:srgbClr val="CADCFC"/>
                 </a:solidFill>
+                <a:latin typeface="+mn-lt"/>
+                <a:ea typeface="+mn-ea"/>
+                <a:cs typeface="+mn-cs"/>
+                <a:sym typeface="Calibri"/>
               </a:defRPr>
             </a:lvl1pPr>
           </a:lstStyle>
@@ -6384,8 +6676,8 @@
         </p:nvSpPr>
         <p:spPr>
           <a:xfrm>
-            <a:off x="1417320" y="4572000"/>
-            <a:ext cx="9326880" cy="300594"/>
+            <a:off x="1417319" y="4572000"/>
+            <a:ext cx="9326882" cy="300593"/>
           </a:xfrm>
           <a:prstGeom prst="rect">
             <a:avLst/>
@@ -6400,7 +6692,7 @@
           </a:extLst>
         </p:spPr>
         <p:txBody>
-          <a:bodyPr lIns="45719" rIns="45719">
+          <a:bodyPr lIns="45718" tIns="45718" rIns="45718" bIns="45718">
             <a:spAutoFit/>
           </a:bodyPr>
           <a:lstStyle>
@@ -6409,6 +6701,10 @@
                 <a:solidFill>
                   <a:srgbClr val="CADCFC"/>
                 </a:solidFill>
+                <a:latin typeface="+mn-lt"/>
+                <a:ea typeface="+mn-ea"/>
+                <a:cs typeface="+mn-cs"/>
+                <a:sym typeface="Calibri"/>
               </a:defRPr>
             </a:lvl1pPr>
           </a:lstStyle>
@@ -6428,8 +6724,8 @@
         </p:nvSpPr>
         <p:spPr>
           <a:xfrm>
-            <a:off x="1417320" y="5120640"/>
-            <a:ext cx="9326880" cy="280800"/>
+            <a:off x="1417319" y="5120641"/>
+            <a:ext cx="9326882" cy="280798"/>
           </a:xfrm>
           <a:prstGeom prst="rect">
             <a:avLst/>
@@ -6444,7 +6740,7 @@
           </a:extLst>
         </p:spPr>
         <p:txBody>
-          <a:bodyPr lIns="45719" rIns="45719">
+          <a:bodyPr lIns="45718" tIns="45718" rIns="45718" bIns="45718">
             <a:spAutoFit/>
           </a:bodyPr>
           <a:lstStyle>
@@ -6453,6 +6749,10 @@
                 <a:solidFill>
                   <a:srgbClr val="6B7B8D"/>
                 </a:solidFill>
+                <a:latin typeface="+mn-lt"/>
+                <a:ea typeface="+mn-ea"/>
+                <a:cs typeface="+mn-cs"/>
+                <a:sym typeface="Calibri"/>
               </a:defRPr>
             </a:lvl1pPr>
           </a:lstStyle>
@@ -6498,8 +6798,8 @@
         </p:nvSpPr>
         <p:spPr>
           <a:xfrm>
-            <a:off x="-1" y="-1"/>
-            <a:ext cx="12191697" cy="73154"/>
+            <a:off x="-1" y="-2"/>
+            <a:ext cx="12191697" cy="73156"/>
           </a:xfrm>
           <a:prstGeom prst="rect">
             <a:avLst/>
@@ -6519,7 +6819,7 @@
           </a:effectLst>
         </p:spPr>
         <p:txBody>
-          <a:bodyPr lIns="45719" rIns="45719" anchor="ctr"/>
+          <a:bodyPr lIns="45718" tIns="45718" rIns="45718" bIns="45718" anchor="ctr"/>
           <a:lstStyle/>
           <a:p>
             <a:pPr algn="ctr">
@@ -6527,6 +6827,10 @@
                 <a:solidFill>
                   <a:srgbClr val="FFFFFF"/>
                 </a:solidFill>
+                <a:latin typeface="+mn-lt"/>
+                <a:ea typeface="+mn-ea"/>
+                <a:cs typeface="+mn-cs"/>
+                <a:sym typeface="Calibri"/>
               </a:defRPr>
             </a:pPr>
           </a:p>
@@ -6541,7 +6845,7 @@
         <p:spPr>
           <a:xfrm>
             <a:off x="777239" y="457199"/>
-            <a:ext cx="9052561" cy="542242"/>
+            <a:ext cx="9052561" cy="542240"/>
           </a:xfrm>
           <a:prstGeom prst="rect">
             <a:avLst/>
@@ -6556,7 +6860,7 @@
           </a:extLst>
         </p:spPr>
         <p:txBody>
-          <a:bodyPr lIns="45719" rIns="45719">
+          <a:bodyPr lIns="45718" tIns="45718" rIns="45718" bIns="45718">
             <a:spAutoFit/>
           </a:bodyPr>
           <a:lstStyle>
@@ -6565,6 +6869,10 @@
                 <a:solidFill>
                   <a:srgbClr val="1E2761"/>
                 </a:solidFill>
+                <a:latin typeface="+mn-lt"/>
+                <a:ea typeface="+mn-ea"/>
+                <a:cs typeface="+mn-cs"/>
+                <a:sym typeface="Calibri"/>
               </a:defRPr>
             </a:lvl1pPr>
           </a:lstStyle>
@@ -6584,8 +6892,8 @@
         </p:nvSpPr>
         <p:spPr>
           <a:xfrm>
-            <a:off x="777239" y="1463039"/>
-            <a:ext cx="4937761" cy="385377"/>
+            <a:off x="777238" y="1463039"/>
+            <a:ext cx="4937762" cy="385375"/>
           </a:xfrm>
           <a:prstGeom prst="rect">
             <a:avLst/>
@@ -6600,7 +6908,7 @@
           </a:extLst>
         </p:spPr>
         <p:txBody>
-          <a:bodyPr lIns="45719" rIns="45719">
+          <a:bodyPr lIns="45718" tIns="45718" rIns="45718" bIns="45718">
             <a:spAutoFit/>
           </a:bodyPr>
           <a:lstStyle>
@@ -6609,6 +6917,10 @@
                 <a:solidFill>
                   <a:srgbClr val="00A896"/>
                 </a:solidFill>
+                <a:latin typeface="+mn-lt"/>
+                <a:ea typeface="+mn-ea"/>
+                <a:cs typeface="+mn-cs"/>
+                <a:sym typeface="Calibri"/>
               </a:defRPr>
             </a:lvl1pPr>
           </a:lstStyle>
@@ -6629,7 +6941,7 @@
         <p:spPr>
           <a:xfrm>
             <a:off x="731519" y="2103120"/>
-            <a:ext cx="54865" cy="457201"/>
+            <a:ext cx="54866" cy="457202"/>
           </a:xfrm>
           <a:prstGeom prst="rect">
             <a:avLst/>
@@ -6649,7 +6961,7 @@
           </a:effectLst>
         </p:spPr>
         <p:txBody>
-          <a:bodyPr lIns="45719" rIns="45719" anchor="ctr"/>
+          <a:bodyPr lIns="45718" tIns="45718" rIns="45718" bIns="45718" anchor="ctr"/>
           <a:lstStyle/>
           <a:p>
             <a:pPr algn="ctr">
@@ -6657,6 +6969,10 @@
                 <a:solidFill>
                   <a:srgbClr val="FFFFFF"/>
                 </a:solidFill>
+                <a:latin typeface="+mn-lt"/>
+                <a:ea typeface="+mn-ea"/>
+                <a:cs typeface="+mn-cs"/>
+                <a:sym typeface="Calibri"/>
               </a:defRPr>
             </a:pPr>
           </a:p>
@@ -6670,8 +6986,8 @@
         </p:nvSpPr>
         <p:spPr>
           <a:xfrm>
-            <a:off x="1142999" y="2103120"/>
-            <a:ext cx="4572002" cy="506597"/>
+            <a:off x="1142999" y="2103121"/>
+            <a:ext cx="4572002" cy="506595"/>
           </a:xfrm>
           <a:prstGeom prst="rect">
             <a:avLst/>
@@ -6686,7 +7002,7 @@
           </a:extLst>
         </p:spPr>
         <p:txBody>
-          <a:bodyPr lIns="45719" rIns="45719">
+          <a:bodyPr lIns="45718" tIns="45718" rIns="45718" bIns="45718">
             <a:spAutoFit/>
           </a:bodyPr>
           <a:lstStyle>
@@ -6695,6 +7011,10 @@
                 <a:solidFill>
                   <a:srgbClr val="1A1A2E"/>
                 </a:solidFill>
+                <a:latin typeface="+mn-lt"/>
+                <a:ea typeface="+mn-ea"/>
+                <a:cs typeface="+mn-cs"/>
+                <a:sym typeface="Calibri"/>
               </a:defRPr>
             </a:lvl1pPr>
           </a:lstStyle>
@@ -6715,7 +7035,7 @@
         <p:spPr>
           <a:xfrm>
             <a:off x="731519" y="3017520"/>
-            <a:ext cx="54865" cy="457201"/>
+            <a:ext cx="54866" cy="457202"/>
           </a:xfrm>
           <a:prstGeom prst="rect">
             <a:avLst/>
@@ -6735,7 +7055,7 @@
           </a:effectLst>
         </p:spPr>
         <p:txBody>
-          <a:bodyPr lIns="45719" rIns="45719" anchor="ctr"/>
+          <a:bodyPr lIns="45718" tIns="45718" rIns="45718" bIns="45718" anchor="ctr"/>
           <a:lstStyle/>
           <a:p>
             <a:pPr algn="ctr">
@@ -6743,6 +7063,10 @@
                 <a:solidFill>
                   <a:srgbClr val="FFFFFF"/>
                 </a:solidFill>
+                <a:latin typeface="+mn-lt"/>
+                <a:ea typeface="+mn-ea"/>
+                <a:cs typeface="+mn-cs"/>
+                <a:sym typeface="Calibri"/>
               </a:defRPr>
             </a:pPr>
           </a:p>
@@ -6756,8 +7080,8 @@
         </p:nvSpPr>
         <p:spPr>
           <a:xfrm>
-            <a:off x="1142999" y="3017520"/>
-            <a:ext cx="4572002" cy="506597"/>
+            <a:off x="1142999" y="3017521"/>
+            <a:ext cx="4572002" cy="506595"/>
           </a:xfrm>
           <a:prstGeom prst="rect">
             <a:avLst/>
@@ -6772,7 +7096,7 @@
           </a:extLst>
         </p:spPr>
         <p:txBody>
-          <a:bodyPr lIns="45719" rIns="45719">
+          <a:bodyPr lIns="45718" tIns="45718" rIns="45718" bIns="45718">
             <a:spAutoFit/>
           </a:bodyPr>
           <a:lstStyle>
@@ -6781,6 +7105,10 @@
                 <a:solidFill>
                   <a:srgbClr val="1A1A2E"/>
                 </a:solidFill>
+                <a:latin typeface="+mn-lt"/>
+                <a:ea typeface="+mn-ea"/>
+                <a:cs typeface="+mn-cs"/>
+                <a:sym typeface="Calibri"/>
               </a:defRPr>
             </a:lvl1pPr>
           </a:lstStyle>
@@ -6801,7 +7129,7 @@
         <p:spPr>
           <a:xfrm>
             <a:off x="731519" y="3931920"/>
-            <a:ext cx="54865" cy="457201"/>
+            <a:ext cx="54866" cy="457202"/>
           </a:xfrm>
           <a:prstGeom prst="rect">
             <a:avLst/>
@@ -6821,7 +7149,7 @@
           </a:effectLst>
         </p:spPr>
         <p:txBody>
-          <a:bodyPr lIns="45719" rIns="45719" anchor="ctr"/>
+          <a:bodyPr lIns="45718" tIns="45718" rIns="45718" bIns="45718" anchor="ctr"/>
           <a:lstStyle/>
           <a:p>
             <a:pPr algn="ctr">
@@ -6829,6 +7157,10 @@
                 <a:solidFill>
                   <a:srgbClr val="FFFFFF"/>
                 </a:solidFill>
+                <a:latin typeface="+mn-lt"/>
+                <a:ea typeface="+mn-ea"/>
+                <a:cs typeface="+mn-cs"/>
+                <a:sym typeface="Calibri"/>
               </a:defRPr>
             </a:pPr>
           </a:p>
@@ -6842,8 +7174,8 @@
         </p:nvSpPr>
         <p:spPr>
           <a:xfrm>
-            <a:off x="1142999" y="3931920"/>
-            <a:ext cx="4572002" cy="506597"/>
+            <a:off x="1142999" y="3931921"/>
+            <a:ext cx="4572002" cy="506595"/>
           </a:xfrm>
           <a:prstGeom prst="rect">
             <a:avLst/>
@@ -6858,7 +7190,7 @@
           </a:extLst>
         </p:spPr>
         <p:txBody>
-          <a:bodyPr lIns="45719" rIns="45719">
+          <a:bodyPr lIns="45718" tIns="45718" rIns="45718" bIns="45718">
             <a:spAutoFit/>
           </a:bodyPr>
           <a:lstStyle>
@@ -6867,6 +7199,10 @@
                 <a:solidFill>
                   <a:srgbClr val="1A1A2E"/>
                 </a:solidFill>
+                <a:latin typeface="+mn-lt"/>
+                <a:ea typeface="+mn-ea"/>
+                <a:cs typeface="+mn-cs"/>
+                <a:sym typeface="Calibri"/>
               </a:defRPr>
             </a:lvl1pPr>
           </a:lstStyle>
@@ -6886,8 +7222,8 @@
         </p:nvSpPr>
         <p:spPr>
           <a:xfrm>
-            <a:off x="6629400" y="1463039"/>
-            <a:ext cx="4480561" cy="385377"/>
+            <a:off x="6629399" y="1463039"/>
+            <a:ext cx="4480563" cy="385375"/>
           </a:xfrm>
           <a:prstGeom prst="rect">
             <a:avLst/>
@@ -6902,7 +7238,7 @@
           </a:extLst>
         </p:spPr>
         <p:txBody>
-          <a:bodyPr lIns="45719" rIns="45719">
+          <a:bodyPr lIns="45718" tIns="45718" rIns="45718" bIns="45718">
             <a:spAutoFit/>
           </a:bodyPr>
           <a:lstStyle>
@@ -6911,6 +7247,10 @@
                 <a:solidFill>
                   <a:srgbClr val="00A896"/>
                 </a:solidFill>
+                <a:latin typeface="+mn-lt"/>
+                <a:ea typeface="+mn-ea"/>
+                <a:cs typeface="+mn-cs"/>
+                <a:sym typeface="Calibri"/>
               </a:defRPr>
             </a:lvl1pPr>
           </a:lstStyle>
@@ -6931,7 +7271,7 @@
         <p:spPr>
           <a:xfrm>
             <a:off x="6583680" y="2103120"/>
-            <a:ext cx="4846321" cy="777241"/>
+            <a:ext cx="4846322" cy="777242"/>
           </a:xfrm>
           <a:prstGeom prst="rect">
             <a:avLst/>
@@ -6951,7 +7291,7 @@
           </a:effectLst>
         </p:spPr>
         <p:txBody>
-          <a:bodyPr lIns="45719" rIns="45719" anchor="ctr"/>
+          <a:bodyPr lIns="45718" tIns="45718" rIns="45718" bIns="45718" anchor="ctr"/>
           <a:lstStyle/>
           <a:p>
             <a:pPr algn="ctr">
@@ -6959,6 +7299,10 @@
                 <a:solidFill>
                   <a:srgbClr val="FFFFFF"/>
                 </a:solidFill>
+                <a:latin typeface="+mn-lt"/>
+                <a:ea typeface="+mn-ea"/>
+                <a:cs typeface="+mn-cs"/>
+                <a:sym typeface="Calibri"/>
               </a:defRPr>
             </a:pPr>
           </a:p>
@@ -6973,7 +7317,7 @@
         <p:spPr>
           <a:xfrm>
             <a:off x="6583680" y="2103120"/>
-            <a:ext cx="73153" cy="777241"/>
+            <a:ext cx="73154" cy="777242"/>
           </a:xfrm>
           <a:prstGeom prst="rect">
             <a:avLst/>
@@ -6993,7 +7337,7 @@
           </a:effectLst>
         </p:spPr>
         <p:txBody>
-          <a:bodyPr lIns="45719" rIns="45719" anchor="ctr"/>
+          <a:bodyPr lIns="45718" tIns="45718" rIns="45718" bIns="45718" anchor="ctr"/>
           <a:lstStyle/>
           <a:p>
             <a:pPr algn="ctr">
@@ -7001,6 +7345,10 @@
                 <a:solidFill>
                   <a:srgbClr val="FFFFFF"/>
                 </a:solidFill>
+                <a:latin typeface="+mn-lt"/>
+                <a:ea typeface="+mn-ea"/>
+                <a:cs typeface="+mn-cs"/>
+                <a:sym typeface="Calibri"/>
               </a:defRPr>
             </a:pPr>
           </a:p>
@@ -7014,8 +7362,8 @@
         </p:nvSpPr>
         <p:spPr>
           <a:xfrm>
-            <a:off x="6995160" y="2148838"/>
-            <a:ext cx="1737361" cy="333089"/>
+            <a:off x="6995159" y="2148839"/>
+            <a:ext cx="1737362" cy="333086"/>
           </a:xfrm>
           <a:prstGeom prst="rect">
             <a:avLst/>
@@ -7030,7 +7378,7 @@
           </a:extLst>
         </p:spPr>
         <p:txBody>
-          <a:bodyPr lIns="45719" rIns="45719">
+          <a:bodyPr lIns="45718" tIns="45718" rIns="45718" bIns="45718">
             <a:spAutoFit/>
           </a:bodyPr>
           <a:lstStyle>
@@ -7039,6 +7387,10 @@
                 <a:solidFill>
                   <a:srgbClr val="1E2761"/>
                 </a:solidFill>
+                <a:latin typeface="+mn-lt"/>
+                <a:ea typeface="+mn-ea"/>
+                <a:cs typeface="+mn-cs"/>
+                <a:sym typeface="Calibri"/>
               </a:defRPr>
             </a:lvl1pPr>
           </a:lstStyle>
@@ -7058,8 +7410,8 @@
         </p:nvSpPr>
         <p:spPr>
           <a:xfrm>
-            <a:off x="6995160" y="2468878"/>
-            <a:ext cx="4023361" cy="258203"/>
+            <a:off x="6995159" y="2468878"/>
+            <a:ext cx="4023362" cy="258201"/>
           </a:xfrm>
           <a:prstGeom prst="rect">
             <a:avLst/>
@@ -7074,7 +7426,7 @@
           </a:extLst>
         </p:spPr>
         <p:txBody>
-          <a:bodyPr lIns="45719" rIns="45719">
+          <a:bodyPr lIns="45718" tIns="45718" rIns="45718" bIns="45718">
             <a:spAutoFit/>
           </a:bodyPr>
           <a:lstStyle>
@@ -7083,6 +7435,10 @@
                 <a:solidFill>
                   <a:srgbClr val="6B7B8D"/>
                 </a:solidFill>
+                <a:latin typeface="+mn-lt"/>
+                <a:ea typeface="+mn-ea"/>
+                <a:cs typeface="+mn-cs"/>
+                <a:sym typeface="Calibri"/>
               </a:defRPr>
             </a:lvl1pPr>
           </a:lstStyle>
@@ -7103,7 +7459,7 @@
         <p:spPr>
           <a:xfrm>
             <a:off x="6583680" y="3063238"/>
-            <a:ext cx="4846321" cy="777241"/>
+            <a:ext cx="4846322" cy="777242"/>
           </a:xfrm>
           <a:prstGeom prst="rect">
             <a:avLst/>
@@ -7123,7 +7479,7 @@
           </a:effectLst>
         </p:spPr>
         <p:txBody>
-          <a:bodyPr lIns="45719" rIns="45719" anchor="ctr"/>
+          <a:bodyPr lIns="45718" tIns="45718" rIns="45718" bIns="45718" anchor="ctr"/>
           <a:lstStyle/>
           <a:p>
             <a:pPr algn="ctr">
@@ -7131,6 +7487,10 @@
                 <a:solidFill>
                   <a:srgbClr val="FFFFFF"/>
                 </a:solidFill>
+                <a:latin typeface="+mn-lt"/>
+                <a:ea typeface="+mn-ea"/>
+                <a:cs typeface="+mn-cs"/>
+                <a:sym typeface="Calibri"/>
               </a:defRPr>
             </a:pPr>
           </a:p>
@@ -7145,7 +7505,7 @@
         <p:spPr>
           <a:xfrm>
             <a:off x="6583680" y="3063238"/>
-            <a:ext cx="73153" cy="777241"/>
+            <a:ext cx="73154" cy="777242"/>
           </a:xfrm>
           <a:prstGeom prst="rect">
             <a:avLst/>
@@ -7165,7 +7525,7 @@
           </a:effectLst>
         </p:spPr>
         <p:txBody>
-          <a:bodyPr lIns="45719" rIns="45719" anchor="ctr"/>
+          <a:bodyPr lIns="45718" tIns="45718" rIns="45718" bIns="45718" anchor="ctr"/>
           <a:lstStyle/>
           <a:p>
             <a:pPr algn="ctr">
@@ -7173,6 +7533,10 @@
                 <a:solidFill>
                   <a:srgbClr val="FFFFFF"/>
                 </a:solidFill>
+                <a:latin typeface="+mn-lt"/>
+                <a:ea typeface="+mn-ea"/>
+                <a:cs typeface="+mn-cs"/>
+                <a:sym typeface="Calibri"/>
               </a:defRPr>
             </a:pPr>
           </a:p>
@@ -7186,8 +7550,8 @@
         </p:nvSpPr>
         <p:spPr>
           <a:xfrm>
-            <a:off x="6995160" y="3108959"/>
-            <a:ext cx="1737361" cy="333088"/>
+            <a:off x="6995159" y="3108960"/>
+            <a:ext cx="1737362" cy="333086"/>
           </a:xfrm>
           <a:prstGeom prst="rect">
             <a:avLst/>
@@ -7202,7 +7566,7 @@
           </a:extLst>
         </p:spPr>
         <p:txBody>
-          <a:bodyPr lIns="45719" rIns="45719">
+          <a:bodyPr lIns="45718" tIns="45718" rIns="45718" bIns="45718">
             <a:spAutoFit/>
           </a:bodyPr>
           <a:lstStyle>
@@ -7211,6 +7575,10 @@
                 <a:solidFill>
                   <a:srgbClr val="1E2761"/>
                 </a:solidFill>
+                <a:latin typeface="+mn-lt"/>
+                <a:ea typeface="+mn-ea"/>
+                <a:cs typeface="+mn-cs"/>
+                <a:sym typeface="Calibri"/>
               </a:defRPr>
             </a:lvl1pPr>
           </a:lstStyle>
@@ -7230,8 +7598,8 @@
         </p:nvSpPr>
         <p:spPr>
           <a:xfrm>
-            <a:off x="6995160" y="3428998"/>
-            <a:ext cx="4023361" cy="258203"/>
+            <a:off x="6995159" y="3428999"/>
+            <a:ext cx="4023362" cy="258200"/>
           </a:xfrm>
           <a:prstGeom prst="rect">
             <a:avLst/>
@@ -7246,7 +7614,7 @@
           </a:extLst>
         </p:spPr>
         <p:txBody>
-          <a:bodyPr lIns="45719" rIns="45719">
+          <a:bodyPr lIns="45718" tIns="45718" rIns="45718" bIns="45718">
             <a:spAutoFit/>
           </a:bodyPr>
           <a:lstStyle>
@@ -7255,6 +7623,10 @@
                 <a:solidFill>
                   <a:srgbClr val="6B7B8D"/>
                 </a:solidFill>
+                <a:latin typeface="+mn-lt"/>
+                <a:ea typeface="+mn-ea"/>
+                <a:cs typeface="+mn-cs"/>
+                <a:sym typeface="Calibri"/>
               </a:defRPr>
             </a:lvl1pPr>
           </a:lstStyle>
@@ -7275,7 +7647,7 @@
         <p:spPr>
           <a:xfrm>
             <a:off x="6583680" y="4023359"/>
-            <a:ext cx="4846321" cy="777241"/>
+            <a:ext cx="4846322" cy="777242"/>
           </a:xfrm>
           <a:prstGeom prst="rect">
             <a:avLst/>
@@ -7295,7 +7667,7 @@
           </a:effectLst>
         </p:spPr>
         <p:txBody>
-          <a:bodyPr lIns="45719" rIns="45719" anchor="ctr"/>
+          <a:bodyPr lIns="45718" tIns="45718" rIns="45718" bIns="45718" anchor="ctr"/>
           <a:lstStyle/>
           <a:p>
             <a:pPr algn="ctr">
@@ -7303,6 +7675,10 @@
                 <a:solidFill>
                   <a:srgbClr val="FFFFFF"/>
                 </a:solidFill>
+                <a:latin typeface="+mn-lt"/>
+                <a:ea typeface="+mn-ea"/>
+                <a:cs typeface="+mn-cs"/>
+                <a:sym typeface="Calibri"/>
               </a:defRPr>
             </a:pPr>
           </a:p>
@@ -7317,7 +7693,7 @@
         <p:spPr>
           <a:xfrm>
             <a:off x="6583680" y="4023359"/>
-            <a:ext cx="73153" cy="777241"/>
+            <a:ext cx="73154" cy="777242"/>
           </a:xfrm>
           <a:prstGeom prst="rect">
             <a:avLst/>
@@ -7337,7 +7713,7 @@
           </a:effectLst>
         </p:spPr>
         <p:txBody>
-          <a:bodyPr lIns="45719" rIns="45719" anchor="ctr"/>
+          <a:bodyPr lIns="45718" tIns="45718" rIns="45718" bIns="45718" anchor="ctr"/>
           <a:lstStyle/>
           <a:p>
             <a:pPr algn="ctr">
@@ -7345,6 +7721,10 @@
                 <a:solidFill>
                   <a:srgbClr val="FFFFFF"/>
                 </a:solidFill>
+                <a:latin typeface="+mn-lt"/>
+                <a:ea typeface="+mn-ea"/>
+                <a:cs typeface="+mn-cs"/>
+                <a:sym typeface="Calibri"/>
               </a:defRPr>
             </a:pPr>
           </a:p>
@@ -7358,8 +7738,8 @@
         </p:nvSpPr>
         <p:spPr>
           <a:xfrm>
-            <a:off x="6995160" y="4069079"/>
-            <a:ext cx="1737361" cy="333089"/>
+            <a:off x="6995159" y="4069080"/>
+            <a:ext cx="1737362" cy="333086"/>
           </a:xfrm>
           <a:prstGeom prst="rect">
             <a:avLst/>
@@ -7374,7 +7754,7 @@
           </a:extLst>
         </p:spPr>
         <p:txBody>
-          <a:bodyPr lIns="45719" rIns="45719">
+          <a:bodyPr lIns="45718" tIns="45718" rIns="45718" bIns="45718">
             <a:spAutoFit/>
           </a:bodyPr>
           <a:lstStyle>
@@ -7383,6 +7763,10 @@
                 <a:solidFill>
                   <a:srgbClr val="1E2761"/>
                 </a:solidFill>
+                <a:latin typeface="+mn-lt"/>
+                <a:ea typeface="+mn-ea"/>
+                <a:cs typeface="+mn-cs"/>
+                <a:sym typeface="Calibri"/>
               </a:defRPr>
             </a:lvl1pPr>
           </a:lstStyle>
@@ -7402,8 +7786,8 @@
         </p:nvSpPr>
         <p:spPr>
           <a:xfrm>
-            <a:off x="6995160" y="4389120"/>
-            <a:ext cx="4023361" cy="258202"/>
+            <a:off x="6995159" y="4389121"/>
+            <a:ext cx="4023362" cy="258200"/>
           </a:xfrm>
           <a:prstGeom prst="rect">
             <a:avLst/>
@@ -7418,7 +7802,7 @@
           </a:extLst>
         </p:spPr>
         <p:txBody>
-          <a:bodyPr lIns="45719" rIns="45719">
+          <a:bodyPr lIns="45718" tIns="45718" rIns="45718" bIns="45718">
             <a:spAutoFit/>
           </a:bodyPr>
           <a:lstStyle>
@@ -7427,6 +7811,10 @@
                 <a:solidFill>
                   <a:srgbClr val="6B7B8D"/>
                 </a:solidFill>
+                <a:latin typeface="+mn-lt"/>
+                <a:ea typeface="+mn-ea"/>
+                <a:cs typeface="+mn-cs"/>
+                <a:sym typeface="Calibri"/>
               </a:defRPr>
             </a:lvl1pPr>
           </a:lstStyle>
@@ -7447,7 +7835,7 @@
         <p:spPr>
           <a:xfrm>
             <a:off x="6583680" y="4983479"/>
-            <a:ext cx="4846321" cy="777241"/>
+            <a:ext cx="4846322" cy="777242"/>
           </a:xfrm>
           <a:prstGeom prst="rect">
             <a:avLst/>
@@ -7467,7 +7855,7 @@
           </a:effectLst>
         </p:spPr>
         <p:txBody>
-          <a:bodyPr lIns="45719" rIns="45719" anchor="ctr"/>
+          <a:bodyPr lIns="45718" tIns="45718" rIns="45718" bIns="45718" anchor="ctr"/>
           <a:lstStyle/>
           <a:p>
             <a:pPr algn="ctr">
@@ -7475,6 +7863,10 @@
                 <a:solidFill>
                   <a:srgbClr val="FFFFFF"/>
                 </a:solidFill>
+                <a:latin typeface="+mn-lt"/>
+                <a:ea typeface="+mn-ea"/>
+                <a:cs typeface="+mn-cs"/>
+                <a:sym typeface="Calibri"/>
               </a:defRPr>
             </a:pPr>
           </a:p>
@@ -7489,7 +7881,7 @@
         <p:spPr>
           <a:xfrm>
             <a:off x="6583680" y="4983479"/>
-            <a:ext cx="73153" cy="777241"/>
+            <a:ext cx="73154" cy="777242"/>
           </a:xfrm>
           <a:prstGeom prst="rect">
             <a:avLst/>
@@ -7509,7 +7901,7 @@
           </a:effectLst>
         </p:spPr>
         <p:txBody>
-          <a:bodyPr lIns="45719" rIns="45719" anchor="ctr"/>
+          <a:bodyPr lIns="45718" tIns="45718" rIns="45718" bIns="45718" anchor="ctr"/>
           <a:lstStyle/>
           <a:p>
             <a:pPr algn="ctr">
@@ -7517,6 +7909,10 @@
                 <a:solidFill>
                   <a:srgbClr val="FFFFFF"/>
                 </a:solidFill>
+                <a:latin typeface="+mn-lt"/>
+                <a:ea typeface="+mn-ea"/>
+                <a:cs typeface="+mn-cs"/>
+                <a:sym typeface="Calibri"/>
               </a:defRPr>
             </a:pPr>
           </a:p>
@@ -7530,8 +7926,8 @@
         </p:nvSpPr>
         <p:spPr>
           <a:xfrm>
-            <a:off x="6995160" y="5029199"/>
-            <a:ext cx="1737361" cy="333089"/>
+            <a:off x="6995159" y="5029199"/>
+            <a:ext cx="1737362" cy="333087"/>
           </a:xfrm>
           <a:prstGeom prst="rect">
             <a:avLst/>
@@ -7546,7 +7942,7 @@
           </a:extLst>
         </p:spPr>
         <p:txBody>
-          <a:bodyPr lIns="45719" rIns="45719">
+          <a:bodyPr lIns="45718" tIns="45718" rIns="45718" bIns="45718">
             <a:spAutoFit/>
           </a:bodyPr>
           <a:lstStyle>
@@ -7555,6 +7951,10 @@
                 <a:solidFill>
                   <a:srgbClr val="1E2761"/>
                 </a:solidFill>
+                <a:latin typeface="+mn-lt"/>
+                <a:ea typeface="+mn-ea"/>
+                <a:cs typeface="+mn-cs"/>
+                <a:sym typeface="Calibri"/>
               </a:defRPr>
             </a:lvl1pPr>
           </a:lstStyle>
@@ -7574,8 +7974,8 @@
         </p:nvSpPr>
         <p:spPr>
           <a:xfrm>
-            <a:off x="6995160" y="5349240"/>
-            <a:ext cx="4023361" cy="258203"/>
+            <a:off x="6995159" y="5349241"/>
+            <a:ext cx="4023362" cy="258201"/>
           </a:xfrm>
           <a:prstGeom prst="rect">
             <a:avLst/>
@@ -7590,7 +7990,7 @@
           </a:extLst>
         </p:spPr>
         <p:txBody>
-          <a:bodyPr lIns="45719" rIns="45719">
+          <a:bodyPr lIns="45718" tIns="45718" rIns="45718" bIns="45718">
             <a:spAutoFit/>
           </a:bodyPr>
           <a:lstStyle>
@@ -7599,6 +7999,10 @@
                 <a:solidFill>
                   <a:srgbClr val="6B7B8D"/>
                 </a:solidFill>
+                <a:latin typeface="+mn-lt"/>
+                <a:ea typeface="+mn-ea"/>
+                <a:cs typeface="+mn-cs"/>
+                <a:sym typeface="Calibri"/>
               </a:defRPr>
             </a:lvl1pPr>
           </a:lstStyle>
@@ -7644,8 +8048,8 @@
         </p:nvSpPr>
         <p:spPr>
           <a:xfrm>
-            <a:off x="-1" y="-1"/>
-            <a:ext cx="12191697" cy="73154"/>
+            <a:off x="-1" y="-2"/>
+            <a:ext cx="12191697" cy="73156"/>
           </a:xfrm>
           <a:prstGeom prst="rect">
             <a:avLst/>
@@ -7665,7 +8069,7 @@
           </a:effectLst>
         </p:spPr>
         <p:txBody>
-          <a:bodyPr lIns="45719" rIns="45719" anchor="ctr"/>
+          <a:bodyPr lIns="45718" tIns="45718" rIns="45718" bIns="45718" anchor="ctr"/>
           <a:lstStyle/>
           <a:p>
             <a:pPr algn="ctr">
@@ -7673,6 +8077,10 @@
                 <a:solidFill>
                   <a:srgbClr val="FFFFFF"/>
                 </a:solidFill>
+                <a:latin typeface="+mn-lt"/>
+                <a:ea typeface="+mn-ea"/>
+                <a:cs typeface="+mn-cs"/>
+                <a:sym typeface="Calibri"/>
               </a:defRPr>
             </a:pPr>
           </a:p>
@@ -7687,7 +8095,7 @@
         <p:spPr>
           <a:xfrm>
             <a:off x="777239" y="457199"/>
-            <a:ext cx="9052561" cy="542242"/>
+            <a:ext cx="9052561" cy="542240"/>
           </a:xfrm>
           <a:prstGeom prst="rect">
             <a:avLst/>
@@ -7702,7 +8110,7 @@
           </a:extLst>
         </p:spPr>
         <p:txBody>
-          <a:bodyPr lIns="45719" rIns="45719">
+          <a:bodyPr lIns="45718" tIns="45718" rIns="45718" bIns="45718">
             <a:spAutoFit/>
           </a:bodyPr>
           <a:lstStyle>
@@ -7711,6 +8119,10 @@
                 <a:solidFill>
                   <a:srgbClr val="1E2761"/>
                 </a:solidFill>
+                <a:latin typeface="+mn-lt"/>
+                <a:ea typeface="+mn-ea"/>
+                <a:cs typeface="+mn-cs"/>
+                <a:sym typeface="Calibri"/>
               </a:defRPr>
             </a:lvl1pPr>
           </a:lstStyle>
@@ -7731,7 +8143,7 @@
         <p:spPr>
           <a:xfrm>
             <a:off x="731519" y="1645920"/>
-            <a:ext cx="10698482" cy="1188721"/>
+            <a:ext cx="10698482" cy="1188722"/>
           </a:xfrm>
           <a:prstGeom prst="rect">
             <a:avLst/>
@@ -7751,7 +8163,7 @@
           </a:effectLst>
         </p:spPr>
         <p:txBody>
-          <a:bodyPr lIns="45719" rIns="45719" anchor="ctr"/>
+          <a:bodyPr lIns="45718" tIns="45718" rIns="45718" bIns="45718" anchor="ctr"/>
           <a:lstStyle/>
           <a:p>
             <a:pPr algn="ctr">
@@ -7759,6 +8171,10 @@
                 <a:solidFill>
                   <a:srgbClr val="FFFFFF"/>
                 </a:solidFill>
+                <a:latin typeface="+mn-lt"/>
+                <a:ea typeface="+mn-ea"/>
+                <a:cs typeface="+mn-cs"/>
+                <a:sym typeface="Calibri"/>
               </a:defRPr>
             </a:pPr>
           </a:p>
@@ -7772,8 +8188,8 @@
         </p:nvSpPr>
         <p:spPr>
           <a:xfrm>
-            <a:off x="1234439" y="1885785"/>
-            <a:ext cx="9692642" cy="644982"/>
+            <a:off x="1234438" y="1885786"/>
+            <a:ext cx="9692644" cy="644980"/>
           </a:xfrm>
           <a:prstGeom prst="rect">
             <a:avLst/>
@@ -7788,7 +8204,7 @@
           </a:extLst>
         </p:spPr>
         <p:txBody>
-          <a:bodyPr lIns="45719" rIns="45719">
+          <a:bodyPr lIns="45718" tIns="45718" rIns="45718" bIns="45718">
             <a:spAutoFit/>
           </a:bodyPr>
           <a:lstStyle>
@@ -7797,6 +8213,10 @@
                 <a:solidFill>
                   <a:srgbClr val="FFFFFF"/>
                 </a:solidFill>
+                <a:latin typeface="+mn-lt"/>
+                <a:ea typeface="+mn-ea"/>
+                <a:cs typeface="+mn-cs"/>
+                <a:sym typeface="Calibri"/>
               </a:defRPr>
             </a:lvl1pPr>
           </a:lstStyle>
@@ -7816,8 +8236,8 @@
         </p:nvSpPr>
         <p:spPr>
           <a:xfrm>
-            <a:off x="777239" y="3291840"/>
-            <a:ext cx="4937761" cy="385376"/>
+            <a:off x="777238" y="3291841"/>
+            <a:ext cx="4937762" cy="385374"/>
           </a:xfrm>
           <a:prstGeom prst="rect">
             <a:avLst/>
@@ -7832,7 +8252,7 @@
           </a:extLst>
         </p:spPr>
         <p:txBody>
-          <a:bodyPr lIns="45719" rIns="45719">
+          <a:bodyPr lIns="45718" tIns="45718" rIns="45718" bIns="45718">
             <a:spAutoFit/>
           </a:bodyPr>
           <a:lstStyle>
@@ -7841,6 +8261,10 @@
                 <a:solidFill>
                   <a:srgbClr val="00A896"/>
                 </a:solidFill>
+                <a:latin typeface="+mn-lt"/>
+                <a:ea typeface="+mn-ea"/>
+                <a:cs typeface="+mn-cs"/>
+                <a:sym typeface="Calibri"/>
               </a:defRPr>
             </a:lvl1pPr>
           </a:lstStyle>
@@ -7860,8 +8284,8 @@
         </p:nvSpPr>
         <p:spPr>
           <a:xfrm>
-            <a:off x="777239" y="3840479"/>
-            <a:ext cx="4937761" cy="1062595"/>
+            <a:off x="777238" y="3840480"/>
+            <a:ext cx="4937762" cy="1062592"/>
           </a:xfrm>
           <a:prstGeom prst="rect">
             <a:avLst/>
@@ -7876,7 +8300,7 @@
           </a:extLst>
         </p:spPr>
         <p:txBody>
-          <a:bodyPr lIns="45719" rIns="45719">
+          <a:bodyPr lIns="45718" tIns="45718" rIns="45718" bIns="45718">
             <a:spAutoFit/>
           </a:bodyPr>
           <a:lstStyle>
@@ -7885,6 +8309,10 @@
                 <a:solidFill>
                   <a:srgbClr val="1A1A2E"/>
                 </a:solidFill>
+                <a:latin typeface="+mn-lt"/>
+                <a:ea typeface="+mn-ea"/>
+                <a:cs typeface="+mn-cs"/>
+                <a:sym typeface="Calibri"/>
               </a:defRPr>
             </a:lvl1pPr>
           </a:lstStyle>
@@ -7904,8 +8332,8 @@
         </p:nvSpPr>
         <p:spPr>
           <a:xfrm>
-            <a:off x="6629400" y="3291840"/>
-            <a:ext cx="4937761" cy="385376"/>
+            <a:off x="6629399" y="3291841"/>
+            <a:ext cx="4937763" cy="385374"/>
           </a:xfrm>
           <a:prstGeom prst="rect">
             <a:avLst/>
@@ -7920,7 +8348,7 @@
           </a:extLst>
         </p:spPr>
         <p:txBody>
-          <a:bodyPr lIns="45719" rIns="45719">
+          <a:bodyPr lIns="45718" tIns="45718" rIns="45718" bIns="45718">
             <a:spAutoFit/>
           </a:bodyPr>
           <a:lstStyle>
@@ -7929,6 +8357,10 @@
                 <a:solidFill>
                   <a:srgbClr val="00A896"/>
                 </a:solidFill>
+                <a:latin typeface="+mn-lt"/>
+                <a:ea typeface="+mn-ea"/>
+                <a:cs typeface="+mn-cs"/>
+                <a:sym typeface="Calibri"/>
               </a:defRPr>
             </a:lvl1pPr>
           </a:lstStyle>
@@ -7948,8 +8380,8 @@
         </p:nvSpPr>
         <p:spPr>
           <a:xfrm>
-            <a:off x="6629400" y="3840479"/>
-            <a:ext cx="4937761" cy="277997"/>
+            <a:off x="6629399" y="3840480"/>
+            <a:ext cx="4937763" cy="277995"/>
           </a:xfrm>
           <a:prstGeom prst="rect">
             <a:avLst/>
@@ -7964,7 +8396,7 @@
           </a:extLst>
         </p:spPr>
         <p:txBody>
-          <a:bodyPr lIns="45719" rIns="45719">
+          <a:bodyPr lIns="45718" tIns="45718" rIns="45718" bIns="45718">
             <a:spAutoFit/>
           </a:bodyPr>
           <a:lstStyle>
@@ -7973,6 +8405,10 @@
                 <a:solidFill>
                   <a:srgbClr val="1A1A2E"/>
                 </a:solidFill>
+                <a:latin typeface="+mn-lt"/>
+                <a:ea typeface="+mn-ea"/>
+                <a:cs typeface="+mn-cs"/>
+                <a:sym typeface="Calibri"/>
               </a:defRPr>
             </a:lvl1pPr>
           </a:lstStyle>
@@ -7992,8 +8428,8 @@
         </p:nvSpPr>
         <p:spPr>
           <a:xfrm>
-            <a:off x="6629400" y="4343400"/>
-            <a:ext cx="4937761" cy="277997"/>
+            <a:off x="6629399" y="4343400"/>
+            <a:ext cx="4937763" cy="277996"/>
           </a:xfrm>
           <a:prstGeom prst="rect">
             <a:avLst/>
@@ -8008,7 +8444,7 @@
           </a:extLst>
         </p:spPr>
         <p:txBody>
-          <a:bodyPr lIns="45719" rIns="45719">
+          <a:bodyPr lIns="45718" tIns="45718" rIns="45718" bIns="45718">
             <a:spAutoFit/>
           </a:bodyPr>
           <a:lstStyle>
@@ -8017,6 +8453,10 @@
                 <a:solidFill>
                   <a:srgbClr val="1A1A2E"/>
                 </a:solidFill>
+                <a:latin typeface="+mn-lt"/>
+                <a:ea typeface="+mn-ea"/>
+                <a:cs typeface="+mn-cs"/>
+                <a:sym typeface="Calibri"/>
               </a:defRPr>
             </a:lvl1pPr>
           </a:lstStyle>
@@ -8036,8 +8476,8 @@
         </p:nvSpPr>
         <p:spPr>
           <a:xfrm>
-            <a:off x="6629400" y="4846320"/>
-            <a:ext cx="4937761" cy="277997"/>
+            <a:off x="6629399" y="4846321"/>
+            <a:ext cx="4937763" cy="277995"/>
           </a:xfrm>
           <a:prstGeom prst="rect">
             <a:avLst/>
@@ -8052,7 +8492,7 @@
           </a:extLst>
         </p:spPr>
         <p:txBody>
-          <a:bodyPr lIns="45719" rIns="45719">
+          <a:bodyPr lIns="45718" tIns="45718" rIns="45718" bIns="45718">
             <a:spAutoFit/>
           </a:bodyPr>
           <a:lstStyle>
@@ -8061,6 +8501,10 @@
                 <a:solidFill>
                   <a:srgbClr val="1A1A2E"/>
                 </a:solidFill>
+                <a:latin typeface="+mn-lt"/>
+                <a:ea typeface="+mn-ea"/>
+                <a:cs typeface="+mn-cs"/>
+                <a:sym typeface="Calibri"/>
               </a:defRPr>
             </a:lvl1pPr>
           </a:lstStyle>
@@ -8080,8 +8524,8 @@
         </p:nvSpPr>
         <p:spPr>
           <a:xfrm>
-            <a:off x="6629400" y="5349240"/>
-            <a:ext cx="4937761" cy="277997"/>
+            <a:off x="6629399" y="5349241"/>
+            <a:ext cx="4937763" cy="277995"/>
           </a:xfrm>
           <a:prstGeom prst="rect">
             <a:avLst/>
@@ -8096,7 +8540,7 @@
           </a:extLst>
         </p:spPr>
         <p:txBody>
-          <a:bodyPr lIns="45719" rIns="45719">
+          <a:bodyPr lIns="45718" tIns="45718" rIns="45718" bIns="45718">
             <a:spAutoFit/>
           </a:bodyPr>
           <a:lstStyle>
@@ -8105,6 +8549,10 @@
                 <a:solidFill>
                   <a:srgbClr val="1A1A2E"/>
                 </a:solidFill>
+                <a:latin typeface="+mn-lt"/>
+                <a:ea typeface="+mn-ea"/>
+                <a:cs typeface="+mn-cs"/>
+                <a:sym typeface="Calibri"/>
               </a:defRPr>
             </a:lvl1pPr>
           </a:lstStyle>
@@ -8150,8 +8598,8 @@
         </p:nvSpPr>
         <p:spPr>
           <a:xfrm>
-            <a:off x="-1" y="-1"/>
-            <a:ext cx="12191697" cy="73154"/>
+            <a:off x="-1" y="-2"/>
+            <a:ext cx="12191697" cy="73156"/>
           </a:xfrm>
           <a:prstGeom prst="rect">
             <a:avLst/>
@@ -8171,7 +8619,7 @@
           </a:effectLst>
         </p:spPr>
         <p:txBody>
-          <a:bodyPr lIns="45719" rIns="45719" anchor="ctr"/>
+          <a:bodyPr lIns="45718" tIns="45718" rIns="45718" bIns="45718" anchor="ctr"/>
           <a:lstStyle/>
           <a:p>
             <a:pPr algn="ctr">
@@ -8179,6 +8627,10 @@
                 <a:solidFill>
                   <a:srgbClr val="FFFFFF"/>
                 </a:solidFill>
+                <a:latin typeface="+mn-lt"/>
+                <a:ea typeface="+mn-ea"/>
+                <a:cs typeface="+mn-cs"/>
+                <a:sym typeface="Calibri"/>
               </a:defRPr>
             </a:pPr>
           </a:p>
@@ -8193,7 +8645,7 @@
         <p:spPr>
           <a:xfrm>
             <a:off x="777239" y="457199"/>
-            <a:ext cx="9052561" cy="542242"/>
+            <a:ext cx="9052561" cy="542240"/>
           </a:xfrm>
           <a:prstGeom prst="rect">
             <a:avLst/>
@@ -8208,7 +8660,7 @@
           </a:extLst>
         </p:spPr>
         <p:txBody>
-          <a:bodyPr lIns="45719" rIns="45719">
+          <a:bodyPr lIns="45718" tIns="45718" rIns="45718" bIns="45718">
             <a:spAutoFit/>
           </a:bodyPr>
           <a:lstStyle>
@@ -8217,6 +8669,10 @@
                 <a:solidFill>
                   <a:srgbClr val="1E2761"/>
                 </a:solidFill>
+                <a:latin typeface="+mn-lt"/>
+                <a:ea typeface="+mn-ea"/>
+                <a:cs typeface="+mn-cs"/>
+                <a:sym typeface="Calibri"/>
               </a:defRPr>
             </a:lvl1pPr>
           </a:lstStyle>
@@ -8236,8 +8692,8 @@
         </p:nvSpPr>
         <p:spPr>
           <a:xfrm>
-            <a:off x="731519" y="1463039"/>
-            <a:ext cx="5120642" cy="4114801"/>
+            <a:off x="731518" y="1463038"/>
+            <a:ext cx="5120644" cy="4114803"/>
           </a:xfrm>
           <a:prstGeom prst="rect">
             <a:avLst/>
@@ -8257,7 +8713,7 @@
           </a:effectLst>
         </p:spPr>
         <p:txBody>
-          <a:bodyPr lIns="45719" rIns="45719" anchor="ctr"/>
+          <a:bodyPr lIns="45718" tIns="45718" rIns="45718" bIns="45718" anchor="ctr"/>
           <a:lstStyle/>
           <a:p>
             <a:pPr algn="ctr">
@@ -8265,6 +8721,10 @@
                 <a:solidFill>
                   <a:srgbClr val="FFFFFF"/>
                 </a:solidFill>
+                <a:latin typeface="+mn-lt"/>
+                <a:ea typeface="+mn-ea"/>
+                <a:cs typeface="+mn-cs"/>
+                <a:sym typeface="Calibri"/>
               </a:defRPr>
             </a:pPr>
           </a:p>
@@ -8278,8 +8738,8 @@
         </p:nvSpPr>
         <p:spPr>
           <a:xfrm>
-            <a:off x="731519" y="1463039"/>
-            <a:ext cx="5120642" cy="548641"/>
+            <a:off x="731518" y="1463039"/>
+            <a:ext cx="5120644" cy="548641"/>
           </a:xfrm>
           <a:prstGeom prst="rect">
             <a:avLst/>
@@ -8299,7 +8759,7 @@
           </a:effectLst>
         </p:spPr>
         <p:txBody>
-          <a:bodyPr lIns="45719" rIns="45719" anchor="ctr"/>
+          <a:bodyPr lIns="45718" tIns="45718" rIns="45718" bIns="45718" anchor="ctr"/>
           <a:lstStyle/>
           <a:p>
             <a:pPr algn="ctr">
@@ -8307,6 +8767,10 @@
                 <a:solidFill>
                   <a:srgbClr val="FFFFFF"/>
                 </a:solidFill>
+                <a:latin typeface="+mn-lt"/>
+                <a:ea typeface="+mn-ea"/>
+                <a:cs typeface="+mn-cs"/>
+                <a:sym typeface="Calibri"/>
               </a:defRPr>
             </a:pPr>
           </a:p>
@@ -8320,8 +8784,8 @@
         </p:nvSpPr>
         <p:spPr>
           <a:xfrm>
-            <a:off x="1051559" y="1570816"/>
-            <a:ext cx="4480561" cy="333088"/>
+            <a:off x="1051558" y="1570817"/>
+            <a:ext cx="4480562" cy="333086"/>
           </a:xfrm>
           <a:prstGeom prst="rect">
             <a:avLst/>
@@ -8336,7 +8800,7 @@
           </a:extLst>
         </p:spPr>
         <p:txBody>
-          <a:bodyPr lIns="45719" rIns="45719">
+          <a:bodyPr lIns="45718" tIns="45718" rIns="45718" bIns="45718">
             <a:spAutoFit/>
           </a:bodyPr>
           <a:lstStyle>
@@ -8345,6 +8809,10 @@
                 <a:solidFill>
                   <a:srgbClr val="FFFFFF"/>
                 </a:solidFill>
+                <a:latin typeface="+mn-lt"/>
+                <a:ea typeface="+mn-ea"/>
+                <a:cs typeface="+mn-cs"/>
+                <a:sym typeface="Calibri"/>
               </a:defRPr>
             </a:lvl1pPr>
           </a:lstStyle>
@@ -8364,8 +8832,8 @@
         </p:nvSpPr>
         <p:spPr>
           <a:xfrm>
-            <a:off x="1051559" y="2285999"/>
-            <a:ext cx="4480561" cy="280800"/>
+            <a:off x="1051558" y="2286000"/>
+            <a:ext cx="4480562" cy="280798"/>
           </a:xfrm>
           <a:prstGeom prst="rect">
             <a:avLst/>
@@ -8380,7 +8848,7 @@
           </a:extLst>
         </p:spPr>
         <p:txBody>
-          <a:bodyPr lIns="45719" rIns="45719">
+          <a:bodyPr lIns="45718" tIns="45718" rIns="45718" bIns="45718">
             <a:spAutoFit/>
           </a:bodyPr>
           <a:lstStyle>
@@ -8389,6 +8857,10 @@
                 <a:solidFill>
                   <a:srgbClr val="1A1A2E"/>
                 </a:solidFill>
+                <a:latin typeface="+mn-lt"/>
+                <a:ea typeface="+mn-ea"/>
+                <a:cs typeface="+mn-cs"/>
+                <a:sym typeface="Calibri"/>
               </a:defRPr>
             </a:lvl1pPr>
           </a:lstStyle>
@@ -8408,8 +8880,8 @@
         </p:nvSpPr>
         <p:spPr>
           <a:xfrm>
-            <a:off x="1051559" y="2926079"/>
-            <a:ext cx="4480561" cy="280800"/>
+            <a:off x="1051558" y="2926079"/>
+            <a:ext cx="4480562" cy="280798"/>
           </a:xfrm>
           <a:prstGeom prst="rect">
             <a:avLst/>
@@ -8424,7 +8896,7 @@
           </a:extLst>
         </p:spPr>
         <p:txBody>
-          <a:bodyPr lIns="45719" rIns="45719">
+          <a:bodyPr lIns="45718" tIns="45718" rIns="45718" bIns="45718">
             <a:spAutoFit/>
           </a:bodyPr>
           <a:lstStyle>
@@ -8433,6 +8905,10 @@
                 <a:solidFill>
                   <a:srgbClr val="1A1A2E"/>
                 </a:solidFill>
+                <a:latin typeface="+mn-lt"/>
+                <a:ea typeface="+mn-ea"/>
+                <a:cs typeface="+mn-cs"/>
+                <a:sym typeface="Calibri"/>
               </a:defRPr>
             </a:lvl1pPr>
           </a:lstStyle>
@@ -8452,8 +8928,8 @@
         </p:nvSpPr>
         <p:spPr>
           <a:xfrm>
-            <a:off x="1051559" y="3566159"/>
-            <a:ext cx="4480561" cy="280800"/>
+            <a:off x="1051558" y="3566160"/>
+            <a:ext cx="4480562" cy="280798"/>
           </a:xfrm>
           <a:prstGeom prst="rect">
             <a:avLst/>
@@ -8468,7 +8944,7 @@
           </a:extLst>
         </p:spPr>
         <p:txBody>
-          <a:bodyPr lIns="45719" rIns="45719">
+          <a:bodyPr lIns="45718" tIns="45718" rIns="45718" bIns="45718">
             <a:spAutoFit/>
           </a:bodyPr>
           <a:lstStyle>
@@ -8477,6 +8953,10 @@
                 <a:solidFill>
                   <a:srgbClr val="1A1A2E"/>
                 </a:solidFill>
+                <a:latin typeface="+mn-lt"/>
+                <a:ea typeface="+mn-ea"/>
+                <a:cs typeface="+mn-cs"/>
+                <a:sym typeface="Calibri"/>
               </a:defRPr>
             </a:lvl1pPr>
           </a:lstStyle>
@@ -8496,8 +8976,8 @@
         </p:nvSpPr>
         <p:spPr>
           <a:xfrm>
-            <a:off x="1051559" y="4206240"/>
-            <a:ext cx="4480561" cy="280800"/>
+            <a:off x="1051558" y="4206241"/>
+            <a:ext cx="4480562" cy="280798"/>
           </a:xfrm>
           <a:prstGeom prst="rect">
             <a:avLst/>
@@ -8512,7 +8992,7 @@
           </a:extLst>
         </p:spPr>
         <p:txBody>
-          <a:bodyPr lIns="45719" rIns="45719">
+          <a:bodyPr lIns="45718" tIns="45718" rIns="45718" bIns="45718">
             <a:spAutoFit/>
           </a:bodyPr>
           <a:lstStyle>
@@ -8521,6 +9001,10 @@
                 <a:solidFill>
                   <a:srgbClr val="1A1A2E"/>
                 </a:solidFill>
+                <a:latin typeface="+mn-lt"/>
+                <a:ea typeface="+mn-ea"/>
+                <a:cs typeface="+mn-cs"/>
+                <a:sym typeface="Calibri"/>
               </a:defRPr>
             </a:lvl1pPr>
           </a:lstStyle>
@@ -8540,8 +9024,8 @@
         </p:nvSpPr>
         <p:spPr>
           <a:xfrm>
-            <a:off x="1051559" y="4846320"/>
-            <a:ext cx="4480561" cy="280800"/>
+            <a:off x="1051558" y="4846321"/>
+            <a:ext cx="4480562" cy="280798"/>
           </a:xfrm>
           <a:prstGeom prst="rect">
             <a:avLst/>
@@ -8556,7 +9040,7 @@
           </a:extLst>
         </p:spPr>
         <p:txBody>
-          <a:bodyPr lIns="45719" rIns="45719">
+          <a:bodyPr lIns="45718" tIns="45718" rIns="45718" bIns="45718">
             <a:spAutoFit/>
           </a:bodyPr>
           <a:lstStyle>
@@ -8565,6 +9049,10 @@
                 <a:solidFill>
                   <a:srgbClr val="1A1A2E"/>
                 </a:solidFill>
+                <a:latin typeface="+mn-lt"/>
+                <a:ea typeface="+mn-ea"/>
+                <a:cs typeface="+mn-cs"/>
+                <a:sym typeface="Calibri"/>
               </a:defRPr>
             </a:lvl1pPr>
           </a:lstStyle>
@@ -8584,8 +9072,8 @@
         </p:nvSpPr>
         <p:spPr>
           <a:xfrm>
-            <a:off x="6309359" y="1463039"/>
-            <a:ext cx="5120641" cy="4114801"/>
+            <a:off x="6309359" y="1463038"/>
+            <a:ext cx="5120642" cy="4114803"/>
           </a:xfrm>
           <a:prstGeom prst="rect">
             <a:avLst/>
@@ -8605,7 +9093,7 @@
           </a:effectLst>
         </p:spPr>
         <p:txBody>
-          <a:bodyPr lIns="45719" rIns="45719" anchor="ctr"/>
+          <a:bodyPr lIns="45718" tIns="45718" rIns="45718" bIns="45718" anchor="ctr"/>
           <a:lstStyle/>
           <a:p>
             <a:pPr algn="ctr">
@@ -8613,6 +9101,10 @@
                 <a:solidFill>
                   <a:srgbClr val="FFFFFF"/>
                 </a:solidFill>
+                <a:latin typeface="+mn-lt"/>
+                <a:ea typeface="+mn-ea"/>
+                <a:cs typeface="+mn-cs"/>
+                <a:sym typeface="Calibri"/>
               </a:defRPr>
             </a:pPr>
           </a:p>
@@ -8627,7 +9119,7 @@
         <p:spPr>
           <a:xfrm>
             <a:off x="6309359" y="1463039"/>
-            <a:ext cx="5120641" cy="548641"/>
+            <a:ext cx="5120642" cy="548641"/>
           </a:xfrm>
           <a:prstGeom prst="rect">
             <a:avLst/>
@@ -8647,7 +9139,7 @@
           </a:effectLst>
         </p:spPr>
         <p:txBody>
-          <a:bodyPr lIns="45719" rIns="45719" anchor="ctr"/>
+          <a:bodyPr lIns="45718" tIns="45718" rIns="45718" bIns="45718" anchor="ctr"/>
           <a:lstStyle/>
           <a:p>
             <a:pPr algn="ctr">
@@ -8655,6 +9147,10 @@
                 <a:solidFill>
                   <a:srgbClr val="FFFFFF"/>
                 </a:solidFill>
+                <a:latin typeface="+mn-lt"/>
+                <a:ea typeface="+mn-ea"/>
+                <a:cs typeface="+mn-cs"/>
+                <a:sym typeface="Calibri"/>
               </a:defRPr>
             </a:pPr>
           </a:p>
@@ -8668,8 +9164,8 @@
         </p:nvSpPr>
         <p:spPr>
           <a:xfrm>
-            <a:off x="6629399" y="1570816"/>
-            <a:ext cx="4480561" cy="333088"/>
+            <a:off x="6629399" y="1570817"/>
+            <a:ext cx="4480562" cy="333086"/>
           </a:xfrm>
           <a:prstGeom prst="rect">
             <a:avLst/>
@@ -8684,7 +9180,7 @@
           </a:extLst>
         </p:spPr>
         <p:txBody>
-          <a:bodyPr lIns="45719" rIns="45719">
+          <a:bodyPr lIns="45718" tIns="45718" rIns="45718" bIns="45718">
             <a:spAutoFit/>
           </a:bodyPr>
           <a:lstStyle>
@@ -8693,6 +9189,10 @@
                 <a:solidFill>
                   <a:srgbClr val="FFFFFF"/>
                 </a:solidFill>
+                <a:latin typeface="+mn-lt"/>
+                <a:ea typeface="+mn-ea"/>
+                <a:cs typeface="+mn-cs"/>
+                <a:sym typeface="Calibri"/>
               </a:defRPr>
             </a:lvl1pPr>
           </a:lstStyle>
@@ -8712,8 +9212,8 @@
         </p:nvSpPr>
         <p:spPr>
           <a:xfrm>
-            <a:off x="6629400" y="2285999"/>
-            <a:ext cx="4480561" cy="280800"/>
+            <a:off x="6629399" y="2286000"/>
+            <a:ext cx="4480563" cy="280798"/>
           </a:xfrm>
           <a:prstGeom prst="rect">
             <a:avLst/>
@@ -8728,7 +9228,7 @@
           </a:extLst>
         </p:spPr>
         <p:txBody>
-          <a:bodyPr lIns="45719" rIns="45719">
+          <a:bodyPr lIns="45718" tIns="45718" rIns="45718" bIns="45718">
             <a:spAutoFit/>
           </a:bodyPr>
           <a:lstStyle>
@@ -8737,6 +9237,10 @@
                 <a:solidFill>
                   <a:srgbClr val="1A1A2E"/>
                 </a:solidFill>
+                <a:latin typeface="+mn-lt"/>
+                <a:ea typeface="+mn-ea"/>
+                <a:cs typeface="+mn-cs"/>
+                <a:sym typeface="Calibri"/>
               </a:defRPr>
             </a:lvl1pPr>
           </a:lstStyle>
@@ -8756,8 +9260,8 @@
         </p:nvSpPr>
         <p:spPr>
           <a:xfrm>
-            <a:off x="6629400" y="2926079"/>
-            <a:ext cx="4480561" cy="280800"/>
+            <a:off x="6629399" y="2926079"/>
+            <a:ext cx="4480563" cy="280798"/>
           </a:xfrm>
           <a:prstGeom prst="rect">
             <a:avLst/>
@@ -8772,7 +9276,7 @@
           </a:extLst>
         </p:spPr>
         <p:txBody>
-          <a:bodyPr lIns="45719" rIns="45719">
+          <a:bodyPr lIns="45718" tIns="45718" rIns="45718" bIns="45718">
             <a:spAutoFit/>
           </a:bodyPr>
           <a:lstStyle>
@@ -8781,6 +9285,10 @@
                 <a:solidFill>
                   <a:srgbClr val="1A1A2E"/>
                 </a:solidFill>
+                <a:latin typeface="+mn-lt"/>
+                <a:ea typeface="+mn-ea"/>
+                <a:cs typeface="+mn-cs"/>
+                <a:sym typeface="Calibri"/>
               </a:defRPr>
             </a:lvl1pPr>
           </a:lstStyle>
@@ -8800,8 +9308,8 @@
         </p:nvSpPr>
         <p:spPr>
           <a:xfrm>
-            <a:off x="6629400" y="3566159"/>
-            <a:ext cx="4480561" cy="280800"/>
+            <a:off x="6629399" y="3566160"/>
+            <a:ext cx="4480563" cy="280798"/>
           </a:xfrm>
           <a:prstGeom prst="rect">
             <a:avLst/>
@@ -8816,7 +9324,7 @@
           </a:extLst>
         </p:spPr>
         <p:txBody>
-          <a:bodyPr lIns="45719" rIns="45719">
+          <a:bodyPr lIns="45718" tIns="45718" rIns="45718" bIns="45718">
             <a:spAutoFit/>
           </a:bodyPr>
           <a:lstStyle>
@@ -8825,6 +9333,10 @@
                 <a:solidFill>
                   <a:srgbClr val="1A1A2E"/>
                 </a:solidFill>
+                <a:latin typeface="+mn-lt"/>
+                <a:ea typeface="+mn-ea"/>
+                <a:cs typeface="+mn-cs"/>
+                <a:sym typeface="Calibri"/>
               </a:defRPr>
             </a:lvl1pPr>
           </a:lstStyle>
@@ -8844,8 +9356,8 @@
         </p:nvSpPr>
         <p:spPr>
           <a:xfrm>
-            <a:off x="6629400" y="4206240"/>
-            <a:ext cx="4480561" cy="280800"/>
+            <a:off x="6629399" y="4206241"/>
+            <a:ext cx="4480563" cy="280798"/>
           </a:xfrm>
           <a:prstGeom prst="rect">
             <a:avLst/>
@@ -8860,7 +9372,7 @@
           </a:extLst>
         </p:spPr>
         <p:txBody>
-          <a:bodyPr lIns="45719" rIns="45719">
+          <a:bodyPr lIns="45718" tIns="45718" rIns="45718" bIns="45718">
             <a:spAutoFit/>
           </a:bodyPr>
           <a:lstStyle>
@@ -8869,6 +9381,10 @@
                 <a:solidFill>
                   <a:srgbClr val="1A1A2E"/>
                 </a:solidFill>
+                <a:latin typeface="+mn-lt"/>
+                <a:ea typeface="+mn-ea"/>
+                <a:cs typeface="+mn-cs"/>
+                <a:sym typeface="Calibri"/>
               </a:defRPr>
             </a:lvl1pPr>
           </a:lstStyle>
@@ -8888,8 +9404,8 @@
         </p:nvSpPr>
         <p:spPr>
           <a:xfrm>
-            <a:off x="6629400" y="4846320"/>
-            <a:ext cx="4480561" cy="280800"/>
+            <a:off x="6629399" y="4846321"/>
+            <a:ext cx="4480563" cy="280798"/>
           </a:xfrm>
           <a:prstGeom prst="rect">
             <a:avLst/>
@@ -8904,7 +9420,7 @@
           </a:extLst>
         </p:spPr>
         <p:txBody>
-          <a:bodyPr lIns="45719" rIns="45719">
+          <a:bodyPr lIns="45718" tIns="45718" rIns="45718" bIns="45718">
             <a:spAutoFit/>
           </a:bodyPr>
           <a:lstStyle>
@@ -8913,6 +9429,10 @@
                 <a:solidFill>
                   <a:srgbClr val="1A1A2E"/>
                 </a:solidFill>
+                <a:latin typeface="+mn-lt"/>
+                <a:ea typeface="+mn-ea"/>
+                <a:cs typeface="+mn-cs"/>
+                <a:sym typeface="Calibri"/>
               </a:defRPr>
             </a:lvl1pPr>
           </a:lstStyle>
@@ -8958,8 +9478,8 @@
         </p:nvSpPr>
         <p:spPr>
           <a:xfrm>
-            <a:off x="-1" y="-1"/>
-            <a:ext cx="12191697" cy="73154"/>
+            <a:off x="-1" y="-2"/>
+            <a:ext cx="12191697" cy="73156"/>
           </a:xfrm>
           <a:prstGeom prst="rect">
             <a:avLst/>
@@ -8979,7 +9499,7 @@
           </a:effectLst>
         </p:spPr>
         <p:txBody>
-          <a:bodyPr lIns="45719" rIns="45719" anchor="ctr"/>
+          <a:bodyPr lIns="45718" tIns="45718" rIns="45718" bIns="45718" anchor="ctr"/>
           <a:lstStyle/>
           <a:p>
             <a:pPr algn="ctr">
@@ -8987,6 +9507,10 @@
                 <a:solidFill>
                   <a:srgbClr val="FFFFFF"/>
                 </a:solidFill>
+                <a:latin typeface="+mn-lt"/>
+                <a:ea typeface="+mn-ea"/>
+                <a:cs typeface="+mn-cs"/>
+                <a:sym typeface="Calibri"/>
               </a:defRPr>
             </a:pPr>
           </a:p>
@@ -9001,7 +9525,7 @@
         <p:spPr>
           <a:xfrm>
             <a:off x="777239" y="457199"/>
-            <a:ext cx="9052561" cy="542242"/>
+            <a:ext cx="9052561" cy="542240"/>
           </a:xfrm>
           <a:prstGeom prst="rect">
             <a:avLst/>
@@ -9016,7 +9540,7 @@
           </a:extLst>
         </p:spPr>
         <p:txBody>
-          <a:bodyPr lIns="45719" rIns="45719">
+          <a:bodyPr lIns="45718" tIns="45718" rIns="45718" bIns="45718">
             <a:spAutoFit/>
           </a:bodyPr>
           <a:lstStyle>
@@ -9025,6 +9549,10 @@
                 <a:solidFill>
                   <a:srgbClr val="1E2761"/>
                 </a:solidFill>
+                <a:latin typeface="+mn-lt"/>
+                <a:ea typeface="+mn-ea"/>
+                <a:cs typeface="+mn-cs"/>
+                <a:sym typeface="Calibri"/>
               </a:defRPr>
             </a:lvl1pPr>
           </a:lstStyle>
@@ -9044,8 +9572,8 @@
         </p:nvSpPr>
         <p:spPr>
           <a:xfrm>
-            <a:off x="777239" y="1463039"/>
-            <a:ext cx="2651761" cy="300595"/>
+            <a:off x="777238" y="1463039"/>
+            <a:ext cx="2651762" cy="300593"/>
           </a:xfrm>
           <a:prstGeom prst="rect">
             <a:avLst/>
@@ -9060,7 +9588,7 @@
           </a:extLst>
         </p:spPr>
         <p:txBody>
-          <a:bodyPr lIns="45719" rIns="45719">
+          <a:bodyPr lIns="45718" tIns="45718" rIns="45718" bIns="45718">
             <a:spAutoFit/>
           </a:bodyPr>
           <a:lstStyle>
@@ -9069,6 +9597,10 @@
                 <a:solidFill>
                   <a:srgbClr val="00A896"/>
                 </a:solidFill>
+                <a:latin typeface="+mn-lt"/>
+                <a:ea typeface="+mn-ea"/>
+                <a:cs typeface="+mn-cs"/>
+                <a:sym typeface="Calibri"/>
               </a:defRPr>
             </a:lvl1pPr>
           </a:lstStyle>
@@ -9088,8 +9620,8 @@
         </p:nvSpPr>
         <p:spPr>
           <a:xfrm>
-            <a:off x="731519" y="2011679"/>
-            <a:ext cx="2286001" cy="1097281"/>
+            <a:off x="731519" y="2011678"/>
+            <a:ext cx="2286001" cy="1097282"/>
           </a:xfrm>
           <a:prstGeom prst="rect">
             <a:avLst/>
@@ -9109,7 +9641,7 @@
           </a:effectLst>
         </p:spPr>
         <p:txBody>
-          <a:bodyPr lIns="45719" rIns="45719" anchor="ctr"/>
+          <a:bodyPr lIns="45718" tIns="45718" rIns="45718" bIns="45718" anchor="ctr"/>
           <a:lstStyle/>
           <a:p>
             <a:pPr algn="ctr">
@@ -9117,6 +9649,10 @@
                 <a:solidFill>
                   <a:srgbClr val="FFFFFF"/>
                 </a:solidFill>
+                <a:latin typeface="+mn-lt"/>
+                <a:ea typeface="+mn-ea"/>
+                <a:cs typeface="+mn-cs"/>
+                <a:sym typeface="Calibri"/>
               </a:defRPr>
             </a:pPr>
           </a:p>
@@ -9130,8 +9666,8 @@
         </p:nvSpPr>
         <p:spPr>
           <a:xfrm>
-            <a:off x="868679" y="2227232"/>
-            <a:ext cx="2011682" cy="300594"/>
+            <a:off x="868678" y="2227233"/>
+            <a:ext cx="2011683" cy="300592"/>
           </a:xfrm>
           <a:prstGeom prst="rect">
             <a:avLst/>
@@ -9146,7 +9682,7 @@
           </a:extLst>
         </p:spPr>
         <p:txBody>
-          <a:bodyPr lIns="45719" rIns="45719">
+          <a:bodyPr lIns="45718" tIns="45718" rIns="45718" bIns="45718">
             <a:spAutoFit/>
           </a:bodyPr>
           <a:lstStyle>
@@ -9155,6 +9691,10 @@
                 <a:solidFill>
                   <a:srgbClr val="1E2761"/>
                 </a:solidFill>
+                <a:latin typeface="+mn-lt"/>
+                <a:ea typeface="+mn-ea"/>
+                <a:cs typeface="+mn-cs"/>
+                <a:sym typeface="Calibri"/>
               </a:defRPr>
             </a:lvl1pPr>
           </a:lstStyle>
@@ -9174,8 +9714,8 @@
         </p:nvSpPr>
         <p:spPr>
           <a:xfrm>
-            <a:off x="868679" y="2592992"/>
-            <a:ext cx="2011682" cy="248306"/>
+            <a:off x="868678" y="2592992"/>
+            <a:ext cx="2011683" cy="248304"/>
           </a:xfrm>
           <a:prstGeom prst="rect">
             <a:avLst/>
@@ -9190,7 +9730,7 @@
           </a:extLst>
         </p:spPr>
         <p:txBody>
-          <a:bodyPr lIns="45719" rIns="45719">
+          <a:bodyPr lIns="45718" tIns="45718" rIns="45718" bIns="45718">
             <a:spAutoFit/>
           </a:bodyPr>
           <a:lstStyle>
@@ -9199,6 +9739,10 @@
                 <a:solidFill>
                   <a:srgbClr val="6B7B8D"/>
                 </a:solidFill>
+                <a:latin typeface="+mn-lt"/>
+                <a:ea typeface="+mn-ea"/>
+                <a:cs typeface="+mn-cs"/>
+                <a:sym typeface="Calibri"/>
               </a:defRPr>
             </a:lvl1pPr>
           </a:lstStyle>
@@ -9218,8 +9762,8 @@
         </p:nvSpPr>
         <p:spPr>
           <a:xfrm>
-            <a:off x="3200399" y="2468879"/>
-            <a:ext cx="731522" cy="54865"/>
+            <a:off x="3200399" y="2468878"/>
+            <a:ext cx="731523" cy="54866"/>
           </a:xfrm>
           <a:prstGeom prst="rect">
             <a:avLst/>
@@ -9239,7 +9783,7 @@
           </a:effectLst>
         </p:spPr>
         <p:txBody>
-          <a:bodyPr lIns="45719" rIns="45719" anchor="ctr"/>
+          <a:bodyPr lIns="45718" tIns="45718" rIns="45718" bIns="45718" anchor="ctr"/>
           <a:lstStyle/>
           <a:p>
             <a:pPr algn="ctr">
@@ -9247,6 +9791,10 @@
                 <a:solidFill>
                   <a:srgbClr val="FFFFFF"/>
                 </a:solidFill>
+                <a:latin typeface="+mn-lt"/>
+                <a:ea typeface="+mn-ea"/>
+                <a:cs typeface="+mn-cs"/>
+                <a:sym typeface="Calibri"/>
               </a:defRPr>
             </a:pPr>
           </a:p>
@@ -9260,8 +9808,8 @@
         </p:nvSpPr>
         <p:spPr>
           <a:xfrm>
-            <a:off x="4114799" y="2011679"/>
-            <a:ext cx="2560322" cy="1097281"/>
+            <a:off x="4114798" y="2011678"/>
+            <a:ext cx="2560323" cy="1097282"/>
           </a:xfrm>
           <a:prstGeom prst="rect">
             <a:avLst/>
@@ -9281,7 +9829,7 @@
           </a:effectLst>
         </p:spPr>
         <p:txBody>
-          <a:bodyPr lIns="45719" rIns="45719" anchor="ctr"/>
+          <a:bodyPr lIns="45718" tIns="45718" rIns="45718" bIns="45718" anchor="ctr"/>
           <a:lstStyle/>
           <a:p>
             <a:pPr algn="ctr">
@@ -9289,6 +9837,10 @@
                 <a:solidFill>
                   <a:srgbClr val="FFFFFF"/>
                 </a:solidFill>
+                <a:latin typeface="+mn-lt"/>
+                <a:ea typeface="+mn-ea"/>
+                <a:cs typeface="+mn-cs"/>
+                <a:sym typeface="Calibri"/>
               </a:defRPr>
             </a:pPr>
           </a:p>
@@ -9302,8 +9854,8 @@
         </p:nvSpPr>
         <p:spPr>
           <a:xfrm>
-            <a:off x="4251960" y="2246848"/>
-            <a:ext cx="2286001" cy="333088"/>
+            <a:off x="4251959" y="2246848"/>
+            <a:ext cx="2286002" cy="333087"/>
           </a:xfrm>
           <a:prstGeom prst="rect">
             <a:avLst/>
@@ -9318,7 +9870,7 @@
           </a:extLst>
         </p:spPr>
         <p:txBody>
-          <a:bodyPr lIns="45719" rIns="45719">
+          <a:bodyPr lIns="45718" tIns="45718" rIns="45718" bIns="45718">
             <a:spAutoFit/>
           </a:bodyPr>
           <a:lstStyle>
@@ -9327,6 +9879,10 @@
                 <a:solidFill>
                   <a:srgbClr val="FFFFFF"/>
                 </a:solidFill>
+                <a:latin typeface="+mn-lt"/>
+                <a:ea typeface="+mn-ea"/>
+                <a:cs typeface="+mn-cs"/>
+                <a:sym typeface="Calibri"/>
               </a:defRPr>
             </a:lvl1pPr>
           </a:lstStyle>
@@ -9346,8 +9902,8 @@
         </p:nvSpPr>
         <p:spPr>
           <a:xfrm>
-            <a:off x="4251960" y="2612607"/>
-            <a:ext cx="2286001" cy="248306"/>
+            <a:off x="4251959" y="2612608"/>
+            <a:ext cx="2286002" cy="248303"/>
           </a:xfrm>
           <a:prstGeom prst="rect">
             <a:avLst/>
@@ -9362,7 +9918,7 @@
           </a:extLst>
         </p:spPr>
         <p:txBody>
-          <a:bodyPr lIns="45719" rIns="45719">
+          <a:bodyPr lIns="45718" tIns="45718" rIns="45718" bIns="45718">
             <a:spAutoFit/>
           </a:bodyPr>
           <a:lstStyle>
@@ -9371,13 +9927,17 @@
                 <a:solidFill>
                   <a:srgbClr val="CADCFC"/>
                 </a:solidFill>
+                <a:latin typeface="+mn-lt"/>
+                <a:ea typeface="+mn-ea"/>
+                <a:cs typeface="+mn-cs"/>
+                <a:sym typeface="Calibri"/>
               </a:defRPr>
             </a:lvl1pPr>
           </a:lstStyle>
           <a:p>
             <a:pPr/>
             <a:r>
-              <a:t>ImageNet pretrained</a:t>
+              <a:t>ImageNet preentrenadas</a:t>
             </a:r>
           </a:p>
         </p:txBody>
@@ -9390,8 +9950,8 @@
         </p:nvSpPr>
         <p:spPr>
           <a:xfrm>
-            <a:off x="6857999" y="2468879"/>
-            <a:ext cx="731522" cy="54865"/>
+            <a:off x="6857999" y="2468878"/>
+            <a:ext cx="731523" cy="54866"/>
           </a:xfrm>
           <a:prstGeom prst="rect">
             <a:avLst/>
@@ -9411,7 +9971,7 @@
           </a:effectLst>
         </p:spPr>
         <p:txBody>
-          <a:bodyPr lIns="45719" rIns="45719" anchor="ctr"/>
+          <a:bodyPr lIns="45718" tIns="45718" rIns="45718" bIns="45718" anchor="ctr"/>
           <a:lstStyle/>
           <a:p>
             <a:pPr algn="ctr">
@@ -9419,6 +9979,10 @@
                 <a:solidFill>
                   <a:srgbClr val="FFFFFF"/>
                 </a:solidFill>
+                <a:latin typeface="+mn-lt"/>
+                <a:ea typeface="+mn-ea"/>
+                <a:cs typeface="+mn-cs"/>
+                <a:sym typeface="Calibri"/>
               </a:defRPr>
             </a:pPr>
           </a:p>
@@ -9432,8 +9996,8 @@
         </p:nvSpPr>
         <p:spPr>
           <a:xfrm>
-            <a:off x="7772400" y="2011679"/>
-            <a:ext cx="3200400" cy="1097281"/>
+            <a:off x="7772400" y="2011678"/>
+            <a:ext cx="3200400" cy="1097282"/>
           </a:xfrm>
           <a:prstGeom prst="rect">
             <a:avLst/>
@@ -9453,7 +10017,7 @@
           </a:effectLst>
         </p:spPr>
         <p:txBody>
-          <a:bodyPr lIns="45719" rIns="45719" anchor="ctr"/>
+          <a:bodyPr lIns="45718" tIns="45718" rIns="45718" bIns="45718" anchor="ctr"/>
           <a:lstStyle/>
           <a:p>
             <a:pPr algn="ctr">
@@ -9461,6 +10025,10 @@
                 <a:solidFill>
                   <a:srgbClr val="FFFFFF"/>
                 </a:solidFill>
+                <a:latin typeface="+mn-lt"/>
+                <a:ea typeface="+mn-ea"/>
+                <a:cs typeface="+mn-cs"/>
+                <a:sym typeface="Calibri"/>
               </a:defRPr>
             </a:pPr>
           </a:p>
@@ -9474,8 +10042,8 @@
         </p:nvSpPr>
         <p:spPr>
           <a:xfrm>
-            <a:off x="7909560" y="2250003"/>
-            <a:ext cx="2926081" cy="333088"/>
+            <a:off x="7909559" y="2250003"/>
+            <a:ext cx="2926082" cy="333087"/>
           </a:xfrm>
           <a:prstGeom prst="rect">
             <a:avLst/>
@@ -9490,7 +10058,7 @@
           </a:extLst>
         </p:spPr>
         <p:txBody>
-          <a:bodyPr lIns="45719" rIns="45719">
+          <a:bodyPr lIns="45718" tIns="45718" rIns="45718" bIns="45718">
             <a:spAutoFit/>
           </a:bodyPr>
           <a:lstStyle>
@@ -9499,6 +10067,10 @@
                 <a:solidFill>
                   <a:srgbClr val="FFFFFF"/>
                 </a:solidFill>
+                <a:latin typeface="+mn-lt"/>
+                <a:ea typeface="+mn-ea"/>
+                <a:cs typeface="+mn-cs"/>
+                <a:sym typeface="Calibri"/>
               </a:defRPr>
             </a:lvl1pPr>
           </a:lstStyle>
@@ -9519,7 +10091,7 @@
         <p:spPr>
           <a:xfrm>
             <a:off x="7909559" y="2570043"/>
-            <a:ext cx="2926081" cy="300594"/>
+            <a:ext cx="2926082" cy="300593"/>
           </a:xfrm>
           <a:prstGeom prst="rect">
             <a:avLst/>
@@ -9534,7 +10106,7 @@
           </a:extLst>
         </p:spPr>
         <p:txBody>
-          <a:bodyPr lIns="45719" rIns="45719">
+          <a:bodyPr lIns="45718" tIns="45718" rIns="45718" bIns="45718">
             <a:spAutoFit/>
           </a:bodyPr>
           <a:lstStyle>
@@ -9543,6 +10115,10 @@
                 <a:solidFill>
                   <a:srgbClr val="FFFFFF"/>
                 </a:solidFill>
+                <a:latin typeface="+mn-lt"/>
+                <a:ea typeface="+mn-ea"/>
+                <a:cs typeface="+mn-cs"/>
+                <a:sym typeface="Calibri"/>
               </a:defRPr>
             </a:lvl1pPr>
           </a:lstStyle>
@@ -9562,8 +10138,8 @@
         </p:nvSpPr>
         <p:spPr>
           <a:xfrm>
-            <a:off x="777239" y="3566159"/>
-            <a:ext cx="4480561" cy="300594"/>
+            <a:off x="777238" y="3566160"/>
+            <a:ext cx="4480562" cy="300592"/>
           </a:xfrm>
           <a:prstGeom prst="rect">
             <a:avLst/>
@@ -9578,7 +10154,7 @@
           </a:extLst>
         </p:spPr>
         <p:txBody>
-          <a:bodyPr lIns="45719" rIns="45719">
+          <a:bodyPr lIns="45718" tIns="45718" rIns="45718" bIns="45718">
             <a:spAutoFit/>
           </a:bodyPr>
           <a:lstStyle>
@@ -9587,6 +10163,10 @@
                 <a:solidFill>
                   <a:srgbClr val="00A896"/>
                 </a:solidFill>
+                <a:latin typeface="+mn-lt"/>
+                <a:ea typeface="+mn-ea"/>
+                <a:cs typeface="+mn-cs"/>
+                <a:sym typeface="Calibri"/>
               </a:defRPr>
             </a:lvl1pPr>
           </a:lstStyle>
@@ -9606,8 +10186,8 @@
         </p:nvSpPr>
         <p:spPr>
           <a:xfrm>
-            <a:off x="731519" y="4114799"/>
-            <a:ext cx="1828801" cy="1097282"/>
+            <a:off x="731519" y="4114798"/>
+            <a:ext cx="1828801" cy="1097283"/>
           </a:xfrm>
           <a:prstGeom prst="rect">
             <a:avLst/>
@@ -9627,7 +10207,7 @@
           </a:effectLst>
         </p:spPr>
         <p:txBody>
-          <a:bodyPr lIns="45719" rIns="45719" anchor="ctr"/>
+          <a:bodyPr lIns="45718" tIns="45718" rIns="45718" bIns="45718" anchor="ctr"/>
           <a:lstStyle/>
           <a:p>
             <a:pPr algn="ctr">
@@ -9635,6 +10215,10 @@
                 <a:solidFill>
                   <a:srgbClr val="FFFFFF"/>
                 </a:solidFill>
+                <a:latin typeface="+mn-lt"/>
+                <a:ea typeface="+mn-ea"/>
+                <a:cs typeface="+mn-cs"/>
+                <a:sym typeface="Calibri"/>
               </a:defRPr>
             </a:pPr>
           </a:p>
@@ -9648,8 +10232,8 @@
         </p:nvSpPr>
         <p:spPr>
           <a:xfrm>
-            <a:off x="822959" y="4320540"/>
-            <a:ext cx="1645922" cy="280799"/>
+            <a:off x="822958" y="4320541"/>
+            <a:ext cx="1645923" cy="280798"/>
           </a:xfrm>
           <a:prstGeom prst="rect">
             <a:avLst/>
@@ -9664,7 +10248,7 @@
           </a:extLst>
         </p:spPr>
         <p:txBody>
-          <a:bodyPr lIns="45719" rIns="45719">
+          <a:bodyPr lIns="45718" tIns="45718" rIns="45718" bIns="45718">
             <a:spAutoFit/>
           </a:bodyPr>
           <a:lstStyle>
@@ -9673,6 +10257,10 @@
                 <a:solidFill>
                   <a:srgbClr val="1E2761"/>
                 </a:solidFill>
+                <a:latin typeface="+mn-lt"/>
+                <a:ea typeface="+mn-ea"/>
+                <a:cs typeface="+mn-cs"/>
+                <a:sym typeface="Calibri"/>
               </a:defRPr>
             </a:lvl1pPr>
           </a:lstStyle>
@@ -9692,8 +10280,8 @@
         </p:nvSpPr>
         <p:spPr>
           <a:xfrm>
-            <a:off x="822959" y="4686299"/>
-            <a:ext cx="1645922" cy="225709"/>
+            <a:off x="822958" y="4686299"/>
+            <a:ext cx="1645923" cy="225707"/>
           </a:xfrm>
           <a:prstGeom prst="rect">
             <a:avLst/>
@@ -9708,7 +10296,7 @@
           </a:extLst>
         </p:spPr>
         <p:txBody>
-          <a:bodyPr lIns="45719" rIns="45719">
+          <a:bodyPr lIns="45718" tIns="45718" rIns="45718" bIns="45718">
             <a:spAutoFit/>
           </a:bodyPr>
           <a:lstStyle>
@@ -9717,6 +10305,10 @@
                 <a:solidFill>
                   <a:srgbClr val="6B7B8D"/>
                 </a:solidFill>
+                <a:latin typeface="+mn-lt"/>
+                <a:ea typeface="+mn-ea"/>
+                <a:cs typeface="+mn-cs"/>
+                <a:sym typeface="Calibri"/>
               </a:defRPr>
             </a:lvl1pPr>
           </a:lstStyle>
@@ -9736,8 +10328,8 @@
         </p:nvSpPr>
         <p:spPr>
           <a:xfrm>
-            <a:off x="2697479" y="4572000"/>
-            <a:ext cx="457201" cy="54864"/>
+            <a:off x="2697478" y="4572000"/>
+            <a:ext cx="457202" cy="54864"/>
           </a:xfrm>
           <a:prstGeom prst="rect">
             <a:avLst/>
@@ -9757,7 +10349,7 @@
           </a:effectLst>
         </p:spPr>
         <p:txBody>
-          <a:bodyPr lIns="45719" rIns="45719" anchor="ctr"/>
+          <a:bodyPr lIns="45718" tIns="45718" rIns="45718" bIns="45718" anchor="ctr"/>
           <a:lstStyle/>
           <a:p>
             <a:pPr algn="ctr">
@@ -9765,6 +10357,10 @@
                 <a:solidFill>
                   <a:srgbClr val="FFFFFF"/>
                 </a:solidFill>
+                <a:latin typeface="+mn-lt"/>
+                <a:ea typeface="+mn-ea"/>
+                <a:cs typeface="+mn-cs"/>
+                <a:sym typeface="Calibri"/>
               </a:defRPr>
             </a:pPr>
           </a:p>
@@ -9778,8 +10374,8 @@
         </p:nvSpPr>
         <p:spPr>
           <a:xfrm>
-            <a:off x="3291840" y="4114799"/>
-            <a:ext cx="2103121" cy="1097282"/>
+            <a:off x="3291840" y="4114798"/>
+            <a:ext cx="2103122" cy="1097283"/>
           </a:xfrm>
           <a:prstGeom prst="rect">
             <a:avLst/>
@@ -9799,7 +10395,7 @@
           </a:effectLst>
         </p:spPr>
         <p:txBody>
-          <a:bodyPr lIns="45719" rIns="45719" anchor="ctr"/>
+          <a:bodyPr lIns="45718" tIns="45718" rIns="45718" bIns="45718" anchor="ctr"/>
           <a:lstStyle/>
           <a:p>
             <a:pPr algn="ctr">
@@ -9807,6 +10403,10 @@
                 <a:solidFill>
                   <a:srgbClr val="FFFFFF"/>
                 </a:solidFill>
+                <a:latin typeface="+mn-lt"/>
+                <a:ea typeface="+mn-ea"/>
+                <a:cs typeface="+mn-cs"/>
+                <a:sym typeface="Calibri"/>
               </a:defRPr>
             </a:pPr>
           </a:p>
@@ -9820,8 +10420,8 @@
         </p:nvSpPr>
         <p:spPr>
           <a:xfrm>
-            <a:off x="3383279" y="4320540"/>
-            <a:ext cx="1920240" cy="300594"/>
+            <a:off x="3383279" y="4320541"/>
+            <a:ext cx="1920241" cy="300592"/>
           </a:xfrm>
           <a:prstGeom prst="rect">
             <a:avLst/>
@@ -9836,7 +10436,7 @@
           </a:extLst>
         </p:spPr>
         <p:txBody>
-          <a:bodyPr lIns="45719" rIns="45719">
+          <a:bodyPr lIns="45718" tIns="45718" rIns="45718" bIns="45718">
             <a:spAutoFit/>
           </a:bodyPr>
           <a:lstStyle>
@@ -9845,6 +10445,10 @@
                 <a:solidFill>
                   <a:srgbClr val="FFFFFF"/>
                 </a:solidFill>
+                <a:latin typeface="+mn-lt"/>
+                <a:ea typeface="+mn-ea"/>
+                <a:cs typeface="+mn-cs"/>
+                <a:sym typeface="Calibri"/>
               </a:defRPr>
             </a:lvl1pPr>
           </a:lstStyle>
@@ -9865,7 +10469,7 @@
         <p:spPr>
           <a:xfrm>
             <a:off x="3383279" y="4686299"/>
-            <a:ext cx="1920240" cy="225709"/>
+            <a:ext cx="1920241" cy="225707"/>
           </a:xfrm>
           <a:prstGeom prst="rect">
             <a:avLst/>
@@ -9880,7 +10484,7 @@
           </a:extLst>
         </p:spPr>
         <p:txBody>
-          <a:bodyPr lIns="45719" rIns="45719">
+          <a:bodyPr lIns="45718" tIns="45718" rIns="45718" bIns="45718">
             <a:spAutoFit/>
           </a:bodyPr>
           <a:lstStyle>
@@ -9889,6 +10493,10 @@
                 <a:solidFill>
                   <a:srgbClr val="FFFFFF"/>
                 </a:solidFill>
+                <a:latin typeface="+mn-lt"/>
+                <a:ea typeface="+mn-ea"/>
+                <a:cs typeface="+mn-cs"/>
+                <a:sym typeface="Calibri"/>
               </a:defRPr>
             </a:lvl1pPr>
           </a:lstStyle>
@@ -9909,7 +10517,7 @@
         <p:spPr>
           <a:xfrm>
             <a:off x="5532120" y="4572000"/>
-            <a:ext cx="457201" cy="54864"/>
+            <a:ext cx="457202" cy="54864"/>
           </a:xfrm>
           <a:prstGeom prst="rect">
             <a:avLst/>
@@ -9929,7 +10537,7 @@
           </a:effectLst>
         </p:spPr>
         <p:txBody>
-          <a:bodyPr lIns="45719" rIns="45719" anchor="ctr"/>
+          <a:bodyPr lIns="45718" tIns="45718" rIns="45718" bIns="45718" anchor="ctr"/>
           <a:lstStyle/>
           <a:p>
             <a:pPr algn="ctr">
@@ -9937,6 +10545,10 @@
                 <a:solidFill>
                   <a:srgbClr val="FFFFFF"/>
                 </a:solidFill>
+                <a:latin typeface="+mn-lt"/>
+                <a:ea typeface="+mn-ea"/>
+                <a:cs typeface="+mn-cs"/>
+                <a:sym typeface="Calibri"/>
               </a:defRPr>
             </a:pPr>
           </a:p>
@@ -9950,8 +10562,8 @@
         </p:nvSpPr>
         <p:spPr>
           <a:xfrm>
-            <a:off x="6126479" y="4114799"/>
-            <a:ext cx="1645921" cy="1097282"/>
+            <a:off x="6126479" y="4114798"/>
+            <a:ext cx="1645922" cy="1097283"/>
           </a:xfrm>
           <a:prstGeom prst="rect">
             <a:avLst/>
@@ -9971,7 +10583,7 @@
           </a:effectLst>
         </p:spPr>
         <p:txBody>
-          <a:bodyPr lIns="45719" rIns="45719" anchor="ctr"/>
+          <a:bodyPr lIns="45718" tIns="45718" rIns="45718" bIns="45718" anchor="ctr"/>
           <a:lstStyle/>
           <a:p>
             <a:pPr algn="ctr">
@@ -9979,6 +10591,10 @@
                 <a:solidFill>
                   <a:srgbClr val="FFFFFF"/>
                 </a:solidFill>
+                <a:latin typeface="+mn-lt"/>
+                <a:ea typeface="+mn-ea"/>
+                <a:cs typeface="+mn-cs"/>
+                <a:sym typeface="Calibri"/>
               </a:defRPr>
             </a:pPr>
           </a:p>
@@ -9992,8 +10608,8 @@
         </p:nvSpPr>
         <p:spPr>
           <a:xfrm>
-            <a:off x="6217919" y="4328004"/>
-            <a:ext cx="1463042" cy="280800"/>
+            <a:off x="6217918" y="4328005"/>
+            <a:ext cx="1463043" cy="280798"/>
           </a:xfrm>
           <a:prstGeom prst="rect">
             <a:avLst/>
@@ -10008,7 +10624,7 @@
           </a:extLst>
         </p:spPr>
         <p:txBody>
-          <a:bodyPr lIns="45719" rIns="45719">
+          <a:bodyPr lIns="45718" tIns="45718" rIns="45718" bIns="45718">
             <a:spAutoFit/>
           </a:bodyPr>
           <a:lstStyle>
@@ -10017,6 +10633,10 @@
                 <a:solidFill>
                   <a:srgbClr val="1E2761"/>
                 </a:solidFill>
+                <a:latin typeface="+mn-lt"/>
+                <a:ea typeface="+mn-ea"/>
+                <a:cs typeface="+mn-cs"/>
+                <a:sym typeface="Calibri"/>
               </a:defRPr>
             </a:lvl1pPr>
           </a:lstStyle>
@@ -10036,8 +10656,8 @@
         </p:nvSpPr>
         <p:spPr>
           <a:xfrm>
-            <a:off x="6217919" y="4693764"/>
-            <a:ext cx="1463042" cy="225708"/>
+            <a:off x="6217918" y="4693764"/>
+            <a:ext cx="1463043" cy="225707"/>
           </a:xfrm>
           <a:prstGeom prst="rect">
             <a:avLst/>
@@ -10052,7 +10672,7 @@
           </a:extLst>
         </p:spPr>
         <p:txBody>
-          <a:bodyPr lIns="45719" rIns="45719">
+          <a:bodyPr lIns="45718" tIns="45718" rIns="45718" bIns="45718">
             <a:spAutoFit/>
           </a:bodyPr>
           <a:lstStyle>
@@ -10061,6 +10681,10 @@
                 <a:solidFill>
                   <a:srgbClr val="1E2761"/>
                 </a:solidFill>
+                <a:latin typeface="+mn-lt"/>
+                <a:ea typeface="+mn-ea"/>
+                <a:cs typeface="+mn-cs"/>
+                <a:sym typeface="Calibri"/>
               </a:defRPr>
             </a:lvl1pPr>
           </a:lstStyle>
@@ -10081,7 +10705,7 @@
         <p:spPr>
           <a:xfrm>
             <a:off x="7909559" y="4572000"/>
-            <a:ext cx="457201" cy="54864"/>
+            <a:ext cx="457202" cy="54864"/>
           </a:xfrm>
           <a:prstGeom prst="rect">
             <a:avLst/>
@@ -10101,7 +10725,7 @@
           </a:effectLst>
         </p:spPr>
         <p:txBody>
-          <a:bodyPr lIns="45719" rIns="45719" anchor="ctr"/>
+          <a:bodyPr lIns="45718" tIns="45718" rIns="45718" bIns="45718" anchor="ctr"/>
           <a:lstStyle/>
           <a:p>
             <a:pPr algn="ctr">
@@ -10109,6 +10733,10 @@
                 <a:solidFill>
                   <a:srgbClr val="FFFFFF"/>
                 </a:solidFill>
+                <a:latin typeface="+mn-lt"/>
+                <a:ea typeface="+mn-ea"/>
+                <a:cs typeface="+mn-cs"/>
+                <a:sym typeface="Calibri"/>
               </a:defRPr>
             </a:pPr>
           </a:p>
@@ -10122,8 +10750,8 @@
         </p:nvSpPr>
         <p:spPr>
           <a:xfrm>
-            <a:off x="8503919" y="4114799"/>
-            <a:ext cx="1828801" cy="1097282"/>
+            <a:off x="8503918" y="4114798"/>
+            <a:ext cx="1828802" cy="1097283"/>
           </a:xfrm>
           <a:prstGeom prst="rect">
             <a:avLst/>
@@ -10143,7 +10771,7 @@
           </a:effectLst>
         </p:spPr>
         <p:txBody>
-          <a:bodyPr lIns="45719" rIns="45719" anchor="ctr"/>
+          <a:bodyPr lIns="45718" tIns="45718" rIns="45718" bIns="45718" anchor="ctr"/>
           <a:lstStyle/>
           <a:p>
             <a:pPr algn="ctr">
@@ -10151,6 +10779,10 @@
                 <a:solidFill>
                   <a:srgbClr val="FFFFFF"/>
                 </a:solidFill>
+                <a:latin typeface="+mn-lt"/>
+                <a:ea typeface="+mn-ea"/>
+                <a:cs typeface="+mn-cs"/>
+                <a:sym typeface="Calibri"/>
               </a:defRPr>
             </a:pPr>
           </a:p>
@@ -10164,8 +10796,8 @@
         </p:nvSpPr>
         <p:spPr>
           <a:xfrm>
-            <a:off x="8595359" y="4303698"/>
-            <a:ext cx="1645921" cy="300594"/>
+            <a:off x="8595359" y="4303699"/>
+            <a:ext cx="1645922" cy="300592"/>
           </a:xfrm>
           <a:prstGeom prst="rect">
             <a:avLst/>
@@ -10180,7 +10812,7 @@
           </a:extLst>
         </p:spPr>
         <p:txBody>
-          <a:bodyPr lIns="45719" rIns="45719">
+          <a:bodyPr lIns="45718" tIns="45718" rIns="45718" bIns="45718">
             <a:spAutoFit/>
           </a:bodyPr>
           <a:lstStyle>
@@ -10189,6 +10821,10 @@
                 <a:solidFill>
                   <a:srgbClr val="FFFFFF"/>
                 </a:solidFill>
+                <a:latin typeface="+mn-lt"/>
+                <a:ea typeface="+mn-ea"/>
+                <a:cs typeface="+mn-cs"/>
+                <a:sym typeface="Calibri"/>
               </a:defRPr>
             </a:lvl1pPr>
           </a:lstStyle>
@@ -10208,8 +10844,8 @@
         </p:nvSpPr>
         <p:spPr>
           <a:xfrm>
-            <a:off x="8595359" y="4669458"/>
-            <a:ext cx="1645921" cy="225708"/>
+            <a:off x="8595359" y="4669459"/>
+            <a:ext cx="1645922" cy="225706"/>
           </a:xfrm>
           <a:prstGeom prst="rect">
             <a:avLst/>
@@ -10224,7 +10860,7 @@
           </a:extLst>
         </p:spPr>
         <p:txBody>
-          <a:bodyPr lIns="45719" rIns="45719">
+          <a:bodyPr lIns="45718" tIns="45718" rIns="45718" bIns="45718">
             <a:spAutoFit/>
           </a:bodyPr>
           <a:lstStyle>
@@ -10233,6 +10869,10 @@
                 <a:solidFill>
                   <a:srgbClr val="CADCFC"/>
                 </a:solidFill>
+                <a:latin typeface="+mn-lt"/>
+                <a:ea typeface="+mn-ea"/>
+                <a:cs typeface="+mn-cs"/>
+                <a:sym typeface="Calibri"/>
               </a:defRPr>
             </a:lvl1pPr>
           </a:lstStyle>
@@ -10253,7 +10893,7 @@
         <p:spPr>
           <a:xfrm>
             <a:off x="10469880" y="4572000"/>
-            <a:ext cx="320041" cy="54864"/>
+            <a:ext cx="320042" cy="54864"/>
           </a:xfrm>
           <a:prstGeom prst="rect">
             <a:avLst/>
@@ -10273,7 +10913,7 @@
           </a:effectLst>
         </p:spPr>
         <p:txBody>
-          <a:bodyPr lIns="45719" rIns="45719" anchor="ctr"/>
+          <a:bodyPr lIns="45718" tIns="45718" rIns="45718" bIns="45718" anchor="ctr"/>
           <a:lstStyle/>
           <a:p>
             <a:pPr algn="ctr">
@@ -10281,6 +10921,10 @@
                 <a:solidFill>
                   <a:srgbClr val="FFFFFF"/>
                 </a:solidFill>
+                <a:latin typeface="+mn-lt"/>
+                <a:ea typeface="+mn-ea"/>
+                <a:cs typeface="+mn-cs"/>
+                <a:sym typeface="Calibri"/>
               </a:defRPr>
             </a:pPr>
           </a:p>
@@ -10294,8 +10938,8 @@
         </p:nvSpPr>
         <p:spPr>
           <a:xfrm>
-            <a:off x="10058400" y="5486399"/>
-            <a:ext cx="1371600" cy="731522"/>
+            <a:off x="10058400" y="5486398"/>
+            <a:ext cx="1371600" cy="731523"/>
           </a:xfrm>
           <a:prstGeom prst="rect">
             <a:avLst/>
@@ -10315,7 +10959,7 @@
           </a:effectLst>
         </p:spPr>
         <p:txBody>
-          <a:bodyPr lIns="45719" rIns="45719" anchor="ctr"/>
+          <a:bodyPr lIns="45718" tIns="45718" rIns="45718" bIns="45718" anchor="ctr"/>
           <a:lstStyle/>
           <a:p>
             <a:pPr algn="ctr">
@@ -10323,6 +10967,10 @@
                 <a:solidFill>
                   <a:srgbClr val="FFFFFF"/>
                 </a:solidFill>
+                <a:latin typeface="+mn-lt"/>
+                <a:ea typeface="+mn-ea"/>
+                <a:cs typeface="+mn-cs"/>
+                <a:sym typeface="Calibri"/>
               </a:defRPr>
             </a:pPr>
           </a:p>
@@ -10337,7 +10985,7 @@
         <p:spPr>
           <a:xfrm>
             <a:off x="10149839" y="5564703"/>
-            <a:ext cx="1188721" cy="258203"/>
+            <a:ext cx="1188722" cy="258201"/>
           </a:xfrm>
           <a:prstGeom prst="rect">
             <a:avLst/>
@@ -10352,7 +11000,7 @@
           </a:extLst>
         </p:spPr>
         <p:txBody>
-          <a:bodyPr lIns="45719" rIns="45719">
+          <a:bodyPr lIns="45718" tIns="45718" rIns="45718" bIns="45718">
             <a:spAutoFit/>
           </a:bodyPr>
           <a:lstStyle>
@@ -10361,6 +11009,10 @@
                 <a:solidFill>
                   <a:srgbClr val="FFFFFF"/>
                 </a:solidFill>
+                <a:latin typeface="+mn-lt"/>
+                <a:ea typeface="+mn-ea"/>
+                <a:cs typeface="+mn-cs"/>
+                <a:sym typeface="Calibri"/>
               </a:defRPr>
             </a:lvl1pPr>
           </a:lstStyle>
@@ -10380,8 +11032,8 @@
         </p:nvSpPr>
         <p:spPr>
           <a:xfrm>
-            <a:off x="10149839" y="5839023"/>
-            <a:ext cx="1188721" cy="300594"/>
+            <a:off x="10149839" y="5839024"/>
+            <a:ext cx="1188722" cy="300592"/>
           </a:xfrm>
           <a:prstGeom prst="rect">
             <a:avLst/>
@@ -10396,7 +11048,7 @@
           </a:extLst>
         </p:spPr>
         <p:txBody>
-          <a:bodyPr lIns="45719" rIns="45719">
+          <a:bodyPr lIns="45718" tIns="45718" rIns="45718" bIns="45718">
             <a:spAutoFit/>
           </a:bodyPr>
           <a:lstStyle>
@@ -10405,6 +11057,10 @@
                 <a:solidFill>
                   <a:srgbClr val="FFFFFF"/>
                 </a:solidFill>
+                <a:latin typeface="+mn-lt"/>
+                <a:ea typeface="+mn-ea"/>
+                <a:cs typeface="+mn-cs"/>
+                <a:sym typeface="Calibri"/>
               </a:defRPr>
             </a:lvl1pPr>
           </a:lstStyle>
@@ -10424,8 +11080,8 @@
         </p:nvSpPr>
         <p:spPr>
           <a:xfrm>
-            <a:off x="731519" y="5943599"/>
-            <a:ext cx="8686801" cy="640082"/>
+            <a:off x="731519" y="5943598"/>
+            <a:ext cx="8686801" cy="640083"/>
           </a:xfrm>
           <a:prstGeom prst="rect">
             <a:avLst/>
@@ -10445,7 +11101,7 @@
           </a:effectLst>
         </p:spPr>
         <p:txBody>
-          <a:bodyPr lIns="45719" rIns="45719" anchor="ctr"/>
+          <a:bodyPr lIns="45718" tIns="45718" rIns="45718" bIns="45718" anchor="ctr"/>
           <a:lstStyle/>
           <a:p>
             <a:pPr algn="ctr">
@@ -10453,6 +11109,10 @@
                 <a:solidFill>
                   <a:srgbClr val="FFFFFF"/>
                 </a:solidFill>
+                <a:latin typeface="+mn-lt"/>
+                <a:ea typeface="+mn-ea"/>
+                <a:cs typeface="+mn-cs"/>
+                <a:sym typeface="Calibri"/>
               </a:defRPr>
             </a:pPr>
           </a:p>
@@ -10466,8 +11126,8 @@
         </p:nvSpPr>
         <p:spPr>
           <a:xfrm>
-            <a:off x="731519" y="5943599"/>
-            <a:ext cx="54865" cy="640082"/>
+            <a:off x="731519" y="5943598"/>
+            <a:ext cx="54866" cy="640083"/>
           </a:xfrm>
           <a:prstGeom prst="rect">
             <a:avLst/>
@@ -10487,7 +11147,7 @@
           </a:effectLst>
         </p:spPr>
         <p:txBody>
-          <a:bodyPr lIns="45719" rIns="45719" anchor="ctr"/>
+          <a:bodyPr lIns="45718" tIns="45718" rIns="45718" bIns="45718" anchor="ctr"/>
           <a:lstStyle/>
           <a:p>
             <a:pPr algn="ctr">
@@ -10495,6 +11155,10 @@
                 <a:solidFill>
                   <a:srgbClr val="FFFFFF"/>
                 </a:solidFill>
+                <a:latin typeface="+mn-lt"/>
+                <a:ea typeface="+mn-ea"/>
+                <a:cs typeface="+mn-cs"/>
+                <a:sym typeface="Calibri"/>
               </a:defRPr>
             </a:pPr>
           </a:p>
@@ -10509,7 +11173,7 @@
         <p:spPr>
           <a:xfrm>
             <a:off x="1005839" y="6123240"/>
-            <a:ext cx="8138161" cy="280800"/>
+            <a:ext cx="8138160" cy="280798"/>
           </a:xfrm>
           <a:prstGeom prst="rect">
             <a:avLst/>
@@ -10524,7 +11188,7 @@
           </a:extLst>
         </p:spPr>
         <p:txBody>
-          <a:bodyPr lIns="45719" rIns="45719">
+          <a:bodyPr lIns="45718" tIns="45718" rIns="45718" bIns="45718">
             <a:spAutoFit/>
           </a:bodyPr>
           <a:lstStyle>
@@ -10533,6 +11197,10 @@
                 <a:solidFill>
                   <a:srgbClr val="1A1A2E"/>
                 </a:solidFill>
+                <a:latin typeface="+mn-lt"/>
+                <a:ea typeface="+mn-ea"/>
+                <a:cs typeface="+mn-cs"/>
+                <a:sym typeface="Calibri"/>
               </a:defRPr>
             </a:lvl1pPr>
           </a:lstStyle>
@@ -10578,8 +11246,8 @@
         </p:nvSpPr>
         <p:spPr>
           <a:xfrm>
-            <a:off x="-1" y="-1"/>
-            <a:ext cx="12191697" cy="73154"/>
+            <a:off x="-1" y="-2"/>
+            <a:ext cx="12191697" cy="73156"/>
           </a:xfrm>
           <a:prstGeom prst="rect">
             <a:avLst/>
@@ -10599,7 +11267,7 @@
           </a:effectLst>
         </p:spPr>
         <p:txBody>
-          <a:bodyPr lIns="45719" rIns="45719" anchor="ctr"/>
+          <a:bodyPr lIns="45718" tIns="45718" rIns="45718" bIns="45718" anchor="ctr"/>
           <a:lstStyle/>
           <a:p>
             <a:pPr algn="ctr">
@@ -10607,6 +11275,10 @@
                 <a:solidFill>
                   <a:srgbClr val="FFFFFF"/>
                 </a:solidFill>
+                <a:latin typeface="+mn-lt"/>
+                <a:ea typeface="+mn-ea"/>
+                <a:cs typeface="+mn-cs"/>
+                <a:sym typeface="Calibri"/>
               </a:defRPr>
             </a:pPr>
           </a:p>
@@ -10621,7 +11293,7 @@
         <p:spPr>
           <a:xfrm>
             <a:off x="777239" y="457199"/>
-            <a:ext cx="9052561" cy="542242"/>
+            <a:ext cx="9052561" cy="542240"/>
           </a:xfrm>
           <a:prstGeom prst="rect">
             <a:avLst/>
@@ -10636,7 +11308,7 @@
           </a:extLst>
         </p:spPr>
         <p:txBody>
-          <a:bodyPr lIns="45719" rIns="45719">
+          <a:bodyPr lIns="45718" tIns="45718" rIns="45718" bIns="45718">
             <a:spAutoFit/>
           </a:bodyPr>
           <a:lstStyle>
@@ -10645,6 +11317,10 @@
                 <a:solidFill>
                   <a:srgbClr val="1E2761"/>
                 </a:solidFill>
+                <a:latin typeface="+mn-lt"/>
+                <a:ea typeface="+mn-ea"/>
+                <a:cs typeface="+mn-cs"/>
+                <a:sym typeface="Calibri"/>
               </a:defRPr>
             </a:lvl1pPr>
           </a:lstStyle>
@@ -10664,8 +11340,8 @@
         </p:nvSpPr>
         <p:spPr>
           <a:xfrm>
-            <a:off x="777239" y="1463039"/>
-            <a:ext cx="5394961" cy="340183"/>
+            <a:off x="777238" y="1463039"/>
+            <a:ext cx="5394962" cy="340181"/>
           </a:xfrm>
           <a:prstGeom prst="rect">
             <a:avLst/>
@@ -10680,7 +11356,7 @@
           </a:extLst>
         </p:spPr>
         <p:txBody>
-          <a:bodyPr lIns="45719" rIns="45719">
+          <a:bodyPr lIns="45718" tIns="45718" rIns="45718" bIns="45718">
             <a:spAutoFit/>
           </a:bodyPr>
           <a:lstStyle>
@@ -10689,6 +11365,10 @@
                 <a:solidFill>
                   <a:srgbClr val="00A896"/>
                 </a:solidFill>
+                <a:latin typeface="+mn-lt"/>
+                <a:ea typeface="+mn-ea"/>
+                <a:cs typeface="+mn-cs"/>
+                <a:sym typeface="Calibri"/>
               </a:defRPr>
             </a:lvl1pPr>
           </a:lstStyle>
@@ -10708,8 +11388,8 @@
         </p:nvSpPr>
         <p:spPr>
           <a:xfrm>
-            <a:off x="960119" y="2103120"/>
-            <a:ext cx="1554482" cy="280800"/>
+            <a:off x="960118" y="2103121"/>
+            <a:ext cx="1554484" cy="280798"/>
           </a:xfrm>
           <a:prstGeom prst="rect">
             <a:avLst/>
@@ -10724,7 +11404,7 @@
           </a:extLst>
         </p:spPr>
         <p:txBody>
-          <a:bodyPr lIns="45719" rIns="45719">
+          <a:bodyPr lIns="45718" tIns="45718" rIns="45718" bIns="45718">
             <a:spAutoFit/>
           </a:bodyPr>
           <a:lstStyle>
@@ -10733,6 +11413,10 @@
                 <a:solidFill>
                   <a:srgbClr val="1E2761"/>
                 </a:solidFill>
+                <a:latin typeface="+mn-lt"/>
+                <a:ea typeface="+mn-ea"/>
+                <a:cs typeface="+mn-cs"/>
+                <a:sym typeface="Calibri"/>
               </a:defRPr>
             </a:lvl1pPr>
           </a:lstStyle>
@@ -10752,8 +11436,8 @@
         </p:nvSpPr>
         <p:spPr>
           <a:xfrm>
-            <a:off x="2606040" y="2103120"/>
-            <a:ext cx="3566161" cy="280800"/>
+            <a:off x="2606039" y="2103121"/>
+            <a:ext cx="3566162" cy="280798"/>
           </a:xfrm>
           <a:prstGeom prst="rect">
             <a:avLst/>
@@ -10768,7 +11452,7 @@
           </a:extLst>
         </p:spPr>
         <p:txBody>
-          <a:bodyPr lIns="45719" rIns="45719">
+          <a:bodyPr lIns="45718" tIns="45718" rIns="45718" bIns="45718">
             <a:spAutoFit/>
           </a:bodyPr>
           <a:lstStyle>
@@ -10777,6 +11461,10 @@
                 <a:solidFill>
                   <a:srgbClr val="1A1A2E"/>
                 </a:solidFill>
+                <a:latin typeface="+mn-lt"/>
+                <a:ea typeface="+mn-ea"/>
+                <a:cs typeface="+mn-cs"/>
+                <a:sym typeface="Calibri"/>
               </a:defRPr>
             </a:lvl1pPr>
           </a:lstStyle>
@@ -10796,8 +11484,8 @@
         </p:nvSpPr>
         <p:spPr>
           <a:xfrm>
-            <a:off x="960119" y="2560320"/>
-            <a:ext cx="1554482" cy="280800"/>
+            <a:off x="960118" y="2560321"/>
+            <a:ext cx="1554484" cy="280798"/>
           </a:xfrm>
           <a:prstGeom prst="rect">
             <a:avLst/>
@@ -10812,7 +11500,7 @@
           </a:extLst>
         </p:spPr>
         <p:txBody>
-          <a:bodyPr lIns="45719" rIns="45719">
+          <a:bodyPr lIns="45718" tIns="45718" rIns="45718" bIns="45718">
             <a:spAutoFit/>
           </a:bodyPr>
           <a:lstStyle>
@@ -10821,6 +11509,10 @@
                 <a:solidFill>
                   <a:srgbClr val="1E2761"/>
                 </a:solidFill>
+                <a:latin typeface="+mn-lt"/>
+                <a:ea typeface="+mn-ea"/>
+                <a:cs typeface="+mn-cs"/>
+                <a:sym typeface="Calibri"/>
               </a:defRPr>
             </a:lvl1pPr>
           </a:lstStyle>
@@ -10840,8 +11532,8 @@
         </p:nvSpPr>
         <p:spPr>
           <a:xfrm>
-            <a:off x="2606040" y="2560320"/>
-            <a:ext cx="3566161" cy="280800"/>
+            <a:off x="2606039" y="2560321"/>
+            <a:ext cx="3745048" cy="280798"/>
           </a:xfrm>
           <a:prstGeom prst="rect">
             <a:avLst/>
@@ -10856,7 +11548,7 @@
           </a:extLst>
         </p:spPr>
         <p:txBody>
-          <a:bodyPr lIns="45719" rIns="45719">
+          <a:bodyPr lIns="45718" tIns="45718" rIns="45718" bIns="45718">
             <a:spAutoFit/>
           </a:bodyPr>
           <a:lstStyle>
@@ -10865,13 +11557,17 @@
                 <a:solidFill>
                   <a:srgbClr val="1A1A2E"/>
                 </a:solidFill>
+                <a:latin typeface="+mn-lt"/>
+                <a:ea typeface="+mn-ea"/>
+                <a:cs typeface="+mn-cs"/>
+                <a:sym typeface="Calibri"/>
               </a:defRPr>
             </a:lvl1pPr>
           </a:lstStyle>
           <a:p>
             <a:pPr/>
             <a:r>
-              <a:t>ResNet34 (sin pesos pretrained)</a:t>
+              <a:t>ResNet34 (con pesos pre-entrenados / Imagenet)</a:t>
             </a:r>
           </a:p>
         </p:txBody>
@@ -10884,8 +11580,8 @@
         </p:nvSpPr>
         <p:spPr>
           <a:xfrm>
-            <a:off x="960119" y="3017520"/>
-            <a:ext cx="1554482" cy="280800"/>
+            <a:off x="960118" y="3017521"/>
+            <a:ext cx="1554484" cy="280798"/>
           </a:xfrm>
           <a:prstGeom prst="rect">
             <a:avLst/>
@@ -10900,7 +11596,7 @@
           </a:extLst>
         </p:spPr>
         <p:txBody>
-          <a:bodyPr lIns="45719" rIns="45719">
+          <a:bodyPr lIns="45718" tIns="45718" rIns="45718" bIns="45718">
             <a:spAutoFit/>
           </a:bodyPr>
           <a:lstStyle>
@@ -10909,6 +11605,10 @@
                 <a:solidFill>
                   <a:srgbClr val="1E2761"/>
                 </a:solidFill>
+                <a:latin typeface="+mn-lt"/>
+                <a:ea typeface="+mn-ea"/>
+                <a:cs typeface="+mn-cs"/>
+                <a:sym typeface="Calibri"/>
               </a:defRPr>
             </a:lvl1pPr>
           </a:lstStyle>
@@ -10928,8 +11628,8 @@
         </p:nvSpPr>
         <p:spPr>
           <a:xfrm>
-            <a:off x="2606040" y="3017520"/>
-            <a:ext cx="3566161" cy="280800"/>
+            <a:off x="2606039" y="3017521"/>
+            <a:ext cx="3566162" cy="280798"/>
           </a:xfrm>
           <a:prstGeom prst="rect">
             <a:avLst/>
@@ -10944,7 +11644,7 @@
           </a:extLst>
         </p:spPr>
         <p:txBody>
-          <a:bodyPr lIns="45719" rIns="45719">
+          <a:bodyPr lIns="45718" tIns="45718" rIns="45718" bIns="45718">
             <a:spAutoFit/>
           </a:bodyPr>
           <a:lstStyle>
@@ -10953,6 +11653,10 @@
                 <a:solidFill>
                   <a:srgbClr val="1A1A2E"/>
                 </a:solidFill>
+                <a:latin typeface="+mn-lt"/>
+                <a:ea typeface="+mn-ea"/>
+                <a:cs typeface="+mn-cs"/>
+                <a:sym typeface="Calibri"/>
               </a:defRPr>
             </a:lvl1pPr>
           </a:lstStyle>
@@ -10972,8 +11676,8 @@
         </p:nvSpPr>
         <p:spPr>
           <a:xfrm>
-            <a:off x="960119" y="3474720"/>
-            <a:ext cx="1554482" cy="280800"/>
+            <a:off x="960118" y="3474721"/>
+            <a:ext cx="1554484" cy="280798"/>
           </a:xfrm>
           <a:prstGeom prst="rect">
             <a:avLst/>
@@ -10988,7 +11692,7 @@
           </a:extLst>
         </p:spPr>
         <p:txBody>
-          <a:bodyPr lIns="45719" rIns="45719">
+          <a:bodyPr lIns="45718" tIns="45718" rIns="45718" bIns="45718">
             <a:spAutoFit/>
           </a:bodyPr>
           <a:lstStyle>
@@ -10997,6 +11701,10 @@
                 <a:solidFill>
                   <a:srgbClr val="1E2761"/>
                 </a:solidFill>
+                <a:latin typeface="+mn-lt"/>
+                <a:ea typeface="+mn-ea"/>
+                <a:cs typeface="+mn-cs"/>
+                <a:sym typeface="Calibri"/>
               </a:defRPr>
             </a:lvl1pPr>
           </a:lstStyle>
@@ -11016,8 +11724,8 @@
         </p:nvSpPr>
         <p:spPr>
           <a:xfrm>
-            <a:off x="2606040" y="3474720"/>
-            <a:ext cx="3566161" cy="280800"/>
+            <a:off x="2606039" y="3474721"/>
+            <a:ext cx="3566162" cy="280798"/>
           </a:xfrm>
           <a:prstGeom prst="rect">
             <a:avLst/>
@@ -11032,7 +11740,7 @@
           </a:extLst>
         </p:spPr>
         <p:txBody>
-          <a:bodyPr lIns="45719" rIns="45719">
+          <a:bodyPr lIns="45718" tIns="45718" rIns="45718" bIns="45718">
             <a:spAutoFit/>
           </a:bodyPr>
           <a:lstStyle>
@@ -11041,6 +11749,10 @@
                 <a:solidFill>
                   <a:srgbClr val="1A1A2E"/>
                 </a:solidFill>
+                <a:latin typeface="+mn-lt"/>
+                <a:ea typeface="+mn-ea"/>
+                <a:cs typeface="+mn-cs"/>
+                <a:sym typeface="Calibri"/>
               </a:defRPr>
             </a:lvl1pPr>
           </a:lstStyle>
@@ -11060,8 +11772,8 @@
         </p:nvSpPr>
         <p:spPr>
           <a:xfrm>
-            <a:off x="960119" y="3931920"/>
-            <a:ext cx="1554482" cy="280800"/>
+            <a:off x="960118" y="3931921"/>
+            <a:ext cx="1554484" cy="280798"/>
           </a:xfrm>
           <a:prstGeom prst="rect">
             <a:avLst/>
@@ -11076,7 +11788,7 @@
           </a:extLst>
         </p:spPr>
         <p:txBody>
-          <a:bodyPr lIns="45719" rIns="45719">
+          <a:bodyPr lIns="45718" tIns="45718" rIns="45718" bIns="45718">
             <a:spAutoFit/>
           </a:bodyPr>
           <a:lstStyle>
@@ -11085,6 +11797,10 @@
                 <a:solidFill>
                   <a:srgbClr val="1E2761"/>
                 </a:solidFill>
+                <a:latin typeface="+mn-lt"/>
+                <a:ea typeface="+mn-ea"/>
+                <a:cs typeface="+mn-cs"/>
+                <a:sym typeface="Calibri"/>
               </a:defRPr>
             </a:lvl1pPr>
           </a:lstStyle>
@@ -11104,8 +11820,8 @@
         </p:nvSpPr>
         <p:spPr>
           <a:xfrm>
-            <a:off x="2606040" y="3931920"/>
-            <a:ext cx="3566161" cy="280800"/>
+            <a:off x="2606039" y="3931921"/>
+            <a:ext cx="3566162" cy="280798"/>
           </a:xfrm>
           <a:prstGeom prst="rect">
             <a:avLst/>
@@ -11120,7 +11836,7 @@
           </a:extLst>
         </p:spPr>
         <p:txBody>
-          <a:bodyPr lIns="45719" rIns="45719">
+          <a:bodyPr lIns="45718" tIns="45718" rIns="45718" bIns="45718">
             <a:spAutoFit/>
           </a:bodyPr>
           <a:lstStyle>
@@ -11129,6 +11845,10 @@
                 <a:solidFill>
                   <a:srgbClr val="1A1A2E"/>
                 </a:solidFill>
+                <a:latin typeface="+mn-lt"/>
+                <a:ea typeface="+mn-ea"/>
+                <a:cs typeface="+mn-cs"/>
+                <a:sym typeface="Calibri"/>
               </a:defRPr>
             </a:lvl1pPr>
           </a:lstStyle>
@@ -11148,8 +11868,8 @@
         </p:nvSpPr>
         <p:spPr>
           <a:xfrm>
-            <a:off x="960119" y="4389120"/>
-            <a:ext cx="1554482" cy="280800"/>
+            <a:off x="960118" y="4389121"/>
+            <a:ext cx="1554484" cy="280798"/>
           </a:xfrm>
           <a:prstGeom prst="rect">
             <a:avLst/>
@@ -11164,7 +11884,7 @@
           </a:extLst>
         </p:spPr>
         <p:txBody>
-          <a:bodyPr lIns="45719" rIns="45719">
+          <a:bodyPr lIns="45718" tIns="45718" rIns="45718" bIns="45718">
             <a:spAutoFit/>
           </a:bodyPr>
           <a:lstStyle>
@@ -11173,6 +11893,10 @@
                 <a:solidFill>
                   <a:srgbClr val="1E2761"/>
                 </a:solidFill>
+                <a:latin typeface="+mn-lt"/>
+                <a:ea typeface="+mn-ea"/>
+                <a:cs typeface="+mn-cs"/>
+                <a:sym typeface="Calibri"/>
               </a:defRPr>
             </a:lvl1pPr>
           </a:lstStyle>
@@ -11192,8 +11916,8 @@
         </p:nvSpPr>
         <p:spPr>
           <a:xfrm>
-            <a:off x="2606040" y="4389120"/>
-            <a:ext cx="3566161" cy="280800"/>
+            <a:off x="2606039" y="4389121"/>
+            <a:ext cx="3566162" cy="280798"/>
           </a:xfrm>
           <a:prstGeom prst="rect">
             <a:avLst/>
@@ -11208,7 +11932,7 @@
           </a:extLst>
         </p:spPr>
         <p:txBody>
-          <a:bodyPr lIns="45719" rIns="45719">
+          <a:bodyPr lIns="45718" tIns="45718" rIns="45718" bIns="45718">
             <a:spAutoFit/>
           </a:bodyPr>
           <a:lstStyle>
@@ -11217,6 +11941,10 @@
                 <a:solidFill>
                   <a:srgbClr val="1A1A2E"/>
                 </a:solidFill>
+                <a:latin typeface="+mn-lt"/>
+                <a:ea typeface="+mn-ea"/>
+                <a:cs typeface="+mn-cs"/>
+                <a:sym typeface="Calibri"/>
               </a:defRPr>
             </a:lvl1pPr>
           </a:lstStyle>
@@ -11236,8 +11964,8 @@
         </p:nvSpPr>
         <p:spPr>
           <a:xfrm>
-            <a:off x="960119" y="4846320"/>
-            <a:ext cx="1554482" cy="280800"/>
+            <a:off x="960118" y="4846321"/>
+            <a:ext cx="1554484" cy="280798"/>
           </a:xfrm>
           <a:prstGeom prst="rect">
             <a:avLst/>
@@ -11252,7 +11980,7 @@
           </a:extLst>
         </p:spPr>
         <p:txBody>
-          <a:bodyPr lIns="45719" rIns="45719">
+          <a:bodyPr lIns="45718" tIns="45718" rIns="45718" bIns="45718">
             <a:spAutoFit/>
           </a:bodyPr>
           <a:lstStyle>
@@ -11261,6 +11989,10 @@
                 <a:solidFill>
                   <a:srgbClr val="1E2761"/>
                 </a:solidFill>
+                <a:latin typeface="+mn-lt"/>
+                <a:ea typeface="+mn-ea"/>
+                <a:cs typeface="+mn-cs"/>
+                <a:sym typeface="Calibri"/>
               </a:defRPr>
             </a:lvl1pPr>
           </a:lstStyle>
@@ -11280,8 +12012,8 @@
         </p:nvSpPr>
         <p:spPr>
           <a:xfrm>
-            <a:off x="2606040" y="4846320"/>
-            <a:ext cx="3566161" cy="280800"/>
+            <a:off x="2606039" y="4846321"/>
+            <a:ext cx="3566162" cy="280798"/>
           </a:xfrm>
           <a:prstGeom prst="rect">
             <a:avLst/>
@@ -11296,7 +12028,7 @@
           </a:extLst>
         </p:spPr>
         <p:txBody>
-          <a:bodyPr lIns="45719" rIns="45719">
+          <a:bodyPr lIns="45718" tIns="45718" rIns="45718" bIns="45718">
             <a:spAutoFit/>
           </a:bodyPr>
           <a:lstStyle>
@@ -11305,6 +12037,10 @@
                 <a:solidFill>
                   <a:srgbClr val="1A1A2E"/>
                 </a:solidFill>
+                <a:latin typeface="+mn-lt"/>
+                <a:ea typeface="+mn-ea"/>
+                <a:cs typeface="+mn-cs"/>
+                <a:sym typeface="Calibri"/>
               </a:defRPr>
             </a:lvl1pPr>
           </a:lstStyle>
@@ -11324,8 +12060,8 @@
         </p:nvSpPr>
         <p:spPr>
           <a:xfrm>
-            <a:off x="960119" y="5303520"/>
-            <a:ext cx="1554482" cy="280800"/>
+            <a:off x="960118" y="5303521"/>
+            <a:ext cx="1554484" cy="280798"/>
           </a:xfrm>
           <a:prstGeom prst="rect">
             <a:avLst/>
@@ -11340,7 +12076,7 @@
           </a:extLst>
         </p:spPr>
         <p:txBody>
-          <a:bodyPr lIns="45719" rIns="45719">
+          <a:bodyPr lIns="45718" tIns="45718" rIns="45718" bIns="45718">
             <a:spAutoFit/>
           </a:bodyPr>
           <a:lstStyle>
@@ -11349,6 +12085,10 @@
                 <a:solidFill>
                   <a:srgbClr val="1E2761"/>
                 </a:solidFill>
+                <a:latin typeface="+mn-lt"/>
+                <a:ea typeface="+mn-ea"/>
+                <a:cs typeface="+mn-cs"/>
+                <a:sym typeface="Calibri"/>
               </a:defRPr>
             </a:lvl1pPr>
           </a:lstStyle>
@@ -11368,8 +12108,8 @@
         </p:nvSpPr>
         <p:spPr>
           <a:xfrm>
-            <a:off x="2606040" y="5303520"/>
-            <a:ext cx="3566161" cy="280800"/>
+            <a:off x="2606039" y="5303521"/>
+            <a:ext cx="3566162" cy="280798"/>
           </a:xfrm>
           <a:prstGeom prst="rect">
             <a:avLst/>
@@ -11384,7 +12124,7 @@
           </a:extLst>
         </p:spPr>
         <p:txBody>
-          <a:bodyPr lIns="45719" rIns="45719">
+          <a:bodyPr lIns="45718" tIns="45718" rIns="45718" bIns="45718">
             <a:spAutoFit/>
           </a:bodyPr>
           <a:lstStyle>
@@ -11393,6 +12133,10 @@
                 <a:solidFill>
                   <a:srgbClr val="1A1A2E"/>
                 </a:solidFill>
+                <a:latin typeface="+mn-lt"/>
+                <a:ea typeface="+mn-ea"/>
+                <a:cs typeface="+mn-cs"/>
+                <a:sym typeface="Calibri"/>
               </a:defRPr>
             </a:lvl1pPr>
           </a:lstStyle>
@@ -11412,8 +12156,8 @@
         </p:nvSpPr>
         <p:spPr>
           <a:xfrm>
-            <a:off x="6903719" y="1463039"/>
-            <a:ext cx="4480562" cy="340183"/>
+            <a:off x="6903718" y="1463039"/>
+            <a:ext cx="4480563" cy="340181"/>
           </a:xfrm>
           <a:prstGeom prst="rect">
             <a:avLst/>
@@ -11428,7 +12172,7 @@
           </a:extLst>
         </p:spPr>
         <p:txBody>
-          <a:bodyPr lIns="45719" rIns="45719">
+          <a:bodyPr lIns="45718" tIns="45718" rIns="45718" bIns="45718">
             <a:spAutoFit/>
           </a:bodyPr>
           <a:lstStyle>
@@ -11437,6 +12181,10 @@
                 <a:solidFill>
                   <a:srgbClr val="00A896"/>
                 </a:solidFill>
+                <a:latin typeface="+mn-lt"/>
+                <a:ea typeface="+mn-ea"/>
+                <a:cs typeface="+mn-cs"/>
+                <a:sym typeface="Calibri"/>
               </a:defRPr>
             </a:lvl1pPr>
           </a:lstStyle>
@@ -11457,7 +12205,7 @@
         <p:spPr>
           <a:xfrm>
             <a:off x="6858000" y="2103120"/>
-            <a:ext cx="4572000" cy="1371601"/>
+            <a:ext cx="4572000" cy="1371602"/>
           </a:xfrm>
           <a:prstGeom prst="rect">
             <a:avLst/>
@@ -11477,7 +12225,7 @@
           </a:effectLst>
         </p:spPr>
         <p:txBody>
-          <a:bodyPr lIns="45719" rIns="45719" anchor="ctr"/>
+          <a:bodyPr lIns="45718" tIns="45718" rIns="45718" bIns="45718" anchor="ctr"/>
           <a:lstStyle/>
           <a:p>
             <a:pPr algn="ctr">
@@ -11485,6 +12233,10 @@
                 <a:solidFill>
                   <a:srgbClr val="FFFFFF"/>
                 </a:solidFill>
+                <a:latin typeface="+mn-lt"/>
+                <a:ea typeface="+mn-ea"/>
+                <a:cs typeface="+mn-cs"/>
+                <a:sym typeface="Calibri"/>
               </a:defRPr>
             </a:pPr>
           </a:p>
@@ -11499,7 +12251,7 @@
         <p:spPr>
           <a:xfrm>
             <a:off x="6858000" y="2103120"/>
-            <a:ext cx="54864" cy="1371601"/>
+            <a:ext cx="54864" cy="1371602"/>
           </a:xfrm>
           <a:prstGeom prst="rect">
             <a:avLst/>
@@ -11519,7 +12271,7 @@
           </a:effectLst>
         </p:spPr>
         <p:txBody>
-          <a:bodyPr lIns="45719" rIns="45719" anchor="ctr"/>
+          <a:bodyPr lIns="45718" tIns="45718" rIns="45718" bIns="45718" anchor="ctr"/>
           <a:lstStyle/>
           <a:p>
             <a:pPr algn="ctr">
@@ -11527,6 +12279,10 @@
                 <a:solidFill>
                   <a:srgbClr val="FFFFFF"/>
                 </a:solidFill>
+                <a:latin typeface="+mn-lt"/>
+                <a:ea typeface="+mn-ea"/>
+                <a:cs typeface="+mn-cs"/>
+                <a:sym typeface="Calibri"/>
               </a:defRPr>
             </a:pPr>
           </a:p>
@@ -11540,8 +12296,8 @@
         </p:nvSpPr>
         <p:spPr>
           <a:xfrm>
-            <a:off x="7132319" y="2287138"/>
-            <a:ext cx="4023362" cy="277997"/>
+            <a:off x="7132318" y="2287138"/>
+            <a:ext cx="4023363" cy="277995"/>
           </a:xfrm>
           <a:prstGeom prst="rect">
             <a:avLst/>
@@ -11556,7 +12312,7 @@
           </a:extLst>
         </p:spPr>
         <p:txBody>
-          <a:bodyPr lIns="45719" rIns="45719">
+          <a:bodyPr lIns="45718" tIns="45718" rIns="45718" bIns="45718">
             <a:spAutoFit/>
           </a:bodyPr>
           <a:lstStyle>
@@ -11565,6 +12321,10 @@
                 <a:solidFill>
                   <a:srgbClr val="1E2761"/>
                 </a:solidFill>
+                <a:latin typeface="+mn-lt"/>
+                <a:ea typeface="+mn-ea"/>
+                <a:cs typeface="+mn-cs"/>
+                <a:sym typeface="Calibri"/>
               </a:defRPr>
             </a:lvl1pPr>
           </a:lstStyle>
@@ -11584,8 +12344,8 @@
         </p:nvSpPr>
         <p:spPr>
           <a:xfrm>
-            <a:off x="7132319" y="2652898"/>
-            <a:ext cx="4023362" cy="461403"/>
+            <a:off x="7132318" y="2652898"/>
+            <a:ext cx="4023363" cy="461401"/>
           </a:xfrm>
           <a:prstGeom prst="rect">
             <a:avLst/>
@@ -11600,7 +12360,7 @@
           </a:extLst>
         </p:spPr>
         <p:txBody>
-          <a:bodyPr lIns="45719" rIns="45719">
+          <a:bodyPr lIns="45718" tIns="45718" rIns="45718" bIns="45718">
             <a:spAutoFit/>
           </a:bodyPr>
           <a:lstStyle>
@@ -11609,6 +12369,10 @@
                 <a:solidFill>
                   <a:srgbClr val="1A1A2E"/>
                 </a:solidFill>
+                <a:latin typeface="+mn-lt"/>
+                <a:ea typeface="+mn-ea"/>
+                <a:cs typeface="+mn-cs"/>
+                <a:sym typeface="Calibri"/>
               </a:defRPr>
             </a:lvl1pPr>
           </a:lstStyle>
@@ -11628,8 +12392,8 @@
         </p:nvSpPr>
         <p:spPr>
           <a:xfrm>
-            <a:off x="6858000" y="3749038"/>
-            <a:ext cx="4572000" cy="1371601"/>
+            <a:off x="6858000" y="3749037"/>
+            <a:ext cx="4572000" cy="1371602"/>
           </a:xfrm>
           <a:prstGeom prst="rect">
             <a:avLst/>
@@ -11649,7 +12413,7 @@
           </a:effectLst>
         </p:spPr>
         <p:txBody>
-          <a:bodyPr lIns="45719" rIns="45719" anchor="ctr"/>
+          <a:bodyPr lIns="45718" tIns="45718" rIns="45718" bIns="45718" anchor="ctr"/>
           <a:lstStyle/>
           <a:p>
             <a:pPr algn="ctr">
@@ -11657,6 +12421,10 @@
                 <a:solidFill>
                   <a:srgbClr val="FFFFFF"/>
                 </a:solidFill>
+                <a:latin typeface="+mn-lt"/>
+                <a:ea typeface="+mn-ea"/>
+                <a:cs typeface="+mn-cs"/>
+                <a:sym typeface="Calibri"/>
               </a:defRPr>
             </a:pPr>
           </a:p>
@@ -11670,8 +12438,8 @@
         </p:nvSpPr>
         <p:spPr>
           <a:xfrm>
-            <a:off x="6858000" y="3749038"/>
-            <a:ext cx="54864" cy="1371601"/>
+            <a:off x="6858000" y="3749037"/>
+            <a:ext cx="54864" cy="1371602"/>
           </a:xfrm>
           <a:prstGeom prst="rect">
             <a:avLst/>
@@ -11691,7 +12459,7 @@
           </a:effectLst>
         </p:spPr>
         <p:txBody>
-          <a:bodyPr lIns="45719" rIns="45719" anchor="ctr"/>
+          <a:bodyPr lIns="45718" tIns="45718" rIns="45718" bIns="45718" anchor="ctr"/>
           <a:lstStyle/>
           <a:p>
             <a:pPr algn="ctr">
@@ -11699,6 +12467,10 @@
                 <a:solidFill>
                   <a:srgbClr val="FFFFFF"/>
                 </a:solidFill>
+                <a:latin typeface="+mn-lt"/>
+                <a:ea typeface="+mn-ea"/>
+                <a:cs typeface="+mn-cs"/>
+                <a:sym typeface="Calibri"/>
               </a:defRPr>
             </a:pPr>
           </a:p>
@@ -11712,8 +12484,8 @@
         </p:nvSpPr>
         <p:spPr>
           <a:xfrm>
-            <a:off x="7132319" y="3963977"/>
-            <a:ext cx="4023361" cy="277997"/>
+            <a:off x="7132318" y="3963978"/>
+            <a:ext cx="4023362" cy="277995"/>
           </a:xfrm>
           <a:prstGeom prst="rect">
             <a:avLst/>
@@ -11728,7 +12500,7 @@
           </a:extLst>
         </p:spPr>
         <p:txBody>
-          <a:bodyPr lIns="45719" rIns="45719">
+          <a:bodyPr lIns="45718" tIns="45718" rIns="45718" bIns="45718">
             <a:spAutoFit/>
           </a:bodyPr>
           <a:lstStyle>
@@ -11737,6 +12509,10 @@
                 <a:solidFill>
                   <a:srgbClr val="1E2761"/>
                 </a:solidFill>
+                <a:latin typeface="+mn-lt"/>
+                <a:ea typeface="+mn-ea"/>
+                <a:cs typeface="+mn-cs"/>
+                <a:sym typeface="Calibri"/>
               </a:defRPr>
             </a:lvl1pPr>
           </a:lstStyle>
@@ -11756,8 +12532,8 @@
         </p:nvSpPr>
         <p:spPr>
           <a:xfrm>
-            <a:off x="7132319" y="4373355"/>
-            <a:ext cx="4023361" cy="461403"/>
+            <a:off x="7132318" y="4373356"/>
+            <a:ext cx="4023362" cy="461401"/>
           </a:xfrm>
           <a:prstGeom prst="rect">
             <a:avLst/>
@@ -11772,7 +12548,7 @@
           </a:extLst>
         </p:spPr>
         <p:txBody>
-          <a:bodyPr lIns="45719" rIns="45719">
+          <a:bodyPr lIns="45718" tIns="45718" rIns="45718" bIns="45718">
             <a:spAutoFit/>
           </a:bodyPr>
           <a:lstStyle>
@@ -11781,13 +12557,17 @@
                 <a:solidFill>
                   <a:srgbClr val="1A1A2E"/>
                 </a:solidFill>
+                <a:latin typeface="+mn-lt"/>
+                <a:ea typeface="+mn-ea"/>
+                <a:cs typeface="+mn-cs"/>
+                <a:sym typeface="Calibri"/>
               </a:defRPr>
             </a:lvl1pPr>
           </a:lstStyle>
           <a:p>
             <a:pPr/>
             <a:r>
-              <a:t>Balance entre capacidad de representación y costo computacional para imágenes medicas de un solo canal.</a:t>
+              <a:t>Balance entre capacidad de representación y costo computacional para imágenes médicas de un solo canal.</a:t>
             </a:r>
           </a:p>
         </p:txBody>
@@ -11826,8 +12606,8 @@
         </p:nvSpPr>
         <p:spPr>
           <a:xfrm>
-            <a:off x="-1" y="-1"/>
-            <a:ext cx="12191697" cy="73154"/>
+            <a:off x="-1" y="-2"/>
+            <a:ext cx="12191697" cy="73156"/>
           </a:xfrm>
           <a:prstGeom prst="rect">
             <a:avLst/>
@@ -11847,7 +12627,7 @@
           </a:effectLst>
         </p:spPr>
         <p:txBody>
-          <a:bodyPr lIns="45719" rIns="45719" anchor="ctr"/>
+          <a:bodyPr lIns="45718" tIns="45718" rIns="45718" bIns="45718" anchor="ctr"/>
           <a:lstStyle/>
           <a:p>
             <a:pPr algn="ctr">
@@ -11855,6 +12635,10 @@
                 <a:solidFill>
                   <a:srgbClr val="FFFFFF"/>
                 </a:solidFill>
+                <a:latin typeface="+mn-lt"/>
+                <a:ea typeface="+mn-ea"/>
+                <a:cs typeface="+mn-cs"/>
+                <a:sym typeface="Calibri"/>
               </a:defRPr>
             </a:pPr>
           </a:p>
@@ -11869,7 +12653,7 @@
         <p:spPr>
           <a:xfrm>
             <a:off x="777239" y="457199"/>
-            <a:ext cx="9052561" cy="542242"/>
+            <a:ext cx="9052561" cy="542240"/>
           </a:xfrm>
           <a:prstGeom prst="rect">
             <a:avLst/>
@@ -11884,7 +12668,7 @@
           </a:extLst>
         </p:spPr>
         <p:txBody>
-          <a:bodyPr lIns="45719" rIns="45719">
+          <a:bodyPr lIns="45718" tIns="45718" rIns="45718" bIns="45718">
             <a:spAutoFit/>
           </a:bodyPr>
           <a:lstStyle>
@@ -11893,6 +12677,10 @@
                 <a:solidFill>
                   <a:srgbClr val="1E2761"/>
                 </a:solidFill>
+                <a:latin typeface="+mn-lt"/>
+                <a:ea typeface="+mn-ea"/>
+                <a:cs typeface="+mn-cs"/>
+                <a:sym typeface="Calibri"/>
               </a:defRPr>
             </a:lvl1pPr>
           </a:lstStyle>
@@ -11912,8 +12700,8 @@
         </p:nvSpPr>
         <p:spPr>
           <a:xfrm>
-            <a:off x="777239" y="1371599"/>
-            <a:ext cx="3108961" cy="745789"/>
+            <a:off x="777238" y="1371600"/>
+            <a:ext cx="3108962" cy="745786"/>
           </a:xfrm>
           <a:prstGeom prst="rect">
             <a:avLst/>
@@ -11928,7 +12716,7 @@
           </a:extLst>
         </p:spPr>
         <p:txBody>
-          <a:bodyPr lIns="45719" rIns="45719">
+          <a:bodyPr lIns="45718" tIns="45718" rIns="45718" bIns="45718">
             <a:spAutoFit/>
           </a:bodyPr>
           <a:lstStyle>
@@ -11937,6 +12725,10 @@
                 <a:solidFill>
                   <a:srgbClr val="00A896"/>
                 </a:solidFill>
+                <a:latin typeface="+mn-lt"/>
+                <a:ea typeface="+mn-ea"/>
+                <a:cs typeface="+mn-cs"/>
+                <a:sym typeface="Calibri"/>
               </a:defRPr>
             </a:lvl1pPr>
           </a:lstStyle>
@@ -11956,8 +12748,8 @@
         </p:nvSpPr>
         <p:spPr>
           <a:xfrm>
-            <a:off x="777239" y="2103120"/>
-            <a:ext cx="3108961" cy="300594"/>
+            <a:off x="777238" y="2103121"/>
+            <a:ext cx="3108962" cy="300592"/>
           </a:xfrm>
           <a:prstGeom prst="rect">
             <a:avLst/>
@@ -11972,7 +12764,7 @@
           </a:extLst>
         </p:spPr>
         <p:txBody>
-          <a:bodyPr lIns="45719" rIns="45719">
+          <a:bodyPr lIns="45718" tIns="45718" rIns="45718" bIns="45718">
             <a:spAutoFit/>
           </a:bodyPr>
           <a:lstStyle>
@@ -11981,6 +12773,10 @@
                 <a:solidFill>
                   <a:srgbClr val="6B7B8D"/>
                 </a:solidFill>
+                <a:latin typeface="+mn-lt"/>
+                <a:ea typeface="+mn-ea"/>
+                <a:cs typeface="+mn-cs"/>
+                <a:sym typeface="Calibri"/>
               </a:defRPr>
             </a:lvl1pPr>
           </a:lstStyle>
@@ -12000,8 +12796,8 @@
         </p:nvSpPr>
         <p:spPr>
           <a:xfrm>
-            <a:off x="4617719" y="1371599"/>
-            <a:ext cx="3108962" cy="745789"/>
+            <a:off x="4617718" y="1371600"/>
+            <a:ext cx="3108963" cy="745786"/>
           </a:xfrm>
           <a:prstGeom prst="rect">
             <a:avLst/>
@@ -12016,7 +12812,7 @@
           </a:extLst>
         </p:spPr>
         <p:txBody>
-          <a:bodyPr lIns="45719" rIns="45719">
+          <a:bodyPr lIns="45718" tIns="45718" rIns="45718" bIns="45718">
             <a:spAutoFit/>
           </a:bodyPr>
           <a:lstStyle>
@@ -12025,6 +12821,10 @@
                 <a:solidFill>
                   <a:srgbClr val="1E2761"/>
                 </a:solidFill>
+                <a:latin typeface="+mn-lt"/>
+                <a:ea typeface="+mn-ea"/>
+                <a:cs typeface="+mn-cs"/>
+                <a:sym typeface="Calibri"/>
               </a:defRPr>
             </a:lvl1pPr>
           </a:lstStyle>
@@ -12044,8 +12844,8 @@
         </p:nvSpPr>
         <p:spPr>
           <a:xfrm>
-            <a:off x="4617719" y="2103120"/>
-            <a:ext cx="3108962" cy="300594"/>
+            <a:off x="4617718" y="2103121"/>
+            <a:ext cx="3108963" cy="300592"/>
           </a:xfrm>
           <a:prstGeom prst="rect">
             <a:avLst/>
@@ -12060,7 +12860,7 @@
           </a:extLst>
         </p:spPr>
         <p:txBody>
-          <a:bodyPr lIns="45719" rIns="45719">
+          <a:bodyPr lIns="45718" tIns="45718" rIns="45718" bIns="45718">
             <a:spAutoFit/>
           </a:bodyPr>
           <a:lstStyle>
@@ -12069,6 +12869,10 @@
                 <a:solidFill>
                   <a:srgbClr val="6B7B8D"/>
                 </a:solidFill>
+                <a:latin typeface="+mn-lt"/>
+                <a:ea typeface="+mn-ea"/>
+                <a:cs typeface="+mn-cs"/>
+                <a:sym typeface="Calibri"/>
               </a:defRPr>
             </a:lvl1pPr>
           </a:lstStyle>
@@ -12088,8 +12892,8 @@
         </p:nvSpPr>
         <p:spPr>
           <a:xfrm>
-            <a:off x="8458200" y="1371599"/>
-            <a:ext cx="3108961" cy="745789"/>
+            <a:off x="8458199" y="1371600"/>
+            <a:ext cx="3108963" cy="745786"/>
           </a:xfrm>
           <a:prstGeom prst="rect">
             <a:avLst/>
@@ -12104,7 +12908,7 @@
           </a:extLst>
         </p:spPr>
         <p:txBody>
-          <a:bodyPr lIns="45719" rIns="45719">
+          <a:bodyPr lIns="45718" tIns="45718" rIns="45718" bIns="45718">
             <a:spAutoFit/>
           </a:bodyPr>
           <a:lstStyle>
@@ -12113,6 +12917,10 @@
                 <a:solidFill>
                   <a:srgbClr val="6B7B8D"/>
                 </a:solidFill>
+                <a:latin typeface="+mn-lt"/>
+                <a:ea typeface="+mn-ea"/>
+                <a:cs typeface="+mn-cs"/>
+                <a:sym typeface="Calibri"/>
               </a:defRPr>
             </a:lvl1pPr>
           </a:lstStyle>
@@ -12132,8 +12940,8 @@
         </p:nvSpPr>
         <p:spPr>
           <a:xfrm>
-            <a:off x="8458200" y="2103120"/>
-            <a:ext cx="3108961" cy="300594"/>
+            <a:off x="8458199" y="2103121"/>
+            <a:ext cx="3108963" cy="300592"/>
           </a:xfrm>
           <a:prstGeom prst="rect">
             <a:avLst/>
@@ -12148,7 +12956,7 @@
           </a:extLst>
         </p:spPr>
         <p:txBody>
-          <a:bodyPr lIns="45719" rIns="45719">
+          <a:bodyPr lIns="45718" tIns="45718" rIns="45718" bIns="45718">
             <a:spAutoFit/>
           </a:bodyPr>
           <a:lstStyle>
@@ -12157,6 +12965,10 @@
                 <a:solidFill>
                   <a:srgbClr val="6B7B8D"/>
                 </a:solidFill>
+                <a:latin typeface="+mn-lt"/>
+                <a:ea typeface="+mn-ea"/>
+                <a:cs typeface="+mn-cs"/>
+                <a:sym typeface="Calibri"/>
               </a:defRPr>
             </a:lvl1pPr>
           </a:lstStyle>
@@ -12176,8 +12988,8 @@
         </p:nvSpPr>
         <p:spPr>
           <a:xfrm>
-            <a:off x="777239" y="2926079"/>
-            <a:ext cx="5394961" cy="333089"/>
+            <a:off x="777238" y="2926079"/>
+            <a:ext cx="5394962" cy="333087"/>
           </a:xfrm>
           <a:prstGeom prst="rect">
             <a:avLst/>
@@ -12192,7 +13004,7 @@
           </a:extLst>
         </p:spPr>
         <p:txBody>
-          <a:bodyPr lIns="45719" rIns="45719">
+          <a:bodyPr lIns="45718" tIns="45718" rIns="45718" bIns="45718">
             <a:spAutoFit/>
           </a:bodyPr>
           <a:lstStyle>
@@ -12201,6 +13013,10 @@
                 <a:solidFill>
                   <a:srgbClr val="1E2761"/>
                 </a:solidFill>
+                <a:latin typeface="+mn-lt"/>
+                <a:ea typeface="+mn-ea"/>
+                <a:cs typeface="+mn-cs"/>
+                <a:sym typeface="Calibri"/>
               </a:defRPr>
             </a:lvl1pPr>
           </a:lstStyle>
@@ -12220,7 +13036,7 @@
         </p:nvGraphicFramePr>
         <p:xfrm>
           <a:off x="731519" y="3474720"/>
-          <a:ext cx="10698482" cy="1097281"/>
+          <a:ext cx="10698482" cy="1097282"/>
         </p:xfrm>
         <a:graphic xmlns:a="http://schemas.openxmlformats.org/drawingml/2006/main">
           <a:graphicData uri="http://schemas.openxmlformats.org/drawingml/2006/table">
@@ -12864,8 +13680,8 @@
         </p:nvSpPr>
         <p:spPr>
           <a:xfrm>
-            <a:off x="777239" y="4846320"/>
-            <a:ext cx="5394961" cy="333088"/>
+            <a:off x="777238" y="4846321"/>
+            <a:ext cx="5394962" cy="333086"/>
           </a:xfrm>
           <a:prstGeom prst="rect">
             <a:avLst/>
@@ -12880,7 +13696,7 @@
           </a:extLst>
         </p:spPr>
         <p:txBody>
-          <a:bodyPr lIns="45719" rIns="45719">
+          <a:bodyPr lIns="45718" tIns="45718" rIns="45718" bIns="45718">
             <a:spAutoFit/>
           </a:bodyPr>
           <a:lstStyle>
@@ -12889,6 +13705,10 @@
                 <a:solidFill>
                   <a:srgbClr val="1E2761"/>
                 </a:solidFill>
+                <a:latin typeface="+mn-lt"/>
+                <a:ea typeface="+mn-ea"/>
+                <a:cs typeface="+mn-cs"/>
+                <a:sym typeface="Calibri"/>
               </a:defRPr>
             </a:lvl1pPr>
           </a:lstStyle>
@@ -12908,7 +13728,7 @@
         </p:nvGraphicFramePr>
         <p:xfrm>
           <a:off x="731519" y="5303520"/>
-          <a:ext cx="7315201" cy="1371601"/>
+          <a:ext cx="7315201" cy="1371602"/>
         </p:xfrm>
         <a:graphic xmlns:a="http://schemas.openxmlformats.org/drawingml/2006/main">
           <a:graphicData uri="http://schemas.openxmlformats.org/drawingml/2006/table">
@@ -13564,8 +14384,8 @@
         </p:nvSpPr>
         <p:spPr>
           <a:xfrm>
-            <a:off x="-1" y="-1"/>
-            <a:ext cx="12191697" cy="73154"/>
+            <a:off x="-1" y="-2"/>
+            <a:ext cx="12191697" cy="73156"/>
           </a:xfrm>
           <a:prstGeom prst="rect">
             <a:avLst/>
@@ -13585,7 +14405,7 @@
           </a:effectLst>
         </p:spPr>
         <p:txBody>
-          <a:bodyPr lIns="45719" rIns="45719" anchor="ctr"/>
+          <a:bodyPr lIns="45718" tIns="45718" rIns="45718" bIns="45718" anchor="ctr"/>
           <a:lstStyle/>
           <a:p>
             <a:pPr algn="ctr">
@@ -13593,6 +14413,10 @@
                 <a:solidFill>
                   <a:srgbClr val="FFFFFF"/>
                 </a:solidFill>
+                <a:latin typeface="+mn-lt"/>
+                <a:ea typeface="+mn-ea"/>
+                <a:cs typeface="+mn-cs"/>
+                <a:sym typeface="Calibri"/>
               </a:defRPr>
             </a:pPr>
           </a:p>
@@ -13607,7 +14431,7 @@
         <p:spPr>
           <a:xfrm>
             <a:off x="777239" y="457199"/>
-            <a:ext cx="9052561" cy="542242"/>
+            <a:ext cx="9052561" cy="542240"/>
           </a:xfrm>
           <a:prstGeom prst="rect">
             <a:avLst/>
@@ -13622,7 +14446,7 @@
           </a:extLst>
         </p:spPr>
         <p:txBody>
-          <a:bodyPr lIns="45719" rIns="45719">
+          <a:bodyPr lIns="45718" tIns="45718" rIns="45718" bIns="45718">
             <a:spAutoFit/>
           </a:bodyPr>
           <a:lstStyle>
@@ -13631,6 +14455,10 @@
                 <a:solidFill>
                   <a:srgbClr val="1E2761"/>
                 </a:solidFill>
+                <a:latin typeface="+mn-lt"/>
+                <a:ea typeface="+mn-ea"/>
+                <a:cs typeface="+mn-cs"/>
+                <a:sym typeface="Calibri"/>
               </a:defRPr>
             </a:lvl1pPr>
           </a:lstStyle>
@@ -13671,7 +14499,7 @@
           </a:effectLst>
         </p:spPr>
         <p:txBody>
-          <a:bodyPr lIns="45719" rIns="45719" anchor="ctr"/>
+          <a:bodyPr lIns="45718" tIns="45718" rIns="45718" bIns="45718" anchor="ctr"/>
           <a:lstStyle/>
           <a:p>
             <a:pPr algn="ctr">
@@ -13679,6 +14507,10 @@
                 <a:solidFill>
                   <a:srgbClr val="FFFFFF"/>
                 </a:solidFill>
+                <a:latin typeface="+mn-lt"/>
+                <a:ea typeface="+mn-ea"/>
+                <a:cs typeface="+mn-cs"/>
+                <a:sym typeface="Calibri"/>
               </a:defRPr>
             </a:pPr>
           </a:p>
@@ -13693,7 +14525,7 @@
         <p:spPr>
           <a:xfrm>
             <a:off x="731520" y="1371599"/>
-            <a:ext cx="3383280" cy="548642"/>
+            <a:ext cx="3383280" cy="548643"/>
           </a:xfrm>
           <a:prstGeom prst="rect">
             <a:avLst/>
@@ -13713,7 +14545,7 @@
           </a:effectLst>
         </p:spPr>
         <p:txBody>
-          <a:bodyPr lIns="45719" rIns="45719" anchor="ctr"/>
+          <a:bodyPr lIns="45718" tIns="45718" rIns="45718" bIns="45718" anchor="ctr"/>
           <a:lstStyle/>
           <a:p>
             <a:pPr algn="ctr">
@@ -13721,6 +14553,10 @@
                 <a:solidFill>
                   <a:srgbClr val="FFFFFF"/>
                 </a:solidFill>
+                <a:latin typeface="+mn-lt"/>
+                <a:ea typeface="+mn-ea"/>
+                <a:cs typeface="+mn-cs"/>
+                <a:sym typeface="Calibri"/>
               </a:defRPr>
             </a:pPr>
           </a:p>
@@ -13734,8 +14570,8 @@
         </p:nvSpPr>
         <p:spPr>
           <a:xfrm>
-            <a:off x="868679" y="1506921"/>
-            <a:ext cx="3108961" cy="277998"/>
+            <a:off x="868678" y="1506922"/>
+            <a:ext cx="3108962" cy="277995"/>
           </a:xfrm>
           <a:prstGeom prst="rect">
             <a:avLst/>
@@ -13750,7 +14586,7 @@
           </a:extLst>
         </p:spPr>
         <p:txBody>
-          <a:bodyPr lIns="45719" rIns="45719">
+          <a:bodyPr lIns="45718" tIns="45718" rIns="45718" bIns="45718">
             <a:spAutoFit/>
           </a:bodyPr>
           <a:lstStyle>
@@ -13759,6 +14595,10 @@
                 <a:solidFill>
                   <a:srgbClr val="FFFFFF"/>
                 </a:solidFill>
+                <a:latin typeface="+mn-lt"/>
+                <a:ea typeface="+mn-ea"/>
+                <a:cs typeface="+mn-cs"/>
+                <a:sym typeface="Calibri"/>
               </a:defRPr>
             </a:lvl1pPr>
           </a:lstStyle>
@@ -13778,8 +14618,8 @@
         </p:nvSpPr>
         <p:spPr>
           <a:xfrm>
-            <a:off x="960119" y="2103120"/>
-            <a:ext cx="2926082" cy="248305"/>
+            <a:off x="960118" y="2103121"/>
+            <a:ext cx="2926084" cy="248303"/>
           </a:xfrm>
           <a:prstGeom prst="rect">
             <a:avLst/>
@@ -13794,7 +14634,7 @@
           </a:extLst>
         </p:spPr>
         <p:txBody>
-          <a:bodyPr lIns="45719" rIns="45719">
+          <a:bodyPr lIns="45718" tIns="45718" rIns="45718" bIns="45718">
             <a:spAutoFit/>
           </a:bodyPr>
           <a:lstStyle>
@@ -13803,6 +14643,10 @@
                 <a:solidFill>
                   <a:srgbClr val="1A1A2E"/>
                 </a:solidFill>
+                <a:latin typeface="+mn-lt"/>
+                <a:ea typeface="+mn-ea"/>
+                <a:cs typeface="+mn-cs"/>
+                <a:sym typeface="Calibri"/>
               </a:defRPr>
             </a:lvl1pPr>
           </a:lstStyle>
@@ -13822,8 +14666,8 @@
         </p:nvSpPr>
         <p:spPr>
           <a:xfrm>
-            <a:off x="960119" y="2560320"/>
-            <a:ext cx="2926082" cy="248305"/>
+            <a:off x="960118" y="2560321"/>
+            <a:ext cx="2926084" cy="248303"/>
           </a:xfrm>
           <a:prstGeom prst="rect">
             <a:avLst/>
@@ -13838,7 +14682,7 @@
           </a:extLst>
         </p:spPr>
         <p:txBody>
-          <a:bodyPr lIns="45719" rIns="45719">
+          <a:bodyPr lIns="45718" tIns="45718" rIns="45718" bIns="45718">
             <a:spAutoFit/>
           </a:bodyPr>
           <a:lstStyle>
@@ -13847,6 +14691,10 @@
                 <a:solidFill>
                   <a:srgbClr val="1A1A2E"/>
                 </a:solidFill>
+                <a:latin typeface="+mn-lt"/>
+                <a:ea typeface="+mn-ea"/>
+                <a:cs typeface="+mn-cs"/>
+                <a:sym typeface="Calibri"/>
               </a:defRPr>
             </a:lvl1pPr>
           </a:lstStyle>
@@ -13866,8 +14714,8 @@
         </p:nvSpPr>
         <p:spPr>
           <a:xfrm>
-            <a:off x="960119" y="3017520"/>
-            <a:ext cx="2926082" cy="248305"/>
+            <a:off x="960118" y="3017521"/>
+            <a:ext cx="2926084" cy="248303"/>
           </a:xfrm>
           <a:prstGeom prst="rect">
             <a:avLst/>
@@ -13882,7 +14730,7 @@
           </a:extLst>
         </p:spPr>
         <p:txBody>
-          <a:bodyPr lIns="45719" rIns="45719">
+          <a:bodyPr lIns="45718" tIns="45718" rIns="45718" bIns="45718">
             <a:spAutoFit/>
           </a:bodyPr>
           <a:lstStyle>
@@ -13891,6 +14739,10 @@
                 <a:solidFill>
                   <a:srgbClr val="1A1A2E"/>
                 </a:solidFill>
+                <a:latin typeface="+mn-lt"/>
+                <a:ea typeface="+mn-ea"/>
+                <a:cs typeface="+mn-cs"/>
+                <a:sym typeface="Calibri"/>
               </a:defRPr>
             </a:lvl1pPr>
           </a:lstStyle>
@@ -13910,8 +14762,8 @@
         </p:nvSpPr>
         <p:spPr>
           <a:xfrm>
-            <a:off x="960119" y="3474720"/>
-            <a:ext cx="2926082" cy="248305"/>
+            <a:off x="960118" y="3474721"/>
+            <a:ext cx="2926084" cy="248303"/>
           </a:xfrm>
           <a:prstGeom prst="rect">
             <a:avLst/>
@@ -13926,7 +14778,7 @@
           </a:extLst>
         </p:spPr>
         <p:txBody>
-          <a:bodyPr lIns="45719" rIns="45719">
+          <a:bodyPr lIns="45718" tIns="45718" rIns="45718" bIns="45718">
             <a:spAutoFit/>
           </a:bodyPr>
           <a:lstStyle>
@@ -13935,6 +14787,10 @@
                 <a:solidFill>
                   <a:srgbClr val="1A1A2E"/>
                 </a:solidFill>
+                <a:latin typeface="+mn-lt"/>
+                <a:ea typeface="+mn-ea"/>
+                <a:cs typeface="+mn-cs"/>
+                <a:sym typeface="Calibri"/>
               </a:defRPr>
             </a:lvl1pPr>
           </a:lstStyle>
@@ -13954,8 +14810,8 @@
         </p:nvSpPr>
         <p:spPr>
           <a:xfrm>
-            <a:off x="960119" y="3931920"/>
-            <a:ext cx="2926082" cy="248305"/>
+            <a:off x="960118" y="3931921"/>
+            <a:ext cx="2926084" cy="248303"/>
           </a:xfrm>
           <a:prstGeom prst="rect">
             <a:avLst/>
@@ -13970,7 +14826,7 @@
           </a:extLst>
         </p:spPr>
         <p:txBody>
-          <a:bodyPr lIns="45719" rIns="45719">
+          <a:bodyPr lIns="45718" tIns="45718" rIns="45718" bIns="45718">
             <a:spAutoFit/>
           </a:bodyPr>
           <a:lstStyle>
@@ -13979,6 +14835,10 @@
                 <a:solidFill>
                   <a:srgbClr val="1A1A2E"/>
                 </a:solidFill>
+                <a:latin typeface="+mn-lt"/>
+                <a:ea typeface="+mn-ea"/>
+                <a:cs typeface="+mn-cs"/>
+                <a:sym typeface="Calibri"/>
               </a:defRPr>
             </a:lvl1pPr>
           </a:lstStyle>
@@ -13998,8 +14858,8 @@
         </p:nvSpPr>
         <p:spPr>
           <a:xfrm>
-            <a:off x="960119" y="4389120"/>
-            <a:ext cx="2926082" cy="248305"/>
+            <a:off x="960118" y="4389121"/>
+            <a:ext cx="2926084" cy="248303"/>
           </a:xfrm>
           <a:prstGeom prst="rect">
             <a:avLst/>
@@ -14014,7 +14874,7 @@
           </a:extLst>
         </p:spPr>
         <p:txBody>
-          <a:bodyPr lIns="45719" rIns="45719">
+          <a:bodyPr lIns="45718" tIns="45718" rIns="45718" bIns="45718">
             <a:spAutoFit/>
           </a:bodyPr>
           <a:lstStyle>
@@ -14023,6 +14883,10 @@
                 <a:solidFill>
                   <a:srgbClr val="1A1A2E"/>
                 </a:solidFill>
+                <a:latin typeface="+mn-lt"/>
+                <a:ea typeface="+mn-ea"/>
+                <a:cs typeface="+mn-cs"/>
+                <a:sym typeface="Calibri"/>
               </a:defRPr>
             </a:lvl1pPr>
           </a:lstStyle>
@@ -14042,8 +14906,8 @@
         </p:nvSpPr>
         <p:spPr>
           <a:xfrm>
-            <a:off x="960119" y="4846320"/>
-            <a:ext cx="2926082" cy="248305"/>
+            <a:off x="960118" y="4846321"/>
+            <a:ext cx="2926084" cy="248303"/>
           </a:xfrm>
           <a:prstGeom prst="rect">
             <a:avLst/>
@@ -14058,7 +14922,7 @@
           </a:extLst>
         </p:spPr>
         <p:txBody>
-          <a:bodyPr lIns="45719" rIns="45719">
+          <a:bodyPr lIns="45718" tIns="45718" rIns="45718" bIns="45718">
             <a:spAutoFit/>
           </a:bodyPr>
           <a:lstStyle>
@@ -14067,6 +14931,10 @@
                 <a:solidFill>
                   <a:srgbClr val="1A1A2E"/>
                 </a:solidFill>
+                <a:latin typeface="+mn-lt"/>
+                <a:ea typeface="+mn-ea"/>
+                <a:cs typeface="+mn-cs"/>
+                <a:sym typeface="Calibri"/>
               </a:defRPr>
             </a:lvl1pPr>
           </a:lstStyle>
@@ -14087,7 +14955,7 @@
         <p:spPr>
           <a:xfrm>
             <a:off x="4389120" y="1371600"/>
-            <a:ext cx="3383281" cy="4754880"/>
+            <a:ext cx="3383282" cy="4754880"/>
           </a:xfrm>
           <a:prstGeom prst="rect">
             <a:avLst/>
@@ -14107,7 +14975,7 @@
           </a:effectLst>
         </p:spPr>
         <p:txBody>
-          <a:bodyPr lIns="45719" rIns="45719" anchor="ctr"/>
+          <a:bodyPr lIns="45718" tIns="45718" rIns="45718" bIns="45718" anchor="ctr"/>
           <a:lstStyle/>
           <a:p>
             <a:pPr algn="ctr">
@@ -14115,6 +14983,10 @@
                 <a:solidFill>
                   <a:srgbClr val="FFFFFF"/>
                 </a:solidFill>
+                <a:latin typeface="+mn-lt"/>
+                <a:ea typeface="+mn-ea"/>
+                <a:cs typeface="+mn-cs"/>
+                <a:sym typeface="Calibri"/>
               </a:defRPr>
             </a:pPr>
           </a:p>
@@ -14129,7 +15001,7 @@
         <p:spPr>
           <a:xfrm>
             <a:off x="4389120" y="1371599"/>
-            <a:ext cx="3383281" cy="548642"/>
+            <a:ext cx="3383282" cy="548643"/>
           </a:xfrm>
           <a:prstGeom prst="rect">
             <a:avLst/>
@@ -14149,7 +15021,7 @@
           </a:effectLst>
         </p:spPr>
         <p:txBody>
-          <a:bodyPr lIns="45719" rIns="45719" anchor="ctr"/>
+          <a:bodyPr lIns="45718" tIns="45718" rIns="45718" bIns="45718" anchor="ctr"/>
           <a:lstStyle/>
           <a:p>
             <a:pPr algn="ctr">
@@ -14157,6 +15029,10 @@
                 <a:solidFill>
                   <a:srgbClr val="FFFFFF"/>
                 </a:solidFill>
+                <a:latin typeface="+mn-lt"/>
+                <a:ea typeface="+mn-ea"/>
+                <a:cs typeface="+mn-cs"/>
+                <a:sym typeface="Calibri"/>
               </a:defRPr>
             </a:pPr>
           </a:p>
@@ -14170,8 +15046,8 @@
         </p:nvSpPr>
         <p:spPr>
           <a:xfrm>
-            <a:off x="4526280" y="1506921"/>
-            <a:ext cx="3108961" cy="277998"/>
+            <a:off x="4526279" y="1506922"/>
+            <a:ext cx="3108962" cy="277995"/>
           </a:xfrm>
           <a:prstGeom prst="rect">
             <a:avLst/>
@@ -14186,7 +15062,7 @@
           </a:extLst>
         </p:spPr>
         <p:txBody>
-          <a:bodyPr lIns="45719" rIns="45719">
+          <a:bodyPr lIns="45718" tIns="45718" rIns="45718" bIns="45718">
             <a:spAutoFit/>
           </a:bodyPr>
           <a:lstStyle>
@@ -14195,6 +15071,10 @@
                 <a:solidFill>
                   <a:srgbClr val="FFFFFF"/>
                 </a:solidFill>
+                <a:latin typeface="+mn-lt"/>
+                <a:ea typeface="+mn-ea"/>
+                <a:cs typeface="+mn-cs"/>
+                <a:sym typeface="Calibri"/>
               </a:defRPr>
             </a:lvl1pPr>
           </a:lstStyle>
@@ -14214,8 +15094,8 @@
         </p:nvSpPr>
         <p:spPr>
           <a:xfrm>
-            <a:off x="4617719" y="2103120"/>
-            <a:ext cx="2926082" cy="248305"/>
+            <a:off x="4617718" y="2103121"/>
+            <a:ext cx="2926083" cy="248303"/>
           </a:xfrm>
           <a:prstGeom prst="rect">
             <a:avLst/>
@@ -14230,7 +15110,7 @@
           </a:extLst>
         </p:spPr>
         <p:txBody>
-          <a:bodyPr lIns="45719" rIns="45719">
+          <a:bodyPr lIns="45718" tIns="45718" rIns="45718" bIns="45718">
             <a:spAutoFit/>
           </a:bodyPr>
           <a:lstStyle>
@@ -14239,6 +15119,10 @@
                 <a:solidFill>
                   <a:srgbClr val="1A1A2E"/>
                 </a:solidFill>
+                <a:latin typeface="+mn-lt"/>
+                <a:ea typeface="+mn-ea"/>
+                <a:cs typeface="+mn-cs"/>
+                <a:sym typeface="Calibri"/>
               </a:defRPr>
             </a:lvl1pPr>
           </a:lstStyle>
@@ -14258,8 +15142,8 @@
         </p:nvSpPr>
         <p:spPr>
           <a:xfrm>
-            <a:off x="4617719" y="2560320"/>
-            <a:ext cx="2926082" cy="248305"/>
+            <a:off x="4617718" y="2560321"/>
+            <a:ext cx="2926083" cy="248303"/>
           </a:xfrm>
           <a:prstGeom prst="rect">
             <a:avLst/>
@@ -14274,7 +15158,7 @@
           </a:extLst>
         </p:spPr>
         <p:txBody>
-          <a:bodyPr lIns="45719" rIns="45719">
+          <a:bodyPr lIns="45718" tIns="45718" rIns="45718" bIns="45718">
             <a:spAutoFit/>
           </a:bodyPr>
           <a:lstStyle>
@@ -14283,6 +15167,10 @@
                 <a:solidFill>
                   <a:srgbClr val="1A1A2E"/>
                 </a:solidFill>
+                <a:latin typeface="+mn-lt"/>
+                <a:ea typeface="+mn-ea"/>
+                <a:cs typeface="+mn-cs"/>
+                <a:sym typeface="Calibri"/>
               </a:defRPr>
             </a:lvl1pPr>
           </a:lstStyle>
@@ -14302,8 +15190,8 @@
         </p:nvSpPr>
         <p:spPr>
           <a:xfrm>
-            <a:off x="4617719" y="3017520"/>
-            <a:ext cx="2926082" cy="248305"/>
+            <a:off x="4617718" y="3017521"/>
+            <a:ext cx="2926083" cy="248303"/>
           </a:xfrm>
           <a:prstGeom prst="rect">
             <a:avLst/>
@@ -14318,7 +15206,7 @@
           </a:extLst>
         </p:spPr>
         <p:txBody>
-          <a:bodyPr lIns="45719" rIns="45719">
+          <a:bodyPr lIns="45718" tIns="45718" rIns="45718" bIns="45718">
             <a:spAutoFit/>
           </a:bodyPr>
           <a:lstStyle>
@@ -14327,6 +15215,10 @@
                 <a:solidFill>
                   <a:srgbClr val="1A1A2E"/>
                 </a:solidFill>
+                <a:latin typeface="+mn-lt"/>
+                <a:ea typeface="+mn-ea"/>
+                <a:cs typeface="+mn-cs"/>
+                <a:sym typeface="Calibri"/>
               </a:defRPr>
             </a:lvl1pPr>
           </a:lstStyle>
@@ -14346,8 +15238,8 @@
         </p:nvSpPr>
         <p:spPr>
           <a:xfrm>
-            <a:off x="4617719" y="3474720"/>
-            <a:ext cx="2926082" cy="248305"/>
+            <a:off x="4617718" y="3474721"/>
+            <a:ext cx="2926083" cy="248303"/>
           </a:xfrm>
           <a:prstGeom prst="rect">
             <a:avLst/>
@@ -14362,7 +15254,7 @@
           </a:extLst>
         </p:spPr>
         <p:txBody>
-          <a:bodyPr lIns="45719" rIns="45719">
+          <a:bodyPr lIns="45718" tIns="45718" rIns="45718" bIns="45718">
             <a:spAutoFit/>
           </a:bodyPr>
           <a:lstStyle>
@@ -14371,6 +15263,10 @@
                 <a:solidFill>
                   <a:srgbClr val="1A1A2E"/>
                 </a:solidFill>
+                <a:latin typeface="+mn-lt"/>
+                <a:ea typeface="+mn-ea"/>
+                <a:cs typeface="+mn-cs"/>
+                <a:sym typeface="Calibri"/>
               </a:defRPr>
             </a:lvl1pPr>
           </a:lstStyle>
@@ -14390,8 +15286,8 @@
         </p:nvSpPr>
         <p:spPr>
           <a:xfrm>
-            <a:off x="4617719" y="3931920"/>
-            <a:ext cx="2926082" cy="248305"/>
+            <a:off x="4617718" y="3931921"/>
+            <a:ext cx="2926083" cy="248303"/>
           </a:xfrm>
           <a:prstGeom prst="rect">
             <a:avLst/>
@@ -14406,7 +15302,7 @@
           </a:extLst>
         </p:spPr>
         <p:txBody>
-          <a:bodyPr lIns="45719" rIns="45719">
+          <a:bodyPr lIns="45718" tIns="45718" rIns="45718" bIns="45718">
             <a:spAutoFit/>
           </a:bodyPr>
           <a:lstStyle>
@@ -14415,6 +15311,10 @@
                 <a:solidFill>
                   <a:srgbClr val="1A1A2E"/>
                 </a:solidFill>
+                <a:latin typeface="+mn-lt"/>
+                <a:ea typeface="+mn-ea"/>
+                <a:cs typeface="+mn-cs"/>
+                <a:sym typeface="Calibri"/>
               </a:defRPr>
             </a:lvl1pPr>
           </a:lstStyle>
@@ -14434,8 +15334,8 @@
         </p:nvSpPr>
         <p:spPr>
           <a:xfrm>
-            <a:off x="4617719" y="4389120"/>
-            <a:ext cx="2926082" cy="248305"/>
+            <a:off x="4617718" y="4389121"/>
+            <a:ext cx="2926083" cy="248303"/>
           </a:xfrm>
           <a:prstGeom prst="rect">
             <a:avLst/>
@@ -14450,7 +15350,7 @@
           </a:extLst>
         </p:spPr>
         <p:txBody>
-          <a:bodyPr lIns="45719" rIns="45719">
+          <a:bodyPr lIns="45718" tIns="45718" rIns="45718" bIns="45718">
             <a:spAutoFit/>
           </a:bodyPr>
           <a:lstStyle>
@@ -14459,6 +15359,10 @@
                 <a:solidFill>
                   <a:srgbClr val="1A1A2E"/>
                 </a:solidFill>
+                <a:latin typeface="+mn-lt"/>
+                <a:ea typeface="+mn-ea"/>
+                <a:cs typeface="+mn-cs"/>
+                <a:sym typeface="Calibri"/>
               </a:defRPr>
             </a:lvl1pPr>
           </a:lstStyle>
@@ -14478,8 +15382,8 @@
         </p:nvSpPr>
         <p:spPr>
           <a:xfrm>
-            <a:off x="4617719" y="4846320"/>
-            <a:ext cx="2926082" cy="248305"/>
+            <a:off x="4617718" y="4846321"/>
+            <a:ext cx="2926083" cy="248303"/>
           </a:xfrm>
           <a:prstGeom prst="rect">
             <a:avLst/>
@@ -14494,7 +15398,7 @@
           </a:extLst>
         </p:spPr>
         <p:txBody>
-          <a:bodyPr lIns="45719" rIns="45719">
+          <a:bodyPr lIns="45718" tIns="45718" rIns="45718" bIns="45718">
             <a:spAutoFit/>
           </a:bodyPr>
           <a:lstStyle>
@@ -14503,6 +15407,10 @@
                 <a:solidFill>
                   <a:srgbClr val="1A1A2E"/>
                 </a:solidFill>
+                <a:latin typeface="+mn-lt"/>
+                <a:ea typeface="+mn-ea"/>
+                <a:cs typeface="+mn-cs"/>
+                <a:sym typeface="Calibri"/>
               </a:defRPr>
             </a:lvl1pPr>
           </a:lstStyle>
@@ -14522,8 +15430,8 @@
         </p:nvSpPr>
         <p:spPr>
           <a:xfrm>
-            <a:off x="8046719" y="1371600"/>
-            <a:ext cx="3383281" cy="4754880"/>
+            <a:off x="8046718" y="1371600"/>
+            <a:ext cx="3383282" cy="4754880"/>
           </a:xfrm>
           <a:prstGeom prst="rect">
             <a:avLst/>
@@ -14543,7 +15451,7 @@
           </a:effectLst>
         </p:spPr>
         <p:txBody>
-          <a:bodyPr lIns="45719" rIns="45719" anchor="ctr"/>
+          <a:bodyPr lIns="45718" tIns="45718" rIns="45718" bIns="45718" anchor="ctr"/>
           <a:lstStyle/>
           <a:p>
             <a:pPr algn="ctr">
@@ -14551,6 +15459,10 @@
                 <a:solidFill>
                   <a:srgbClr val="FFFFFF"/>
                 </a:solidFill>
+                <a:latin typeface="+mn-lt"/>
+                <a:ea typeface="+mn-ea"/>
+                <a:cs typeface="+mn-cs"/>
+                <a:sym typeface="Calibri"/>
               </a:defRPr>
             </a:pPr>
           </a:p>
@@ -14564,8 +15476,8 @@
         </p:nvSpPr>
         <p:spPr>
           <a:xfrm>
-            <a:off x="8046719" y="1371599"/>
-            <a:ext cx="3383281" cy="548642"/>
+            <a:off x="8046718" y="1371599"/>
+            <a:ext cx="3383282" cy="548643"/>
           </a:xfrm>
           <a:prstGeom prst="rect">
             <a:avLst/>
@@ -14585,7 +15497,7 @@
           </a:effectLst>
         </p:spPr>
         <p:txBody>
-          <a:bodyPr lIns="45719" rIns="45719" anchor="ctr"/>
+          <a:bodyPr lIns="45718" tIns="45718" rIns="45718" bIns="45718" anchor="ctr"/>
           <a:lstStyle/>
           <a:p>
             <a:pPr algn="ctr">
@@ -14593,6 +15505,10 @@
                 <a:solidFill>
                   <a:srgbClr val="FFFFFF"/>
                 </a:solidFill>
+                <a:latin typeface="+mn-lt"/>
+                <a:ea typeface="+mn-ea"/>
+                <a:cs typeface="+mn-cs"/>
+                <a:sym typeface="Calibri"/>
               </a:defRPr>
             </a:pPr>
           </a:p>
@@ -14606,8 +15522,8 @@
         </p:nvSpPr>
         <p:spPr>
           <a:xfrm>
-            <a:off x="8183880" y="1506921"/>
-            <a:ext cx="3108961" cy="277998"/>
+            <a:off x="8183880" y="1506922"/>
+            <a:ext cx="3108962" cy="277995"/>
           </a:xfrm>
           <a:prstGeom prst="rect">
             <a:avLst/>
@@ -14622,7 +15538,7 @@
           </a:extLst>
         </p:spPr>
         <p:txBody>
-          <a:bodyPr lIns="45719" rIns="45719">
+          <a:bodyPr lIns="45718" tIns="45718" rIns="45718" bIns="45718">
             <a:spAutoFit/>
           </a:bodyPr>
           <a:lstStyle>
@@ -14631,6 +15547,10 @@
                 <a:solidFill>
                   <a:srgbClr val="FFFFFF"/>
                 </a:solidFill>
+                <a:latin typeface="+mn-lt"/>
+                <a:ea typeface="+mn-ea"/>
+                <a:cs typeface="+mn-cs"/>
+                <a:sym typeface="Calibri"/>
               </a:defRPr>
             </a:lvl1pPr>
           </a:lstStyle>
@@ -14650,8 +15570,8 @@
         </p:nvSpPr>
         <p:spPr>
           <a:xfrm>
-            <a:off x="8275319" y="2103120"/>
-            <a:ext cx="2926082" cy="248305"/>
+            <a:off x="8275318" y="2103121"/>
+            <a:ext cx="2926083" cy="248303"/>
           </a:xfrm>
           <a:prstGeom prst="rect">
             <a:avLst/>
@@ -14666,7 +15586,7 @@
           </a:extLst>
         </p:spPr>
         <p:txBody>
-          <a:bodyPr lIns="45719" rIns="45719">
+          <a:bodyPr lIns="45718" tIns="45718" rIns="45718" bIns="45718">
             <a:spAutoFit/>
           </a:bodyPr>
           <a:lstStyle>
@@ -14675,6 +15595,10 @@
                 <a:solidFill>
                   <a:srgbClr val="1A1A2E"/>
                 </a:solidFill>
+                <a:latin typeface="+mn-lt"/>
+                <a:ea typeface="+mn-ea"/>
+                <a:cs typeface="+mn-cs"/>
+                <a:sym typeface="Calibri"/>
               </a:defRPr>
             </a:lvl1pPr>
           </a:lstStyle>
@@ -14694,8 +15618,8 @@
         </p:nvSpPr>
         <p:spPr>
           <a:xfrm>
-            <a:off x="8275319" y="2560320"/>
-            <a:ext cx="2926082" cy="248305"/>
+            <a:off x="8275318" y="2560321"/>
+            <a:ext cx="2926083" cy="248303"/>
           </a:xfrm>
           <a:prstGeom prst="rect">
             <a:avLst/>
@@ -14710,7 +15634,7 @@
           </a:extLst>
         </p:spPr>
         <p:txBody>
-          <a:bodyPr lIns="45719" rIns="45719">
+          <a:bodyPr lIns="45718" tIns="45718" rIns="45718" bIns="45718">
             <a:spAutoFit/>
           </a:bodyPr>
           <a:lstStyle>
@@ -14719,6 +15643,10 @@
                 <a:solidFill>
                   <a:srgbClr val="1A1A2E"/>
                 </a:solidFill>
+                <a:latin typeface="+mn-lt"/>
+                <a:ea typeface="+mn-ea"/>
+                <a:cs typeface="+mn-cs"/>
+                <a:sym typeface="Calibri"/>
               </a:defRPr>
             </a:lvl1pPr>
           </a:lstStyle>
@@ -14738,8 +15666,8 @@
         </p:nvSpPr>
         <p:spPr>
           <a:xfrm>
-            <a:off x="8275319" y="3017520"/>
-            <a:ext cx="2926082" cy="248305"/>
+            <a:off x="8275318" y="3017521"/>
+            <a:ext cx="2926083" cy="248303"/>
           </a:xfrm>
           <a:prstGeom prst="rect">
             <a:avLst/>
@@ -14754,7 +15682,7 @@
           </a:extLst>
         </p:spPr>
         <p:txBody>
-          <a:bodyPr lIns="45719" rIns="45719">
+          <a:bodyPr lIns="45718" tIns="45718" rIns="45718" bIns="45718">
             <a:spAutoFit/>
           </a:bodyPr>
           <a:lstStyle>
@@ -14763,6 +15691,10 @@
                 <a:solidFill>
                   <a:srgbClr val="1A1A2E"/>
                 </a:solidFill>
+                <a:latin typeface="+mn-lt"/>
+                <a:ea typeface="+mn-ea"/>
+                <a:cs typeface="+mn-cs"/>
+                <a:sym typeface="Calibri"/>
               </a:defRPr>
             </a:lvl1pPr>
           </a:lstStyle>
@@ -14782,8 +15714,8 @@
         </p:nvSpPr>
         <p:spPr>
           <a:xfrm>
-            <a:off x="8275319" y="3474720"/>
-            <a:ext cx="2926082" cy="248305"/>
+            <a:off x="8275318" y="3474721"/>
+            <a:ext cx="2926083" cy="248303"/>
           </a:xfrm>
           <a:prstGeom prst="rect">
             <a:avLst/>
@@ -14798,7 +15730,7 @@
           </a:extLst>
         </p:spPr>
         <p:txBody>
-          <a:bodyPr lIns="45719" rIns="45719">
+          <a:bodyPr lIns="45718" tIns="45718" rIns="45718" bIns="45718">
             <a:spAutoFit/>
           </a:bodyPr>
           <a:lstStyle>
@@ -14807,6 +15739,10 @@
                 <a:solidFill>
                   <a:srgbClr val="1A1A2E"/>
                 </a:solidFill>
+                <a:latin typeface="+mn-lt"/>
+                <a:ea typeface="+mn-ea"/>
+                <a:cs typeface="+mn-cs"/>
+                <a:sym typeface="Calibri"/>
               </a:defRPr>
             </a:lvl1pPr>
           </a:lstStyle>
@@ -14826,8 +15762,8 @@
         </p:nvSpPr>
         <p:spPr>
           <a:xfrm>
-            <a:off x="8275319" y="3931920"/>
-            <a:ext cx="2926082" cy="248305"/>
+            <a:off x="8275318" y="3931921"/>
+            <a:ext cx="2926083" cy="248303"/>
           </a:xfrm>
           <a:prstGeom prst="rect">
             <a:avLst/>
@@ -14842,7 +15778,7 @@
           </a:extLst>
         </p:spPr>
         <p:txBody>
-          <a:bodyPr lIns="45719" rIns="45719">
+          <a:bodyPr lIns="45718" tIns="45718" rIns="45718" bIns="45718">
             <a:spAutoFit/>
           </a:bodyPr>
           <a:lstStyle>
@@ -14851,6 +15787,10 @@
                 <a:solidFill>
                   <a:srgbClr val="1A1A2E"/>
                 </a:solidFill>
+                <a:latin typeface="+mn-lt"/>
+                <a:ea typeface="+mn-ea"/>
+                <a:cs typeface="+mn-cs"/>
+                <a:sym typeface="Calibri"/>
               </a:defRPr>
             </a:lvl1pPr>
           </a:lstStyle>
@@ -14870,8 +15810,8 @@
         </p:nvSpPr>
         <p:spPr>
           <a:xfrm>
-            <a:off x="8275319" y="4389120"/>
-            <a:ext cx="2926082" cy="248305"/>
+            <a:off x="8275318" y="4389121"/>
+            <a:ext cx="2926083" cy="248303"/>
           </a:xfrm>
           <a:prstGeom prst="rect">
             <a:avLst/>
@@ -14886,7 +15826,7 @@
           </a:extLst>
         </p:spPr>
         <p:txBody>
-          <a:bodyPr lIns="45719" rIns="45719">
+          <a:bodyPr lIns="45718" tIns="45718" rIns="45718" bIns="45718">
             <a:spAutoFit/>
           </a:bodyPr>
           <a:lstStyle>
@@ -14895,6 +15835,10 @@
                 <a:solidFill>
                   <a:srgbClr val="1A1A2E"/>
                 </a:solidFill>
+                <a:latin typeface="+mn-lt"/>
+                <a:ea typeface="+mn-ea"/>
+                <a:cs typeface="+mn-cs"/>
+                <a:sym typeface="Calibri"/>
               </a:defRPr>
             </a:lvl1pPr>
           </a:lstStyle>
@@ -14914,8 +15858,8 @@
         </p:nvSpPr>
         <p:spPr>
           <a:xfrm>
-            <a:off x="8275319" y="4846320"/>
-            <a:ext cx="2926082" cy="248305"/>
+            <a:off x="8275318" y="4846321"/>
+            <a:ext cx="2926083" cy="248303"/>
           </a:xfrm>
           <a:prstGeom prst="rect">
             <a:avLst/>
@@ -14930,7 +15874,7 @@
           </a:extLst>
         </p:spPr>
         <p:txBody>
-          <a:bodyPr lIns="45719" rIns="45719">
+          <a:bodyPr lIns="45718" tIns="45718" rIns="45718" bIns="45718">
             <a:spAutoFit/>
           </a:bodyPr>
           <a:lstStyle>
@@ -14939,6 +15883,10 @@
                 <a:solidFill>
                   <a:srgbClr val="1A1A2E"/>
                 </a:solidFill>
+                <a:latin typeface="+mn-lt"/>
+                <a:ea typeface="+mn-ea"/>
+                <a:cs typeface="+mn-cs"/>
+                <a:sym typeface="Calibri"/>
               </a:defRPr>
             </a:lvl1pPr>
           </a:lstStyle>
@@ -14959,7 +15907,7 @@
         <p:spPr>
           <a:xfrm>
             <a:off x="731519" y="6309359"/>
-            <a:ext cx="10698482" cy="54865"/>
+            <a:ext cx="10698482" cy="54866"/>
           </a:xfrm>
           <a:prstGeom prst="rect">
             <a:avLst/>
@@ -14979,7 +15927,7 @@
           </a:effectLst>
         </p:spPr>
         <p:txBody>
-          <a:bodyPr lIns="45719" rIns="45719" anchor="ctr"/>
+          <a:bodyPr lIns="45718" tIns="45718" rIns="45718" bIns="45718" anchor="ctr"/>
           <a:lstStyle/>
           <a:p>
             <a:pPr algn="ctr">
@@ -14987,6 +15935,10 @@
                 <a:solidFill>
                   <a:srgbClr val="FFFFFF"/>
                 </a:solidFill>
+                <a:latin typeface="+mn-lt"/>
+                <a:ea typeface="+mn-ea"/>
+                <a:cs typeface="+mn-cs"/>
+                <a:sym typeface="Calibri"/>
               </a:defRPr>
             </a:pPr>
           </a:p>
@@ -15026,8 +15978,8 @@
         </p:nvSpPr>
         <p:spPr>
           <a:xfrm>
-            <a:off x="-1" y="-1"/>
-            <a:ext cx="12191697" cy="73154"/>
+            <a:off x="-1" y="-2"/>
+            <a:ext cx="12191697" cy="73156"/>
           </a:xfrm>
           <a:prstGeom prst="rect">
             <a:avLst/>
@@ -15047,7 +15999,7 @@
           </a:effectLst>
         </p:spPr>
         <p:txBody>
-          <a:bodyPr lIns="45719" rIns="45719" anchor="ctr"/>
+          <a:bodyPr lIns="45718" tIns="45718" rIns="45718" bIns="45718" anchor="ctr"/>
           <a:lstStyle/>
           <a:p>
             <a:pPr algn="ctr">
@@ -15055,6 +16007,10 @@
                 <a:solidFill>
                   <a:srgbClr val="FFFFFF"/>
                 </a:solidFill>
+                <a:latin typeface="+mn-lt"/>
+                <a:ea typeface="+mn-ea"/>
+                <a:cs typeface="+mn-cs"/>
+                <a:sym typeface="Calibri"/>
               </a:defRPr>
             </a:pPr>
           </a:p>
@@ -15069,7 +16025,7 @@
         <p:spPr>
           <a:xfrm>
             <a:off x="777239" y="457199"/>
-            <a:ext cx="9052561" cy="542242"/>
+            <a:ext cx="9052561" cy="542240"/>
           </a:xfrm>
           <a:prstGeom prst="rect">
             <a:avLst/>
@@ -15084,7 +16040,7 @@
           </a:extLst>
         </p:spPr>
         <p:txBody>
-          <a:bodyPr lIns="45719" rIns="45719">
+          <a:bodyPr lIns="45718" tIns="45718" rIns="45718" bIns="45718">
             <a:spAutoFit/>
           </a:bodyPr>
           <a:lstStyle>
@@ -15093,6 +16049,10 @@
                 <a:solidFill>
                   <a:srgbClr val="1E2761"/>
                 </a:solidFill>
+                <a:latin typeface="+mn-lt"/>
+                <a:ea typeface="+mn-ea"/>
+                <a:cs typeface="+mn-cs"/>
+                <a:sym typeface="Calibri"/>
               </a:defRPr>
             </a:lvl1pPr>
           </a:lstStyle>
@@ -15113,7 +16073,7 @@
         <p:spPr>
           <a:xfrm>
             <a:off x="731520" y="1280160"/>
-            <a:ext cx="3383280" cy="1828801"/>
+            <a:ext cx="3383280" cy="1828802"/>
           </a:xfrm>
           <a:prstGeom prst="rect">
             <a:avLst/>
@@ -15133,7 +16093,7 @@
           </a:effectLst>
         </p:spPr>
         <p:txBody>
-          <a:bodyPr lIns="45719" rIns="45719" anchor="ctr"/>
+          <a:bodyPr lIns="45718" tIns="45718" rIns="45718" bIns="45718" anchor="ctr"/>
           <a:lstStyle/>
           <a:p>
             <a:pPr algn="ctr">
@@ -15141,6 +16101,10 @@
                 <a:solidFill>
                   <a:srgbClr val="FFFFFF"/>
                 </a:solidFill>
+                <a:latin typeface="+mn-lt"/>
+                <a:ea typeface="+mn-ea"/>
+                <a:cs typeface="+mn-cs"/>
+                <a:sym typeface="Calibri"/>
               </a:defRPr>
             </a:pPr>
           </a:p>
@@ -15154,8 +16118,8 @@
         </p:nvSpPr>
         <p:spPr>
           <a:xfrm>
-            <a:off x="868679" y="1453187"/>
-            <a:ext cx="3108961" cy="280800"/>
+            <a:off x="868678" y="1453187"/>
+            <a:ext cx="3108962" cy="280798"/>
           </a:xfrm>
           <a:prstGeom prst="rect">
             <a:avLst/>
@@ -15170,7 +16134,7 @@
           </a:extLst>
         </p:spPr>
         <p:txBody>
-          <a:bodyPr lIns="45719" rIns="45719">
+          <a:bodyPr lIns="45718" tIns="45718" rIns="45718" bIns="45718">
             <a:spAutoFit/>
           </a:bodyPr>
           <a:lstStyle>
@@ -15179,6 +16143,10 @@
                 <a:solidFill>
                   <a:srgbClr val="6B7B8D"/>
                 </a:solidFill>
+                <a:latin typeface="+mn-lt"/>
+                <a:ea typeface="+mn-ea"/>
+                <a:cs typeface="+mn-cs"/>
+                <a:sym typeface="Calibri"/>
               </a:defRPr>
             </a:lvl1pPr>
           </a:lstStyle>
@@ -15198,8 +16166,8 @@
         </p:nvSpPr>
         <p:spPr>
           <a:xfrm>
-            <a:off x="868679" y="1773227"/>
-            <a:ext cx="3108961" cy="850365"/>
+            <a:off x="868678" y="1773228"/>
+            <a:ext cx="3108962" cy="850363"/>
           </a:xfrm>
           <a:prstGeom prst="rect">
             <a:avLst/>
@@ -15214,7 +16182,7 @@
           </a:extLst>
         </p:spPr>
         <p:txBody>
-          <a:bodyPr lIns="45719" rIns="45719">
+          <a:bodyPr lIns="45718" tIns="45718" rIns="45718" bIns="45718">
             <a:spAutoFit/>
           </a:bodyPr>
           <a:lstStyle>
@@ -15223,6 +16191,10 @@
                 <a:solidFill>
                   <a:srgbClr val="2ECC71"/>
                 </a:solidFill>
+                <a:latin typeface="+mn-lt"/>
+                <a:ea typeface="+mn-ea"/>
+                <a:cs typeface="+mn-cs"/>
+                <a:sym typeface="Calibri"/>
               </a:defRPr>
             </a:lvl1pPr>
           </a:lstStyle>
@@ -15242,8 +16214,8 @@
         </p:nvSpPr>
         <p:spPr>
           <a:xfrm>
-            <a:off x="868679" y="2687627"/>
-            <a:ext cx="3108961" cy="248306"/>
+            <a:off x="868678" y="2687628"/>
+            <a:ext cx="3108962" cy="248303"/>
           </a:xfrm>
           <a:prstGeom prst="rect">
             <a:avLst/>
@@ -15258,7 +16230,7 @@
           </a:extLst>
         </p:spPr>
         <p:txBody>
-          <a:bodyPr lIns="45719" rIns="45719">
+          <a:bodyPr lIns="45718" tIns="45718" rIns="45718" bIns="45718">
             <a:spAutoFit/>
           </a:bodyPr>
           <a:lstStyle>
@@ -15267,6 +16239,10 @@
                 <a:solidFill>
                   <a:srgbClr val="6B7B8D"/>
                 </a:solidFill>
+                <a:latin typeface="+mn-lt"/>
+                <a:ea typeface="+mn-ea"/>
+                <a:cs typeface="+mn-cs"/>
+                <a:sym typeface="Calibri"/>
               </a:defRPr>
             </a:lvl1pPr>
           </a:lstStyle>
@@ -15287,7 +16263,7 @@
         <p:spPr>
           <a:xfrm>
             <a:off x="4389120" y="1280160"/>
-            <a:ext cx="3383281" cy="1828801"/>
+            <a:ext cx="3383282" cy="1828802"/>
           </a:xfrm>
           <a:prstGeom prst="rect">
             <a:avLst/>
@@ -15307,7 +16283,7 @@
           </a:effectLst>
         </p:spPr>
         <p:txBody>
-          <a:bodyPr lIns="45719" rIns="45719" anchor="ctr"/>
+          <a:bodyPr lIns="45718" tIns="45718" rIns="45718" bIns="45718" anchor="ctr"/>
           <a:lstStyle/>
           <a:p>
             <a:pPr algn="ctr">
@@ -15315,6 +16291,10 @@
                 <a:solidFill>
                   <a:srgbClr val="FFFFFF"/>
                 </a:solidFill>
+                <a:latin typeface="+mn-lt"/>
+                <a:ea typeface="+mn-ea"/>
+                <a:cs typeface="+mn-cs"/>
+                <a:sym typeface="Calibri"/>
               </a:defRPr>
             </a:pPr>
           </a:p>
@@ -15329,7 +16309,7 @@
         <p:spPr>
           <a:xfrm>
             <a:off x="4526279" y="1453187"/>
-            <a:ext cx="3108961" cy="280800"/>
+            <a:ext cx="3108962" cy="280798"/>
           </a:xfrm>
           <a:prstGeom prst="rect">
             <a:avLst/>
@@ -15344,7 +16324,7 @@
           </a:extLst>
         </p:spPr>
         <p:txBody>
-          <a:bodyPr lIns="45719" rIns="45719">
+          <a:bodyPr lIns="45718" tIns="45718" rIns="45718" bIns="45718">
             <a:spAutoFit/>
           </a:bodyPr>
           <a:lstStyle>
@@ -15353,6 +16333,10 @@
                 <a:solidFill>
                   <a:srgbClr val="6B7B8D"/>
                 </a:solidFill>
+                <a:latin typeface="+mn-lt"/>
+                <a:ea typeface="+mn-ea"/>
+                <a:cs typeface="+mn-cs"/>
+                <a:sym typeface="Calibri"/>
               </a:defRPr>
             </a:lvl1pPr>
           </a:lstStyle>
@@ -15372,8 +16356,8 @@
         </p:nvSpPr>
         <p:spPr>
           <a:xfrm>
-            <a:off x="4526279" y="1773227"/>
-            <a:ext cx="3108961" cy="850365"/>
+            <a:off x="4526279" y="1773228"/>
+            <a:ext cx="3108962" cy="850363"/>
           </a:xfrm>
           <a:prstGeom prst="rect">
             <a:avLst/>
@@ -15388,7 +16372,7 @@
           </a:extLst>
         </p:spPr>
         <p:txBody>
-          <a:bodyPr lIns="45719" rIns="45719">
+          <a:bodyPr lIns="45718" tIns="45718" rIns="45718" bIns="45718">
             <a:spAutoFit/>
           </a:bodyPr>
           <a:lstStyle>
@@ -15397,6 +16381,10 @@
                 <a:solidFill>
                   <a:srgbClr val="E74C3C"/>
                 </a:solidFill>
+                <a:latin typeface="+mn-lt"/>
+                <a:ea typeface="+mn-ea"/>
+                <a:cs typeface="+mn-cs"/>
+                <a:sym typeface="Calibri"/>
               </a:defRPr>
             </a:lvl1pPr>
           </a:lstStyle>
@@ -15416,8 +16404,8 @@
         </p:nvSpPr>
         <p:spPr>
           <a:xfrm>
-            <a:off x="4526279" y="2687627"/>
-            <a:ext cx="3108961" cy="248306"/>
+            <a:off x="4526279" y="2687628"/>
+            <a:ext cx="3108962" cy="248303"/>
           </a:xfrm>
           <a:prstGeom prst="rect">
             <a:avLst/>
@@ -15432,7 +16420,7 @@
           </a:extLst>
         </p:spPr>
         <p:txBody>
-          <a:bodyPr lIns="45719" rIns="45719">
+          <a:bodyPr lIns="45718" tIns="45718" rIns="45718" bIns="45718">
             <a:spAutoFit/>
           </a:bodyPr>
           <a:lstStyle>
@@ -15441,6 +16429,10 @@
                 <a:solidFill>
                   <a:srgbClr val="6B7B8D"/>
                 </a:solidFill>
+                <a:latin typeface="+mn-lt"/>
+                <a:ea typeface="+mn-ea"/>
+                <a:cs typeface="+mn-cs"/>
+                <a:sym typeface="Calibri"/>
               </a:defRPr>
             </a:lvl1pPr>
           </a:lstStyle>
@@ -15460,8 +16452,8 @@
         </p:nvSpPr>
         <p:spPr>
           <a:xfrm>
-            <a:off x="8046719" y="1280160"/>
-            <a:ext cx="3383281" cy="1828801"/>
+            <a:off x="8046718" y="1280160"/>
+            <a:ext cx="3383282" cy="1828802"/>
           </a:xfrm>
           <a:prstGeom prst="rect">
             <a:avLst/>
@@ -15481,7 +16473,7 @@
           </a:effectLst>
         </p:spPr>
         <p:txBody>
-          <a:bodyPr lIns="45719" rIns="45719" anchor="ctr"/>
+          <a:bodyPr lIns="45718" tIns="45718" rIns="45718" bIns="45718" anchor="ctr"/>
           <a:lstStyle/>
           <a:p>
             <a:pPr algn="ctr">
@@ -15489,6 +16481,10 @@
                 <a:solidFill>
                   <a:srgbClr val="FFFFFF"/>
                 </a:solidFill>
+                <a:latin typeface="+mn-lt"/>
+                <a:ea typeface="+mn-ea"/>
+                <a:cs typeface="+mn-cs"/>
+                <a:sym typeface="Calibri"/>
               </a:defRPr>
             </a:pPr>
           </a:p>
@@ -15502,8 +16498,8 @@
         </p:nvSpPr>
         <p:spPr>
           <a:xfrm>
-            <a:off x="8183879" y="1453187"/>
-            <a:ext cx="3108961" cy="280800"/>
+            <a:off x="8183878" y="1453187"/>
+            <a:ext cx="3108962" cy="280798"/>
           </a:xfrm>
           <a:prstGeom prst="rect">
             <a:avLst/>
@@ -15518,7 +16514,7 @@
           </a:extLst>
         </p:spPr>
         <p:txBody>
-          <a:bodyPr lIns="45719" rIns="45719">
+          <a:bodyPr lIns="45718" tIns="45718" rIns="45718" bIns="45718">
             <a:spAutoFit/>
           </a:bodyPr>
           <a:lstStyle>
@@ -15527,6 +16523,10 @@
                 <a:solidFill>
                   <a:srgbClr val="6B7B8D"/>
                 </a:solidFill>
+                <a:latin typeface="+mn-lt"/>
+                <a:ea typeface="+mn-ea"/>
+                <a:cs typeface="+mn-cs"/>
+                <a:sym typeface="Calibri"/>
               </a:defRPr>
             </a:lvl1pPr>
           </a:lstStyle>
@@ -15546,8 +16546,8 @@
         </p:nvSpPr>
         <p:spPr>
           <a:xfrm>
-            <a:off x="8183879" y="1773227"/>
-            <a:ext cx="3108961" cy="850365"/>
+            <a:off x="8183878" y="1773228"/>
+            <a:ext cx="3108962" cy="850363"/>
           </a:xfrm>
           <a:prstGeom prst="rect">
             <a:avLst/>
@@ -15562,7 +16562,7 @@
           </a:extLst>
         </p:spPr>
         <p:txBody>
-          <a:bodyPr lIns="45719" rIns="45719">
+          <a:bodyPr lIns="45718" tIns="45718" rIns="45718" bIns="45718">
             <a:spAutoFit/>
           </a:bodyPr>
           <a:lstStyle>
@@ -15571,6 +16571,10 @@
                 <a:solidFill>
                   <a:srgbClr val="2ECC71"/>
                 </a:solidFill>
+                <a:latin typeface="+mn-lt"/>
+                <a:ea typeface="+mn-ea"/>
+                <a:cs typeface="+mn-cs"/>
+                <a:sym typeface="Calibri"/>
               </a:defRPr>
             </a:lvl1pPr>
           </a:lstStyle>
@@ -15590,8 +16594,8 @@
         </p:nvSpPr>
         <p:spPr>
           <a:xfrm>
-            <a:off x="8183879" y="2687627"/>
-            <a:ext cx="3108961" cy="248306"/>
+            <a:off x="8183878" y="2687628"/>
+            <a:ext cx="3108962" cy="248303"/>
           </a:xfrm>
           <a:prstGeom prst="rect">
             <a:avLst/>
@@ -15606,7 +16610,7 @@
           </a:extLst>
         </p:spPr>
         <p:txBody>
-          <a:bodyPr lIns="45719" rIns="45719">
+          <a:bodyPr lIns="45718" tIns="45718" rIns="45718" bIns="45718">
             <a:spAutoFit/>
           </a:bodyPr>
           <a:lstStyle>
@@ -15615,6 +16619,10 @@
                 <a:solidFill>
                   <a:srgbClr val="6B7B8D"/>
                 </a:solidFill>
+                <a:latin typeface="+mn-lt"/>
+                <a:ea typeface="+mn-ea"/>
+                <a:cs typeface="+mn-cs"/>
+                <a:sym typeface="Calibri"/>
               </a:defRPr>
             </a:lvl1pPr>
           </a:lstStyle>
@@ -15635,7 +16643,7 @@
         <p:spPr>
           <a:xfrm>
             <a:off x="731519" y="3200399"/>
-            <a:ext cx="10698482" cy="548642"/>
+            <a:ext cx="10698482" cy="548643"/>
           </a:xfrm>
           <a:prstGeom prst="rect">
             <a:avLst/>
@@ -15655,7 +16663,7 @@
           </a:effectLst>
         </p:spPr>
         <p:txBody>
-          <a:bodyPr lIns="45719" rIns="45719" anchor="ctr"/>
+          <a:bodyPr lIns="45718" tIns="45718" rIns="45718" bIns="45718" anchor="ctr"/>
           <a:lstStyle/>
           <a:p>
             <a:pPr algn="ctr">
@@ -15663,6 +16671,10 @@
                 <a:solidFill>
                   <a:srgbClr val="FFFFFF"/>
                 </a:solidFill>
+                <a:latin typeface="+mn-lt"/>
+                <a:ea typeface="+mn-ea"/>
+                <a:cs typeface="+mn-cs"/>
+                <a:sym typeface="Calibri"/>
               </a:defRPr>
             </a:pPr>
           </a:p>
@@ -15676,8 +16688,8 @@
         </p:nvSpPr>
         <p:spPr>
           <a:xfrm>
-            <a:off x="1051559" y="3288600"/>
-            <a:ext cx="10058402" cy="280800"/>
+            <a:off x="1051558" y="3288601"/>
+            <a:ext cx="10058404" cy="280798"/>
           </a:xfrm>
           <a:prstGeom prst="rect">
             <a:avLst/>
@@ -15692,7 +16704,7 @@
           </a:extLst>
         </p:spPr>
         <p:txBody>
-          <a:bodyPr lIns="45719" rIns="45719">
+          <a:bodyPr lIns="45718" tIns="45718" rIns="45718" bIns="45718">
             <a:spAutoFit/>
           </a:bodyPr>
           <a:lstStyle>
@@ -15701,6 +16713,10 @@
                 <a:solidFill>
                   <a:srgbClr val="FFFFFF"/>
                 </a:solidFill>
+                <a:latin typeface="+mn-lt"/>
+                <a:ea typeface="+mn-ea"/>
+                <a:cs typeface="+mn-cs"/>
+                <a:sym typeface="Calibri"/>
               </a:defRPr>
             </a:lvl1pPr>
           </a:lstStyle>
@@ -15720,8 +16736,8 @@
         </p:nvSpPr>
         <p:spPr>
           <a:xfrm>
-            <a:off x="777239" y="3931920"/>
-            <a:ext cx="9052561" cy="340182"/>
+            <a:off x="777239" y="3931921"/>
+            <a:ext cx="9052561" cy="340180"/>
           </a:xfrm>
           <a:prstGeom prst="rect">
             <a:avLst/>
@@ -15736,7 +16752,7 @@
           </a:extLst>
         </p:spPr>
         <p:txBody>
-          <a:bodyPr lIns="45719" rIns="45719">
+          <a:bodyPr lIns="45718" tIns="45718" rIns="45718" bIns="45718">
             <a:spAutoFit/>
           </a:bodyPr>
           <a:lstStyle>
@@ -15745,6 +16761,10 @@
                 <a:solidFill>
                   <a:srgbClr val="1E2761"/>
                 </a:solidFill>
+                <a:latin typeface="+mn-lt"/>
+                <a:ea typeface="+mn-ea"/>
+                <a:cs typeface="+mn-cs"/>
+                <a:sym typeface="Calibri"/>
               </a:defRPr>
             </a:lvl1pPr>
           </a:lstStyle>
@@ -15764,7 +16784,7 @@
         </p:nvGraphicFramePr>
         <p:xfrm>
           <a:off x="731519" y="4480559"/>
-          <a:ext cx="10698482" cy="2103121"/>
+          <a:ext cx="10698482" cy="2103122"/>
         </p:xfrm>
         <a:graphic xmlns:a="http://schemas.openxmlformats.org/drawingml/2006/main">
           <a:graphicData uri="http://schemas.openxmlformats.org/drawingml/2006/table">
@@ -15773,11 +16793,12 @@
                 <a:tableStyleId>{4C3C2611-4C71-4FC5-86AE-919BDF0F9419}</a:tableStyleId>
               </a:tblPr>
               <a:tblGrid>
-                <a:gridCol w="2139696"/>
-                <a:gridCol w="2139696"/>
-                <a:gridCol w="2139696"/>
-                <a:gridCol w="2139696"/>
-                <a:gridCol w="2139696"/>
+                <a:gridCol w="1343917"/>
+                <a:gridCol w="1826804"/>
+                <a:gridCol w="1825164"/>
+                <a:gridCol w="1922387"/>
+                <a:gridCol w="1780861"/>
+                <a:gridCol w="1964958"/>
               </a:tblGrid>
               <a:tr h="420624">
                 <a:tc>
@@ -15854,7 +16875,7 @@
                             <a:srgbClr val="FFFFFF"/>
                           </a:solidFill>
                         </a:rPr>
-                        <a:t>Mod. 2 (mascara)</a:t>
+                        <a:t>Mod. 2 (máscara)</a:t>
                       </a:r>
                     </a:p>
                   </a:txBody>
@@ -15882,7 +16903,7 @@
                             <a:srgbClr val="FFFFFF"/>
                           </a:solidFill>
                         </a:rPr>
-                        <a:t>Mod. 3 (hibrido)</a:t>
+                        <a:t>Mod. 3 (híbrido)</a:t>
                       </a:r>
                     </a:p>
                   </a:txBody>
@@ -15911,6 +16932,34 @@
                           </a:solidFill>
                         </a:rPr>
                         <a:t>Delta 1 vs 2</a:t>
+                      </a:r>
+                    </a:p>
+                  </a:txBody>
+                  <a:tcPr marL="45720" marR="45720" marT="45720" marB="45720" anchor="t" anchorCtr="0" horzOverflow="overflow">
+                    <a:solidFill>
+                      <a:srgbClr val="1E2761"/>
+                    </a:solidFill>
+                  </a:tcPr>
+                </a:tc>
+                <a:tc>
+                  <a:txBody>
+                    <a:bodyPr/>
+                    <a:lstStyle/>
+                    <a:p>
+                      <a:pPr algn="ctr">
+                        <a:defRPr b="0" sz="1800">
+                          <a:solidFill>
+                            <a:srgbClr val="000000"/>
+                          </a:solidFill>
+                        </a:defRPr>
+                      </a:pPr>
+                      <a:r>
+                        <a:rPr b="1" sz="1200">
+                          <a:solidFill>
+                            <a:srgbClr val="FFFFFF"/>
+                          </a:solidFill>
+                        </a:rPr>
+                        <a:t>Delta 1 vs 3</a:t>
                       </a:r>
                     </a:p>
                   </a:txBody>
@@ -16042,6 +17091,30 @@
                     </a:solidFill>
                   </a:tcPr>
                 </a:tc>
+                <a:tc>
+                  <a:txBody>
+                    <a:bodyPr/>
+                    <a:lstStyle/>
+                    <a:p>
+                      <a:pPr algn="ctr">
+                        <a:defRPr sz="1800"/>
+                      </a:pPr>
+                      <a:r>
+                        <a:rPr b="1" sz="1300">
+                          <a:solidFill>
+                            <a:srgbClr val="E74C3C"/>
+                          </a:solidFill>
+                        </a:rPr>
+                        <a:t>-0.01</a:t>
+                      </a:r>
+                    </a:p>
+                  </a:txBody>
+                  <a:tcPr marL="45720" marR="45720" marT="45720" marB="45720" anchor="t" anchorCtr="0" horzOverflow="overflow">
+                    <a:solidFill>
+                      <a:srgbClr val="F5F5F5"/>
+                    </a:solidFill>
+                  </a:tcPr>
+                </a:tc>
               </a:tr>
               <a:tr h="420624">
                 <a:tc>
@@ -16155,6 +17228,30 @@
                           </a:solidFill>
                         </a:rPr>
                         <a:t>-0.16</a:t>
+                      </a:r>
+                    </a:p>
+                  </a:txBody>
+                  <a:tcPr marL="45720" marR="45720" marT="45720" marB="45720" anchor="t" anchorCtr="0" horzOverflow="overflow">
+                    <a:solidFill>
+                      <a:srgbClr val="FFFFFF"/>
+                    </a:solidFill>
+                  </a:tcPr>
+                </a:tc>
+                <a:tc>
+                  <a:txBody>
+                    <a:bodyPr/>
+                    <a:lstStyle/>
+                    <a:p>
+                      <a:pPr algn="ctr">
+                        <a:defRPr sz="1800"/>
+                      </a:pPr>
+                      <a:r>
+                        <a:rPr b="1" sz="1300">
+                          <a:solidFill>
+                            <a:srgbClr val="E74C3C"/>
+                          </a:solidFill>
+                        </a:rPr>
+                        <a:t>-0.01</a:t>
                       </a:r>
                     </a:p>
                   </a:txBody>
@@ -16286,6 +17383,30 @@
                     </a:solidFill>
                   </a:tcPr>
                 </a:tc>
+                <a:tc>
+                  <a:txBody>
+                    <a:bodyPr/>
+                    <a:lstStyle/>
+                    <a:p>
+                      <a:pPr algn="ctr">
+                        <a:defRPr sz="1800"/>
+                      </a:pPr>
+                      <a:r>
+                        <a:rPr b="1" sz="1300">
+                          <a:solidFill>
+                            <a:srgbClr val="E74C3C"/>
+                          </a:solidFill>
+                        </a:rPr>
+                        <a:t>0</a:t>
+                      </a:r>
+                    </a:p>
+                  </a:txBody>
+                  <a:tcPr marL="45720" marR="45720" marT="45720" marB="45720" anchor="t" anchorCtr="0" horzOverflow="overflow">
+                    <a:solidFill>
+                      <a:srgbClr val="F5F5F5"/>
+                    </a:solidFill>
+                  </a:tcPr>
+                </a:tc>
               </a:tr>
               <a:tr h="420624">
                 <a:tc>
@@ -16408,6 +17529,30 @@
                     </a:solidFill>
                   </a:tcPr>
                 </a:tc>
+                <a:tc>
+                  <a:txBody>
+                    <a:bodyPr/>
+                    <a:lstStyle/>
+                    <a:p>
+                      <a:pPr algn="ctr">
+                        <a:defRPr sz="1800"/>
+                      </a:pPr>
+                      <a:r>
+                        <a:rPr b="1" sz="1300">
+                          <a:solidFill>
+                            <a:srgbClr val="E74C3C"/>
+                          </a:solidFill>
+                        </a:rPr>
+                        <a:t>-0.01</a:t>
+                      </a:r>
+                    </a:p>
+                  </a:txBody>
+                  <a:tcPr marL="45720" marR="45720" marT="45720" marB="45720" anchor="t" anchorCtr="0" horzOverflow="overflow">
+                    <a:solidFill>
+                      <a:srgbClr val="FFFFFF"/>
+                    </a:solidFill>
+                  </a:tcPr>
+                </a:tc>
               </a:tr>
             </a:tbl>
           </a:graphicData>
@@ -16465,14 +17610,14 @@
     </a:clrScheme>
     <a:fontScheme name="Office Theme">
       <a:majorFont>
+        <a:latin typeface="Helvetica"/>
+        <a:ea typeface="Helvetica"/>
+        <a:cs typeface="Helvetica"/>
+      </a:majorFont>
+      <a:minorFont>
         <a:latin typeface="Calibri"/>
         <a:ea typeface="Calibri"/>
         <a:cs typeface="Calibri"/>
-      </a:majorFont>
-      <a:minorFont>
-        <a:latin typeface="Helvetica"/>
-        <a:ea typeface="Helvetica"/>
-        <a:cs typeface="Helvetica"/>
       </a:minorFont>
     </a:fontScheme>
     <a:fmtScheme name="Office Theme">
@@ -16567,9 +17712,9 @@
         </a:effectStyle>
         <a:effectStyle>
           <a:effectLst>
-            <a:outerShdw sx="100000" sy="100000" kx="0" ky="0" algn="b" rotWithShape="0" blurRad="38100" dist="20000" dir="5400000">
+            <a:outerShdw sx="100000" sy="100000" kx="0" ky="0" algn="b" rotWithShape="0" blurRad="38100" dist="23000" dir="5400000">
               <a:srgbClr val="000000">
-                <a:alpha val="38000"/>
+                <a:alpha val="35000"/>
               </a:srgbClr>
             </a:outerShdw>
           </a:effectLst>
@@ -16649,7 +17794,7 @@
         </a:effectLst>
         <a:sp3d/>
       </a:spPr>
-      <a:bodyPr rot="0" spcFirstLastPara="1" vertOverflow="overflow" horzOverflow="overflow" vert="horz" wrap="square" lIns="45719" tIns="45719" rIns="45719" bIns="45719" numCol="1" spcCol="38100" rtlCol="0" anchor="ctr" upright="0">
+      <a:bodyPr rot="0" spcFirstLastPara="1" vertOverflow="overflow" horzOverflow="overflow" vert="horz" wrap="square" lIns="45718" tIns="45718" rIns="45718" bIns="45718" numCol="1" spcCol="38100" rtlCol="0" anchor="ctr" upright="0">
         <a:spAutoFit/>
       </a:bodyPr>
       <a:lstStyle>
@@ -16680,7 +17825,7 @@
             <a:latin typeface="+mj-lt"/>
             <a:ea typeface="+mj-ea"/>
             <a:cs typeface="+mj-cs"/>
-            <a:sym typeface="Calibri"/>
+            <a:sym typeface="Helvetica"/>
           </a:defRPr>
         </a:defPPr>
         <a:lvl1pPr marL="0" marR="0" indent="0" algn="l" defTabSz="914400" rtl="0" fontAlgn="auto" latinLnBrk="1" hangingPunct="0">
@@ -16936,9 +18081,9 @@
           <a:round/>
         </a:ln>
         <a:effectLst>
-          <a:outerShdw sx="100000" sy="100000" kx="0" ky="0" algn="b" rotWithShape="0" blurRad="38100" dist="20000" dir="5400000">
+          <a:outerShdw sx="100000" sy="100000" kx="0" ky="0" algn="b" rotWithShape="0" blurRad="38100" dist="23000" dir="5400000">
             <a:srgbClr val="000000">
-              <a:alpha val="38000"/>
+              <a:alpha val="35000"/>
             </a:srgbClr>
           </a:outerShdw>
         </a:effectLst>
@@ -17226,7 +18371,7 @@
         <a:effectLst/>
         <a:sp3d/>
       </a:spPr>
-      <a:bodyPr rot="0" spcFirstLastPara="1" vertOverflow="overflow" horzOverflow="overflow" vert="horz" wrap="square" lIns="45719" tIns="45719" rIns="45719" bIns="45719" numCol="1" spcCol="38100" rtlCol="0" anchor="t" upright="0">
+      <a:bodyPr rot="0" spcFirstLastPara="1" vertOverflow="overflow" horzOverflow="overflow" vert="horz" wrap="square" lIns="45718" tIns="45718" rIns="45718" bIns="45718" numCol="1" spcCol="38100" rtlCol="0" anchor="t" upright="0">
         <a:spAutoFit/>
       </a:bodyPr>
       <a:lstStyle>
@@ -17257,7 +18402,7 @@
             <a:latin typeface="+mj-lt"/>
             <a:ea typeface="+mj-ea"/>
             <a:cs typeface="+mj-cs"/>
-            <a:sym typeface="Calibri"/>
+            <a:sym typeface="Helvetica"/>
           </a:defRPr>
         </a:defPPr>
         <a:lvl1pPr marL="0" marR="0" indent="0" algn="l" defTabSz="914400" rtl="0" fontAlgn="auto" latinLnBrk="1" hangingPunct="0">
@@ -17549,14 +18694,14 @@
     </a:clrScheme>
     <a:fontScheme name="Office Theme">
       <a:majorFont>
+        <a:latin typeface="Helvetica"/>
+        <a:ea typeface="Helvetica"/>
+        <a:cs typeface="Helvetica"/>
+      </a:majorFont>
+      <a:minorFont>
         <a:latin typeface="Calibri"/>
         <a:ea typeface="Calibri"/>
         <a:cs typeface="Calibri"/>
-      </a:majorFont>
-      <a:minorFont>
-        <a:latin typeface="Helvetica"/>
-        <a:ea typeface="Helvetica"/>
-        <a:cs typeface="Helvetica"/>
       </a:minorFont>
     </a:fontScheme>
     <a:fmtScheme name="Office Theme">
@@ -17651,9 +18796,9 @@
         </a:effectStyle>
         <a:effectStyle>
           <a:effectLst>
-            <a:outerShdw sx="100000" sy="100000" kx="0" ky="0" algn="b" rotWithShape="0" blurRad="38100" dist="20000" dir="5400000">
+            <a:outerShdw sx="100000" sy="100000" kx="0" ky="0" algn="b" rotWithShape="0" blurRad="38100" dist="23000" dir="5400000">
               <a:srgbClr val="000000">
-                <a:alpha val="38000"/>
+                <a:alpha val="35000"/>
               </a:srgbClr>
             </a:outerShdw>
           </a:effectLst>
@@ -17733,7 +18878,7 @@
         </a:effectLst>
         <a:sp3d/>
       </a:spPr>
-      <a:bodyPr rot="0" spcFirstLastPara="1" vertOverflow="overflow" horzOverflow="overflow" vert="horz" wrap="square" lIns="45719" tIns="45719" rIns="45719" bIns="45719" numCol="1" spcCol="38100" rtlCol="0" anchor="ctr" upright="0">
+      <a:bodyPr rot="0" spcFirstLastPara="1" vertOverflow="overflow" horzOverflow="overflow" vert="horz" wrap="square" lIns="45718" tIns="45718" rIns="45718" bIns="45718" numCol="1" spcCol="38100" rtlCol="0" anchor="ctr" upright="0">
         <a:spAutoFit/>
       </a:bodyPr>
       <a:lstStyle>
@@ -17764,7 +18909,7 @@
             <a:latin typeface="+mj-lt"/>
             <a:ea typeface="+mj-ea"/>
             <a:cs typeface="+mj-cs"/>
-            <a:sym typeface="Calibri"/>
+            <a:sym typeface="Helvetica"/>
           </a:defRPr>
         </a:defPPr>
         <a:lvl1pPr marL="0" marR="0" indent="0" algn="l" defTabSz="914400" rtl="0" fontAlgn="auto" latinLnBrk="1" hangingPunct="0">
@@ -18020,9 +19165,9 @@
           <a:round/>
         </a:ln>
         <a:effectLst>
-          <a:outerShdw sx="100000" sy="100000" kx="0" ky="0" algn="b" rotWithShape="0" blurRad="38100" dist="20000" dir="5400000">
+          <a:outerShdw sx="100000" sy="100000" kx="0" ky="0" algn="b" rotWithShape="0" blurRad="38100" dist="23000" dir="5400000">
             <a:srgbClr val="000000">
-              <a:alpha val="38000"/>
+              <a:alpha val="35000"/>
             </a:srgbClr>
           </a:outerShdw>
         </a:effectLst>
@@ -18310,7 +19455,7 @@
         <a:effectLst/>
         <a:sp3d/>
       </a:spPr>
-      <a:bodyPr rot="0" spcFirstLastPara="1" vertOverflow="overflow" horzOverflow="overflow" vert="horz" wrap="square" lIns="45719" tIns="45719" rIns="45719" bIns="45719" numCol="1" spcCol="38100" rtlCol="0" anchor="t" upright="0">
+      <a:bodyPr rot="0" spcFirstLastPara="1" vertOverflow="overflow" horzOverflow="overflow" vert="horz" wrap="square" lIns="45718" tIns="45718" rIns="45718" bIns="45718" numCol="1" spcCol="38100" rtlCol="0" anchor="t" upright="0">
         <a:spAutoFit/>
       </a:bodyPr>
       <a:lstStyle>
@@ -18341,7 +19486,7 @@
             <a:latin typeface="+mj-lt"/>
             <a:ea typeface="+mj-ea"/>
             <a:cs typeface="+mj-cs"/>
-            <a:sym typeface="Calibri"/>
+            <a:sym typeface="Helvetica"/>
           </a:defRPr>
         </a:defPPr>
         <a:lvl1pPr marL="0" marR="0" indent="0" algn="l" defTabSz="914400" rtl="0" fontAlgn="auto" latinLnBrk="1" hangingPunct="0">

--- a/paper/presentacion_OCT.pptx
+++ b/paper/presentacion_OCT.pptx
@@ -75,10 +75,10 @@
         </a:solidFill>
         <a:effectLst/>
         <a:uFillTx/>
-        <a:latin typeface="+mj-lt"/>
-        <a:ea typeface="+mj-ea"/>
-        <a:cs typeface="+mj-cs"/>
-        <a:sym typeface="Helvetica"/>
+        <a:latin typeface="+mn-lt"/>
+        <a:ea typeface="+mn-ea"/>
+        <a:cs typeface="+mn-cs"/>
+        <a:sym typeface="Calibri"/>
       </a:defRPr>
     </a:lvl1pPr>
     <a:lvl2pPr marL="0" marR="0" indent="0" algn="l" defTabSz="457200" rtl="0" fontAlgn="auto" latinLnBrk="0" hangingPunct="0">
@@ -105,10 +105,10 @@
         </a:solidFill>
         <a:effectLst/>
         <a:uFillTx/>
-        <a:latin typeface="+mj-lt"/>
-        <a:ea typeface="+mj-ea"/>
-        <a:cs typeface="+mj-cs"/>
-        <a:sym typeface="Helvetica"/>
+        <a:latin typeface="+mn-lt"/>
+        <a:ea typeface="+mn-ea"/>
+        <a:cs typeface="+mn-cs"/>
+        <a:sym typeface="Calibri"/>
       </a:defRPr>
     </a:lvl2pPr>
     <a:lvl3pPr marL="0" marR="0" indent="0" algn="l" defTabSz="457200" rtl="0" fontAlgn="auto" latinLnBrk="0" hangingPunct="0">
@@ -135,10 +135,10 @@
         </a:solidFill>
         <a:effectLst/>
         <a:uFillTx/>
-        <a:latin typeface="+mj-lt"/>
-        <a:ea typeface="+mj-ea"/>
-        <a:cs typeface="+mj-cs"/>
-        <a:sym typeface="Helvetica"/>
+        <a:latin typeface="+mn-lt"/>
+        <a:ea typeface="+mn-ea"/>
+        <a:cs typeface="+mn-cs"/>
+        <a:sym typeface="Calibri"/>
       </a:defRPr>
     </a:lvl3pPr>
     <a:lvl4pPr marL="0" marR="0" indent="0" algn="l" defTabSz="457200" rtl="0" fontAlgn="auto" latinLnBrk="0" hangingPunct="0">
@@ -165,10 +165,10 @@
         </a:solidFill>
         <a:effectLst/>
         <a:uFillTx/>
-        <a:latin typeface="+mj-lt"/>
-        <a:ea typeface="+mj-ea"/>
-        <a:cs typeface="+mj-cs"/>
-        <a:sym typeface="Helvetica"/>
+        <a:latin typeface="+mn-lt"/>
+        <a:ea typeface="+mn-ea"/>
+        <a:cs typeface="+mn-cs"/>
+        <a:sym typeface="Calibri"/>
       </a:defRPr>
     </a:lvl4pPr>
     <a:lvl5pPr marL="0" marR="0" indent="0" algn="l" defTabSz="457200" rtl="0" fontAlgn="auto" latinLnBrk="0" hangingPunct="0">
@@ -195,10 +195,10 @@
         </a:solidFill>
         <a:effectLst/>
         <a:uFillTx/>
-        <a:latin typeface="+mj-lt"/>
-        <a:ea typeface="+mj-ea"/>
-        <a:cs typeface="+mj-cs"/>
-        <a:sym typeface="Helvetica"/>
+        <a:latin typeface="+mn-lt"/>
+        <a:ea typeface="+mn-ea"/>
+        <a:cs typeface="+mn-cs"/>
+        <a:sym typeface="Calibri"/>
       </a:defRPr>
     </a:lvl5pPr>
     <a:lvl6pPr marL="0" marR="0" indent="0" algn="l" defTabSz="457200" rtl="0" fontAlgn="auto" latinLnBrk="0" hangingPunct="0">
@@ -225,10 +225,10 @@
         </a:solidFill>
         <a:effectLst/>
         <a:uFillTx/>
-        <a:latin typeface="+mj-lt"/>
-        <a:ea typeface="+mj-ea"/>
-        <a:cs typeface="+mj-cs"/>
-        <a:sym typeface="Helvetica"/>
+        <a:latin typeface="+mn-lt"/>
+        <a:ea typeface="+mn-ea"/>
+        <a:cs typeface="+mn-cs"/>
+        <a:sym typeface="Calibri"/>
       </a:defRPr>
     </a:lvl6pPr>
     <a:lvl7pPr marL="0" marR="0" indent="0" algn="l" defTabSz="457200" rtl="0" fontAlgn="auto" latinLnBrk="0" hangingPunct="0">
@@ -255,10 +255,10 @@
         </a:solidFill>
         <a:effectLst/>
         <a:uFillTx/>
-        <a:latin typeface="+mj-lt"/>
-        <a:ea typeface="+mj-ea"/>
-        <a:cs typeface="+mj-cs"/>
-        <a:sym typeface="Helvetica"/>
+        <a:latin typeface="+mn-lt"/>
+        <a:ea typeface="+mn-ea"/>
+        <a:cs typeface="+mn-cs"/>
+        <a:sym typeface="Calibri"/>
       </a:defRPr>
     </a:lvl7pPr>
     <a:lvl8pPr marL="0" marR="0" indent="0" algn="l" defTabSz="457200" rtl="0" fontAlgn="auto" latinLnBrk="0" hangingPunct="0">
@@ -285,10 +285,10 @@
         </a:solidFill>
         <a:effectLst/>
         <a:uFillTx/>
-        <a:latin typeface="+mj-lt"/>
-        <a:ea typeface="+mj-ea"/>
-        <a:cs typeface="+mj-cs"/>
-        <a:sym typeface="Helvetica"/>
+        <a:latin typeface="+mn-lt"/>
+        <a:ea typeface="+mn-ea"/>
+        <a:cs typeface="+mn-cs"/>
+        <a:sym typeface="Calibri"/>
       </a:defRPr>
     </a:lvl8pPr>
     <a:lvl9pPr marL="0" marR="0" indent="0" algn="l" defTabSz="457200" rtl="0" fontAlgn="auto" latinLnBrk="0" hangingPunct="0">
@@ -315,10 +315,10 @@
         </a:solidFill>
         <a:effectLst/>
         <a:uFillTx/>
-        <a:latin typeface="+mj-lt"/>
-        <a:ea typeface="+mj-ea"/>
-        <a:cs typeface="+mj-cs"/>
-        <a:sym typeface="Helvetica"/>
+        <a:latin typeface="+mn-lt"/>
+        <a:ea typeface="+mn-ea"/>
+        <a:cs typeface="+mn-cs"/>
+        <a:sym typeface="Calibri"/>
       </a:defRPr>
     </a:lvl9pPr>
   </p:defaultTextStyle>
@@ -835,7 +835,7 @@
         <p:spPr>
           <a:xfrm>
             <a:off x="722312" y="2906713"/>
-            <a:ext cx="7772401" cy="1500189"/>
+            <a:ext cx="7772401" cy="1500190"/>
           </a:xfrm>
           <a:prstGeom prst="rect">
             <a:avLst/>
@@ -1278,7 +1278,7 @@
         <p:spPr>
           <a:xfrm>
             <a:off x="4645025" y="1535111"/>
-            <a:ext cx="4041775" cy="639765"/>
+            <a:ext cx="4041775" cy="639766"/>
           </a:xfrm>
           <a:prstGeom prst="rect">
             <a:avLst/>
@@ -1471,7 +1471,7 @@
         <p:spPr>
           <a:xfrm>
             <a:off x="457200" y="273050"/>
-            <a:ext cx="3008315" cy="1162050"/>
+            <a:ext cx="3008316" cy="1162050"/>
           </a:xfrm>
           <a:prstGeom prst="rect">
             <a:avLst/>
@@ -1555,7 +1555,7 @@
         <p:spPr>
           <a:xfrm>
             <a:off x="457198" y="1435100"/>
-            <a:ext cx="3008316" cy="4691063"/>
+            <a:ext cx="3008317" cy="4691063"/>
           </a:xfrm>
           <a:prstGeom prst="rect">
             <a:avLst/>
@@ -1628,7 +1628,7 @@
         <p:spPr>
           <a:xfrm>
             <a:off x="1792288" y="4800600"/>
-            <a:ext cx="5486402" cy="566738"/>
+            <a:ext cx="5486403" cy="566738"/>
           </a:xfrm>
           <a:prstGeom prst="rect">
             <a:avLst/>
@@ -1660,7 +1660,7 @@
         <p:spPr>
           <a:xfrm>
             <a:off x="1792288" y="612775"/>
-            <a:ext cx="5486402" cy="4114800"/>
+            <a:ext cx="5486403" cy="4114800"/>
           </a:xfrm>
           <a:prstGeom prst="rect">
             <a:avLst/>
@@ -1687,7 +1687,7 @@
         <p:spPr>
           <a:xfrm>
             <a:off x="1792288" y="5367337"/>
-            <a:ext cx="5486402" cy="804864"/>
+            <a:ext cx="5486403" cy="804865"/>
           </a:xfrm>
           <a:prstGeom prst="rect">
             <a:avLst/>
@@ -1939,8 +1939,8 @@
         </p:nvSpPr>
         <p:spPr>
           <a:xfrm>
-            <a:off x="8428178" y="6414761"/>
-            <a:ext cx="258623" cy="248303"/>
+            <a:off x="8428181" y="6414762"/>
+            <a:ext cx="258620" cy="248302"/>
           </a:xfrm>
           <a:prstGeom prst="rect">
             <a:avLst/>
@@ -1959,10 +1959,6 @@
                 <a:solidFill>
                   <a:srgbClr val="888888"/>
                 </a:solidFill>
-                <a:latin typeface="+mn-lt"/>
-                <a:ea typeface="+mn-ea"/>
-                <a:cs typeface="+mn-cs"/>
-                <a:sym typeface="Calibri"/>
               </a:defRPr>
             </a:lvl1pPr>
           </a:lstStyle>
@@ -2761,10 +2757,6 @@
                 <a:solidFill>
                   <a:srgbClr val="FFFFFF"/>
                 </a:solidFill>
-                <a:latin typeface="+mn-lt"/>
-                <a:ea typeface="+mn-ea"/>
-                <a:cs typeface="+mn-cs"/>
-                <a:sym typeface="Calibri"/>
               </a:defRPr>
             </a:pPr>
           </a:p>
@@ -2779,7 +2771,7 @@
         <p:spPr>
           <a:xfrm>
             <a:off x="1417319" y="1371600"/>
-            <a:ext cx="9326882" cy="1666933"/>
+            <a:ext cx="9326882" cy="1666931"/>
           </a:xfrm>
           <a:prstGeom prst="rect">
             <a:avLst/>
@@ -2804,10 +2796,6 @@
                 <a:solidFill>
                   <a:srgbClr val="FFFFFF"/>
                 </a:solidFill>
-                <a:latin typeface="+mn-lt"/>
-                <a:ea typeface="+mn-ea"/>
-                <a:cs typeface="+mn-cs"/>
-                <a:sym typeface="Calibri"/>
               </a:defRPr>
             </a:pPr>
             <a:r>
@@ -2829,7 +2817,7 @@
         <p:spPr>
           <a:xfrm>
             <a:off x="1371600" y="3749037"/>
-            <a:ext cx="2743200" cy="36578"/>
+            <a:ext cx="2743200" cy="36579"/>
           </a:xfrm>
           <a:prstGeom prst="rect">
             <a:avLst/>
@@ -2857,10 +2845,6 @@
                 <a:solidFill>
                   <a:srgbClr val="FFFFFF"/>
                 </a:solidFill>
-                <a:latin typeface="+mn-lt"/>
-                <a:ea typeface="+mn-ea"/>
-                <a:cs typeface="+mn-cs"/>
-                <a:sym typeface="Calibri"/>
               </a:defRPr>
             </a:pPr>
           </a:p>
@@ -2875,7 +2859,7 @@
         <p:spPr>
           <a:xfrm>
             <a:off x="1417319" y="4114800"/>
-            <a:ext cx="9326882" cy="300593"/>
+            <a:ext cx="9326882" cy="300590"/>
           </a:xfrm>
           <a:prstGeom prst="rect">
             <a:avLst/>
@@ -2899,10 +2883,6 @@
                 <a:solidFill>
                   <a:srgbClr val="CADCFC"/>
                 </a:solidFill>
-                <a:latin typeface="+mn-lt"/>
-                <a:ea typeface="+mn-ea"/>
-                <a:cs typeface="+mn-cs"/>
-                <a:sym typeface="Calibri"/>
               </a:defRPr>
             </a:lvl1pPr>
           </a:lstStyle>
@@ -2922,8 +2902,8 @@
         </p:nvSpPr>
         <p:spPr>
           <a:xfrm>
-            <a:off x="1417319" y="4846321"/>
-            <a:ext cx="9326882" cy="280798"/>
+            <a:off x="1417319" y="4846320"/>
+            <a:ext cx="9326882" cy="280796"/>
           </a:xfrm>
           <a:prstGeom prst="rect">
             <a:avLst/>
@@ -2947,10 +2927,6 @@
                 <a:solidFill>
                   <a:srgbClr val="6B7B8D"/>
                 </a:solidFill>
-                <a:latin typeface="+mn-lt"/>
-                <a:ea typeface="+mn-ea"/>
-                <a:cs typeface="+mn-cs"/>
-                <a:sym typeface="Calibri"/>
               </a:defRPr>
             </a:lvl1pPr>
           </a:lstStyle>
@@ -3025,10 +3001,6 @@
                 <a:solidFill>
                   <a:srgbClr val="FFFFFF"/>
                 </a:solidFill>
-                <a:latin typeface="+mn-lt"/>
-                <a:ea typeface="+mn-ea"/>
-                <a:cs typeface="+mn-cs"/>
-                <a:sym typeface="Calibri"/>
               </a:defRPr>
             </a:pPr>
           </a:p>
@@ -3042,8 +3014,8 @@
         </p:nvSpPr>
         <p:spPr>
           <a:xfrm>
-            <a:off x="777239" y="457199"/>
-            <a:ext cx="9052561" cy="542240"/>
+            <a:off x="777239" y="457198"/>
+            <a:ext cx="9052561" cy="542238"/>
           </a:xfrm>
           <a:prstGeom prst="rect">
             <a:avLst/>
@@ -3067,10 +3039,6 @@
                 <a:solidFill>
                   <a:srgbClr val="1E2761"/>
                 </a:solidFill>
-                <a:latin typeface="+mn-lt"/>
-                <a:ea typeface="+mn-ea"/>
-                <a:cs typeface="+mn-cs"/>
-                <a:sym typeface="Calibri"/>
               </a:defRPr>
             </a:lvl1pPr>
           </a:lstStyle>
@@ -3091,7 +3059,7 @@
         <p:spPr>
           <a:xfrm>
             <a:off x="731519" y="1463038"/>
-            <a:ext cx="10698482" cy="1051562"/>
+            <a:ext cx="10698482" cy="1051563"/>
           </a:xfrm>
           <a:prstGeom prst="rect">
             <a:avLst/>
@@ -3119,10 +3087,6 @@
                 <a:solidFill>
                   <a:srgbClr val="FFFFFF"/>
                 </a:solidFill>
-                <a:latin typeface="+mn-lt"/>
-                <a:ea typeface="+mn-ea"/>
-                <a:cs typeface="+mn-cs"/>
-                <a:sym typeface="Calibri"/>
               </a:defRPr>
             </a:pPr>
           </a:p>
@@ -3137,7 +3101,7 @@
         <p:spPr>
           <a:xfrm>
             <a:off x="731519" y="1463038"/>
-            <a:ext cx="73154" cy="1051562"/>
+            <a:ext cx="73155" cy="1051563"/>
           </a:xfrm>
           <a:prstGeom prst="rect">
             <a:avLst/>
@@ -3165,10 +3129,6 @@
                 <a:solidFill>
                   <a:srgbClr val="FFFFFF"/>
                 </a:solidFill>
-                <a:latin typeface="+mn-lt"/>
-                <a:ea typeface="+mn-ea"/>
-                <a:cs typeface="+mn-cs"/>
-                <a:sym typeface="Calibri"/>
               </a:defRPr>
             </a:pPr>
           </a:p>
@@ -3183,7 +3143,7 @@
         <p:spPr>
           <a:xfrm>
             <a:off x="1005838" y="1645920"/>
-            <a:ext cx="457203" cy="457203"/>
+            <a:ext cx="457205" cy="457205"/>
           </a:xfrm>
           <a:prstGeom prst="ellipse">
             <a:avLst/>
@@ -3211,10 +3171,6 @@
                 <a:solidFill>
                   <a:srgbClr val="FFFFFF"/>
                 </a:solidFill>
-                <a:latin typeface="+mn-lt"/>
-                <a:ea typeface="+mn-ea"/>
-                <a:cs typeface="+mn-cs"/>
-                <a:sym typeface="Calibri"/>
               </a:defRPr>
             </a:pPr>
           </a:p>
@@ -3229,7 +3185,7 @@
         <p:spPr>
           <a:xfrm>
             <a:off x="1051558" y="1645921"/>
-            <a:ext cx="365762" cy="333086"/>
+            <a:ext cx="365763" cy="333084"/>
           </a:xfrm>
           <a:prstGeom prst="rect">
             <a:avLst/>
@@ -3253,10 +3209,6 @@
                 <a:solidFill>
                   <a:srgbClr val="FFFFFF"/>
                 </a:solidFill>
-                <a:latin typeface="+mn-lt"/>
-                <a:ea typeface="+mn-ea"/>
-                <a:cs typeface="+mn-cs"/>
-                <a:sym typeface="Calibri"/>
               </a:defRPr>
             </a:lvl1pPr>
           </a:lstStyle>
@@ -3276,8 +3228,8 @@
         </p:nvSpPr>
         <p:spPr>
           <a:xfrm>
-            <a:off x="1691640" y="1536192"/>
-            <a:ext cx="9509761" cy="300592"/>
+            <a:off x="1691640" y="1536191"/>
+            <a:ext cx="9509761" cy="300591"/>
           </a:xfrm>
           <a:prstGeom prst="rect">
             <a:avLst/>
@@ -3301,10 +3253,6 @@
                 <a:solidFill>
                   <a:srgbClr val="1E2761"/>
                 </a:solidFill>
-                <a:latin typeface="+mn-lt"/>
-                <a:ea typeface="+mn-ea"/>
-                <a:cs typeface="+mn-cs"/>
-                <a:sym typeface="Calibri"/>
               </a:defRPr>
             </a:lvl1pPr>
           </a:lstStyle>
@@ -3324,8 +3272,8 @@
         </p:nvSpPr>
         <p:spPr>
           <a:xfrm>
-            <a:off x="1691640" y="1920239"/>
-            <a:ext cx="9509761" cy="461401"/>
+            <a:off x="1691640" y="1920238"/>
+            <a:ext cx="9509761" cy="461399"/>
           </a:xfrm>
           <a:prstGeom prst="rect">
             <a:avLst/>
@@ -3349,10 +3297,6 @@
                 <a:solidFill>
                   <a:srgbClr val="1A1A2E"/>
                 </a:solidFill>
-                <a:latin typeface="+mn-lt"/>
-                <a:ea typeface="+mn-ea"/>
-                <a:cs typeface="+mn-cs"/>
-                <a:sym typeface="Calibri"/>
               </a:defRPr>
             </a:lvl1pPr>
           </a:lstStyle>
@@ -3372,8 +3316,8 @@
         </p:nvSpPr>
         <p:spPr>
           <a:xfrm>
-            <a:off x="731519" y="2697478"/>
-            <a:ext cx="10698482" cy="1051562"/>
+            <a:off x="731519" y="2697477"/>
+            <a:ext cx="10698482" cy="1051563"/>
           </a:xfrm>
           <a:prstGeom prst="rect">
             <a:avLst/>
@@ -3401,10 +3345,6 @@
                 <a:solidFill>
                   <a:srgbClr val="FFFFFF"/>
                 </a:solidFill>
-                <a:latin typeface="+mn-lt"/>
-                <a:ea typeface="+mn-ea"/>
-                <a:cs typeface="+mn-cs"/>
-                <a:sym typeface="Calibri"/>
               </a:defRPr>
             </a:pPr>
           </a:p>
@@ -3418,8 +3358,8 @@
         </p:nvSpPr>
         <p:spPr>
           <a:xfrm>
-            <a:off x="731519" y="2697478"/>
-            <a:ext cx="73154" cy="1051562"/>
+            <a:off x="731519" y="2697477"/>
+            <a:ext cx="73155" cy="1051563"/>
           </a:xfrm>
           <a:prstGeom prst="rect">
             <a:avLst/>
@@ -3447,10 +3387,6 @@
                 <a:solidFill>
                   <a:srgbClr val="FFFFFF"/>
                 </a:solidFill>
-                <a:latin typeface="+mn-lt"/>
-                <a:ea typeface="+mn-ea"/>
-                <a:cs typeface="+mn-cs"/>
-                <a:sym typeface="Calibri"/>
               </a:defRPr>
             </a:pPr>
           </a:p>
@@ -3465,7 +3401,7 @@
         <p:spPr>
           <a:xfrm>
             <a:off x="1005838" y="2880360"/>
-            <a:ext cx="457203" cy="457203"/>
+            <a:ext cx="457205" cy="457205"/>
           </a:xfrm>
           <a:prstGeom prst="ellipse">
             <a:avLst/>
@@ -3493,10 +3429,6 @@
                 <a:solidFill>
                   <a:srgbClr val="FFFFFF"/>
                 </a:solidFill>
-                <a:latin typeface="+mn-lt"/>
-                <a:ea typeface="+mn-ea"/>
-                <a:cs typeface="+mn-cs"/>
-                <a:sym typeface="Calibri"/>
               </a:defRPr>
             </a:pPr>
           </a:p>
@@ -3510,8 +3442,8 @@
         </p:nvSpPr>
         <p:spPr>
           <a:xfrm>
-            <a:off x="1051558" y="2880361"/>
-            <a:ext cx="365762" cy="333086"/>
+            <a:off x="1051558" y="2880360"/>
+            <a:ext cx="365763" cy="333085"/>
           </a:xfrm>
           <a:prstGeom prst="rect">
             <a:avLst/>
@@ -3535,10 +3467,6 @@
                 <a:solidFill>
                   <a:srgbClr val="FFFFFF"/>
                 </a:solidFill>
-                <a:latin typeface="+mn-lt"/>
-                <a:ea typeface="+mn-ea"/>
-                <a:cs typeface="+mn-cs"/>
-                <a:sym typeface="Calibri"/>
               </a:defRPr>
             </a:lvl1pPr>
           </a:lstStyle>
@@ -3559,7 +3487,7 @@
         <p:spPr>
           <a:xfrm>
             <a:off x="1691640" y="2770633"/>
-            <a:ext cx="9509761" cy="300592"/>
+            <a:ext cx="9509761" cy="300590"/>
           </a:xfrm>
           <a:prstGeom prst="rect">
             <a:avLst/>
@@ -3583,10 +3511,6 @@
                 <a:solidFill>
                   <a:srgbClr val="1E2761"/>
                 </a:solidFill>
-                <a:latin typeface="+mn-lt"/>
-                <a:ea typeface="+mn-ea"/>
-                <a:cs typeface="+mn-cs"/>
-                <a:sym typeface="Calibri"/>
               </a:defRPr>
             </a:lvl1pPr>
           </a:lstStyle>
@@ -3606,8 +3530,8 @@
         </p:nvSpPr>
         <p:spPr>
           <a:xfrm>
-            <a:off x="1691640" y="3154679"/>
-            <a:ext cx="9509761" cy="461401"/>
+            <a:off x="1691640" y="3154678"/>
+            <a:ext cx="9509761" cy="461399"/>
           </a:xfrm>
           <a:prstGeom prst="rect">
             <a:avLst/>
@@ -3631,10 +3555,6 @@
                 <a:solidFill>
                   <a:srgbClr val="1A1A2E"/>
                 </a:solidFill>
-                <a:latin typeface="+mn-lt"/>
-                <a:ea typeface="+mn-ea"/>
-                <a:cs typeface="+mn-cs"/>
-                <a:sym typeface="Calibri"/>
               </a:defRPr>
             </a:lvl1pPr>
           </a:lstStyle>
@@ -3655,7 +3575,7 @@
         <p:spPr>
           <a:xfrm>
             <a:off x="731519" y="3931920"/>
-            <a:ext cx="10698482" cy="1051562"/>
+            <a:ext cx="10698482" cy="1051563"/>
           </a:xfrm>
           <a:prstGeom prst="rect">
             <a:avLst/>
@@ -3683,10 +3603,6 @@
                 <a:solidFill>
                   <a:srgbClr val="FFFFFF"/>
                 </a:solidFill>
-                <a:latin typeface="+mn-lt"/>
-                <a:ea typeface="+mn-ea"/>
-                <a:cs typeface="+mn-cs"/>
-                <a:sym typeface="Calibri"/>
               </a:defRPr>
             </a:pPr>
           </a:p>
@@ -3701,7 +3617,7 @@
         <p:spPr>
           <a:xfrm>
             <a:off x="731519" y="3931920"/>
-            <a:ext cx="73154" cy="1051562"/>
+            <a:ext cx="73155" cy="1051563"/>
           </a:xfrm>
           <a:prstGeom prst="rect">
             <a:avLst/>
@@ -3729,10 +3645,6 @@
                 <a:solidFill>
                   <a:srgbClr val="FFFFFF"/>
                 </a:solidFill>
-                <a:latin typeface="+mn-lt"/>
-                <a:ea typeface="+mn-ea"/>
-                <a:cs typeface="+mn-cs"/>
-                <a:sym typeface="Calibri"/>
               </a:defRPr>
             </a:pPr>
           </a:p>
@@ -3747,7 +3659,7 @@
         <p:spPr>
           <a:xfrm>
             <a:off x="1005838" y="4114800"/>
-            <a:ext cx="457203" cy="457200"/>
+            <a:ext cx="457205" cy="457200"/>
           </a:xfrm>
           <a:prstGeom prst="ellipse">
             <a:avLst/>
@@ -3775,10 +3687,6 @@
                 <a:solidFill>
                   <a:srgbClr val="FFFFFF"/>
                 </a:solidFill>
-                <a:latin typeface="+mn-lt"/>
-                <a:ea typeface="+mn-ea"/>
-                <a:cs typeface="+mn-cs"/>
-                <a:sym typeface="Calibri"/>
               </a:defRPr>
             </a:pPr>
           </a:p>
@@ -3792,8 +3700,8 @@
         </p:nvSpPr>
         <p:spPr>
           <a:xfrm>
-            <a:off x="1051558" y="4114800"/>
-            <a:ext cx="365762" cy="333087"/>
+            <a:off x="1051558" y="4114799"/>
+            <a:ext cx="365763" cy="333085"/>
           </a:xfrm>
           <a:prstGeom prst="rect">
             <a:avLst/>
@@ -3817,10 +3725,6 @@
                 <a:solidFill>
                   <a:srgbClr val="FFFFFF"/>
                 </a:solidFill>
-                <a:latin typeface="+mn-lt"/>
-                <a:ea typeface="+mn-ea"/>
-                <a:cs typeface="+mn-cs"/>
-                <a:sym typeface="Calibri"/>
               </a:defRPr>
             </a:lvl1pPr>
           </a:lstStyle>
@@ -3840,8 +3744,8 @@
         </p:nvSpPr>
         <p:spPr>
           <a:xfrm>
-            <a:off x="1691640" y="4005072"/>
-            <a:ext cx="9509761" cy="300592"/>
+            <a:off x="1691640" y="4005071"/>
+            <a:ext cx="9509761" cy="300590"/>
           </a:xfrm>
           <a:prstGeom prst="rect">
             <a:avLst/>
@@ -3865,10 +3769,6 @@
                 <a:solidFill>
                   <a:srgbClr val="1E2761"/>
                 </a:solidFill>
-                <a:latin typeface="+mn-lt"/>
-                <a:ea typeface="+mn-ea"/>
-                <a:cs typeface="+mn-cs"/>
-                <a:sym typeface="Calibri"/>
               </a:defRPr>
             </a:lvl1pPr>
           </a:lstStyle>
@@ -3888,8 +3788,8 @@
         </p:nvSpPr>
         <p:spPr>
           <a:xfrm>
-            <a:off x="1691640" y="4389121"/>
-            <a:ext cx="9509761" cy="461400"/>
+            <a:off x="1691640" y="4389120"/>
+            <a:ext cx="9509761" cy="461399"/>
           </a:xfrm>
           <a:prstGeom prst="rect">
             <a:avLst/>
@@ -3913,10 +3813,6 @@
                 <a:solidFill>
                   <a:srgbClr val="1A1A2E"/>
                 </a:solidFill>
-                <a:latin typeface="+mn-lt"/>
-                <a:ea typeface="+mn-ea"/>
-                <a:cs typeface="+mn-cs"/>
-                <a:sym typeface="Calibri"/>
               </a:defRPr>
             </a:lvl1pPr>
           </a:lstStyle>
@@ -3937,7 +3833,7 @@
         <p:spPr>
           <a:xfrm>
             <a:off x="731519" y="5166359"/>
-            <a:ext cx="10698482" cy="1051562"/>
+            <a:ext cx="10698482" cy="1051563"/>
           </a:xfrm>
           <a:prstGeom prst="rect">
             <a:avLst/>
@@ -3965,10 +3861,6 @@
                 <a:solidFill>
                   <a:srgbClr val="FFFFFF"/>
                 </a:solidFill>
-                <a:latin typeface="+mn-lt"/>
-                <a:ea typeface="+mn-ea"/>
-                <a:cs typeface="+mn-cs"/>
-                <a:sym typeface="Calibri"/>
               </a:defRPr>
             </a:pPr>
           </a:p>
@@ -3983,7 +3875,7 @@
         <p:spPr>
           <a:xfrm>
             <a:off x="731519" y="5166359"/>
-            <a:ext cx="73154" cy="1051562"/>
+            <a:ext cx="73155" cy="1051563"/>
           </a:xfrm>
           <a:prstGeom prst="rect">
             <a:avLst/>
@@ -4011,10 +3903,6 @@
                 <a:solidFill>
                   <a:srgbClr val="FFFFFF"/>
                 </a:solidFill>
-                <a:latin typeface="+mn-lt"/>
-                <a:ea typeface="+mn-ea"/>
-                <a:cs typeface="+mn-cs"/>
-                <a:sym typeface="Calibri"/>
               </a:defRPr>
             </a:pPr>
           </a:p>
@@ -4029,7 +3917,7 @@
         <p:spPr>
           <a:xfrm>
             <a:off x="1005838" y="5349240"/>
-            <a:ext cx="457203" cy="457203"/>
+            <a:ext cx="457205" cy="457205"/>
           </a:xfrm>
           <a:prstGeom prst="ellipse">
             <a:avLst/>
@@ -4057,10 +3945,6 @@
                 <a:solidFill>
                   <a:srgbClr val="FFFFFF"/>
                 </a:solidFill>
-                <a:latin typeface="+mn-lt"/>
-                <a:ea typeface="+mn-ea"/>
-                <a:cs typeface="+mn-cs"/>
-                <a:sym typeface="Calibri"/>
               </a:defRPr>
             </a:pPr>
           </a:p>
@@ -4074,8 +3958,8 @@
         </p:nvSpPr>
         <p:spPr>
           <a:xfrm>
-            <a:off x="1051558" y="5349241"/>
-            <a:ext cx="365762" cy="333086"/>
+            <a:off x="1051558" y="5349240"/>
+            <a:ext cx="365763" cy="333085"/>
           </a:xfrm>
           <a:prstGeom prst="rect">
             <a:avLst/>
@@ -4099,10 +3983,6 @@
                 <a:solidFill>
                   <a:srgbClr val="FFFFFF"/>
                 </a:solidFill>
-                <a:latin typeface="+mn-lt"/>
-                <a:ea typeface="+mn-ea"/>
-                <a:cs typeface="+mn-cs"/>
-                <a:sym typeface="Calibri"/>
               </a:defRPr>
             </a:lvl1pPr>
           </a:lstStyle>
@@ -4122,8 +4002,8 @@
         </p:nvSpPr>
         <p:spPr>
           <a:xfrm>
-            <a:off x="1691640" y="5239511"/>
-            <a:ext cx="9509761" cy="300592"/>
+            <a:off x="1691640" y="5239510"/>
+            <a:ext cx="9509761" cy="300590"/>
           </a:xfrm>
           <a:prstGeom prst="rect">
             <a:avLst/>
@@ -4147,10 +4027,6 @@
                 <a:solidFill>
                   <a:srgbClr val="1E2761"/>
                 </a:solidFill>
-                <a:latin typeface="+mn-lt"/>
-                <a:ea typeface="+mn-ea"/>
-                <a:cs typeface="+mn-cs"/>
-                <a:sym typeface="Calibri"/>
               </a:defRPr>
             </a:lvl1pPr>
           </a:lstStyle>
@@ -4170,8 +4046,8 @@
         </p:nvSpPr>
         <p:spPr>
           <a:xfrm>
-            <a:off x="1691640" y="5623560"/>
-            <a:ext cx="9509761" cy="461400"/>
+            <a:off x="1691640" y="5623559"/>
+            <a:ext cx="9509761" cy="461399"/>
           </a:xfrm>
           <a:prstGeom prst="rect">
             <a:avLst/>
@@ -4195,10 +4071,6 @@
                 <a:solidFill>
                   <a:srgbClr val="1A1A2E"/>
                 </a:solidFill>
-                <a:latin typeface="+mn-lt"/>
-                <a:ea typeface="+mn-ea"/>
-                <a:cs typeface="+mn-cs"/>
-                <a:sym typeface="Calibri"/>
               </a:defRPr>
             </a:lvl1pPr>
           </a:lstStyle>
@@ -4273,10 +4145,6 @@
                 <a:solidFill>
                   <a:srgbClr val="FFFFFF"/>
                 </a:solidFill>
-                <a:latin typeface="+mn-lt"/>
-                <a:ea typeface="+mn-ea"/>
-                <a:cs typeface="+mn-cs"/>
-                <a:sym typeface="Calibri"/>
               </a:defRPr>
             </a:pPr>
           </a:p>
@@ -4290,8 +4158,8 @@
         </p:nvSpPr>
         <p:spPr>
           <a:xfrm>
-            <a:off x="777239" y="457199"/>
-            <a:ext cx="9052561" cy="542240"/>
+            <a:off x="777239" y="457198"/>
+            <a:ext cx="9052561" cy="542238"/>
           </a:xfrm>
           <a:prstGeom prst="rect">
             <a:avLst/>
@@ -4315,10 +4183,6 @@
                 <a:solidFill>
                   <a:srgbClr val="1E2761"/>
                 </a:solidFill>
-                <a:latin typeface="+mn-lt"/>
-                <a:ea typeface="+mn-ea"/>
-                <a:cs typeface="+mn-cs"/>
-                <a:sym typeface="Calibri"/>
               </a:defRPr>
             </a:lvl1pPr>
           </a:lstStyle>
@@ -4338,8 +4202,8 @@
         </p:nvSpPr>
         <p:spPr>
           <a:xfrm>
-            <a:off x="777238" y="1463039"/>
-            <a:ext cx="5394962" cy="385375"/>
+            <a:off x="777237" y="1463038"/>
+            <a:ext cx="5394964" cy="385373"/>
           </a:xfrm>
           <a:prstGeom prst="rect">
             <a:avLst/>
@@ -4363,10 +4227,6 @@
                 <a:solidFill>
                   <a:srgbClr val="00A896"/>
                 </a:solidFill>
-                <a:latin typeface="+mn-lt"/>
-                <a:ea typeface="+mn-ea"/>
-                <a:cs typeface="+mn-cs"/>
-                <a:sym typeface="Calibri"/>
               </a:defRPr>
             </a:lvl1pPr>
           </a:lstStyle>
@@ -4387,7 +4247,7 @@
         <p:spPr>
           <a:xfrm>
             <a:off x="731519" y="2103120"/>
-            <a:ext cx="54866" cy="822962"/>
+            <a:ext cx="54867" cy="822963"/>
           </a:xfrm>
           <a:prstGeom prst="rect">
             <a:avLst/>
@@ -4415,10 +4275,6 @@
                 <a:solidFill>
                   <a:srgbClr val="FFFFFF"/>
                 </a:solidFill>
-                <a:latin typeface="+mn-lt"/>
-                <a:ea typeface="+mn-ea"/>
-                <a:cs typeface="+mn-cs"/>
-                <a:sym typeface="Calibri"/>
               </a:defRPr>
             </a:pPr>
           </a:p>
@@ -4432,8 +4288,8 @@
         </p:nvSpPr>
         <p:spPr>
           <a:xfrm>
-            <a:off x="1142999" y="2103121"/>
-            <a:ext cx="4663442" cy="300592"/>
+            <a:off x="1142998" y="2103121"/>
+            <a:ext cx="4663444" cy="300590"/>
           </a:xfrm>
           <a:prstGeom prst="rect">
             <a:avLst/>
@@ -4457,10 +4313,6 @@
                 <a:solidFill>
                   <a:srgbClr val="1E2761"/>
                 </a:solidFill>
-                <a:latin typeface="+mn-lt"/>
-                <a:ea typeface="+mn-ea"/>
-                <a:cs typeface="+mn-cs"/>
-                <a:sym typeface="Calibri"/>
               </a:defRPr>
             </a:lvl1pPr>
           </a:lstStyle>
@@ -4480,8 +4332,8 @@
         </p:nvSpPr>
         <p:spPr>
           <a:xfrm>
-            <a:off x="1142999" y="2468878"/>
-            <a:ext cx="4663442" cy="461401"/>
+            <a:off x="1142998" y="2468877"/>
+            <a:ext cx="4663444" cy="461399"/>
           </a:xfrm>
           <a:prstGeom prst="rect">
             <a:avLst/>
@@ -4505,10 +4357,6 @@
                 <a:solidFill>
                   <a:srgbClr val="1A1A2E"/>
                 </a:solidFill>
-                <a:latin typeface="+mn-lt"/>
-                <a:ea typeface="+mn-ea"/>
-                <a:cs typeface="+mn-cs"/>
-                <a:sym typeface="Calibri"/>
               </a:defRPr>
             </a:lvl1pPr>
           </a:lstStyle>
@@ -4529,7 +4377,7 @@
         <p:spPr>
           <a:xfrm>
             <a:off x="731519" y="3108960"/>
-            <a:ext cx="54866" cy="822962"/>
+            <a:ext cx="54867" cy="822963"/>
           </a:xfrm>
           <a:prstGeom prst="rect">
             <a:avLst/>
@@ -4557,10 +4405,6 @@
                 <a:solidFill>
                   <a:srgbClr val="FFFFFF"/>
                 </a:solidFill>
-                <a:latin typeface="+mn-lt"/>
-                <a:ea typeface="+mn-ea"/>
-                <a:cs typeface="+mn-cs"/>
-                <a:sym typeface="Calibri"/>
               </a:defRPr>
             </a:pPr>
           </a:p>
@@ -4574,8 +4418,8 @@
         </p:nvSpPr>
         <p:spPr>
           <a:xfrm>
-            <a:off x="1142999" y="3108961"/>
-            <a:ext cx="4663442" cy="300592"/>
+            <a:off x="1142998" y="3108961"/>
+            <a:ext cx="4663444" cy="300590"/>
           </a:xfrm>
           <a:prstGeom prst="rect">
             <a:avLst/>
@@ -4599,10 +4443,6 @@
                 <a:solidFill>
                   <a:srgbClr val="1E2761"/>
                 </a:solidFill>
-                <a:latin typeface="+mn-lt"/>
-                <a:ea typeface="+mn-ea"/>
-                <a:cs typeface="+mn-cs"/>
-                <a:sym typeface="Calibri"/>
               </a:defRPr>
             </a:lvl1pPr>
           </a:lstStyle>
@@ -4622,8 +4462,8 @@
         </p:nvSpPr>
         <p:spPr>
           <a:xfrm>
-            <a:off x="1142999" y="3474721"/>
-            <a:ext cx="4663442" cy="461400"/>
+            <a:off x="1142998" y="3474720"/>
+            <a:ext cx="4663444" cy="461399"/>
           </a:xfrm>
           <a:prstGeom prst="rect">
             <a:avLst/>
@@ -4647,10 +4487,6 @@
                 <a:solidFill>
                   <a:srgbClr val="1A1A2E"/>
                 </a:solidFill>
-                <a:latin typeface="+mn-lt"/>
-                <a:ea typeface="+mn-ea"/>
-                <a:cs typeface="+mn-cs"/>
-                <a:sym typeface="Calibri"/>
               </a:defRPr>
             </a:lvl1pPr>
           </a:lstStyle>
@@ -4671,7 +4507,7 @@
         <p:spPr>
           <a:xfrm>
             <a:off x="731519" y="4114798"/>
-            <a:ext cx="54866" cy="822963"/>
+            <a:ext cx="54867" cy="822964"/>
           </a:xfrm>
           <a:prstGeom prst="rect">
             <a:avLst/>
@@ -4699,10 +4535,6 @@
                 <a:solidFill>
                   <a:srgbClr val="FFFFFF"/>
                 </a:solidFill>
-                <a:latin typeface="+mn-lt"/>
-                <a:ea typeface="+mn-ea"/>
-                <a:cs typeface="+mn-cs"/>
-                <a:sym typeface="Calibri"/>
               </a:defRPr>
             </a:pPr>
           </a:p>
@@ -4716,8 +4548,8 @@
         </p:nvSpPr>
         <p:spPr>
           <a:xfrm>
-            <a:off x="1142999" y="4114799"/>
-            <a:ext cx="4663442" cy="300592"/>
+            <a:off x="1142998" y="4114798"/>
+            <a:ext cx="4663444" cy="300590"/>
           </a:xfrm>
           <a:prstGeom prst="rect">
             <a:avLst/>
@@ -4741,10 +4573,6 @@
                 <a:solidFill>
                   <a:srgbClr val="1E2761"/>
                 </a:solidFill>
-                <a:latin typeface="+mn-lt"/>
-                <a:ea typeface="+mn-ea"/>
-                <a:cs typeface="+mn-cs"/>
-                <a:sym typeface="Calibri"/>
               </a:defRPr>
             </a:lvl1pPr>
           </a:lstStyle>
@@ -4764,8 +4592,8 @@
         </p:nvSpPr>
         <p:spPr>
           <a:xfrm>
-            <a:off x="1142999" y="4480560"/>
-            <a:ext cx="4663442" cy="461400"/>
+            <a:off x="1142998" y="4480559"/>
+            <a:ext cx="4663444" cy="461399"/>
           </a:xfrm>
           <a:prstGeom prst="rect">
             <a:avLst/>
@@ -4789,10 +4617,6 @@
                 <a:solidFill>
                   <a:srgbClr val="1A1A2E"/>
                 </a:solidFill>
-                <a:latin typeface="+mn-lt"/>
-                <a:ea typeface="+mn-ea"/>
-                <a:cs typeface="+mn-cs"/>
-                <a:sym typeface="Calibri"/>
               </a:defRPr>
             </a:lvl1pPr>
           </a:lstStyle>
@@ -4813,7 +4637,7 @@
         <p:spPr>
           <a:xfrm>
             <a:off x="731519" y="5120640"/>
-            <a:ext cx="54866" cy="822962"/>
+            <a:ext cx="54867" cy="822963"/>
           </a:xfrm>
           <a:prstGeom prst="rect">
             <a:avLst/>
@@ -4841,10 +4665,6 @@
                 <a:solidFill>
                   <a:srgbClr val="FFFFFF"/>
                 </a:solidFill>
-                <a:latin typeface="+mn-lt"/>
-                <a:ea typeface="+mn-ea"/>
-                <a:cs typeface="+mn-cs"/>
-                <a:sym typeface="Calibri"/>
               </a:defRPr>
             </a:pPr>
           </a:p>
@@ -4858,8 +4678,8 @@
         </p:nvSpPr>
         <p:spPr>
           <a:xfrm>
-            <a:off x="1142999" y="5120641"/>
-            <a:ext cx="4663442" cy="300592"/>
+            <a:off x="1142998" y="5120640"/>
+            <a:ext cx="4663444" cy="300591"/>
           </a:xfrm>
           <a:prstGeom prst="rect">
             <a:avLst/>
@@ -4883,10 +4703,6 @@
                 <a:solidFill>
                   <a:srgbClr val="1E2761"/>
                 </a:solidFill>
-                <a:latin typeface="+mn-lt"/>
-                <a:ea typeface="+mn-ea"/>
-                <a:cs typeface="+mn-cs"/>
-                <a:sym typeface="Calibri"/>
               </a:defRPr>
             </a:lvl1pPr>
           </a:lstStyle>
@@ -4906,8 +4722,8 @@
         </p:nvSpPr>
         <p:spPr>
           <a:xfrm>
-            <a:off x="1142999" y="5486400"/>
-            <a:ext cx="4663442" cy="461401"/>
+            <a:off x="1142998" y="5486399"/>
+            <a:ext cx="4663444" cy="461399"/>
           </a:xfrm>
           <a:prstGeom prst="rect">
             <a:avLst/>
@@ -4931,10 +4747,6 @@
                 <a:solidFill>
                   <a:srgbClr val="1A1A2E"/>
                 </a:solidFill>
-                <a:latin typeface="+mn-lt"/>
-                <a:ea typeface="+mn-ea"/>
-                <a:cs typeface="+mn-cs"/>
-                <a:sym typeface="Calibri"/>
               </a:defRPr>
             </a:lvl1pPr>
           </a:lstStyle>
@@ -4954,8 +4766,8 @@
         </p:nvSpPr>
         <p:spPr>
           <a:xfrm>
-            <a:off x="6339063" y="2044021"/>
-            <a:ext cx="4846322" cy="3322799"/>
+            <a:off x="6339063" y="2044020"/>
+            <a:ext cx="4846323" cy="3322801"/>
           </a:xfrm>
           <a:prstGeom prst="rect">
             <a:avLst/>
@@ -4983,10 +4795,6 @@
                 <a:solidFill>
                   <a:srgbClr val="FFFFFF"/>
                 </a:solidFill>
-                <a:latin typeface="+mn-lt"/>
-                <a:ea typeface="+mn-ea"/>
-                <a:cs typeface="+mn-cs"/>
-                <a:sym typeface="Calibri"/>
               </a:defRPr>
             </a:pPr>
           </a:p>
@@ -5000,8 +4808,8 @@
         </p:nvSpPr>
         <p:spPr>
           <a:xfrm>
-            <a:off x="6339063" y="2044021"/>
-            <a:ext cx="4846322" cy="548642"/>
+            <a:off x="6339063" y="2044020"/>
+            <a:ext cx="4846323" cy="548643"/>
           </a:xfrm>
           <a:prstGeom prst="rect">
             <a:avLst/>
@@ -5029,10 +4837,6 @@
                 <a:solidFill>
                   <a:srgbClr val="FFFFFF"/>
                 </a:solidFill>
-                <a:latin typeface="+mn-lt"/>
-                <a:ea typeface="+mn-ea"/>
-                <a:cs typeface="+mn-cs"/>
-                <a:sym typeface="Calibri"/>
               </a:defRPr>
             </a:pPr>
           </a:p>
@@ -5046,8 +4850,8 @@
         </p:nvSpPr>
         <p:spPr>
           <a:xfrm>
-            <a:off x="6659103" y="2151798"/>
-            <a:ext cx="4206242" cy="333087"/>
+            <a:off x="6659102" y="2151797"/>
+            <a:ext cx="4206243" cy="333085"/>
           </a:xfrm>
           <a:prstGeom prst="rect">
             <a:avLst/>
@@ -5071,10 +4875,6 @@
                 <a:solidFill>
                   <a:srgbClr val="FFFFFF"/>
                 </a:solidFill>
-                <a:latin typeface="+mn-lt"/>
-                <a:ea typeface="+mn-ea"/>
-                <a:cs typeface="+mn-cs"/>
-                <a:sym typeface="Calibri"/>
               </a:defRPr>
             </a:lvl1pPr>
           </a:lstStyle>
@@ -5094,8 +4894,8 @@
         </p:nvSpPr>
         <p:spPr>
           <a:xfrm>
-            <a:off x="6659103" y="2866982"/>
-            <a:ext cx="4206242" cy="258201"/>
+            <a:off x="6659102" y="2866981"/>
+            <a:ext cx="4206243" cy="258199"/>
           </a:xfrm>
           <a:prstGeom prst="rect">
             <a:avLst/>
@@ -5119,10 +4919,6 @@
                 <a:solidFill>
                   <a:srgbClr val="1A1A2E"/>
                 </a:solidFill>
-                <a:latin typeface="+mn-lt"/>
-                <a:ea typeface="+mn-ea"/>
-                <a:cs typeface="+mn-cs"/>
-                <a:sym typeface="Calibri"/>
               </a:defRPr>
             </a:lvl1pPr>
           </a:lstStyle>
@@ -5142,8 +4938,8 @@
         </p:nvSpPr>
         <p:spPr>
           <a:xfrm>
-            <a:off x="6659103" y="3324182"/>
-            <a:ext cx="4206242" cy="258201"/>
+            <a:off x="6659102" y="3324181"/>
+            <a:ext cx="4206243" cy="258199"/>
           </a:xfrm>
           <a:prstGeom prst="rect">
             <a:avLst/>
@@ -5167,10 +4963,6 @@
                 <a:solidFill>
                   <a:srgbClr val="1A1A2E"/>
                 </a:solidFill>
-                <a:latin typeface="+mn-lt"/>
-                <a:ea typeface="+mn-ea"/>
-                <a:cs typeface="+mn-cs"/>
-                <a:sym typeface="Calibri"/>
               </a:defRPr>
             </a:lvl1pPr>
           </a:lstStyle>
@@ -5190,8 +4982,8 @@
         </p:nvSpPr>
         <p:spPr>
           <a:xfrm>
-            <a:off x="6659103" y="3781382"/>
-            <a:ext cx="4206242" cy="258201"/>
+            <a:off x="6659102" y="3781381"/>
+            <a:ext cx="4206243" cy="258199"/>
           </a:xfrm>
           <a:prstGeom prst="rect">
             <a:avLst/>
@@ -5215,10 +5007,6 @@
                 <a:solidFill>
                   <a:srgbClr val="1A1A2E"/>
                 </a:solidFill>
-                <a:latin typeface="+mn-lt"/>
-                <a:ea typeface="+mn-ea"/>
-                <a:cs typeface="+mn-cs"/>
-                <a:sym typeface="Calibri"/>
               </a:defRPr>
             </a:lvl1pPr>
           </a:lstStyle>
@@ -5238,8 +5026,8 @@
         </p:nvSpPr>
         <p:spPr>
           <a:xfrm>
-            <a:off x="6659103" y="4238582"/>
-            <a:ext cx="4206242" cy="258201"/>
+            <a:off x="6659102" y="4238581"/>
+            <a:ext cx="4206243" cy="258199"/>
           </a:xfrm>
           <a:prstGeom prst="rect">
             <a:avLst/>
@@ -5263,10 +5051,6 @@
                 <a:solidFill>
                   <a:srgbClr val="1A1A2E"/>
                 </a:solidFill>
-                <a:latin typeface="+mn-lt"/>
-                <a:ea typeface="+mn-ea"/>
-                <a:cs typeface="+mn-cs"/>
-                <a:sym typeface="Calibri"/>
               </a:defRPr>
             </a:lvl1pPr>
           </a:lstStyle>
@@ -5286,8 +5070,8 @@
         </p:nvSpPr>
         <p:spPr>
           <a:xfrm>
-            <a:off x="6659103" y="4695782"/>
-            <a:ext cx="4206242" cy="258201"/>
+            <a:off x="6659102" y="4695781"/>
+            <a:ext cx="4206243" cy="258199"/>
           </a:xfrm>
           <a:prstGeom prst="rect">
             <a:avLst/>
@@ -5311,10 +5095,6 @@
                 <a:solidFill>
                   <a:srgbClr val="1A1A2E"/>
                 </a:solidFill>
-                <a:latin typeface="+mn-lt"/>
-                <a:ea typeface="+mn-ea"/>
-                <a:cs typeface="+mn-cs"/>
-                <a:sym typeface="Calibri"/>
               </a:defRPr>
             </a:lvl1pPr>
           </a:lstStyle>
@@ -5396,10 +5176,6 @@
                 <a:solidFill>
                   <a:srgbClr val="FFFFFF"/>
                 </a:solidFill>
-                <a:latin typeface="+mn-lt"/>
-                <a:ea typeface="+mn-ea"/>
-                <a:cs typeface="+mn-cs"/>
-                <a:sym typeface="Calibri"/>
               </a:defRPr>
             </a:pPr>
           </a:p>
@@ -5413,8 +5189,8 @@
         </p:nvSpPr>
         <p:spPr>
           <a:xfrm>
-            <a:off x="777239" y="365759"/>
-            <a:ext cx="9052561" cy="549334"/>
+            <a:off x="777239" y="365758"/>
+            <a:ext cx="9052561" cy="549332"/>
           </a:xfrm>
           <a:prstGeom prst="rect">
             <a:avLst/>
@@ -5438,10 +5214,6 @@
                 <a:solidFill>
                   <a:srgbClr val="FFFFFF"/>
                 </a:solidFill>
-                <a:latin typeface="+mn-lt"/>
-                <a:ea typeface="+mn-ea"/>
-                <a:cs typeface="+mn-cs"/>
-                <a:sym typeface="Calibri"/>
               </a:defRPr>
             </a:lvl1pPr>
           </a:lstStyle>
@@ -5462,7 +5234,7 @@
         <p:spPr>
           <a:xfrm>
             <a:off x="731519" y="1325880"/>
-            <a:ext cx="365763" cy="365763"/>
+            <a:ext cx="365765" cy="365765"/>
           </a:xfrm>
           <a:prstGeom prst="ellipse">
             <a:avLst/>
@@ -5490,10 +5262,6 @@
                 <a:solidFill>
                   <a:srgbClr val="FFFFFF"/>
                 </a:solidFill>
-                <a:latin typeface="+mn-lt"/>
-                <a:ea typeface="+mn-ea"/>
-                <a:cs typeface="+mn-cs"/>
-                <a:sym typeface="Calibri"/>
               </a:defRPr>
             </a:pPr>
           </a:p>
@@ -5507,8 +5275,8 @@
         </p:nvSpPr>
         <p:spPr>
           <a:xfrm>
-            <a:off x="777238" y="1325881"/>
-            <a:ext cx="274322" cy="280798"/>
+            <a:off x="777238" y="1325880"/>
+            <a:ext cx="274323" cy="280796"/>
           </a:xfrm>
           <a:prstGeom prst="rect">
             <a:avLst/>
@@ -5532,10 +5300,6 @@
                 <a:solidFill>
                   <a:srgbClr val="FFFFFF"/>
                 </a:solidFill>
-                <a:latin typeface="+mn-lt"/>
-                <a:ea typeface="+mn-ea"/>
-                <a:cs typeface="+mn-cs"/>
-                <a:sym typeface="Calibri"/>
               </a:defRPr>
             </a:lvl1pPr>
           </a:lstStyle>
@@ -5555,8 +5319,8 @@
         </p:nvSpPr>
         <p:spPr>
           <a:xfrm>
-            <a:off x="1417318" y="1290201"/>
-            <a:ext cx="9966964" cy="506595"/>
+            <a:off x="1417317" y="1290200"/>
+            <a:ext cx="9966966" cy="506594"/>
           </a:xfrm>
           <a:prstGeom prst="rect">
             <a:avLst/>
@@ -5580,10 +5344,6 @@
                 <a:solidFill>
                   <a:srgbClr val="FFFFFF"/>
                 </a:solidFill>
-                <a:latin typeface="+mn-lt"/>
-                <a:ea typeface="+mn-ea"/>
-                <a:cs typeface="+mn-cs"/>
-                <a:sym typeface="Calibri"/>
               </a:defRPr>
             </a:lvl1pPr>
           </a:lstStyle>
@@ -5604,7 +5364,7 @@
         <p:spPr>
           <a:xfrm>
             <a:off x="731519" y="2057399"/>
-            <a:ext cx="365763" cy="365763"/>
+            <a:ext cx="365765" cy="365765"/>
           </a:xfrm>
           <a:prstGeom prst="ellipse">
             <a:avLst/>
@@ -5632,10 +5392,6 @@
                 <a:solidFill>
                   <a:srgbClr val="FFFFFF"/>
                 </a:solidFill>
-                <a:latin typeface="+mn-lt"/>
-                <a:ea typeface="+mn-ea"/>
-                <a:cs typeface="+mn-cs"/>
-                <a:sym typeface="Calibri"/>
               </a:defRPr>
             </a:pPr>
           </a:p>
@@ -5649,8 +5405,8 @@
         </p:nvSpPr>
         <p:spPr>
           <a:xfrm>
-            <a:off x="777238" y="2057400"/>
-            <a:ext cx="274322" cy="280798"/>
+            <a:off x="777238" y="2057399"/>
+            <a:ext cx="274323" cy="280796"/>
           </a:xfrm>
           <a:prstGeom prst="rect">
             <a:avLst/>
@@ -5674,10 +5430,6 @@
                 <a:solidFill>
                   <a:srgbClr val="FFFFFF"/>
                 </a:solidFill>
-                <a:latin typeface="+mn-lt"/>
-                <a:ea typeface="+mn-ea"/>
-                <a:cs typeface="+mn-cs"/>
-                <a:sym typeface="Calibri"/>
               </a:defRPr>
             </a:lvl1pPr>
           </a:lstStyle>
@@ -5697,8 +5449,8 @@
         </p:nvSpPr>
         <p:spPr>
           <a:xfrm>
-            <a:off x="1417318" y="2011679"/>
-            <a:ext cx="9966964" cy="506596"/>
+            <a:off x="1417317" y="2011678"/>
+            <a:ext cx="9966966" cy="506594"/>
           </a:xfrm>
           <a:prstGeom prst="rect">
             <a:avLst/>
@@ -5722,10 +5474,6 @@
                 <a:solidFill>
                   <a:srgbClr val="FFFFFF"/>
                 </a:solidFill>
-                <a:latin typeface="+mn-lt"/>
-                <a:ea typeface="+mn-ea"/>
-                <a:cs typeface="+mn-cs"/>
-                <a:sym typeface="Calibri"/>
               </a:defRPr>
             </a:lvl1pPr>
           </a:lstStyle>
@@ -5746,7 +5494,7 @@
         <p:spPr>
           <a:xfrm>
             <a:off x="731519" y="2788920"/>
-            <a:ext cx="365763" cy="365763"/>
+            <a:ext cx="365765" cy="365765"/>
           </a:xfrm>
           <a:prstGeom prst="ellipse">
             <a:avLst/>
@@ -5774,10 +5522,6 @@
                 <a:solidFill>
                   <a:srgbClr val="FFFFFF"/>
                 </a:solidFill>
-                <a:latin typeface="+mn-lt"/>
-                <a:ea typeface="+mn-ea"/>
-                <a:cs typeface="+mn-cs"/>
-                <a:sym typeface="Calibri"/>
               </a:defRPr>
             </a:pPr>
           </a:p>
@@ -5792,7 +5536,7 @@
         <p:spPr>
           <a:xfrm>
             <a:off x="777238" y="2788921"/>
-            <a:ext cx="274322" cy="280798"/>
+            <a:ext cx="274323" cy="280796"/>
           </a:xfrm>
           <a:prstGeom prst="rect">
             <a:avLst/>
@@ -5816,10 +5560,6 @@
                 <a:solidFill>
                   <a:srgbClr val="FFFFFF"/>
                 </a:solidFill>
-                <a:latin typeface="+mn-lt"/>
-                <a:ea typeface="+mn-ea"/>
-                <a:cs typeface="+mn-cs"/>
-                <a:sym typeface="Calibri"/>
               </a:defRPr>
             </a:lvl1pPr>
           </a:lstStyle>
@@ -5839,8 +5579,8 @@
         </p:nvSpPr>
         <p:spPr>
           <a:xfrm>
-            <a:off x="1417318" y="2733157"/>
-            <a:ext cx="9966964" cy="506595"/>
+            <a:off x="1417317" y="2733157"/>
+            <a:ext cx="9966966" cy="506593"/>
           </a:xfrm>
           <a:prstGeom prst="rect">
             <a:avLst/>
@@ -5864,10 +5604,6 @@
                 <a:solidFill>
                   <a:srgbClr val="FFFFFF"/>
                 </a:solidFill>
-                <a:latin typeface="+mn-lt"/>
-                <a:ea typeface="+mn-ea"/>
-                <a:cs typeface="+mn-cs"/>
-                <a:sym typeface="Calibri"/>
               </a:defRPr>
             </a:lvl1pPr>
           </a:lstStyle>
@@ -5888,7 +5624,7 @@
         <p:spPr>
           <a:xfrm>
             <a:off x="731519" y="3520440"/>
-            <a:ext cx="365763" cy="365763"/>
+            <a:ext cx="365765" cy="365765"/>
           </a:xfrm>
           <a:prstGeom prst="ellipse">
             <a:avLst/>
@@ -5916,10 +5652,6 @@
                 <a:solidFill>
                   <a:srgbClr val="FFFFFF"/>
                 </a:solidFill>
-                <a:latin typeface="+mn-lt"/>
-                <a:ea typeface="+mn-ea"/>
-                <a:cs typeface="+mn-cs"/>
-                <a:sym typeface="Calibri"/>
               </a:defRPr>
             </a:pPr>
           </a:p>
@@ -5933,8 +5665,8 @@
         </p:nvSpPr>
         <p:spPr>
           <a:xfrm>
-            <a:off x="777238" y="3520441"/>
-            <a:ext cx="274322" cy="280798"/>
+            <a:off x="777238" y="3520440"/>
+            <a:ext cx="274323" cy="280796"/>
           </a:xfrm>
           <a:prstGeom prst="rect">
             <a:avLst/>
@@ -5958,10 +5690,6 @@
                 <a:solidFill>
                   <a:srgbClr val="FFFFFF"/>
                 </a:solidFill>
-                <a:latin typeface="+mn-lt"/>
-                <a:ea typeface="+mn-ea"/>
-                <a:cs typeface="+mn-cs"/>
-                <a:sym typeface="Calibri"/>
               </a:defRPr>
             </a:lvl1pPr>
           </a:lstStyle>
@@ -5981,8 +5709,8 @@
         </p:nvSpPr>
         <p:spPr>
           <a:xfrm>
-            <a:off x="1417318" y="3564323"/>
-            <a:ext cx="9966964" cy="277995"/>
+            <a:off x="1417317" y="3564323"/>
+            <a:ext cx="9966966" cy="277993"/>
           </a:xfrm>
           <a:prstGeom prst="rect">
             <a:avLst/>
@@ -6006,10 +5734,6 @@
                 <a:solidFill>
                   <a:srgbClr val="FFFFFF"/>
                 </a:solidFill>
-                <a:latin typeface="+mn-lt"/>
-                <a:ea typeface="+mn-ea"/>
-                <a:cs typeface="+mn-cs"/>
-                <a:sym typeface="Calibri"/>
               </a:defRPr>
             </a:lvl1pPr>
           </a:lstStyle>
@@ -6030,7 +5754,7 @@
         <p:spPr>
           <a:xfrm>
             <a:off x="731519" y="4251959"/>
-            <a:ext cx="365763" cy="365763"/>
+            <a:ext cx="365765" cy="365765"/>
           </a:xfrm>
           <a:prstGeom prst="ellipse">
             <a:avLst/>
@@ -6058,10 +5782,6 @@
                 <a:solidFill>
                   <a:srgbClr val="FFFFFF"/>
                 </a:solidFill>
-                <a:latin typeface="+mn-lt"/>
-                <a:ea typeface="+mn-ea"/>
-                <a:cs typeface="+mn-cs"/>
-                <a:sym typeface="Calibri"/>
               </a:defRPr>
             </a:pPr>
           </a:p>
@@ -6075,8 +5795,8 @@
         </p:nvSpPr>
         <p:spPr>
           <a:xfrm>
-            <a:off x="777238" y="4251960"/>
-            <a:ext cx="274322" cy="280798"/>
+            <a:off x="777238" y="4251959"/>
+            <a:ext cx="274323" cy="280796"/>
           </a:xfrm>
           <a:prstGeom prst="rect">
             <a:avLst/>
@@ -6100,10 +5820,6 @@
                 <a:solidFill>
                   <a:srgbClr val="FFFFFF"/>
                 </a:solidFill>
-                <a:latin typeface="+mn-lt"/>
-                <a:ea typeface="+mn-ea"/>
-                <a:cs typeface="+mn-cs"/>
-                <a:sym typeface="Calibri"/>
               </a:defRPr>
             </a:lvl1pPr>
           </a:lstStyle>
@@ -6123,8 +5839,8 @@
         </p:nvSpPr>
         <p:spPr>
           <a:xfrm>
-            <a:off x="1417318" y="4295842"/>
-            <a:ext cx="9966964" cy="277996"/>
+            <a:off x="1417317" y="4295842"/>
+            <a:ext cx="9966966" cy="277993"/>
           </a:xfrm>
           <a:prstGeom prst="rect">
             <a:avLst/>
@@ -6148,10 +5864,6 @@
                 <a:solidFill>
                   <a:srgbClr val="FFFFFF"/>
                 </a:solidFill>
-                <a:latin typeface="+mn-lt"/>
-                <a:ea typeface="+mn-ea"/>
-                <a:cs typeface="+mn-cs"/>
-                <a:sym typeface="Calibri"/>
               </a:defRPr>
             </a:lvl1pPr>
           </a:lstStyle>
@@ -6172,7 +5884,7 @@
         <p:spPr>
           <a:xfrm>
             <a:off x="731519" y="4983479"/>
-            <a:ext cx="365763" cy="365763"/>
+            <a:ext cx="365765" cy="365765"/>
           </a:xfrm>
           <a:prstGeom prst="ellipse">
             <a:avLst/>
@@ -6200,10 +5912,6 @@
                 <a:solidFill>
                   <a:srgbClr val="FFFFFF"/>
                 </a:solidFill>
-                <a:latin typeface="+mn-lt"/>
-                <a:ea typeface="+mn-ea"/>
-                <a:cs typeface="+mn-cs"/>
-                <a:sym typeface="Calibri"/>
               </a:defRPr>
             </a:pPr>
           </a:p>
@@ -6217,8 +5925,8 @@
         </p:nvSpPr>
         <p:spPr>
           <a:xfrm>
-            <a:off x="777238" y="4983480"/>
-            <a:ext cx="274322" cy="280798"/>
+            <a:off x="777238" y="4983479"/>
+            <a:ext cx="274323" cy="280796"/>
           </a:xfrm>
           <a:prstGeom prst="rect">
             <a:avLst/>
@@ -6242,10 +5950,6 @@
                 <a:solidFill>
                   <a:srgbClr val="FFFFFF"/>
                 </a:solidFill>
-                <a:latin typeface="+mn-lt"/>
-                <a:ea typeface="+mn-ea"/>
-                <a:cs typeface="+mn-cs"/>
-                <a:sym typeface="Calibri"/>
               </a:defRPr>
             </a:lvl1pPr>
           </a:lstStyle>
@@ -6265,8 +5969,8 @@
         </p:nvSpPr>
         <p:spPr>
           <a:xfrm>
-            <a:off x="1417318" y="5027362"/>
-            <a:ext cx="9966964" cy="277995"/>
+            <a:off x="1417317" y="5027362"/>
+            <a:ext cx="9966966" cy="277993"/>
           </a:xfrm>
           <a:prstGeom prst="rect">
             <a:avLst/>
@@ -6290,10 +5994,6 @@
                 <a:solidFill>
                   <a:srgbClr val="FFFFFF"/>
                 </a:solidFill>
-                <a:latin typeface="+mn-lt"/>
-                <a:ea typeface="+mn-ea"/>
-                <a:cs typeface="+mn-cs"/>
-                <a:sym typeface="Calibri"/>
               </a:defRPr>
             </a:lvl1pPr>
           </a:lstStyle>
@@ -6314,7 +6014,7 @@
         <p:spPr>
           <a:xfrm>
             <a:off x="731519" y="5714998"/>
-            <a:ext cx="365763" cy="365763"/>
+            <a:ext cx="365765" cy="365765"/>
           </a:xfrm>
           <a:prstGeom prst="ellipse">
             <a:avLst/>
@@ -6342,10 +6042,6 @@
                 <a:solidFill>
                   <a:srgbClr val="FFFFFF"/>
                 </a:solidFill>
-                <a:latin typeface="+mn-lt"/>
-                <a:ea typeface="+mn-ea"/>
-                <a:cs typeface="+mn-cs"/>
-                <a:sym typeface="Calibri"/>
               </a:defRPr>
             </a:pPr>
           </a:p>
@@ -6359,8 +6055,8 @@
         </p:nvSpPr>
         <p:spPr>
           <a:xfrm>
-            <a:off x="777238" y="5714999"/>
-            <a:ext cx="274322" cy="280798"/>
+            <a:off x="777238" y="5714998"/>
+            <a:ext cx="274323" cy="280796"/>
           </a:xfrm>
           <a:prstGeom prst="rect">
             <a:avLst/>
@@ -6384,10 +6080,6 @@
                 <a:solidFill>
                   <a:srgbClr val="FFFFFF"/>
                 </a:solidFill>
-                <a:latin typeface="+mn-lt"/>
-                <a:ea typeface="+mn-ea"/>
-                <a:cs typeface="+mn-cs"/>
-                <a:sym typeface="Calibri"/>
               </a:defRPr>
             </a:lvl1pPr>
           </a:lstStyle>
@@ -6407,8 +6099,8 @@
         </p:nvSpPr>
         <p:spPr>
           <a:xfrm>
-            <a:off x="1417318" y="5758882"/>
-            <a:ext cx="9966964" cy="277995"/>
+            <a:off x="1417317" y="5758881"/>
+            <a:ext cx="9966966" cy="277993"/>
           </a:xfrm>
           <a:prstGeom prst="rect">
             <a:avLst/>
@@ -6432,10 +6124,6 @@
                 <a:solidFill>
                   <a:srgbClr val="FFFFFF"/>
                 </a:solidFill>
-                <a:latin typeface="+mn-lt"/>
-                <a:ea typeface="+mn-ea"/>
-                <a:cs typeface="+mn-cs"/>
-                <a:sym typeface="Calibri"/>
               </a:defRPr>
             </a:lvl1pPr>
           </a:lstStyle>
@@ -6517,10 +6205,6 @@
                 <a:solidFill>
                   <a:srgbClr val="FFFFFF"/>
                 </a:solidFill>
-                <a:latin typeface="+mn-lt"/>
-                <a:ea typeface="+mn-ea"/>
-                <a:cs typeface="+mn-cs"/>
-                <a:sym typeface="Calibri"/>
               </a:defRPr>
             </a:pPr>
           </a:p>
@@ -6535,7 +6219,7 @@
         <p:spPr>
           <a:xfrm>
             <a:off x="1417319" y="1828800"/>
-            <a:ext cx="9326882" cy="706199"/>
+            <a:ext cx="9326882" cy="706196"/>
           </a:xfrm>
           <a:prstGeom prst="rect">
             <a:avLst/>
@@ -6559,10 +6243,6 @@
                 <a:solidFill>
                   <a:srgbClr val="FFFFFF"/>
                 </a:solidFill>
-                <a:latin typeface="+mn-lt"/>
-                <a:ea typeface="+mn-ea"/>
-                <a:cs typeface="+mn-cs"/>
-                <a:sym typeface="Calibri"/>
               </a:defRPr>
             </a:lvl1pPr>
           </a:lstStyle>
@@ -6583,7 +6263,7 @@
         <p:spPr>
           <a:xfrm>
             <a:off x="4571998" y="3017520"/>
-            <a:ext cx="3017523" cy="36578"/>
+            <a:ext cx="3017524" cy="36579"/>
           </a:xfrm>
           <a:prstGeom prst="rect">
             <a:avLst/>
@@ -6611,10 +6291,6 @@
                 <a:solidFill>
                   <a:srgbClr val="FFFFFF"/>
                 </a:solidFill>
-                <a:latin typeface="+mn-lt"/>
-                <a:ea typeface="+mn-ea"/>
-                <a:cs typeface="+mn-cs"/>
-                <a:sym typeface="Calibri"/>
               </a:defRPr>
             </a:pPr>
           </a:p>
@@ -6628,8 +6304,8 @@
         </p:nvSpPr>
         <p:spPr>
           <a:xfrm>
-            <a:off x="1417319" y="3474721"/>
-            <a:ext cx="9326882" cy="444757"/>
+            <a:off x="1417319" y="3474720"/>
+            <a:ext cx="9326882" cy="444755"/>
           </a:xfrm>
           <a:prstGeom prst="rect">
             <a:avLst/>
@@ -6653,10 +6329,6 @@
                 <a:solidFill>
                   <a:srgbClr val="CADCFC"/>
                 </a:solidFill>
-                <a:latin typeface="+mn-lt"/>
-                <a:ea typeface="+mn-ea"/>
-                <a:cs typeface="+mn-cs"/>
-                <a:sym typeface="Calibri"/>
               </a:defRPr>
             </a:lvl1pPr>
           </a:lstStyle>
@@ -6677,7 +6349,7 @@
         <p:spPr>
           <a:xfrm>
             <a:off x="1417319" y="4572000"/>
-            <a:ext cx="9326882" cy="300593"/>
+            <a:ext cx="9326882" cy="300590"/>
           </a:xfrm>
           <a:prstGeom prst="rect">
             <a:avLst/>
@@ -6701,10 +6373,6 @@
                 <a:solidFill>
                   <a:srgbClr val="CADCFC"/>
                 </a:solidFill>
-                <a:latin typeface="+mn-lt"/>
-                <a:ea typeface="+mn-ea"/>
-                <a:cs typeface="+mn-cs"/>
-                <a:sym typeface="Calibri"/>
               </a:defRPr>
             </a:lvl1pPr>
           </a:lstStyle>
@@ -6724,8 +6392,8 @@
         </p:nvSpPr>
         <p:spPr>
           <a:xfrm>
-            <a:off x="1417319" y="5120641"/>
-            <a:ext cx="9326882" cy="280798"/>
+            <a:off x="1417319" y="5120640"/>
+            <a:ext cx="9326882" cy="280796"/>
           </a:xfrm>
           <a:prstGeom prst="rect">
             <a:avLst/>
@@ -6749,10 +6417,6 @@
                 <a:solidFill>
                   <a:srgbClr val="6B7B8D"/>
                 </a:solidFill>
-                <a:latin typeface="+mn-lt"/>
-                <a:ea typeface="+mn-ea"/>
-                <a:cs typeface="+mn-cs"/>
-                <a:sym typeface="Calibri"/>
               </a:defRPr>
             </a:lvl1pPr>
           </a:lstStyle>
@@ -6827,10 +6491,6 @@
                 <a:solidFill>
                   <a:srgbClr val="FFFFFF"/>
                 </a:solidFill>
-                <a:latin typeface="+mn-lt"/>
-                <a:ea typeface="+mn-ea"/>
-                <a:cs typeface="+mn-cs"/>
-                <a:sym typeface="Calibri"/>
               </a:defRPr>
             </a:pPr>
           </a:p>
@@ -6844,8 +6504,8 @@
         </p:nvSpPr>
         <p:spPr>
           <a:xfrm>
-            <a:off x="777239" y="457199"/>
-            <a:ext cx="9052561" cy="542240"/>
+            <a:off x="777239" y="457198"/>
+            <a:ext cx="9052561" cy="542238"/>
           </a:xfrm>
           <a:prstGeom prst="rect">
             <a:avLst/>
@@ -6869,10 +6529,6 @@
                 <a:solidFill>
                   <a:srgbClr val="1E2761"/>
                 </a:solidFill>
-                <a:latin typeface="+mn-lt"/>
-                <a:ea typeface="+mn-ea"/>
-                <a:cs typeface="+mn-cs"/>
-                <a:sym typeface="Calibri"/>
               </a:defRPr>
             </a:lvl1pPr>
           </a:lstStyle>
@@ -6892,8 +6548,8 @@
         </p:nvSpPr>
         <p:spPr>
           <a:xfrm>
-            <a:off x="777238" y="1463039"/>
-            <a:ext cx="4937762" cy="385375"/>
+            <a:off x="777237" y="1463038"/>
+            <a:ext cx="4937764" cy="385373"/>
           </a:xfrm>
           <a:prstGeom prst="rect">
             <a:avLst/>
@@ -6917,10 +6573,6 @@
                 <a:solidFill>
                   <a:srgbClr val="00A896"/>
                 </a:solidFill>
-                <a:latin typeface="+mn-lt"/>
-                <a:ea typeface="+mn-ea"/>
-                <a:cs typeface="+mn-cs"/>
-                <a:sym typeface="Calibri"/>
               </a:defRPr>
             </a:lvl1pPr>
           </a:lstStyle>
@@ -6941,7 +6593,7 @@
         <p:spPr>
           <a:xfrm>
             <a:off x="731519" y="2103120"/>
-            <a:ext cx="54866" cy="457202"/>
+            <a:ext cx="54867" cy="457203"/>
           </a:xfrm>
           <a:prstGeom prst="rect">
             <a:avLst/>
@@ -6969,10 +6621,6 @@
                 <a:solidFill>
                   <a:srgbClr val="FFFFFF"/>
                 </a:solidFill>
-                <a:latin typeface="+mn-lt"/>
-                <a:ea typeface="+mn-ea"/>
-                <a:cs typeface="+mn-cs"/>
-                <a:sym typeface="Calibri"/>
               </a:defRPr>
             </a:pPr>
           </a:p>
@@ -6987,7 +6635,7 @@
         <p:spPr>
           <a:xfrm>
             <a:off x="1142999" y="2103121"/>
-            <a:ext cx="4572002" cy="506595"/>
+            <a:ext cx="4572002" cy="506593"/>
           </a:xfrm>
           <a:prstGeom prst="rect">
             <a:avLst/>
@@ -7011,10 +6659,6 @@
                 <a:solidFill>
                   <a:srgbClr val="1A1A2E"/>
                 </a:solidFill>
-                <a:latin typeface="+mn-lt"/>
-                <a:ea typeface="+mn-ea"/>
-                <a:cs typeface="+mn-cs"/>
-                <a:sym typeface="Calibri"/>
               </a:defRPr>
             </a:lvl1pPr>
           </a:lstStyle>
@@ -7035,7 +6679,7 @@
         <p:spPr>
           <a:xfrm>
             <a:off x="731519" y="3017520"/>
-            <a:ext cx="54866" cy="457202"/>
+            <a:ext cx="54867" cy="457203"/>
           </a:xfrm>
           <a:prstGeom prst="rect">
             <a:avLst/>
@@ -7063,10 +6707,6 @@
                 <a:solidFill>
                   <a:srgbClr val="FFFFFF"/>
                 </a:solidFill>
-                <a:latin typeface="+mn-lt"/>
-                <a:ea typeface="+mn-ea"/>
-                <a:cs typeface="+mn-cs"/>
-                <a:sym typeface="Calibri"/>
               </a:defRPr>
             </a:pPr>
           </a:p>
@@ -7081,7 +6721,7 @@
         <p:spPr>
           <a:xfrm>
             <a:off x="1142999" y="3017521"/>
-            <a:ext cx="4572002" cy="506595"/>
+            <a:ext cx="4572002" cy="506593"/>
           </a:xfrm>
           <a:prstGeom prst="rect">
             <a:avLst/>
@@ -7105,10 +6745,6 @@
                 <a:solidFill>
                   <a:srgbClr val="1A1A2E"/>
                 </a:solidFill>
-                <a:latin typeface="+mn-lt"/>
-                <a:ea typeface="+mn-ea"/>
-                <a:cs typeface="+mn-cs"/>
-                <a:sym typeface="Calibri"/>
               </a:defRPr>
             </a:lvl1pPr>
           </a:lstStyle>
@@ -7129,7 +6765,7 @@
         <p:spPr>
           <a:xfrm>
             <a:off x="731519" y="3931920"/>
-            <a:ext cx="54866" cy="457202"/>
+            <a:ext cx="54867" cy="457203"/>
           </a:xfrm>
           <a:prstGeom prst="rect">
             <a:avLst/>
@@ -7157,10 +6793,6 @@
                 <a:solidFill>
                   <a:srgbClr val="FFFFFF"/>
                 </a:solidFill>
-                <a:latin typeface="+mn-lt"/>
-                <a:ea typeface="+mn-ea"/>
-                <a:cs typeface="+mn-cs"/>
-                <a:sym typeface="Calibri"/>
               </a:defRPr>
             </a:pPr>
           </a:p>
@@ -7174,8 +6806,8 @@
         </p:nvSpPr>
         <p:spPr>
           <a:xfrm>
-            <a:off x="1142999" y="3931921"/>
-            <a:ext cx="4572002" cy="506595"/>
+            <a:off x="1142999" y="3931920"/>
+            <a:ext cx="4572002" cy="506593"/>
           </a:xfrm>
           <a:prstGeom prst="rect">
             <a:avLst/>
@@ -7199,10 +6831,6 @@
                 <a:solidFill>
                   <a:srgbClr val="1A1A2E"/>
                 </a:solidFill>
-                <a:latin typeface="+mn-lt"/>
-                <a:ea typeface="+mn-ea"/>
-                <a:cs typeface="+mn-cs"/>
-                <a:sym typeface="Calibri"/>
               </a:defRPr>
             </a:lvl1pPr>
           </a:lstStyle>
@@ -7222,8 +6850,8 @@
         </p:nvSpPr>
         <p:spPr>
           <a:xfrm>
-            <a:off x="6629399" y="1463039"/>
-            <a:ext cx="4480563" cy="385375"/>
+            <a:off x="6629399" y="1463038"/>
+            <a:ext cx="4480564" cy="385373"/>
           </a:xfrm>
           <a:prstGeom prst="rect">
             <a:avLst/>
@@ -7247,10 +6875,6 @@
                 <a:solidFill>
                   <a:srgbClr val="00A896"/>
                 </a:solidFill>
-                <a:latin typeface="+mn-lt"/>
-                <a:ea typeface="+mn-ea"/>
-                <a:cs typeface="+mn-cs"/>
-                <a:sym typeface="Calibri"/>
               </a:defRPr>
             </a:lvl1pPr>
           </a:lstStyle>
@@ -7271,7 +6895,7 @@
         <p:spPr>
           <a:xfrm>
             <a:off x="6583680" y="2103120"/>
-            <a:ext cx="4846322" cy="777242"/>
+            <a:ext cx="4846323" cy="777243"/>
           </a:xfrm>
           <a:prstGeom prst="rect">
             <a:avLst/>
@@ -7299,10 +6923,6 @@
                 <a:solidFill>
                   <a:srgbClr val="FFFFFF"/>
                 </a:solidFill>
-                <a:latin typeface="+mn-lt"/>
-                <a:ea typeface="+mn-ea"/>
-                <a:cs typeface="+mn-cs"/>
-                <a:sym typeface="Calibri"/>
               </a:defRPr>
             </a:pPr>
           </a:p>
@@ -7317,7 +6937,7 @@
         <p:spPr>
           <a:xfrm>
             <a:off x="6583680" y="2103120"/>
-            <a:ext cx="73154" cy="777242"/>
+            <a:ext cx="73155" cy="777243"/>
           </a:xfrm>
           <a:prstGeom prst="rect">
             <a:avLst/>
@@ -7345,10 +6965,6 @@
                 <a:solidFill>
                   <a:srgbClr val="FFFFFF"/>
                 </a:solidFill>
-                <a:latin typeface="+mn-lt"/>
-                <a:ea typeface="+mn-ea"/>
-                <a:cs typeface="+mn-cs"/>
-                <a:sym typeface="Calibri"/>
               </a:defRPr>
             </a:pPr>
           </a:p>
@@ -7362,8 +6978,8 @@
         </p:nvSpPr>
         <p:spPr>
           <a:xfrm>
-            <a:off x="6995159" y="2148839"/>
-            <a:ext cx="1737362" cy="333086"/>
+            <a:off x="6995159" y="2148838"/>
+            <a:ext cx="1737363" cy="333085"/>
           </a:xfrm>
           <a:prstGeom prst="rect">
             <a:avLst/>
@@ -7387,10 +7003,6 @@
                 <a:solidFill>
                   <a:srgbClr val="1E2761"/>
                 </a:solidFill>
-                <a:latin typeface="+mn-lt"/>
-                <a:ea typeface="+mn-ea"/>
-                <a:cs typeface="+mn-cs"/>
-                <a:sym typeface="Calibri"/>
               </a:defRPr>
             </a:lvl1pPr>
           </a:lstStyle>
@@ -7410,8 +7022,8 @@
         </p:nvSpPr>
         <p:spPr>
           <a:xfrm>
-            <a:off x="6995159" y="2468878"/>
-            <a:ext cx="4023362" cy="258201"/>
+            <a:off x="6995158" y="2468877"/>
+            <a:ext cx="4023364" cy="258199"/>
           </a:xfrm>
           <a:prstGeom prst="rect">
             <a:avLst/>
@@ -7435,10 +7047,6 @@
                 <a:solidFill>
                   <a:srgbClr val="6B7B8D"/>
                 </a:solidFill>
-                <a:latin typeface="+mn-lt"/>
-                <a:ea typeface="+mn-ea"/>
-                <a:cs typeface="+mn-cs"/>
-                <a:sym typeface="Calibri"/>
               </a:defRPr>
             </a:lvl1pPr>
           </a:lstStyle>
@@ -7459,7 +7067,7 @@
         <p:spPr>
           <a:xfrm>
             <a:off x="6583680" y="3063238"/>
-            <a:ext cx="4846322" cy="777242"/>
+            <a:ext cx="4846323" cy="777243"/>
           </a:xfrm>
           <a:prstGeom prst="rect">
             <a:avLst/>
@@ -7487,10 +7095,6 @@
                 <a:solidFill>
                   <a:srgbClr val="FFFFFF"/>
                 </a:solidFill>
-                <a:latin typeface="+mn-lt"/>
-                <a:ea typeface="+mn-ea"/>
-                <a:cs typeface="+mn-cs"/>
-                <a:sym typeface="Calibri"/>
               </a:defRPr>
             </a:pPr>
           </a:p>
@@ -7505,7 +7109,7 @@
         <p:spPr>
           <a:xfrm>
             <a:off x="6583680" y="3063238"/>
-            <a:ext cx="73154" cy="777242"/>
+            <a:ext cx="73155" cy="777243"/>
           </a:xfrm>
           <a:prstGeom prst="rect">
             <a:avLst/>
@@ -7533,10 +7137,6 @@
                 <a:solidFill>
                   <a:srgbClr val="FFFFFF"/>
                 </a:solidFill>
-                <a:latin typeface="+mn-lt"/>
-                <a:ea typeface="+mn-ea"/>
-                <a:cs typeface="+mn-cs"/>
-                <a:sym typeface="Calibri"/>
               </a:defRPr>
             </a:pPr>
           </a:p>
@@ -7551,7 +7151,7 @@
         <p:spPr>
           <a:xfrm>
             <a:off x="6995159" y="3108960"/>
-            <a:ext cx="1737362" cy="333086"/>
+            <a:ext cx="1737363" cy="333084"/>
           </a:xfrm>
           <a:prstGeom prst="rect">
             <a:avLst/>
@@ -7575,10 +7175,6 @@
                 <a:solidFill>
                   <a:srgbClr val="1E2761"/>
                 </a:solidFill>
-                <a:latin typeface="+mn-lt"/>
-                <a:ea typeface="+mn-ea"/>
-                <a:cs typeface="+mn-cs"/>
-                <a:sym typeface="Calibri"/>
               </a:defRPr>
             </a:lvl1pPr>
           </a:lstStyle>
@@ -7598,8 +7194,8 @@
         </p:nvSpPr>
         <p:spPr>
           <a:xfrm>
-            <a:off x="6995159" y="3428999"/>
-            <a:ext cx="4023362" cy="258200"/>
+            <a:off x="6995158" y="3428998"/>
+            <a:ext cx="4023364" cy="258199"/>
           </a:xfrm>
           <a:prstGeom prst="rect">
             <a:avLst/>
@@ -7623,10 +7219,6 @@
                 <a:solidFill>
                   <a:srgbClr val="6B7B8D"/>
                 </a:solidFill>
-                <a:latin typeface="+mn-lt"/>
-                <a:ea typeface="+mn-ea"/>
-                <a:cs typeface="+mn-cs"/>
-                <a:sym typeface="Calibri"/>
               </a:defRPr>
             </a:lvl1pPr>
           </a:lstStyle>
@@ -7647,7 +7239,7 @@
         <p:spPr>
           <a:xfrm>
             <a:off x="6583680" y="4023359"/>
-            <a:ext cx="4846322" cy="777242"/>
+            <a:ext cx="4846323" cy="777243"/>
           </a:xfrm>
           <a:prstGeom prst="rect">
             <a:avLst/>
@@ -7675,10 +7267,6 @@
                 <a:solidFill>
                   <a:srgbClr val="FFFFFF"/>
                 </a:solidFill>
-                <a:latin typeface="+mn-lt"/>
-                <a:ea typeface="+mn-ea"/>
-                <a:cs typeface="+mn-cs"/>
-                <a:sym typeface="Calibri"/>
               </a:defRPr>
             </a:pPr>
           </a:p>
@@ -7693,7 +7281,7 @@
         <p:spPr>
           <a:xfrm>
             <a:off x="6583680" y="4023359"/>
-            <a:ext cx="73154" cy="777242"/>
+            <a:ext cx="73155" cy="777243"/>
           </a:xfrm>
           <a:prstGeom prst="rect">
             <a:avLst/>
@@ -7721,10 +7309,6 @@
                 <a:solidFill>
                   <a:srgbClr val="FFFFFF"/>
                 </a:solidFill>
-                <a:latin typeface="+mn-lt"/>
-                <a:ea typeface="+mn-ea"/>
-                <a:cs typeface="+mn-cs"/>
-                <a:sym typeface="Calibri"/>
               </a:defRPr>
             </a:pPr>
           </a:p>
@@ -7738,8 +7322,8 @@
         </p:nvSpPr>
         <p:spPr>
           <a:xfrm>
-            <a:off x="6995159" y="4069080"/>
-            <a:ext cx="1737362" cy="333086"/>
+            <a:off x="6995159" y="4069079"/>
+            <a:ext cx="1737363" cy="333085"/>
           </a:xfrm>
           <a:prstGeom prst="rect">
             <a:avLst/>
@@ -7763,10 +7347,6 @@
                 <a:solidFill>
                   <a:srgbClr val="1E2761"/>
                 </a:solidFill>
-                <a:latin typeface="+mn-lt"/>
-                <a:ea typeface="+mn-ea"/>
-                <a:cs typeface="+mn-cs"/>
-                <a:sym typeface="Calibri"/>
               </a:defRPr>
             </a:lvl1pPr>
           </a:lstStyle>
@@ -7786,8 +7366,8 @@
         </p:nvSpPr>
         <p:spPr>
           <a:xfrm>
-            <a:off x="6995159" y="4389121"/>
-            <a:ext cx="4023362" cy="258200"/>
+            <a:off x="6995158" y="4389120"/>
+            <a:ext cx="4023364" cy="258199"/>
           </a:xfrm>
           <a:prstGeom prst="rect">
             <a:avLst/>
@@ -7811,10 +7391,6 @@
                 <a:solidFill>
                   <a:srgbClr val="6B7B8D"/>
                 </a:solidFill>
-                <a:latin typeface="+mn-lt"/>
-                <a:ea typeface="+mn-ea"/>
-                <a:cs typeface="+mn-cs"/>
-                <a:sym typeface="Calibri"/>
               </a:defRPr>
             </a:lvl1pPr>
           </a:lstStyle>
@@ -7835,7 +7411,7 @@
         <p:spPr>
           <a:xfrm>
             <a:off x="6583680" y="4983479"/>
-            <a:ext cx="4846322" cy="777242"/>
+            <a:ext cx="4846323" cy="777243"/>
           </a:xfrm>
           <a:prstGeom prst="rect">
             <a:avLst/>
@@ -7863,10 +7439,6 @@
                 <a:solidFill>
                   <a:srgbClr val="FFFFFF"/>
                 </a:solidFill>
-                <a:latin typeface="+mn-lt"/>
-                <a:ea typeface="+mn-ea"/>
-                <a:cs typeface="+mn-cs"/>
-                <a:sym typeface="Calibri"/>
               </a:defRPr>
             </a:pPr>
           </a:p>
@@ -7881,7 +7453,7 @@
         <p:spPr>
           <a:xfrm>
             <a:off x="6583680" y="4983479"/>
-            <a:ext cx="73154" cy="777242"/>
+            <a:ext cx="73155" cy="777243"/>
           </a:xfrm>
           <a:prstGeom prst="rect">
             <a:avLst/>
@@ -7909,10 +7481,6 @@
                 <a:solidFill>
                   <a:srgbClr val="FFFFFF"/>
                 </a:solidFill>
-                <a:latin typeface="+mn-lt"/>
-                <a:ea typeface="+mn-ea"/>
-                <a:cs typeface="+mn-cs"/>
-                <a:sym typeface="Calibri"/>
               </a:defRPr>
             </a:pPr>
           </a:p>
@@ -7926,8 +7494,8 @@
         </p:nvSpPr>
         <p:spPr>
           <a:xfrm>
-            <a:off x="6995159" y="5029199"/>
-            <a:ext cx="1737362" cy="333087"/>
+            <a:off x="6995159" y="5029198"/>
+            <a:ext cx="1737363" cy="333085"/>
           </a:xfrm>
           <a:prstGeom prst="rect">
             <a:avLst/>
@@ -7951,10 +7519,6 @@
                 <a:solidFill>
                   <a:srgbClr val="1E2761"/>
                 </a:solidFill>
-                <a:latin typeface="+mn-lt"/>
-                <a:ea typeface="+mn-ea"/>
-                <a:cs typeface="+mn-cs"/>
-                <a:sym typeface="Calibri"/>
               </a:defRPr>
             </a:lvl1pPr>
           </a:lstStyle>
@@ -7974,8 +7538,8 @@
         </p:nvSpPr>
         <p:spPr>
           <a:xfrm>
-            <a:off x="6995159" y="5349241"/>
-            <a:ext cx="4023362" cy="258201"/>
+            <a:off x="6995158" y="5349240"/>
+            <a:ext cx="4023364" cy="258199"/>
           </a:xfrm>
           <a:prstGeom prst="rect">
             <a:avLst/>
@@ -7999,10 +7563,6 @@
                 <a:solidFill>
                   <a:srgbClr val="6B7B8D"/>
                 </a:solidFill>
-                <a:latin typeface="+mn-lt"/>
-                <a:ea typeface="+mn-ea"/>
-                <a:cs typeface="+mn-cs"/>
-                <a:sym typeface="Calibri"/>
               </a:defRPr>
             </a:lvl1pPr>
           </a:lstStyle>
@@ -8077,10 +7637,6 @@
                 <a:solidFill>
                   <a:srgbClr val="FFFFFF"/>
                 </a:solidFill>
-                <a:latin typeface="+mn-lt"/>
-                <a:ea typeface="+mn-ea"/>
-                <a:cs typeface="+mn-cs"/>
-                <a:sym typeface="Calibri"/>
               </a:defRPr>
             </a:pPr>
           </a:p>
@@ -8094,8 +7650,8 @@
         </p:nvSpPr>
         <p:spPr>
           <a:xfrm>
-            <a:off x="777239" y="457199"/>
-            <a:ext cx="9052561" cy="542240"/>
+            <a:off x="777239" y="457198"/>
+            <a:ext cx="9052561" cy="542238"/>
           </a:xfrm>
           <a:prstGeom prst="rect">
             <a:avLst/>
@@ -8119,10 +7675,6 @@
                 <a:solidFill>
                   <a:srgbClr val="1E2761"/>
                 </a:solidFill>
-                <a:latin typeface="+mn-lt"/>
-                <a:ea typeface="+mn-ea"/>
-                <a:cs typeface="+mn-cs"/>
-                <a:sym typeface="Calibri"/>
               </a:defRPr>
             </a:lvl1pPr>
           </a:lstStyle>
@@ -8143,7 +7695,7 @@
         <p:spPr>
           <a:xfrm>
             <a:off x="731519" y="1645920"/>
-            <a:ext cx="10698482" cy="1188722"/>
+            <a:ext cx="10698482" cy="1188723"/>
           </a:xfrm>
           <a:prstGeom prst="rect">
             <a:avLst/>
@@ -8171,10 +7723,6 @@
                 <a:solidFill>
                   <a:srgbClr val="FFFFFF"/>
                 </a:solidFill>
-                <a:latin typeface="+mn-lt"/>
-                <a:ea typeface="+mn-ea"/>
-                <a:cs typeface="+mn-cs"/>
-                <a:sym typeface="Calibri"/>
               </a:defRPr>
             </a:pPr>
           </a:p>
@@ -8189,7 +7737,7 @@
         <p:spPr>
           <a:xfrm>
             <a:off x="1234438" y="1885786"/>
-            <a:ext cx="9692644" cy="644980"/>
+            <a:ext cx="9692645" cy="644978"/>
           </a:xfrm>
           <a:prstGeom prst="rect">
             <a:avLst/>
@@ -8213,10 +7761,6 @@
                 <a:solidFill>
                   <a:srgbClr val="FFFFFF"/>
                 </a:solidFill>
-                <a:latin typeface="+mn-lt"/>
-                <a:ea typeface="+mn-ea"/>
-                <a:cs typeface="+mn-cs"/>
-                <a:sym typeface="Calibri"/>
               </a:defRPr>
             </a:lvl1pPr>
           </a:lstStyle>
@@ -8236,8 +7780,8 @@
         </p:nvSpPr>
         <p:spPr>
           <a:xfrm>
-            <a:off x="777238" y="3291841"/>
-            <a:ext cx="4937762" cy="385374"/>
+            <a:off x="777237" y="3291840"/>
+            <a:ext cx="4937764" cy="385373"/>
           </a:xfrm>
           <a:prstGeom prst="rect">
             <a:avLst/>
@@ -8261,10 +7805,6 @@
                 <a:solidFill>
                   <a:srgbClr val="00A896"/>
                 </a:solidFill>
-                <a:latin typeface="+mn-lt"/>
-                <a:ea typeface="+mn-ea"/>
-                <a:cs typeface="+mn-cs"/>
-                <a:sym typeface="Calibri"/>
               </a:defRPr>
             </a:lvl1pPr>
           </a:lstStyle>
@@ -8284,8 +7824,8 @@
         </p:nvSpPr>
         <p:spPr>
           <a:xfrm>
-            <a:off x="777238" y="3840480"/>
-            <a:ext cx="4937762" cy="1062592"/>
+            <a:off x="777237" y="3840479"/>
+            <a:ext cx="4937764" cy="1062591"/>
           </a:xfrm>
           <a:prstGeom prst="rect">
             <a:avLst/>
@@ -8309,10 +7849,6 @@
                 <a:solidFill>
                   <a:srgbClr val="1A1A2E"/>
                 </a:solidFill>
-                <a:latin typeface="+mn-lt"/>
-                <a:ea typeface="+mn-ea"/>
-                <a:cs typeface="+mn-cs"/>
-                <a:sym typeface="Calibri"/>
               </a:defRPr>
             </a:lvl1pPr>
           </a:lstStyle>
@@ -8332,8 +7868,8 @@
         </p:nvSpPr>
         <p:spPr>
           <a:xfrm>
-            <a:off x="6629399" y="3291841"/>
-            <a:ext cx="4937763" cy="385374"/>
+            <a:off x="6629399" y="3291840"/>
+            <a:ext cx="4937764" cy="385373"/>
           </a:xfrm>
           <a:prstGeom prst="rect">
             <a:avLst/>
@@ -8357,10 +7893,6 @@
                 <a:solidFill>
                   <a:srgbClr val="00A896"/>
                 </a:solidFill>
-                <a:latin typeface="+mn-lt"/>
-                <a:ea typeface="+mn-ea"/>
-                <a:cs typeface="+mn-cs"/>
-                <a:sym typeface="Calibri"/>
               </a:defRPr>
             </a:lvl1pPr>
           </a:lstStyle>
@@ -8380,8 +7912,8 @@
         </p:nvSpPr>
         <p:spPr>
           <a:xfrm>
-            <a:off x="6629399" y="3840480"/>
-            <a:ext cx="4937763" cy="277995"/>
+            <a:off x="6629399" y="3840479"/>
+            <a:ext cx="4937764" cy="277993"/>
           </a:xfrm>
           <a:prstGeom prst="rect">
             <a:avLst/>
@@ -8405,10 +7937,6 @@
                 <a:solidFill>
                   <a:srgbClr val="1A1A2E"/>
                 </a:solidFill>
-                <a:latin typeface="+mn-lt"/>
-                <a:ea typeface="+mn-ea"/>
-                <a:cs typeface="+mn-cs"/>
-                <a:sym typeface="Calibri"/>
               </a:defRPr>
             </a:lvl1pPr>
           </a:lstStyle>
@@ -8428,8 +7956,8 @@
         </p:nvSpPr>
         <p:spPr>
           <a:xfrm>
-            <a:off x="6629399" y="4343400"/>
-            <a:ext cx="4937763" cy="277996"/>
+            <a:off x="6629399" y="4343399"/>
+            <a:ext cx="4937764" cy="277994"/>
           </a:xfrm>
           <a:prstGeom prst="rect">
             <a:avLst/>
@@ -8453,10 +7981,6 @@
                 <a:solidFill>
                   <a:srgbClr val="1A1A2E"/>
                 </a:solidFill>
-                <a:latin typeface="+mn-lt"/>
-                <a:ea typeface="+mn-ea"/>
-                <a:cs typeface="+mn-cs"/>
-                <a:sym typeface="Calibri"/>
               </a:defRPr>
             </a:lvl1pPr>
           </a:lstStyle>
@@ -8476,8 +8000,8 @@
         </p:nvSpPr>
         <p:spPr>
           <a:xfrm>
-            <a:off x="6629399" y="4846321"/>
-            <a:ext cx="4937763" cy="277995"/>
+            <a:off x="6629399" y="4846320"/>
+            <a:ext cx="4937764" cy="277993"/>
           </a:xfrm>
           <a:prstGeom prst="rect">
             <a:avLst/>
@@ -8501,10 +8025,6 @@
                 <a:solidFill>
                   <a:srgbClr val="1A1A2E"/>
                 </a:solidFill>
-                <a:latin typeface="+mn-lt"/>
-                <a:ea typeface="+mn-ea"/>
-                <a:cs typeface="+mn-cs"/>
-                <a:sym typeface="Calibri"/>
               </a:defRPr>
             </a:lvl1pPr>
           </a:lstStyle>
@@ -8524,8 +8044,8 @@
         </p:nvSpPr>
         <p:spPr>
           <a:xfrm>
-            <a:off x="6629399" y="5349241"/>
-            <a:ext cx="4937763" cy="277995"/>
+            <a:off x="6629399" y="5349240"/>
+            <a:ext cx="4937764" cy="277993"/>
           </a:xfrm>
           <a:prstGeom prst="rect">
             <a:avLst/>
@@ -8549,10 +8069,6 @@
                 <a:solidFill>
                   <a:srgbClr val="1A1A2E"/>
                 </a:solidFill>
-                <a:latin typeface="+mn-lt"/>
-                <a:ea typeface="+mn-ea"/>
-                <a:cs typeface="+mn-cs"/>
-                <a:sym typeface="Calibri"/>
               </a:defRPr>
             </a:lvl1pPr>
           </a:lstStyle>
@@ -8627,10 +8143,6 @@
                 <a:solidFill>
                   <a:srgbClr val="FFFFFF"/>
                 </a:solidFill>
-                <a:latin typeface="+mn-lt"/>
-                <a:ea typeface="+mn-ea"/>
-                <a:cs typeface="+mn-cs"/>
-                <a:sym typeface="Calibri"/>
               </a:defRPr>
             </a:pPr>
           </a:p>
@@ -8644,8 +8156,8 @@
         </p:nvSpPr>
         <p:spPr>
           <a:xfrm>
-            <a:off x="777239" y="457199"/>
-            <a:ext cx="9052561" cy="542240"/>
+            <a:off x="777239" y="457198"/>
+            <a:ext cx="9052561" cy="542238"/>
           </a:xfrm>
           <a:prstGeom prst="rect">
             <a:avLst/>
@@ -8669,10 +8181,6 @@
                 <a:solidFill>
                   <a:srgbClr val="1E2761"/>
                 </a:solidFill>
-                <a:latin typeface="+mn-lt"/>
-                <a:ea typeface="+mn-ea"/>
-                <a:cs typeface="+mn-cs"/>
-                <a:sym typeface="Calibri"/>
               </a:defRPr>
             </a:lvl1pPr>
           </a:lstStyle>
@@ -8692,8 +8200,8 @@
         </p:nvSpPr>
         <p:spPr>
           <a:xfrm>
-            <a:off x="731518" y="1463038"/>
-            <a:ext cx="5120644" cy="4114803"/>
+            <a:off x="731517" y="1463037"/>
+            <a:ext cx="5120646" cy="4114805"/>
           </a:xfrm>
           <a:prstGeom prst="rect">
             <a:avLst/>
@@ -8721,10 +8229,6 @@
                 <a:solidFill>
                   <a:srgbClr val="FFFFFF"/>
                 </a:solidFill>
-                <a:latin typeface="+mn-lt"/>
-                <a:ea typeface="+mn-ea"/>
-                <a:cs typeface="+mn-cs"/>
-                <a:sym typeface="Calibri"/>
               </a:defRPr>
             </a:pPr>
           </a:p>
@@ -8738,8 +8242,8 @@
         </p:nvSpPr>
         <p:spPr>
           <a:xfrm>
-            <a:off x="731518" y="1463039"/>
-            <a:ext cx="5120644" cy="548641"/>
+            <a:off x="731517" y="1463039"/>
+            <a:ext cx="5120646" cy="548641"/>
           </a:xfrm>
           <a:prstGeom prst="rect">
             <a:avLst/>
@@ -8767,10 +8271,6 @@
                 <a:solidFill>
                   <a:srgbClr val="FFFFFF"/>
                 </a:solidFill>
-                <a:latin typeface="+mn-lt"/>
-                <a:ea typeface="+mn-ea"/>
-                <a:cs typeface="+mn-cs"/>
-                <a:sym typeface="Calibri"/>
               </a:defRPr>
             </a:pPr>
           </a:p>
@@ -8784,8 +8284,8 @@
         </p:nvSpPr>
         <p:spPr>
           <a:xfrm>
-            <a:off x="1051558" y="1570817"/>
-            <a:ext cx="4480562" cy="333086"/>
+            <a:off x="1051557" y="1570816"/>
+            <a:ext cx="4480564" cy="333085"/>
           </a:xfrm>
           <a:prstGeom prst="rect">
             <a:avLst/>
@@ -8809,10 +8309,6 @@
                 <a:solidFill>
                   <a:srgbClr val="FFFFFF"/>
                 </a:solidFill>
-                <a:latin typeface="+mn-lt"/>
-                <a:ea typeface="+mn-ea"/>
-                <a:cs typeface="+mn-cs"/>
-                <a:sym typeface="Calibri"/>
               </a:defRPr>
             </a:lvl1pPr>
           </a:lstStyle>
@@ -8832,8 +8328,8 @@
         </p:nvSpPr>
         <p:spPr>
           <a:xfrm>
-            <a:off x="1051558" y="2286000"/>
-            <a:ext cx="4480562" cy="280798"/>
+            <a:off x="1051557" y="2285999"/>
+            <a:ext cx="4480564" cy="280796"/>
           </a:xfrm>
           <a:prstGeom prst="rect">
             <a:avLst/>
@@ -8857,10 +8353,6 @@
                 <a:solidFill>
                   <a:srgbClr val="1A1A2E"/>
                 </a:solidFill>
-                <a:latin typeface="+mn-lt"/>
-                <a:ea typeface="+mn-ea"/>
-                <a:cs typeface="+mn-cs"/>
-                <a:sym typeface="Calibri"/>
               </a:defRPr>
             </a:lvl1pPr>
           </a:lstStyle>
@@ -8880,8 +8372,8 @@
         </p:nvSpPr>
         <p:spPr>
           <a:xfrm>
-            <a:off x="1051558" y="2926079"/>
-            <a:ext cx="4480562" cy="280798"/>
+            <a:off x="1051557" y="2926078"/>
+            <a:ext cx="4480564" cy="280796"/>
           </a:xfrm>
           <a:prstGeom prst="rect">
             <a:avLst/>
@@ -8905,17 +8397,13 @@
                 <a:solidFill>
                   <a:srgbClr val="1A1A2E"/>
                 </a:solidFill>
-                <a:latin typeface="+mn-lt"/>
-                <a:ea typeface="+mn-ea"/>
-                <a:cs typeface="+mn-cs"/>
-                <a:sym typeface="Calibri"/>
               </a:defRPr>
             </a:lvl1pPr>
           </a:lstStyle>
           <a:p>
             <a:pPr/>
             <a:r>
-              <a:t>Formato: archivos .npy (256 x 512 px, escala de grises)</a:t>
+              <a:t>Formato: archivos .npy (224 x 512 px, escala de grises)</a:t>
             </a:r>
           </a:p>
         </p:txBody>
@@ -8928,8 +8416,8 @@
         </p:nvSpPr>
         <p:spPr>
           <a:xfrm>
-            <a:off x="1051558" y="3566160"/>
-            <a:ext cx="4480562" cy="280798"/>
+            <a:off x="1051557" y="3566159"/>
+            <a:ext cx="4480564" cy="280796"/>
           </a:xfrm>
           <a:prstGeom prst="rect">
             <a:avLst/>
@@ -8953,10 +8441,6 @@
                 <a:solidFill>
                   <a:srgbClr val="1A1A2E"/>
                 </a:solidFill>
-                <a:latin typeface="+mn-lt"/>
-                <a:ea typeface="+mn-ea"/>
-                <a:cs typeface="+mn-cs"/>
-                <a:sym typeface="Calibri"/>
               </a:defRPr>
             </a:lvl1pPr>
           </a:lstStyle>
@@ -8976,8 +8460,8 @@
         </p:nvSpPr>
         <p:spPr>
           <a:xfrm>
-            <a:off x="1051558" y="4206241"/>
-            <a:ext cx="4480562" cy="280798"/>
+            <a:off x="1051557" y="4206240"/>
+            <a:ext cx="4480564" cy="280796"/>
           </a:xfrm>
           <a:prstGeom prst="rect">
             <a:avLst/>
@@ -9001,10 +8485,6 @@
                 <a:solidFill>
                   <a:srgbClr val="1A1A2E"/>
                 </a:solidFill>
-                <a:latin typeface="+mn-lt"/>
-                <a:ea typeface="+mn-ea"/>
-                <a:cs typeface="+mn-cs"/>
-                <a:sym typeface="Calibri"/>
               </a:defRPr>
             </a:lvl1pPr>
           </a:lstStyle>
@@ -9024,8 +8504,8 @@
         </p:nvSpPr>
         <p:spPr>
           <a:xfrm>
-            <a:off x="1051558" y="4846321"/>
-            <a:ext cx="4480562" cy="280798"/>
+            <a:off x="1051557" y="4846320"/>
+            <a:ext cx="4480564" cy="280796"/>
           </a:xfrm>
           <a:prstGeom prst="rect">
             <a:avLst/>
@@ -9049,10 +8529,6 @@
                 <a:solidFill>
                   <a:srgbClr val="1A1A2E"/>
                 </a:solidFill>
-                <a:latin typeface="+mn-lt"/>
-                <a:ea typeface="+mn-ea"/>
-                <a:cs typeface="+mn-cs"/>
-                <a:sym typeface="Calibri"/>
               </a:defRPr>
             </a:lvl1pPr>
           </a:lstStyle>
@@ -9072,8 +8548,8 @@
         </p:nvSpPr>
         <p:spPr>
           <a:xfrm>
-            <a:off x="6309359" y="1463038"/>
-            <a:ext cx="5120642" cy="4114803"/>
+            <a:off x="6309359" y="1463037"/>
+            <a:ext cx="5120643" cy="4114805"/>
           </a:xfrm>
           <a:prstGeom prst="rect">
             <a:avLst/>
@@ -9101,10 +8577,6 @@
                 <a:solidFill>
                   <a:srgbClr val="FFFFFF"/>
                 </a:solidFill>
-                <a:latin typeface="+mn-lt"/>
-                <a:ea typeface="+mn-ea"/>
-                <a:cs typeface="+mn-cs"/>
-                <a:sym typeface="Calibri"/>
               </a:defRPr>
             </a:pPr>
           </a:p>
@@ -9119,7 +8591,7 @@
         <p:spPr>
           <a:xfrm>
             <a:off x="6309359" y="1463039"/>
-            <a:ext cx="5120642" cy="548641"/>
+            <a:ext cx="5120643" cy="548641"/>
           </a:xfrm>
           <a:prstGeom prst="rect">
             <a:avLst/>
@@ -9147,10 +8619,6 @@
                 <a:solidFill>
                   <a:srgbClr val="FFFFFF"/>
                 </a:solidFill>
-                <a:latin typeface="+mn-lt"/>
-                <a:ea typeface="+mn-ea"/>
-                <a:cs typeface="+mn-cs"/>
-                <a:sym typeface="Calibri"/>
               </a:defRPr>
             </a:pPr>
           </a:p>
@@ -9164,8 +8632,8 @@
         </p:nvSpPr>
         <p:spPr>
           <a:xfrm>
-            <a:off x="6629399" y="1570817"/>
-            <a:ext cx="4480562" cy="333086"/>
+            <a:off x="6629399" y="1570816"/>
+            <a:ext cx="4480563" cy="333085"/>
           </a:xfrm>
           <a:prstGeom prst="rect">
             <a:avLst/>
@@ -9189,10 +8657,6 @@
                 <a:solidFill>
                   <a:srgbClr val="FFFFFF"/>
                 </a:solidFill>
-                <a:latin typeface="+mn-lt"/>
-                <a:ea typeface="+mn-ea"/>
-                <a:cs typeface="+mn-cs"/>
-                <a:sym typeface="Calibri"/>
               </a:defRPr>
             </a:lvl1pPr>
           </a:lstStyle>
@@ -9212,8 +8676,8 @@
         </p:nvSpPr>
         <p:spPr>
           <a:xfrm>
-            <a:off x="6629399" y="2286000"/>
-            <a:ext cx="4480563" cy="280798"/>
+            <a:off x="6629399" y="2285999"/>
+            <a:ext cx="4480564" cy="280796"/>
           </a:xfrm>
           <a:prstGeom prst="rect">
             <a:avLst/>
@@ -9237,10 +8701,6 @@
                 <a:solidFill>
                   <a:srgbClr val="1A1A2E"/>
                 </a:solidFill>
-                <a:latin typeface="+mn-lt"/>
-                <a:ea typeface="+mn-ea"/>
-                <a:cs typeface="+mn-cs"/>
-                <a:sym typeface="Calibri"/>
               </a:defRPr>
             </a:lvl1pPr>
           </a:lstStyle>
@@ -9260,8 +8720,8 @@
         </p:nvSpPr>
         <p:spPr>
           <a:xfrm>
-            <a:off x="6629399" y="2926079"/>
-            <a:ext cx="4480563" cy="280798"/>
+            <a:off x="6629399" y="2926078"/>
+            <a:ext cx="4480564" cy="280796"/>
           </a:xfrm>
           <a:prstGeom prst="rect">
             <a:avLst/>
@@ -9285,10 +8745,6 @@
                 <a:solidFill>
                   <a:srgbClr val="1A1A2E"/>
                 </a:solidFill>
-                <a:latin typeface="+mn-lt"/>
-                <a:ea typeface="+mn-ea"/>
-                <a:cs typeface="+mn-cs"/>
-                <a:sym typeface="Calibri"/>
               </a:defRPr>
             </a:lvl1pPr>
           </a:lstStyle>
@@ -9308,8 +8764,8 @@
         </p:nvSpPr>
         <p:spPr>
           <a:xfrm>
-            <a:off x="6629399" y="3566160"/>
-            <a:ext cx="4480563" cy="280798"/>
+            <a:off x="6629399" y="3566159"/>
+            <a:ext cx="4480564" cy="280796"/>
           </a:xfrm>
           <a:prstGeom prst="rect">
             <a:avLst/>
@@ -9333,10 +8789,6 @@
                 <a:solidFill>
                   <a:srgbClr val="1A1A2E"/>
                 </a:solidFill>
-                <a:latin typeface="+mn-lt"/>
-                <a:ea typeface="+mn-ea"/>
-                <a:cs typeface="+mn-cs"/>
-                <a:sym typeface="Calibri"/>
               </a:defRPr>
             </a:lvl1pPr>
           </a:lstStyle>
@@ -9356,8 +8808,8 @@
         </p:nvSpPr>
         <p:spPr>
           <a:xfrm>
-            <a:off x="6629399" y="4206241"/>
-            <a:ext cx="4480563" cy="280798"/>
+            <a:off x="6629399" y="4206240"/>
+            <a:ext cx="4480564" cy="280796"/>
           </a:xfrm>
           <a:prstGeom prst="rect">
             <a:avLst/>
@@ -9381,10 +8833,6 @@
                 <a:solidFill>
                   <a:srgbClr val="1A1A2E"/>
                 </a:solidFill>
-                <a:latin typeface="+mn-lt"/>
-                <a:ea typeface="+mn-ea"/>
-                <a:cs typeface="+mn-cs"/>
-                <a:sym typeface="Calibri"/>
               </a:defRPr>
             </a:lvl1pPr>
           </a:lstStyle>
@@ -9404,8 +8852,8 @@
         </p:nvSpPr>
         <p:spPr>
           <a:xfrm>
-            <a:off x="6629399" y="4846321"/>
-            <a:ext cx="4480563" cy="280798"/>
+            <a:off x="6629399" y="4846320"/>
+            <a:ext cx="4480564" cy="280796"/>
           </a:xfrm>
           <a:prstGeom prst="rect">
             <a:avLst/>
@@ -9429,10 +8877,6 @@
                 <a:solidFill>
                   <a:srgbClr val="1A1A2E"/>
                 </a:solidFill>
-                <a:latin typeface="+mn-lt"/>
-                <a:ea typeface="+mn-ea"/>
-                <a:cs typeface="+mn-cs"/>
-                <a:sym typeface="Calibri"/>
               </a:defRPr>
             </a:lvl1pPr>
           </a:lstStyle>
@@ -9507,10 +8951,6 @@
                 <a:solidFill>
                   <a:srgbClr val="FFFFFF"/>
                 </a:solidFill>
-                <a:latin typeface="+mn-lt"/>
-                <a:ea typeface="+mn-ea"/>
-                <a:cs typeface="+mn-cs"/>
-                <a:sym typeface="Calibri"/>
               </a:defRPr>
             </a:pPr>
           </a:p>
@@ -9524,8 +8964,8 @@
         </p:nvSpPr>
         <p:spPr>
           <a:xfrm>
-            <a:off x="777239" y="457199"/>
-            <a:ext cx="9052561" cy="542240"/>
+            <a:off x="777239" y="457198"/>
+            <a:ext cx="9052561" cy="542238"/>
           </a:xfrm>
           <a:prstGeom prst="rect">
             <a:avLst/>
@@ -9549,10 +8989,6 @@
                 <a:solidFill>
                   <a:srgbClr val="1E2761"/>
                 </a:solidFill>
-                <a:latin typeface="+mn-lt"/>
-                <a:ea typeface="+mn-ea"/>
-                <a:cs typeface="+mn-cs"/>
-                <a:sym typeface="Calibri"/>
               </a:defRPr>
             </a:lvl1pPr>
           </a:lstStyle>
@@ -9573,7 +9009,7 @@
         <p:spPr>
           <a:xfrm>
             <a:off x="777238" y="1463039"/>
-            <a:ext cx="2651762" cy="300593"/>
+            <a:ext cx="2651763" cy="300590"/>
           </a:xfrm>
           <a:prstGeom prst="rect">
             <a:avLst/>
@@ -9597,10 +9033,6 @@
                 <a:solidFill>
                   <a:srgbClr val="00A896"/>
                 </a:solidFill>
-                <a:latin typeface="+mn-lt"/>
-                <a:ea typeface="+mn-ea"/>
-                <a:cs typeface="+mn-cs"/>
-                <a:sym typeface="Calibri"/>
               </a:defRPr>
             </a:lvl1pPr>
           </a:lstStyle>
@@ -9649,10 +9081,6 @@
                 <a:solidFill>
                   <a:srgbClr val="FFFFFF"/>
                 </a:solidFill>
-                <a:latin typeface="+mn-lt"/>
-                <a:ea typeface="+mn-ea"/>
-                <a:cs typeface="+mn-cs"/>
-                <a:sym typeface="Calibri"/>
               </a:defRPr>
             </a:pPr>
           </a:p>
@@ -9666,8 +9094,8 @@
         </p:nvSpPr>
         <p:spPr>
           <a:xfrm>
-            <a:off x="868678" y="2227233"/>
-            <a:ext cx="2011683" cy="300592"/>
+            <a:off x="868677" y="2227233"/>
+            <a:ext cx="2011684" cy="300590"/>
           </a:xfrm>
           <a:prstGeom prst="rect">
             <a:avLst/>
@@ -9691,10 +9119,6 @@
                 <a:solidFill>
                   <a:srgbClr val="1E2761"/>
                 </a:solidFill>
-                <a:latin typeface="+mn-lt"/>
-                <a:ea typeface="+mn-ea"/>
-                <a:cs typeface="+mn-cs"/>
-                <a:sym typeface="Calibri"/>
               </a:defRPr>
             </a:lvl1pPr>
           </a:lstStyle>
@@ -9714,8 +9138,8 @@
         </p:nvSpPr>
         <p:spPr>
           <a:xfrm>
-            <a:off x="868678" y="2592992"/>
-            <a:ext cx="2011683" cy="248304"/>
+            <a:off x="868677" y="2592991"/>
+            <a:ext cx="2011684" cy="248302"/>
           </a:xfrm>
           <a:prstGeom prst="rect">
             <a:avLst/>
@@ -9739,10 +9163,6 @@
                 <a:solidFill>
                   <a:srgbClr val="6B7B8D"/>
                 </a:solidFill>
-                <a:latin typeface="+mn-lt"/>
-                <a:ea typeface="+mn-ea"/>
-                <a:cs typeface="+mn-cs"/>
-                <a:sym typeface="Calibri"/>
               </a:defRPr>
             </a:lvl1pPr>
           </a:lstStyle>
@@ -9762,8 +9182,8 @@
         </p:nvSpPr>
         <p:spPr>
           <a:xfrm>
-            <a:off x="3200399" y="2468878"/>
-            <a:ext cx="731523" cy="54866"/>
+            <a:off x="3200399" y="2468877"/>
+            <a:ext cx="731524" cy="54867"/>
           </a:xfrm>
           <a:prstGeom prst="rect">
             <a:avLst/>
@@ -9791,10 +9211,6 @@
                 <a:solidFill>
                   <a:srgbClr val="FFFFFF"/>
                 </a:solidFill>
-                <a:latin typeface="+mn-lt"/>
-                <a:ea typeface="+mn-ea"/>
-                <a:cs typeface="+mn-cs"/>
-                <a:sym typeface="Calibri"/>
               </a:defRPr>
             </a:pPr>
           </a:p>
@@ -9809,7 +9225,7 @@
         <p:spPr>
           <a:xfrm>
             <a:off x="4114798" y="2011678"/>
-            <a:ext cx="2560323" cy="1097282"/>
+            <a:ext cx="2560324" cy="1097282"/>
           </a:xfrm>
           <a:prstGeom prst="rect">
             <a:avLst/>
@@ -9837,10 +9253,6 @@
                 <a:solidFill>
                   <a:srgbClr val="FFFFFF"/>
                 </a:solidFill>
-                <a:latin typeface="+mn-lt"/>
-                <a:ea typeface="+mn-ea"/>
-                <a:cs typeface="+mn-cs"/>
-                <a:sym typeface="Calibri"/>
               </a:defRPr>
             </a:pPr>
           </a:p>
@@ -9854,8 +9266,8 @@
         </p:nvSpPr>
         <p:spPr>
           <a:xfrm>
-            <a:off x="4251959" y="2246848"/>
-            <a:ext cx="2286002" cy="333087"/>
+            <a:off x="4251959" y="2246847"/>
+            <a:ext cx="2286003" cy="333085"/>
           </a:xfrm>
           <a:prstGeom prst="rect">
             <a:avLst/>
@@ -9879,10 +9291,6 @@
                 <a:solidFill>
                   <a:srgbClr val="FFFFFF"/>
                 </a:solidFill>
-                <a:latin typeface="+mn-lt"/>
-                <a:ea typeface="+mn-ea"/>
-                <a:cs typeface="+mn-cs"/>
-                <a:sym typeface="Calibri"/>
               </a:defRPr>
             </a:lvl1pPr>
           </a:lstStyle>
@@ -9902,8 +9310,8 @@
         </p:nvSpPr>
         <p:spPr>
           <a:xfrm>
-            <a:off x="4251959" y="2612608"/>
-            <a:ext cx="2286002" cy="248303"/>
+            <a:off x="4251959" y="2612607"/>
+            <a:ext cx="2286003" cy="248302"/>
           </a:xfrm>
           <a:prstGeom prst="rect">
             <a:avLst/>
@@ -9927,17 +9335,13 @@
                 <a:solidFill>
                   <a:srgbClr val="CADCFC"/>
                 </a:solidFill>
-                <a:latin typeface="+mn-lt"/>
-                <a:ea typeface="+mn-ea"/>
-                <a:cs typeface="+mn-cs"/>
-                <a:sym typeface="Calibri"/>
               </a:defRPr>
             </a:lvl1pPr>
           </a:lstStyle>
           <a:p>
             <a:pPr/>
             <a:r>
-              <a:t>ImageNet preentrenadas</a:t>
+              <a:t>ImageNet pre-entrenadas</a:t>
             </a:r>
           </a:p>
         </p:txBody>
@@ -9950,8 +9354,8 @@
         </p:nvSpPr>
         <p:spPr>
           <a:xfrm>
-            <a:off x="6857999" y="2468878"/>
-            <a:ext cx="731523" cy="54866"/>
+            <a:off x="6857999" y="2468877"/>
+            <a:ext cx="731524" cy="54867"/>
           </a:xfrm>
           <a:prstGeom prst="rect">
             <a:avLst/>
@@ -9979,10 +9383,6 @@
                 <a:solidFill>
                   <a:srgbClr val="FFFFFF"/>
                 </a:solidFill>
-                <a:latin typeface="+mn-lt"/>
-                <a:ea typeface="+mn-ea"/>
-                <a:cs typeface="+mn-cs"/>
-                <a:sym typeface="Calibri"/>
               </a:defRPr>
             </a:pPr>
           </a:p>
@@ -10025,10 +9425,6 @@
                 <a:solidFill>
                   <a:srgbClr val="FFFFFF"/>
                 </a:solidFill>
-                <a:latin typeface="+mn-lt"/>
-                <a:ea typeface="+mn-ea"/>
-                <a:cs typeface="+mn-cs"/>
-                <a:sym typeface="Calibri"/>
               </a:defRPr>
             </a:pPr>
           </a:p>
@@ -10042,8 +9438,8 @@
         </p:nvSpPr>
         <p:spPr>
           <a:xfrm>
-            <a:off x="7909559" y="2250003"/>
-            <a:ext cx="2926082" cy="333087"/>
+            <a:off x="7909559" y="2250002"/>
+            <a:ext cx="2926083" cy="333085"/>
           </a:xfrm>
           <a:prstGeom prst="rect">
             <a:avLst/>
@@ -10067,10 +9463,6 @@
                 <a:solidFill>
                   <a:srgbClr val="FFFFFF"/>
                 </a:solidFill>
-                <a:latin typeface="+mn-lt"/>
-                <a:ea typeface="+mn-ea"/>
-                <a:cs typeface="+mn-cs"/>
-                <a:sym typeface="Calibri"/>
               </a:defRPr>
             </a:lvl1pPr>
           </a:lstStyle>
@@ -10090,8 +9482,8 @@
         </p:nvSpPr>
         <p:spPr>
           <a:xfrm>
-            <a:off x="7909559" y="2570043"/>
-            <a:ext cx="2926082" cy="300593"/>
+            <a:off x="7909559" y="2570042"/>
+            <a:ext cx="2926083" cy="300591"/>
           </a:xfrm>
           <a:prstGeom prst="rect">
             <a:avLst/>
@@ -10115,10 +9507,6 @@
                 <a:solidFill>
                   <a:srgbClr val="FFFFFF"/>
                 </a:solidFill>
-                <a:latin typeface="+mn-lt"/>
-                <a:ea typeface="+mn-ea"/>
-                <a:cs typeface="+mn-cs"/>
-                <a:sym typeface="Calibri"/>
               </a:defRPr>
             </a:lvl1pPr>
           </a:lstStyle>
@@ -10138,8 +9526,8 @@
         </p:nvSpPr>
         <p:spPr>
           <a:xfrm>
-            <a:off x="777238" y="3566160"/>
-            <a:ext cx="4480562" cy="300592"/>
+            <a:off x="777237" y="3566159"/>
+            <a:ext cx="4480564" cy="300590"/>
           </a:xfrm>
           <a:prstGeom prst="rect">
             <a:avLst/>
@@ -10163,10 +9551,6 @@
                 <a:solidFill>
                   <a:srgbClr val="00A896"/>
                 </a:solidFill>
-                <a:latin typeface="+mn-lt"/>
-                <a:ea typeface="+mn-ea"/>
-                <a:cs typeface="+mn-cs"/>
-                <a:sym typeface="Calibri"/>
               </a:defRPr>
             </a:lvl1pPr>
           </a:lstStyle>
@@ -10187,7 +9571,7 @@
         <p:spPr>
           <a:xfrm>
             <a:off x="731519" y="4114798"/>
-            <a:ext cx="1828801" cy="1097283"/>
+            <a:ext cx="1828801" cy="1097284"/>
           </a:xfrm>
           <a:prstGeom prst="rect">
             <a:avLst/>
@@ -10215,10 +9599,6 @@
                 <a:solidFill>
                   <a:srgbClr val="FFFFFF"/>
                 </a:solidFill>
-                <a:latin typeface="+mn-lt"/>
-                <a:ea typeface="+mn-ea"/>
-                <a:cs typeface="+mn-cs"/>
-                <a:sym typeface="Calibri"/>
               </a:defRPr>
             </a:pPr>
           </a:p>
@@ -10232,8 +9612,8 @@
         </p:nvSpPr>
         <p:spPr>
           <a:xfrm>
-            <a:off x="822958" y="4320541"/>
-            <a:ext cx="1645923" cy="280798"/>
+            <a:off x="822958" y="4320540"/>
+            <a:ext cx="1645923" cy="280796"/>
           </a:xfrm>
           <a:prstGeom prst="rect">
             <a:avLst/>
@@ -10257,10 +9637,6 @@
                 <a:solidFill>
                   <a:srgbClr val="1E2761"/>
                 </a:solidFill>
-                <a:latin typeface="+mn-lt"/>
-                <a:ea typeface="+mn-ea"/>
-                <a:cs typeface="+mn-cs"/>
-                <a:sym typeface="Calibri"/>
               </a:defRPr>
             </a:lvl1pPr>
           </a:lstStyle>
@@ -10280,8 +9656,8 @@
         </p:nvSpPr>
         <p:spPr>
           <a:xfrm>
-            <a:off x="822958" y="4686299"/>
-            <a:ext cx="1645923" cy="225707"/>
+            <a:off x="822958" y="4686298"/>
+            <a:ext cx="1645923" cy="225705"/>
           </a:xfrm>
           <a:prstGeom prst="rect">
             <a:avLst/>
@@ -10305,10 +9681,6 @@
                 <a:solidFill>
                   <a:srgbClr val="6B7B8D"/>
                 </a:solidFill>
-                <a:latin typeface="+mn-lt"/>
-                <a:ea typeface="+mn-ea"/>
-                <a:cs typeface="+mn-cs"/>
-                <a:sym typeface="Calibri"/>
               </a:defRPr>
             </a:lvl1pPr>
           </a:lstStyle>
@@ -10328,8 +9700,8 @@
         </p:nvSpPr>
         <p:spPr>
           <a:xfrm>
-            <a:off x="2697478" y="4572000"/>
-            <a:ext cx="457202" cy="54864"/>
+            <a:off x="2697477" y="4572000"/>
+            <a:ext cx="457203" cy="54864"/>
           </a:xfrm>
           <a:prstGeom prst="rect">
             <a:avLst/>
@@ -10357,10 +9729,6 @@
                 <a:solidFill>
                   <a:srgbClr val="FFFFFF"/>
                 </a:solidFill>
-                <a:latin typeface="+mn-lt"/>
-                <a:ea typeface="+mn-ea"/>
-                <a:cs typeface="+mn-cs"/>
-                <a:sym typeface="Calibri"/>
               </a:defRPr>
             </a:pPr>
           </a:p>
@@ -10375,7 +9743,7 @@
         <p:spPr>
           <a:xfrm>
             <a:off x="3291840" y="4114798"/>
-            <a:ext cx="2103122" cy="1097283"/>
+            <a:ext cx="2103123" cy="1097284"/>
           </a:xfrm>
           <a:prstGeom prst="rect">
             <a:avLst/>
@@ -10403,10 +9771,6 @@
                 <a:solidFill>
                   <a:srgbClr val="FFFFFF"/>
                 </a:solidFill>
-                <a:latin typeface="+mn-lt"/>
-                <a:ea typeface="+mn-ea"/>
-                <a:cs typeface="+mn-cs"/>
-                <a:sym typeface="Calibri"/>
               </a:defRPr>
             </a:pPr>
           </a:p>
@@ -10420,8 +9784,8 @@
         </p:nvSpPr>
         <p:spPr>
           <a:xfrm>
-            <a:off x="3383279" y="4320541"/>
-            <a:ext cx="1920241" cy="300592"/>
+            <a:off x="3383279" y="4320540"/>
+            <a:ext cx="1920241" cy="300591"/>
           </a:xfrm>
           <a:prstGeom prst="rect">
             <a:avLst/>
@@ -10445,10 +9809,6 @@
                 <a:solidFill>
                   <a:srgbClr val="FFFFFF"/>
                 </a:solidFill>
-                <a:latin typeface="+mn-lt"/>
-                <a:ea typeface="+mn-ea"/>
-                <a:cs typeface="+mn-cs"/>
-                <a:sym typeface="Calibri"/>
               </a:defRPr>
             </a:lvl1pPr>
           </a:lstStyle>
@@ -10468,8 +9828,8 @@
         </p:nvSpPr>
         <p:spPr>
           <a:xfrm>
-            <a:off x="3383279" y="4686299"/>
-            <a:ext cx="1920241" cy="225707"/>
+            <a:off x="3383279" y="4686298"/>
+            <a:ext cx="1920241" cy="225705"/>
           </a:xfrm>
           <a:prstGeom prst="rect">
             <a:avLst/>
@@ -10493,10 +9853,6 @@
                 <a:solidFill>
                   <a:srgbClr val="FFFFFF"/>
                 </a:solidFill>
-                <a:latin typeface="+mn-lt"/>
-                <a:ea typeface="+mn-ea"/>
-                <a:cs typeface="+mn-cs"/>
-                <a:sym typeface="Calibri"/>
               </a:defRPr>
             </a:lvl1pPr>
           </a:lstStyle>
@@ -10517,7 +9873,7 @@
         <p:spPr>
           <a:xfrm>
             <a:off x="5532120" y="4572000"/>
-            <a:ext cx="457202" cy="54864"/>
+            <a:ext cx="457203" cy="54864"/>
           </a:xfrm>
           <a:prstGeom prst="rect">
             <a:avLst/>
@@ -10545,10 +9901,6 @@
                 <a:solidFill>
                   <a:srgbClr val="FFFFFF"/>
                 </a:solidFill>
-                <a:latin typeface="+mn-lt"/>
-                <a:ea typeface="+mn-ea"/>
-                <a:cs typeface="+mn-cs"/>
-                <a:sym typeface="Calibri"/>
               </a:defRPr>
             </a:pPr>
           </a:p>
@@ -10563,7 +9915,7 @@
         <p:spPr>
           <a:xfrm>
             <a:off x="6126479" y="4114798"/>
-            <a:ext cx="1645922" cy="1097283"/>
+            <a:ext cx="1645923" cy="1097284"/>
           </a:xfrm>
           <a:prstGeom prst="rect">
             <a:avLst/>
@@ -10591,10 +9943,6 @@
                 <a:solidFill>
                   <a:srgbClr val="FFFFFF"/>
                 </a:solidFill>
-                <a:latin typeface="+mn-lt"/>
-                <a:ea typeface="+mn-ea"/>
-                <a:cs typeface="+mn-cs"/>
-                <a:sym typeface="Calibri"/>
               </a:defRPr>
             </a:pPr>
           </a:p>
@@ -10608,8 +9956,8 @@
         </p:nvSpPr>
         <p:spPr>
           <a:xfrm>
-            <a:off x="6217918" y="4328005"/>
-            <a:ext cx="1463043" cy="280798"/>
+            <a:off x="6217918" y="4328004"/>
+            <a:ext cx="1463044" cy="280796"/>
           </a:xfrm>
           <a:prstGeom prst="rect">
             <a:avLst/>
@@ -10633,10 +9981,6 @@
                 <a:solidFill>
                   <a:srgbClr val="1E2761"/>
                 </a:solidFill>
-                <a:latin typeface="+mn-lt"/>
-                <a:ea typeface="+mn-ea"/>
-                <a:cs typeface="+mn-cs"/>
-                <a:sym typeface="Calibri"/>
               </a:defRPr>
             </a:lvl1pPr>
           </a:lstStyle>
@@ -10656,8 +10000,8 @@
         </p:nvSpPr>
         <p:spPr>
           <a:xfrm>
-            <a:off x="6217918" y="4693764"/>
-            <a:ext cx="1463043" cy="225707"/>
+            <a:off x="6217918" y="4693763"/>
+            <a:ext cx="1463044" cy="225705"/>
           </a:xfrm>
           <a:prstGeom prst="rect">
             <a:avLst/>
@@ -10681,10 +10025,6 @@
                 <a:solidFill>
                   <a:srgbClr val="1E2761"/>
                 </a:solidFill>
-                <a:latin typeface="+mn-lt"/>
-                <a:ea typeface="+mn-ea"/>
-                <a:cs typeface="+mn-cs"/>
-                <a:sym typeface="Calibri"/>
               </a:defRPr>
             </a:lvl1pPr>
           </a:lstStyle>
@@ -10705,7 +10045,7 @@
         <p:spPr>
           <a:xfrm>
             <a:off x="7909559" y="4572000"/>
-            <a:ext cx="457202" cy="54864"/>
+            <a:ext cx="457203" cy="54864"/>
           </a:xfrm>
           <a:prstGeom prst="rect">
             <a:avLst/>
@@ -10733,10 +10073,6 @@
                 <a:solidFill>
                   <a:srgbClr val="FFFFFF"/>
                 </a:solidFill>
-                <a:latin typeface="+mn-lt"/>
-                <a:ea typeface="+mn-ea"/>
-                <a:cs typeface="+mn-cs"/>
-                <a:sym typeface="Calibri"/>
               </a:defRPr>
             </a:pPr>
           </a:p>
@@ -10751,7 +10087,7 @@
         <p:spPr>
           <a:xfrm>
             <a:off x="8503918" y="4114798"/>
-            <a:ext cx="1828802" cy="1097283"/>
+            <a:ext cx="1828803" cy="1097284"/>
           </a:xfrm>
           <a:prstGeom prst="rect">
             <a:avLst/>
@@ -10779,10 +10115,6 @@
                 <a:solidFill>
                   <a:srgbClr val="FFFFFF"/>
                 </a:solidFill>
-                <a:latin typeface="+mn-lt"/>
-                <a:ea typeface="+mn-ea"/>
-                <a:cs typeface="+mn-cs"/>
-                <a:sym typeface="Calibri"/>
               </a:defRPr>
             </a:pPr>
           </a:p>
@@ -10796,8 +10128,8 @@
         </p:nvSpPr>
         <p:spPr>
           <a:xfrm>
-            <a:off x="8595359" y="4303699"/>
-            <a:ext cx="1645922" cy="300592"/>
+            <a:off x="8595359" y="4303698"/>
+            <a:ext cx="1645923" cy="300591"/>
           </a:xfrm>
           <a:prstGeom prst="rect">
             <a:avLst/>
@@ -10821,10 +10153,6 @@
                 <a:solidFill>
                   <a:srgbClr val="FFFFFF"/>
                 </a:solidFill>
-                <a:latin typeface="+mn-lt"/>
-                <a:ea typeface="+mn-ea"/>
-                <a:cs typeface="+mn-cs"/>
-                <a:sym typeface="Calibri"/>
               </a:defRPr>
             </a:lvl1pPr>
           </a:lstStyle>
@@ -10845,7 +10173,7 @@
         <p:spPr>
           <a:xfrm>
             <a:off x="8595359" y="4669459"/>
-            <a:ext cx="1645922" cy="225706"/>
+            <a:ext cx="1645923" cy="225704"/>
           </a:xfrm>
           <a:prstGeom prst="rect">
             <a:avLst/>
@@ -10869,10 +10197,6 @@
                 <a:solidFill>
                   <a:srgbClr val="CADCFC"/>
                 </a:solidFill>
-                <a:latin typeface="+mn-lt"/>
-                <a:ea typeface="+mn-ea"/>
-                <a:cs typeface="+mn-cs"/>
-                <a:sym typeface="Calibri"/>
               </a:defRPr>
             </a:lvl1pPr>
           </a:lstStyle>
@@ -10893,7 +10217,7 @@
         <p:spPr>
           <a:xfrm>
             <a:off x="10469880" y="4572000"/>
-            <a:ext cx="320042" cy="54864"/>
+            <a:ext cx="320043" cy="54864"/>
           </a:xfrm>
           <a:prstGeom prst="rect">
             <a:avLst/>
@@ -10921,10 +10245,6 @@
                 <a:solidFill>
                   <a:srgbClr val="FFFFFF"/>
                 </a:solidFill>
-                <a:latin typeface="+mn-lt"/>
-                <a:ea typeface="+mn-ea"/>
-                <a:cs typeface="+mn-cs"/>
-                <a:sym typeface="Calibri"/>
               </a:defRPr>
             </a:pPr>
           </a:p>
@@ -10939,7 +10259,7 @@
         <p:spPr>
           <a:xfrm>
             <a:off x="10058400" y="5486398"/>
-            <a:ext cx="1371600" cy="731523"/>
+            <a:ext cx="1371600" cy="731524"/>
           </a:xfrm>
           <a:prstGeom prst="rect">
             <a:avLst/>
@@ -10967,10 +10287,6 @@
                 <a:solidFill>
                   <a:srgbClr val="FFFFFF"/>
                 </a:solidFill>
-                <a:latin typeface="+mn-lt"/>
-                <a:ea typeface="+mn-ea"/>
-                <a:cs typeface="+mn-cs"/>
-                <a:sym typeface="Calibri"/>
               </a:defRPr>
             </a:pPr>
           </a:p>
@@ -10984,8 +10300,8 @@
         </p:nvSpPr>
         <p:spPr>
           <a:xfrm>
-            <a:off x="10149839" y="5564703"/>
-            <a:ext cx="1188722" cy="258201"/>
+            <a:off x="10149839" y="5564702"/>
+            <a:ext cx="1188723" cy="258199"/>
           </a:xfrm>
           <a:prstGeom prst="rect">
             <a:avLst/>
@@ -11009,10 +10325,6 @@
                 <a:solidFill>
                   <a:srgbClr val="FFFFFF"/>
                 </a:solidFill>
-                <a:latin typeface="+mn-lt"/>
-                <a:ea typeface="+mn-ea"/>
-                <a:cs typeface="+mn-cs"/>
-                <a:sym typeface="Calibri"/>
               </a:defRPr>
             </a:lvl1pPr>
           </a:lstStyle>
@@ -11032,8 +10344,8 @@
         </p:nvSpPr>
         <p:spPr>
           <a:xfrm>
-            <a:off x="10149839" y="5839024"/>
-            <a:ext cx="1188722" cy="300592"/>
+            <a:off x="10149839" y="5839023"/>
+            <a:ext cx="1188723" cy="300590"/>
           </a:xfrm>
           <a:prstGeom prst="rect">
             <a:avLst/>
@@ -11057,10 +10369,6 @@
                 <a:solidFill>
                   <a:srgbClr val="FFFFFF"/>
                 </a:solidFill>
-                <a:latin typeface="+mn-lt"/>
-                <a:ea typeface="+mn-ea"/>
-                <a:cs typeface="+mn-cs"/>
-                <a:sym typeface="Calibri"/>
               </a:defRPr>
             </a:lvl1pPr>
           </a:lstStyle>
@@ -11081,7 +10389,7 @@
         <p:spPr>
           <a:xfrm>
             <a:off x="731519" y="5943598"/>
-            <a:ext cx="8686801" cy="640083"/>
+            <a:ext cx="8686801" cy="640084"/>
           </a:xfrm>
           <a:prstGeom prst="rect">
             <a:avLst/>
@@ -11109,10 +10417,6 @@
                 <a:solidFill>
                   <a:srgbClr val="FFFFFF"/>
                 </a:solidFill>
-                <a:latin typeface="+mn-lt"/>
-                <a:ea typeface="+mn-ea"/>
-                <a:cs typeface="+mn-cs"/>
-                <a:sym typeface="Calibri"/>
               </a:defRPr>
             </a:pPr>
           </a:p>
@@ -11127,7 +10431,7 @@
         <p:spPr>
           <a:xfrm>
             <a:off x="731519" y="5943598"/>
-            <a:ext cx="54866" cy="640083"/>
+            <a:ext cx="54867" cy="640084"/>
           </a:xfrm>
           <a:prstGeom prst="rect">
             <a:avLst/>
@@ -11155,10 +10459,6 @@
                 <a:solidFill>
                   <a:srgbClr val="FFFFFF"/>
                 </a:solidFill>
-                <a:latin typeface="+mn-lt"/>
-                <a:ea typeface="+mn-ea"/>
-                <a:cs typeface="+mn-cs"/>
-                <a:sym typeface="Calibri"/>
               </a:defRPr>
             </a:pPr>
           </a:p>
@@ -11172,8 +10472,8 @@
         </p:nvSpPr>
         <p:spPr>
           <a:xfrm>
-            <a:off x="1005839" y="6123240"/>
-            <a:ext cx="8138160" cy="280798"/>
+            <a:off x="1005839" y="6123239"/>
+            <a:ext cx="8138160" cy="280796"/>
           </a:xfrm>
           <a:prstGeom prst="rect">
             <a:avLst/>
@@ -11197,10 +10497,6 @@
                 <a:solidFill>
                   <a:srgbClr val="1A1A2E"/>
                 </a:solidFill>
-                <a:latin typeface="+mn-lt"/>
-                <a:ea typeface="+mn-ea"/>
-                <a:cs typeface="+mn-cs"/>
-                <a:sym typeface="Calibri"/>
               </a:defRPr>
             </a:lvl1pPr>
           </a:lstStyle>
@@ -11275,10 +10571,6 @@
                 <a:solidFill>
                   <a:srgbClr val="FFFFFF"/>
                 </a:solidFill>
-                <a:latin typeface="+mn-lt"/>
-                <a:ea typeface="+mn-ea"/>
-                <a:cs typeface="+mn-cs"/>
-                <a:sym typeface="Calibri"/>
               </a:defRPr>
             </a:pPr>
           </a:p>
@@ -11292,8 +10584,8 @@
         </p:nvSpPr>
         <p:spPr>
           <a:xfrm>
-            <a:off x="777239" y="457199"/>
-            <a:ext cx="9052561" cy="542240"/>
+            <a:off x="777239" y="457198"/>
+            <a:ext cx="9052561" cy="542238"/>
           </a:xfrm>
           <a:prstGeom prst="rect">
             <a:avLst/>
@@ -11317,10 +10609,6 @@
                 <a:solidFill>
                   <a:srgbClr val="1E2761"/>
                 </a:solidFill>
-                <a:latin typeface="+mn-lt"/>
-                <a:ea typeface="+mn-ea"/>
-                <a:cs typeface="+mn-cs"/>
-                <a:sym typeface="Calibri"/>
               </a:defRPr>
             </a:lvl1pPr>
           </a:lstStyle>
@@ -11340,8 +10628,8 @@
         </p:nvSpPr>
         <p:spPr>
           <a:xfrm>
-            <a:off x="777238" y="1463039"/>
-            <a:ext cx="5394962" cy="340181"/>
+            <a:off x="777237" y="1463038"/>
+            <a:ext cx="5394964" cy="340179"/>
           </a:xfrm>
           <a:prstGeom prst="rect">
             <a:avLst/>
@@ -11365,10 +10653,6 @@
                 <a:solidFill>
                   <a:srgbClr val="00A896"/>
                 </a:solidFill>
-                <a:latin typeface="+mn-lt"/>
-                <a:ea typeface="+mn-ea"/>
-                <a:cs typeface="+mn-cs"/>
-                <a:sym typeface="Calibri"/>
               </a:defRPr>
             </a:lvl1pPr>
           </a:lstStyle>
@@ -11389,7 +10673,7 @@
         <p:spPr>
           <a:xfrm>
             <a:off x="960118" y="2103121"/>
-            <a:ext cx="1554484" cy="280798"/>
+            <a:ext cx="1554485" cy="280796"/>
           </a:xfrm>
           <a:prstGeom prst="rect">
             <a:avLst/>
@@ -11413,10 +10697,6 @@
                 <a:solidFill>
                   <a:srgbClr val="1E2761"/>
                 </a:solidFill>
-                <a:latin typeface="+mn-lt"/>
-                <a:ea typeface="+mn-ea"/>
-                <a:cs typeface="+mn-cs"/>
-                <a:sym typeface="Calibri"/>
               </a:defRPr>
             </a:lvl1pPr>
           </a:lstStyle>
@@ -11436,8 +10716,8 @@
         </p:nvSpPr>
         <p:spPr>
           <a:xfrm>
-            <a:off x="2606039" y="2103121"/>
-            <a:ext cx="3566162" cy="280798"/>
+            <a:off x="2606038" y="2103121"/>
+            <a:ext cx="3566164" cy="280796"/>
           </a:xfrm>
           <a:prstGeom prst="rect">
             <a:avLst/>
@@ -11461,17 +10741,13 @@
                 <a:solidFill>
                   <a:srgbClr val="1A1A2E"/>
                 </a:solidFill>
-                <a:latin typeface="+mn-lt"/>
-                <a:ea typeface="+mn-ea"/>
-                <a:cs typeface="+mn-cs"/>
-                <a:sym typeface="Calibri"/>
               </a:defRPr>
             </a:lvl1pPr>
           </a:lstStyle>
           <a:p>
             <a:pPr/>
             <a:r>
-              <a:t>UNet++ (Nested U-Net)</a:t>
+              <a:t>UNet++</a:t>
             </a:r>
           </a:p>
         </p:txBody>
@@ -11485,7 +10761,7 @@
         <p:spPr>
           <a:xfrm>
             <a:off x="960118" y="2560321"/>
-            <a:ext cx="1554484" cy="280798"/>
+            <a:ext cx="1554485" cy="280796"/>
           </a:xfrm>
           <a:prstGeom prst="rect">
             <a:avLst/>
@@ -11509,10 +10785,6 @@
                 <a:solidFill>
                   <a:srgbClr val="1E2761"/>
                 </a:solidFill>
-                <a:latin typeface="+mn-lt"/>
-                <a:ea typeface="+mn-ea"/>
-                <a:cs typeface="+mn-cs"/>
-                <a:sym typeface="Calibri"/>
               </a:defRPr>
             </a:lvl1pPr>
           </a:lstStyle>
@@ -11532,8 +10804,8 @@
         </p:nvSpPr>
         <p:spPr>
           <a:xfrm>
-            <a:off x="2606039" y="2560321"/>
-            <a:ext cx="3745048" cy="280798"/>
+            <a:off x="2606038" y="2560321"/>
+            <a:ext cx="3745050" cy="280796"/>
           </a:xfrm>
           <a:prstGeom prst="rect">
             <a:avLst/>
@@ -11557,10 +10829,6 @@
                 <a:solidFill>
                   <a:srgbClr val="1A1A2E"/>
                 </a:solidFill>
-                <a:latin typeface="+mn-lt"/>
-                <a:ea typeface="+mn-ea"/>
-                <a:cs typeface="+mn-cs"/>
-                <a:sym typeface="Calibri"/>
               </a:defRPr>
             </a:lvl1pPr>
           </a:lstStyle>
@@ -11581,7 +10849,7 @@
         <p:spPr>
           <a:xfrm>
             <a:off x="960118" y="3017521"/>
-            <a:ext cx="1554484" cy="280798"/>
+            <a:ext cx="1554485" cy="280796"/>
           </a:xfrm>
           <a:prstGeom prst="rect">
             <a:avLst/>
@@ -11605,10 +10873,6 @@
                 <a:solidFill>
                   <a:srgbClr val="1E2761"/>
                 </a:solidFill>
-                <a:latin typeface="+mn-lt"/>
-                <a:ea typeface="+mn-ea"/>
-                <a:cs typeface="+mn-cs"/>
-                <a:sym typeface="Calibri"/>
               </a:defRPr>
             </a:lvl1pPr>
           </a:lstStyle>
@@ -11628,8 +10892,8 @@
         </p:nvSpPr>
         <p:spPr>
           <a:xfrm>
-            <a:off x="2606039" y="3017521"/>
-            <a:ext cx="3566162" cy="280798"/>
+            <a:off x="2606038" y="3017521"/>
+            <a:ext cx="3566164" cy="280796"/>
           </a:xfrm>
           <a:prstGeom prst="rect">
             <a:avLst/>
@@ -11653,10 +10917,6 @@
                 <a:solidFill>
                   <a:srgbClr val="1A1A2E"/>
                 </a:solidFill>
-                <a:latin typeface="+mn-lt"/>
-                <a:ea typeface="+mn-ea"/>
-                <a:cs typeface="+mn-cs"/>
-                <a:sym typeface="Calibri"/>
               </a:defRPr>
             </a:lvl1pPr>
           </a:lstStyle>
@@ -11676,8 +10936,8 @@
         </p:nvSpPr>
         <p:spPr>
           <a:xfrm>
-            <a:off x="960118" y="3474721"/>
-            <a:ext cx="1554484" cy="280798"/>
+            <a:off x="960118" y="3474720"/>
+            <a:ext cx="1554485" cy="280796"/>
           </a:xfrm>
           <a:prstGeom prst="rect">
             <a:avLst/>
@@ -11701,10 +10961,6 @@
                 <a:solidFill>
                   <a:srgbClr val="1E2761"/>
                 </a:solidFill>
-                <a:latin typeface="+mn-lt"/>
-                <a:ea typeface="+mn-ea"/>
-                <a:cs typeface="+mn-cs"/>
-                <a:sym typeface="Calibri"/>
               </a:defRPr>
             </a:lvl1pPr>
           </a:lstStyle>
@@ -11724,8 +10980,8 @@
         </p:nvSpPr>
         <p:spPr>
           <a:xfrm>
-            <a:off x="2606039" y="3474721"/>
-            <a:ext cx="3566162" cy="280798"/>
+            <a:off x="2606038" y="3474720"/>
+            <a:ext cx="3566164" cy="280796"/>
           </a:xfrm>
           <a:prstGeom prst="rect">
             <a:avLst/>
@@ -11749,10 +11005,6 @@
                 <a:solidFill>
                   <a:srgbClr val="1A1A2E"/>
                 </a:solidFill>
-                <a:latin typeface="+mn-lt"/>
-                <a:ea typeface="+mn-ea"/>
-                <a:cs typeface="+mn-cs"/>
-                <a:sym typeface="Calibri"/>
               </a:defRPr>
             </a:lvl1pPr>
           </a:lstStyle>
@@ -11772,8 +11024,8 @@
         </p:nvSpPr>
         <p:spPr>
           <a:xfrm>
-            <a:off x="960118" y="3931921"/>
-            <a:ext cx="1554484" cy="280798"/>
+            <a:off x="960118" y="3931920"/>
+            <a:ext cx="1554485" cy="280796"/>
           </a:xfrm>
           <a:prstGeom prst="rect">
             <a:avLst/>
@@ -11797,10 +11049,6 @@
                 <a:solidFill>
                   <a:srgbClr val="1E2761"/>
                 </a:solidFill>
-                <a:latin typeface="+mn-lt"/>
-                <a:ea typeface="+mn-ea"/>
-                <a:cs typeface="+mn-cs"/>
-                <a:sym typeface="Calibri"/>
               </a:defRPr>
             </a:lvl1pPr>
           </a:lstStyle>
@@ -11820,8 +11068,8 @@
         </p:nvSpPr>
         <p:spPr>
           <a:xfrm>
-            <a:off x="2606039" y="3931921"/>
-            <a:ext cx="3566162" cy="280798"/>
+            <a:off x="2606038" y="3931920"/>
+            <a:ext cx="3566164" cy="280796"/>
           </a:xfrm>
           <a:prstGeom prst="rect">
             <a:avLst/>
@@ -11845,10 +11093,6 @@
                 <a:solidFill>
                   <a:srgbClr val="1A1A2E"/>
                 </a:solidFill>
-                <a:latin typeface="+mn-lt"/>
-                <a:ea typeface="+mn-ea"/>
-                <a:cs typeface="+mn-cs"/>
-                <a:sym typeface="Calibri"/>
               </a:defRPr>
             </a:lvl1pPr>
           </a:lstStyle>
@@ -11868,8 +11112,8 @@
         </p:nvSpPr>
         <p:spPr>
           <a:xfrm>
-            <a:off x="960118" y="4389121"/>
-            <a:ext cx="1554484" cy="280798"/>
+            <a:off x="960118" y="4389120"/>
+            <a:ext cx="1554485" cy="280796"/>
           </a:xfrm>
           <a:prstGeom prst="rect">
             <a:avLst/>
@@ -11893,10 +11137,6 @@
                 <a:solidFill>
                   <a:srgbClr val="1E2761"/>
                 </a:solidFill>
-                <a:latin typeface="+mn-lt"/>
-                <a:ea typeface="+mn-ea"/>
-                <a:cs typeface="+mn-cs"/>
-                <a:sym typeface="Calibri"/>
               </a:defRPr>
             </a:lvl1pPr>
           </a:lstStyle>
@@ -11916,8 +11156,8 @@
         </p:nvSpPr>
         <p:spPr>
           <a:xfrm>
-            <a:off x="2606039" y="4389121"/>
-            <a:ext cx="3566162" cy="280798"/>
+            <a:off x="2606038" y="4389120"/>
+            <a:ext cx="3566164" cy="280796"/>
           </a:xfrm>
           <a:prstGeom prst="rect">
             <a:avLst/>
@@ -11941,10 +11181,6 @@
                 <a:solidFill>
                   <a:srgbClr val="1A1A2E"/>
                 </a:solidFill>
-                <a:latin typeface="+mn-lt"/>
-                <a:ea typeface="+mn-ea"/>
-                <a:cs typeface="+mn-cs"/>
-                <a:sym typeface="Calibri"/>
               </a:defRPr>
             </a:lvl1pPr>
           </a:lstStyle>
@@ -11964,8 +11200,8 @@
         </p:nvSpPr>
         <p:spPr>
           <a:xfrm>
-            <a:off x="960118" y="4846321"/>
-            <a:ext cx="1554484" cy="280798"/>
+            <a:off x="960118" y="4846320"/>
+            <a:ext cx="1554485" cy="280796"/>
           </a:xfrm>
           <a:prstGeom prst="rect">
             <a:avLst/>
@@ -11989,10 +11225,6 @@
                 <a:solidFill>
                   <a:srgbClr val="1E2761"/>
                 </a:solidFill>
-                <a:latin typeface="+mn-lt"/>
-                <a:ea typeface="+mn-ea"/>
-                <a:cs typeface="+mn-cs"/>
-                <a:sym typeface="Calibri"/>
               </a:defRPr>
             </a:lvl1pPr>
           </a:lstStyle>
@@ -12012,8 +11244,8 @@
         </p:nvSpPr>
         <p:spPr>
           <a:xfrm>
-            <a:off x="2606039" y="4846321"/>
-            <a:ext cx="3566162" cy="280798"/>
+            <a:off x="2606038" y="4846320"/>
+            <a:ext cx="3566164" cy="280796"/>
           </a:xfrm>
           <a:prstGeom prst="rect">
             <a:avLst/>
@@ -12037,10 +11269,6 @@
                 <a:solidFill>
                   <a:srgbClr val="1A1A2E"/>
                 </a:solidFill>
-                <a:latin typeface="+mn-lt"/>
-                <a:ea typeface="+mn-ea"/>
-                <a:cs typeface="+mn-cs"/>
-                <a:sym typeface="Calibri"/>
               </a:defRPr>
             </a:lvl1pPr>
           </a:lstStyle>
@@ -12060,8 +11288,8 @@
         </p:nvSpPr>
         <p:spPr>
           <a:xfrm>
-            <a:off x="960118" y="5303521"/>
-            <a:ext cx="1554484" cy="280798"/>
+            <a:off x="960118" y="5303520"/>
+            <a:ext cx="1554485" cy="280796"/>
           </a:xfrm>
           <a:prstGeom prst="rect">
             <a:avLst/>
@@ -12085,10 +11313,6 @@
                 <a:solidFill>
                   <a:srgbClr val="1E2761"/>
                 </a:solidFill>
-                <a:latin typeface="+mn-lt"/>
-                <a:ea typeface="+mn-ea"/>
-                <a:cs typeface="+mn-cs"/>
-                <a:sym typeface="Calibri"/>
               </a:defRPr>
             </a:lvl1pPr>
           </a:lstStyle>
@@ -12108,8 +11332,8 @@
         </p:nvSpPr>
         <p:spPr>
           <a:xfrm>
-            <a:off x="2606039" y="5303521"/>
-            <a:ext cx="3566162" cy="280798"/>
+            <a:off x="2606038" y="5303520"/>
+            <a:ext cx="3566164" cy="280796"/>
           </a:xfrm>
           <a:prstGeom prst="rect">
             <a:avLst/>
@@ -12133,10 +11357,6 @@
                 <a:solidFill>
                   <a:srgbClr val="1A1A2E"/>
                 </a:solidFill>
-                <a:latin typeface="+mn-lt"/>
-                <a:ea typeface="+mn-ea"/>
-                <a:cs typeface="+mn-cs"/>
-                <a:sym typeface="Calibri"/>
               </a:defRPr>
             </a:lvl1pPr>
           </a:lstStyle>
@@ -12156,8 +11376,8 @@
         </p:nvSpPr>
         <p:spPr>
           <a:xfrm>
-            <a:off x="6903718" y="1463039"/>
-            <a:ext cx="4480563" cy="340181"/>
+            <a:off x="6903718" y="1463038"/>
+            <a:ext cx="4480564" cy="340179"/>
           </a:xfrm>
           <a:prstGeom prst="rect">
             <a:avLst/>
@@ -12181,10 +11401,6 @@
                 <a:solidFill>
                   <a:srgbClr val="00A896"/>
                 </a:solidFill>
-                <a:latin typeface="+mn-lt"/>
-                <a:ea typeface="+mn-ea"/>
-                <a:cs typeface="+mn-cs"/>
-                <a:sym typeface="Calibri"/>
               </a:defRPr>
             </a:lvl1pPr>
           </a:lstStyle>
@@ -12205,7 +11421,7 @@
         <p:spPr>
           <a:xfrm>
             <a:off x="6858000" y="2103120"/>
-            <a:ext cx="4572000" cy="1371602"/>
+            <a:ext cx="4572000" cy="1371603"/>
           </a:xfrm>
           <a:prstGeom prst="rect">
             <a:avLst/>
@@ -12233,10 +11449,6 @@
                 <a:solidFill>
                   <a:srgbClr val="FFFFFF"/>
                 </a:solidFill>
-                <a:latin typeface="+mn-lt"/>
-                <a:ea typeface="+mn-ea"/>
-                <a:cs typeface="+mn-cs"/>
-                <a:sym typeface="Calibri"/>
               </a:defRPr>
             </a:pPr>
           </a:p>
@@ -12251,7 +11463,7 @@
         <p:spPr>
           <a:xfrm>
             <a:off x="6858000" y="2103120"/>
-            <a:ext cx="54864" cy="1371602"/>
+            <a:ext cx="54864" cy="1371603"/>
           </a:xfrm>
           <a:prstGeom prst="rect">
             <a:avLst/>
@@ -12279,10 +11491,6 @@
                 <a:solidFill>
                   <a:srgbClr val="FFFFFF"/>
                 </a:solidFill>
-                <a:latin typeface="+mn-lt"/>
-                <a:ea typeface="+mn-ea"/>
-                <a:cs typeface="+mn-cs"/>
-                <a:sym typeface="Calibri"/>
               </a:defRPr>
             </a:pPr>
           </a:p>
@@ -12296,8 +11504,8 @@
         </p:nvSpPr>
         <p:spPr>
           <a:xfrm>
-            <a:off x="7132318" y="2287138"/>
-            <a:ext cx="4023363" cy="277995"/>
+            <a:off x="7132318" y="2287137"/>
+            <a:ext cx="4023364" cy="277993"/>
           </a:xfrm>
           <a:prstGeom prst="rect">
             <a:avLst/>
@@ -12321,10 +11529,6 @@
                 <a:solidFill>
                   <a:srgbClr val="1E2761"/>
                 </a:solidFill>
-                <a:latin typeface="+mn-lt"/>
-                <a:ea typeface="+mn-ea"/>
-                <a:cs typeface="+mn-cs"/>
-                <a:sym typeface="Calibri"/>
               </a:defRPr>
             </a:lvl1pPr>
           </a:lstStyle>
@@ -12344,8 +11548,8 @@
         </p:nvSpPr>
         <p:spPr>
           <a:xfrm>
-            <a:off x="7132318" y="2652898"/>
-            <a:ext cx="4023363" cy="461401"/>
+            <a:off x="7132318" y="2652897"/>
+            <a:ext cx="4023364" cy="461399"/>
           </a:xfrm>
           <a:prstGeom prst="rect">
             <a:avLst/>
@@ -12369,10 +11573,6 @@
                 <a:solidFill>
                   <a:srgbClr val="1A1A2E"/>
                 </a:solidFill>
-                <a:latin typeface="+mn-lt"/>
-                <a:ea typeface="+mn-ea"/>
-                <a:cs typeface="+mn-cs"/>
-                <a:sym typeface="Calibri"/>
               </a:defRPr>
             </a:lvl1pPr>
           </a:lstStyle>
@@ -12393,7 +11593,7 @@
         <p:spPr>
           <a:xfrm>
             <a:off x="6858000" y="3749037"/>
-            <a:ext cx="4572000" cy="1371602"/>
+            <a:ext cx="4572000" cy="1371603"/>
           </a:xfrm>
           <a:prstGeom prst="rect">
             <a:avLst/>
@@ -12421,10 +11621,6 @@
                 <a:solidFill>
                   <a:srgbClr val="FFFFFF"/>
                 </a:solidFill>
-                <a:latin typeface="+mn-lt"/>
-                <a:ea typeface="+mn-ea"/>
-                <a:cs typeface="+mn-cs"/>
-                <a:sym typeface="Calibri"/>
               </a:defRPr>
             </a:pPr>
           </a:p>
@@ -12439,7 +11635,7 @@
         <p:spPr>
           <a:xfrm>
             <a:off x="6858000" y="3749037"/>
-            <a:ext cx="54864" cy="1371602"/>
+            <a:ext cx="54864" cy="1371603"/>
           </a:xfrm>
           <a:prstGeom prst="rect">
             <a:avLst/>
@@ -12467,10 +11663,6 @@
                 <a:solidFill>
                   <a:srgbClr val="FFFFFF"/>
                 </a:solidFill>
-                <a:latin typeface="+mn-lt"/>
-                <a:ea typeface="+mn-ea"/>
-                <a:cs typeface="+mn-cs"/>
-                <a:sym typeface="Calibri"/>
               </a:defRPr>
             </a:pPr>
           </a:p>
@@ -12484,8 +11676,8 @@
         </p:nvSpPr>
         <p:spPr>
           <a:xfrm>
-            <a:off x="7132318" y="3963978"/>
-            <a:ext cx="4023362" cy="277995"/>
+            <a:off x="7132318" y="3963977"/>
+            <a:ext cx="4023363" cy="277993"/>
           </a:xfrm>
           <a:prstGeom prst="rect">
             <a:avLst/>
@@ -12509,10 +11701,6 @@
                 <a:solidFill>
                   <a:srgbClr val="1E2761"/>
                 </a:solidFill>
-                <a:latin typeface="+mn-lt"/>
-                <a:ea typeface="+mn-ea"/>
-                <a:cs typeface="+mn-cs"/>
-                <a:sym typeface="Calibri"/>
               </a:defRPr>
             </a:lvl1pPr>
           </a:lstStyle>
@@ -12532,8 +11720,8 @@
         </p:nvSpPr>
         <p:spPr>
           <a:xfrm>
-            <a:off x="7132318" y="4373356"/>
-            <a:ext cx="4023362" cy="461401"/>
+            <a:off x="7132318" y="4373355"/>
+            <a:ext cx="4023363" cy="461399"/>
           </a:xfrm>
           <a:prstGeom prst="rect">
             <a:avLst/>
@@ -12557,10 +11745,6 @@
                 <a:solidFill>
                   <a:srgbClr val="1A1A2E"/>
                 </a:solidFill>
-                <a:latin typeface="+mn-lt"/>
-                <a:ea typeface="+mn-ea"/>
-                <a:cs typeface="+mn-cs"/>
-                <a:sym typeface="Calibri"/>
               </a:defRPr>
             </a:lvl1pPr>
           </a:lstStyle>
@@ -12635,10 +11819,6 @@
                 <a:solidFill>
                   <a:srgbClr val="FFFFFF"/>
                 </a:solidFill>
-                <a:latin typeface="+mn-lt"/>
-                <a:ea typeface="+mn-ea"/>
-                <a:cs typeface="+mn-cs"/>
-                <a:sym typeface="Calibri"/>
               </a:defRPr>
             </a:pPr>
           </a:p>
@@ -12652,8 +11832,8 @@
         </p:nvSpPr>
         <p:spPr>
           <a:xfrm>
-            <a:off x="777239" y="457199"/>
-            <a:ext cx="9052561" cy="542240"/>
+            <a:off x="777239" y="457198"/>
+            <a:ext cx="9052561" cy="542238"/>
           </a:xfrm>
           <a:prstGeom prst="rect">
             <a:avLst/>
@@ -12677,10 +11857,6 @@
                 <a:solidFill>
                   <a:srgbClr val="1E2761"/>
                 </a:solidFill>
-                <a:latin typeface="+mn-lt"/>
-                <a:ea typeface="+mn-ea"/>
-                <a:cs typeface="+mn-cs"/>
-                <a:sym typeface="Calibri"/>
               </a:defRPr>
             </a:lvl1pPr>
           </a:lstStyle>
@@ -12700,8 +11876,8 @@
         </p:nvSpPr>
         <p:spPr>
           <a:xfrm>
-            <a:off x="777238" y="1371600"/>
-            <a:ext cx="3108962" cy="745786"/>
+            <a:off x="777238" y="1371599"/>
+            <a:ext cx="3108963" cy="745785"/>
           </a:xfrm>
           <a:prstGeom prst="rect">
             <a:avLst/>
@@ -12725,10 +11901,6 @@
                 <a:solidFill>
                   <a:srgbClr val="00A896"/>
                 </a:solidFill>
-                <a:latin typeface="+mn-lt"/>
-                <a:ea typeface="+mn-ea"/>
-                <a:cs typeface="+mn-cs"/>
-                <a:sym typeface="Calibri"/>
               </a:defRPr>
             </a:lvl1pPr>
           </a:lstStyle>
@@ -12749,7 +11921,7 @@
         <p:spPr>
           <a:xfrm>
             <a:off x="777238" y="2103121"/>
-            <a:ext cx="3108962" cy="300592"/>
+            <a:ext cx="3108963" cy="300590"/>
           </a:xfrm>
           <a:prstGeom prst="rect">
             <a:avLst/>
@@ -12773,10 +11945,6 @@
                 <a:solidFill>
                   <a:srgbClr val="6B7B8D"/>
                 </a:solidFill>
-                <a:latin typeface="+mn-lt"/>
-                <a:ea typeface="+mn-ea"/>
-                <a:cs typeface="+mn-cs"/>
-                <a:sym typeface="Calibri"/>
               </a:defRPr>
             </a:lvl1pPr>
           </a:lstStyle>
@@ -12796,8 +11964,8 @@
         </p:nvSpPr>
         <p:spPr>
           <a:xfrm>
-            <a:off x="4617718" y="1371600"/>
-            <a:ext cx="3108963" cy="745786"/>
+            <a:off x="4617718" y="1371599"/>
+            <a:ext cx="3108964" cy="745785"/>
           </a:xfrm>
           <a:prstGeom prst="rect">
             <a:avLst/>
@@ -12821,10 +11989,6 @@
                 <a:solidFill>
                   <a:srgbClr val="1E2761"/>
                 </a:solidFill>
-                <a:latin typeface="+mn-lt"/>
-                <a:ea typeface="+mn-ea"/>
-                <a:cs typeface="+mn-cs"/>
-                <a:sym typeface="Calibri"/>
               </a:defRPr>
             </a:lvl1pPr>
           </a:lstStyle>
@@ -12845,7 +12009,7 @@
         <p:spPr>
           <a:xfrm>
             <a:off x="4617718" y="2103121"/>
-            <a:ext cx="3108963" cy="300592"/>
+            <a:ext cx="3108964" cy="300590"/>
           </a:xfrm>
           <a:prstGeom prst="rect">
             <a:avLst/>
@@ -12869,10 +12033,6 @@
                 <a:solidFill>
                   <a:srgbClr val="6B7B8D"/>
                 </a:solidFill>
-                <a:latin typeface="+mn-lt"/>
-                <a:ea typeface="+mn-ea"/>
-                <a:cs typeface="+mn-cs"/>
-                <a:sym typeface="Calibri"/>
               </a:defRPr>
             </a:lvl1pPr>
           </a:lstStyle>
@@ -12892,8 +12052,8 @@
         </p:nvSpPr>
         <p:spPr>
           <a:xfrm>
-            <a:off x="8458199" y="1371600"/>
-            <a:ext cx="3108963" cy="745786"/>
+            <a:off x="8458199" y="1371599"/>
+            <a:ext cx="3108964" cy="745785"/>
           </a:xfrm>
           <a:prstGeom prst="rect">
             <a:avLst/>
@@ -12917,10 +12077,6 @@
                 <a:solidFill>
                   <a:srgbClr val="6B7B8D"/>
                 </a:solidFill>
-                <a:latin typeface="+mn-lt"/>
-                <a:ea typeface="+mn-ea"/>
-                <a:cs typeface="+mn-cs"/>
-                <a:sym typeface="Calibri"/>
               </a:defRPr>
             </a:lvl1pPr>
           </a:lstStyle>
@@ -12941,7 +12097,7 @@
         <p:spPr>
           <a:xfrm>
             <a:off x="8458199" y="2103121"/>
-            <a:ext cx="3108963" cy="300592"/>
+            <a:ext cx="3108964" cy="300590"/>
           </a:xfrm>
           <a:prstGeom prst="rect">
             <a:avLst/>
@@ -12965,10 +12121,6 @@
                 <a:solidFill>
                   <a:srgbClr val="6B7B8D"/>
                 </a:solidFill>
-                <a:latin typeface="+mn-lt"/>
-                <a:ea typeface="+mn-ea"/>
-                <a:cs typeface="+mn-cs"/>
-                <a:sym typeface="Calibri"/>
               </a:defRPr>
             </a:lvl1pPr>
           </a:lstStyle>
@@ -12988,8 +12140,8 @@
         </p:nvSpPr>
         <p:spPr>
           <a:xfrm>
-            <a:off x="777238" y="2926079"/>
-            <a:ext cx="5394962" cy="333087"/>
+            <a:off x="777237" y="2926078"/>
+            <a:ext cx="5394964" cy="333085"/>
           </a:xfrm>
           <a:prstGeom prst="rect">
             <a:avLst/>
@@ -13013,10 +12165,6 @@
                 <a:solidFill>
                   <a:srgbClr val="1E2761"/>
                 </a:solidFill>
-                <a:latin typeface="+mn-lt"/>
-                <a:ea typeface="+mn-ea"/>
-                <a:cs typeface="+mn-cs"/>
-                <a:sym typeface="Calibri"/>
               </a:defRPr>
             </a:lvl1pPr>
           </a:lstStyle>
@@ -13036,7 +12184,7 @@
         </p:nvGraphicFramePr>
         <p:xfrm>
           <a:off x="731519" y="3474720"/>
-          <a:ext cx="10698482" cy="1097282"/>
+          <a:ext cx="10698482" cy="1097283"/>
         </p:xfrm>
         <a:graphic xmlns:a="http://schemas.openxmlformats.org/drawingml/2006/main">
           <a:graphicData uri="http://schemas.openxmlformats.org/drawingml/2006/table">
@@ -13680,8 +12828,8 @@
         </p:nvSpPr>
         <p:spPr>
           <a:xfrm>
-            <a:off x="777238" y="4846321"/>
-            <a:ext cx="5394962" cy="333086"/>
+            <a:off x="777237" y="4846320"/>
+            <a:ext cx="5394964" cy="333085"/>
           </a:xfrm>
           <a:prstGeom prst="rect">
             <a:avLst/>
@@ -13705,10 +12853,6 @@
                 <a:solidFill>
                   <a:srgbClr val="1E2761"/>
                 </a:solidFill>
-                <a:latin typeface="+mn-lt"/>
-                <a:ea typeface="+mn-ea"/>
-                <a:cs typeface="+mn-cs"/>
-                <a:sym typeface="Calibri"/>
               </a:defRPr>
             </a:lvl1pPr>
           </a:lstStyle>
@@ -13728,7 +12872,7 @@
         </p:nvGraphicFramePr>
         <p:xfrm>
           <a:off x="731519" y="5303520"/>
-          <a:ext cx="7315201" cy="1371602"/>
+          <a:ext cx="7315201" cy="1371603"/>
         </p:xfrm>
         <a:graphic xmlns:a="http://schemas.openxmlformats.org/drawingml/2006/main">
           <a:graphicData uri="http://schemas.openxmlformats.org/drawingml/2006/table">
@@ -14413,10 +13557,6 @@
                 <a:solidFill>
                   <a:srgbClr val="FFFFFF"/>
                 </a:solidFill>
-                <a:latin typeface="+mn-lt"/>
-                <a:ea typeface="+mn-ea"/>
-                <a:cs typeface="+mn-cs"/>
-                <a:sym typeface="Calibri"/>
               </a:defRPr>
             </a:pPr>
           </a:p>
@@ -14430,8 +13570,8 @@
         </p:nvSpPr>
         <p:spPr>
           <a:xfrm>
-            <a:off x="777239" y="457199"/>
-            <a:ext cx="9052561" cy="542240"/>
+            <a:off x="777239" y="457198"/>
+            <a:ext cx="9052561" cy="542238"/>
           </a:xfrm>
           <a:prstGeom prst="rect">
             <a:avLst/>
@@ -14455,10 +13595,6 @@
                 <a:solidFill>
                   <a:srgbClr val="1E2761"/>
                 </a:solidFill>
-                <a:latin typeface="+mn-lt"/>
-                <a:ea typeface="+mn-ea"/>
-                <a:cs typeface="+mn-cs"/>
-                <a:sym typeface="Calibri"/>
               </a:defRPr>
             </a:lvl1pPr>
           </a:lstStyle>
@@ -14507,10 +13643,6 @@
                 <a:solidFill>
                   <a:srgbClr val="FFFFFF"/>
                 </a:solidFill>
-                <a:latin typeface="+mn-lt"/>
-                <a:ea typeface="+mn-ea"/>
-                <a:cs typeface="+mn-cs"/>
-                <a:sym typeface="Calibri"/>
               </a:defRPr>
             </a:pPr>
           </a:p>
@@ -14525,7 +13657,7 @@
         <p:spPr>
           <a:xfrm>
             <a:off x="731520" y="1371599"/>
-            <a:ext cx="3383280" cy="548643"/>
+            <a:ext cx="3383280" cy="548644"/>
           </a:xfrm>
           <a:prstGeom prst="rect">
             <a:avLst/>
@@ -14553,10 +13685,6 @@
                 <a:solidFill>
                   <a:srgbClr val="FFFFFF"/>
                 </a:solidFill>
-                <a:latin typeface="+mn-lt"/>
-                <a:ea typeface="+mn-ea"/>
-                <a:cs typeface="+mn-cs"/>
-                <a:sym typeface="Calibri"/>
               </a:defRPr>
             </a:pPr>
           </a:p>
@@ -14570,8 +13698,8 @@
         </p:nvSpPr>
         <p:spPr>
           <a:xfrm>
-            <a:off x="868678" y="1506922"/>
-            <a:ext cx="3108962" cy="277995"/>
+            <a:off x="868677" y="1506921"/>
+            <a:ext cx="3108963" cy="277994"/>
           </a:xfrm>
           <a:prstGeom prst="rect">
             <a:avLst/>
@@ -14595,10 +13723,6 @@
                 <a:solidFill>
                   <a:srgbClr val="FFFFFF"/>
                 </a:solidFill>
-                <a:latin typeface="+mn-lt"/>
-                <a:ea typeface="+mn-ea"/>
-                <a:cs typeface="+mn-cs"/>
-                <a:sym typeface="Calibri"/>
               </a:defRPr>
             </a:lvl1pPr>
           </a:lstStyle>
@@ -14619,7 +13743,7 @@
         <p:spPr>
           <a:xfrm>
             <a:off x="960118" y="2103121"/>
-            <a:ext cx="2926084" cy="248303"/>
+            <a:ext cx="2926085" cy="248301"/>
           </a:xfrm>
           <a:prstGeom prst="rect">
             <a:avLst/>
@@ -14643,10 +13767,6 @@
                 <a:solidFill>
                   <a:srgbClr val="1A1A2E"/>
                 </a:solidFill>
-                <a:latin typeface="+mn-lt"/>
-                <a:ea typeface="+mn-ea"/>
-                <a:cs typeface="+mn-cs"/>
-                <a:sym typeface="Calibri"/>
               </a:defRPr>
             </a:lvl1pPr>
           </a:lstStyle>
@@ -14667,7 +13787,7 @@
         <p:spPr>
           <a:xfrm>
             <a:off x="960118" y="2560321"/>
-            <a:ext cx="2926084" cy="248303"/>
+            <a:ext cx="2926085" cy="248301"/>
           </a:xfrm>
           <a:prstGeom prst="rect">
             <a:avLst/>
@@ -14691,10 +13811,6 @@
                 <a:solidFill>
                   <a:srgbClr val="1A1A2E"/>
                 </a:solidFill>
-                <a:latin typeface="+mn-lt"/>
-                <a:ea typeface="+mn-ea"/>
-                <a:cs typeface="+mn-cs"/>
-                <a:sym typeface="Calibri"/>
               </a:defRPr>
             </a:lvl1pPr>
           </a:lstStyle>
@@ -14715,7 +13831,7 @@
         <p:spPr>
           <a:xfrm>
             <a:off x="960118" y="3017521"/>
-            <a:ext cx="2926084" cy="248303"/>
+            <a:ext cx="2926085" cy="248301"/>
           </a:xfrm>
           <a:prstGeom prst="rect">
             <a:avLst/>
@@ -14739,10 +13855,6 @@
                 <a:solidFill>
                   <a:srgbClr val="1A1A2E"/>
                 </a:solidFill>
-                <a:latin typeface="+mn-lt"/>
-                <a:ea typeface="+mn-ea"/>
-                <a:cs typeface="+mn-cs"/>
-                <a:sym typeface="Calibri"/>
               </a:defRPr>
             </a:lvl1pPr>
           </a:lstStyle>
@@ -14762,8 +13874,8 @@
         </p:nvSpPr>
         <p:spPr>
           <a:xfrm>
-            <a:off x="960118" y="3474721"/>
-            <a:ext cx="2926084" cy="248303"/>
+            <a:off x="960118" y="3474720"/>
+            <a:ext cx="2926085" cy="248302"/>
           </a:xfrm>
           <a:prstGeom prst="rect">
             <a:avLst/>
@@ -14787,10 +13899,6 @@
                 <a:solidFill>
                   <a:srgbClr val="1A1A2E"/>
                 </a:solidFill>
-                <a:latin typeface="+mn-lt"/>
-                <a:ea typeface="+mn-ea"/>
-                <a:cs typeface="+mn-cs"/>
-                <a:sym typeface="Calibri"/>
               </a:defRPr>
             </a:lvl1pPr>
           </a:lstStyle>
@@ -14810,8 +13918,8 @@
         </p:nvSpPr>
         <p:spPr>
           <a:xfrm>
-            <a:off x="960118" y="3931921"/>
-            <a:ext cx="2926084" cy="248303"/>
+            <a:off x="960118" y="3931920"/>
+            <a:ext cx="2926085" cy="248302"/>
           </a:xfrm>
           <a:prstGeom prst="rect">
             <a:avLst/>
@@ -14835,10 +13943,6 @@
                 <a:solidFill>
                   <a:srgbClr val="1A1A2E"/>
                 </a:solidFill>
-                <a:latin typeface="+mn-lt"/>
-                <a:ea typeface="+mn-ea"/>
-                <a:cs typeface="+mn-cs"/>
-                <a:sym typeface="Calibri"/>
               </a:defRPr>
             </a:lvl1pPr>
           </a:lstStyle>
@@ -14858,8 +13962,8 @@
         </p:nvSpPr>
         <p:spPr>
           <a:xfrm>
-            <a:off x="960118" y="4389121"/>
-            <a:ext cx="2926084" cy="248303"/>
+            <a:off x="960118" y="4389120"/>
+            <a:ext cx="2926085" cy="248302"/>
           </a:xfrm>
           <a:prstGeom prst="rect">
             <a:avLst/>
@@ -14883,10 +13987,6 @@
                 <a:solidFill>
                   <a:srgbClr val="1A1A2E"/>
                 </a:solidFill>
-                <a:latin typeface="+mn-lt"/>
-                <a:ea typeface="+mn-ea"/>
-                <a:cs typeface="+mn-cs"/>
-                <a:sym typeface="Calibri"/>
               </a:defRPr>
             </a:lvl1pPr>
           </a:lstStyle>
@@ -14906,8 +14006,8 @@
         </p:nvSpPr>
         <p:spPr>
           <a:xfrm>
-            <a:off x="960118" y="4846321"/>
-            <a:ext cx="2926084" cy="248303"/>
+            <a:off x="960118" y="4846320"/>
+            <a:ext cx="2926085" cy="248302"/>
           </a:xfrm>
           <a:prstGeom prst="rect">
             <a:avLst/>
@@ -14931,10 +14031,6 @@
                 <a:solidFill>
                   <a:srgbClr val="1A1A2E"/>
                 </a:solidFill>
-                <a:latin typeface="+mn-lt"/>
-                <a:ea typeface="+mn-ea"/>
-                <a:cs typeface="+mn-cs"/>
-                <a:sym typeface="Calibri"/>
               </a:defRPr>
             </a:lvl1pPr>
           </a:lstStyle>
@@ -14983,10 +14079,6 @@
                 <a:solidFill>
                   <a:srgbClr val="FFFFFF"/>
                 </a:solidFill>
-                <a:latin typeface="+mn-lt"/>
-                <a:ea typeface="+mn-ea"/>
-                <a:cs typeface="+mn-cs"/>
-                <a:sym typeface="Calibri"/>
               </a:defRPr>
             </a:pPr>
           </a:p>
@@ -15001,7 +14093,7 @@
         <p:spPr>
           <a:xfrm>
             <a:off x="4389120" y="1371599"/>
-            <a:ext cx="3383282" cy="548643"/>
+            <a:ext cx="3383282" cy="548644"/>
           </a:xfrm>
           <a:prstGeom prst="rect">
             <a:avLst/>
@@ -15029,10 +14121,6 @@
                 <a:solidFill>
                   <a:srgbClr val="FFFFFF"/>
                 </a:solidFill>
-                <a:latin typeface="+mn-lt"/>
-                <a:ea typeface="+mn-ea"/>
-                <a:cs typeface="+mn-cs"/>
-                <a:sym typeface="Calibri"/>
               </a:defRPr>
             </a:pPr>
           </a:p>
@@ -15046,8 +14134,8 @@
         </p:nvSpPr>
         <p:spPr>
           <a:xfrm>
-            <a:off x="4526279" y="1506922"/>
-            <a:ext cx="3108962" cy="277995"/>
+            <a:off x="4526279" y="1506921"/>
+            <a:ext cx="3108963" cy="277994"/>
           </a:xfrm>
           <a:prstGeom prst="rect">
             <a:avLst/>
@@ -15071,10 +14159,6 @@
                 <a:solidFill>
                   <a:srgbClr val="FFFFFF"/>
                 </a:solidFill>
-                <a:latin typeface="+mn-lt"/>
-                <a:ea typeface="+mn-ea"/>
-                <a:cs typeface="+mn-cs"/>
-                <a:sym typeface="Calibri"/>
               </a:defRPr>
             </a:lvl1pPr>
           </a:lstStyle>
@@ -15095,7 +14179,7 @@
         <p:spPr>
           <a:xfrm>
             <a:off x="4617718" y="2103121"/>
-            <a:ext cx="2926083" cy="248303"/>
+            <a:ext cx="2926084" cy="248301"/>
           </a:xfrm>
           <a:prstGeom prst="rect">
             <a:avLst/>
@@ -15119,10 +14203,6 @@
                 <a:solidFill>
                   <a:srgbClr val="1A1A2E"/>
                 </a:solidFill>
-                <a:latin typeface="+mn-lt"/>
-                <a:ea typeface="+mn-ea"/>
-                <a:cs typeface="+mn-cs"/>
-                <a:sym typeface="Calibri"/>
               </a:defRPr>
             </a:lvl1pPr>
           </a:lstStyle>
@@ -15143,7 +14223,7 @@
         <p:spPr>
           <a:xfrm>
             <a:off x="4617718" y="2560321"/>
-            <a:ext cx="2926083" cy="248303"/>
+            <a:ext cx="2926084" cy="248301"/>
           </a:xfrm>
           <a:prstGeom prst="rect">
             <a:avLst/>
@@ -15167,10 +14247,6 @@
                 <a:solidFill>
                   <a:srgbClr val="1A1A2E"/>
                 </a:solidFill>
-                <a:latin typeface="+mn-lt"/>
-                <a:ea typeface="+mn-ea"/>
-                <a:cs typeface="+mn-cs"/>
-                <a:sym typeface="Calibri"/>
               </a:defRPr>
             </a:lvl1pPr>
           </a:lstStyle>
@@ -15191,7 +14267,7 @@
         <p:spPr>
           <a:xfrm>
             <a:off x="4617718" y="3017521"/>
-            <a:ext cx="2926083" cy="248303"/>
+            <a:ext cx="2926084" cy="248301"/>
           </a:xfrm>
           <a:prstGeom prst="rect">
             <a:avLst/>
@@ -15215,10 +14291,6 @@
                 <a:solidFill>
                   <a:srgbClr val="1A1A2E"/>
                 </a:solidFill>
-                <a:latin typeface="+mn-lt"/>
-                <a:ea typeface="+mn-ea"/>
-                <a:cs typeface="+mn-cs"/>
-                <a:sym typeface="Calibri"/>
               </a:defRPr>
             </a:lvl1pPr>
           </a:lstStyle>
@@ -15238,8 +14310,8 @@
         </p:nvSpPr>
         <p:spPr>
           <a:xfrm>
-            <a:off x="4617718" y="3474721"/>
-            <a:ext cx="2926083" cy="248303"/>
+            <a:off x="4617718" y="3474720"/>
+            <a:ext cx="2926084" cy="248302"/>
           </a:xfrm>
           <a:prstGeom prst="rect">
             <a:avLst/>
@@ -15263,10 +14335,6 @@
                 <a:solidFill>
                   <a:srgbClr val="1A1A2E"/>
                 </a:solidFill>
-                <a:latin typeface="+mn-lt"/>
-                <a:ea typeface="+mn-ea"/>
-                <a:cs typeface="+mn-cs"/>
-                <a:sym typeface="Calibri"/>
               </a:defRPr>
             </a:lvl1pPr>
           </a:lstStyle>
@@ -15286,8 +14354,8 @@
         </p:nvSpPr>
         <p:spPr>
           <a:xfrm>
-            <a:off x="4617718" y="3931921"/>
-            <a:ext cx="2926083" cy="248303"/>
+            <a:off x="4617718" y="3931920"/>
+            <a:ext cx="2926084" cy="248302"/>
           </a:xfrm>
           <a:prstGeom prst="rect">
             <a:avLst/>
@@ -15311,10 +14379,6 @@
                 <a:solidFill>
                   <a:srgbClr val="1A1A2E"/>
                 </a:solidFill>
-                <a:latin typeface="+mn-lt"/>
-                <a:ea typeface="+mn-ea"/>
-                <a:cs typeface="+mn-cs"/>
-                <a:sym typeface="Calibri"/>
               </a:defRPr>
             </a:lvl1pPr>
           </a:lstStyle>
@@ -15334,8 +14398,8 @@
         </p:nvSpPr>
         <p:spPr>
           <a:xfrm>
-            <a:off x="4617718" y="4389121"/>
-            <a:ext cx="2926083" cy="248303"/>
+            <a:off x="4617718" y="4389120"/>
+            <a:ext cx="2926084" cy="248302"/>
           </a:xfrm>
           <a:prstGeom prst="rect">
             <a:avLst/>
@@ -15359,10 +14423,6 @@
                 <a:solidFill>
                   <a:srgbClr val="1A1A2E"/>
                 </a:solidFill>
-                <a:latin typeface="+mn-lt"/>
-                <a:ea typeface="+mn-ea"/>
-                <a:cs typeface="+mn-cs"/>
-                <a:sym typeface="Calibri"/>
               </a:defRPr>
             </a:lvl1pPr>
           </a:lstStyle>
@@ -15382,8 +14442,8 @@
         </p:nvSpPr>
         <p:spPr>
           <a:xfrm>
-            <a:off x="4617718" y="4846321"/>
-            <a:ext cx="2926083" cy="248303"/>
+            <a:off x="4617718" y="4846320"/>
+            <a:ext cx="2926084" cy="248302"/>
           </a:xfrm>
           <a:prstGeom prst="rect">
             <a:avLst/>
@@ -15407,10 +14467,6 @@
                 <a:solidFill>
                   <a:srgbClr val="1A1A2E"/>
                 </a:solidFill>
-                <a:latin typeface="+mn-lt"/>
-                <a:ea typeface="+mn-ea"/>
-                <a:cs typeface="+mn-cs"/>
-                <a:sym typeface="Calibri"/>
               </a:defRPr>
             </a:lvl1pPr>
           </a:lstStyle>
@@ -15459,10 +14515,6 @@
                 <a:solidFill>
                   <a:srgbClr val="FFFFFF"/>
                 </a:solidFill>
-                <a:latin typeface="+mn-lt"/>
-                <a:ea typeface="+mn-ea"/>
-                <a:cs typeface="+mn-cs"/>
-                <a:sym typeface="Calibri"/>
               </a:defRPr>
             </a:pPr>
           </a:p>
@@ -15477,7 +14529,7 @@
         <p:spPr>
           <a:xfrm>
             <a:off x="8046718" y="1371599"/>
-            <a:ext cx="3383282" cy="548643"/>
+            <a:ext cx="3383282" cy="548644"/>
           </a:xfrm>
           <a:prstGeom prst="rect">
             <a:avLst/>
@@ -15505,10 +14557,6 @@
                 <a:solidFill>
                   <a:srgbClr val="FFFFFF"/>
                 </a:solidFill>
-                <a:latin typeface="+mn-lt"/>
-                <a:ea typeface="+mn-ea"/>
-                <a:cs typeface="+mn-cs"/>
-                <a:sym typeface="Calibri"/>
               </a:defRPr>
             </a:pPr>
           </a:p>
@@ -15522,8 +14570,8 @@
         </p:nvSpPr>
         <p:spPr>
           <a:xfrm>
-            <a:off x="8183880" y="1506922"/>
-            <a:ext cx="3108962" cy="277995"/>
+            <a:off x="8183880" y="1506921"/>
+            <a:ext cx="3108963" cy="277994"/>
           </a:xfrm>
           <a:prstGeom prst="rect">
             <a:avLst/>
@@ -15547,10 +14595,6 @@
                 <a:solidFill>
                   <a:srgbClr val="FFFFFF"/>
                 </a:solidFill>
-                <a:latin typeface="+mn-lt"/>
-                <a:ea typeface="+mn-ea"/>
-                <a:cs typeface="+mn-cs"/>
-                <a:sym typeface="Calibri"/>
               </a:defRPr>
             </a:lvl1pPr>
           </a:lstStyle>
@@ -15571,7 +14615,7 @@
         <p:spPr>
           <a:xfrm>
             <a:off x="8275318" y="2103121"/>
-            <a:ext cx="2926083" cy="248303"/>
+            <a:ext cx="2926084" cy="248301"/>
           </a:xfrm>
           <a:prstGeom prst="rect">
             <a:avLst/>
@@ -15595,10 +14639,6 @@
                 <a:solidFill>
                   <a:srgbClr val="1A1A2E"/>
                 </a:solidFill>
-                <a:latin typeface="+mn-lt"/>
-                <a:ea typeface="+mn-ea"/>
-                <a:cs typeface="+mn-cs"/>
-                <a:sym typeface="Calibri"/>
               </a:defRPr>
             </a:lvl1pPr>
           </a:lstStyle>
@@ -15619,7 +14659,7 @@
         <p:spPr>
           <a:xfrm>
             <a:off x="8275318" y="2560321"/>
-            <a:ext cx="2926083" cy="248303"/>
+            <a:ext cx="2926084" cy="248301"/>
           </a:xfrm>
           <a:prstGeom prst="rect">
             <a:avLst/>
@@ -15643,10 +14683,6 @@
                 <a:solidFill>
                   <a:srgbClr val="1A1A2E"/>
                 </a:solidFill>
-                <a:latin typeface="+mn-lt"/>
-                <a:ea typeface="+mn-ea"/>
-                <a:cs typeface="+mn-cs"/>
-                <a:sym typeface="Calibri"/>
               </a:defRPr>
             </a:lvl1pPr>
           </a:lstStyle>
@@ -15667,7 +14703,7 @@
         <p:spPr>
           <a:xfrm>
             <a:off x="8275318" y="3017521"/>
-            <a:ext cx="2926083" cy="248303"/>
+            <a:ext cx="2926084" cy="248301"/>
           </a:xfrm>
           <a:prstGeom prst="rect">
             <a:avLst/>
@@ -15691,10 +14727,6 @@
                 <a:solidFill>
                   <a:srgbClr val="1A1A2E"/>
                 </a:solidFill>
-                <a:latin typeface="+mn-lt"/>
-                <a:ea typeface="+mn-ea"/>
-                <a:cs typeface="+mn-cs"/>
-                <a:sym typeface="Calibri"/>
               </a:defRPr>
             </a:lvl1pPr>
           </a:lstStyle>
@@ -15714,8 +14746,8 @@
         </p:nvSpPr>
         <p:spPr>
           <a:xfrm>
-            <a:off x="8275318" y="3474721"/>
-            <a:ext cx="2926083" cy="248303"/>
+            <a:off x="8275318" y="3474720"/>
+            <a:ext cx="2926084" cy="248302"/>
           </a:xfrm>
           <a:prstGeom prst="rect">
             <a:avLst/>
@@ -15739,10 +14771,6 @@
                 <a:solidFill>
                   <a:srgbClr val="1A1A2E"/>
                 </a:solidFill>
-                <a:latin typeface="+mn-lt"/>
-                <a:ea typeface="+mn-ea"/>
-                <a:cs typeface="+mn-cs"/>
-                <a:sym typeface="Calibri"/>
               </a:defRPr>
             </a:lvl1pPr>
           </a:lstStyle>
@@ -15762,8 +14790,8 @@
         </p:nvSpPr>
         <p:spPr>
           <a:xfrm>
-            <a:off x="8275318" y="3931921"/>
-            <a:ext cx="2926083" cy="248303"/>
+            <a:off x="8275318" y="3931920"/>
+            <a:ext cx="2926084" cy="248302"/>
           </a:xfrm>
           <a:prstGeom prst="rect">
             <a:avLst/>
@@ -15787,10 +14815,6 @@
                 <a:solidFill>
                   <a:srgbClr val="1A1A2E"/>
                 </a:solidFill>
-                <a:latin typeface="+mn-lt"/>
-                <a:ea typeface="+mn-ea"/>
-                <a:cs typeface="+mn-cs"/>
-                <a:sym typeface="Calibri"/>
               </a:defRPr>
             </a:lvl1pPr>
           </a:lstStyle>
@@ -15810,8 +14834,8 @@
         </p:nvSpPr>
         <p:spPr>
           <a:xfrm>
-            <a:off x="8275318" y="4389121"/>
-            <a:ext cx="2926083" cy="248303"/>
+            <a:off x="8275318" y="4389120"/>
+            <a:ext cx="2926084" cy="248302"/>
           </a:xfrm>
           <a:prstGeom prst="rect">
             <a:avLst/>
@@ -15835,10 +14859,6 @@
                 <a:solidFill>
                   <a:srgbClr val="1A1A2E"/>
                 </a:solidFill>
-                <a:latin typeface="+mn-lt"/>
-                <a:ea typeface="+mn-ea"/>
-                <a:cs typeface="+mn-cs"/>
-                <a:sym typeface="Calibri"/>
               </a:defRPr>
             </a:lvl1pPr>
           </a:lstStyle>
@@ -15858,8 +14878,8 @@
         </p:nvSpPr>
         <p:spPr>
           <a:xfrm>
-            <a:off x="8275318" y="4846321"/>
-            <a:ext cx="2926083" cy="248303"/>
+            <a:off x="8275318" y="4846320"/>
+            <a:ext cx="2926084" cy="248302"/>
           </a:xfrm>
           <a:prstGeom prst="rect">
             <a:avLst/>
@@ -15883,10 +14903,6 @@
                 <a:solidFill>
                   <a:srgbClr val="1A1A2E"/>
                 </a:solidFill>
-                <a:latin typeface="+mn-lt"/>
-                <a:ea typeface="+mn-ea"/>
-                <a:cs typeface="+mn-cs"/>
-                <a:sym typeface="Calibri"/>
               </a:defRPr>
             </a:lvl1pPr>
           </a:lstStyle>
@@ -15907,7 +14923,7 @@
         <p:spPr>
           <a:xfrm>
             <a:off x="731519" y="6309359"/>
-            <a:ext cx="10698482" cy="54866"/>
+            <a:ext cx="10698482" cy="54867"/>
           </a:xfrm>
           <a:prstGeom prst="rect">
             <a:avLst/>
@@ -15935,10 +14951,6 @@
                 <a:solidFill>
                   <a:srgbClr val="FFFFFF"/>
                 </a:solidFill>
-                <a:latin typeface="+mn-lt"/>
-                <a:ea typeface="+mn-ea"/>
-                <a:cs typeface="+mn-cs"/>
-                <a:sym typeface="Calibri"/>
               </a:defRPr>
             </a:pPr>
           </a:p>
@@ -16007,10 +15019,6 @@
                 <a:solidFill>
                   <a:srgbClr val="FFFFFF"/>
                 </a:solidFill>
-                <a:latin typeface="+mn-lt"/>
-                <a:ea typeface="+mn-ea"/>
-                <a:cs typeface="+mn-cs"/>
-                <a:sym typeface="Calibri"/>
               </a:defRPr>
             </a:pPr>
           </a:p>
@@ -16024,8 +15032,8 @@
         </p:nvSpPr>
         <p:spPr>
           <a:xfrm>
-            <a:off x="777239" y="457199"/>
-            <a:ext cx="9052561" cy="542240"/>
+            <a:off x="777239" y="457198"/>
+            <a:ext cx="9052561" cy="542238"/>
           </a:xfrm>
           <a:prstGeom prst="rect">
             <a:avLst/>
@@ -16049,10 +15057,6 @@
                 <a:solidFill>
                   <a:srgbClr val="1E2761"/>
                 </a:solidFill>
-                <a:latin typeface="+mn-lt"/>
-                <a:ea typeface="+mn-ea"/>
-                <a:cs typeface="+mn-cs"/>
-                <a:sym typeface="Calibri"/>
               </a:defRPr>
             </a:lvl1pPr>
           </a:lstStyle>
@@ -16073,7 +15077,7 @@
         <p:spPr>
           <a:xfrm>
             <a:off x="731520" y="1280160"/>
-            <a:ext cx="3383280" cy="1828802"/>
+            <a:ext cx="3383280" cy="1828803"/>
           </a:xfrm>
           <a:prstGeom prst="rect">
             <a:avLst/>
@@ -16101,10 +15105,6 @@
                 <a:solidFill>
                   <a:srgbClr val="FFFFFF"/>
                 </a:solidFill>
-                <a:latin typeface="+mn-lt"/>
-                <a:ea typeface="+mn-ea"/>
-                <a:cs typeface="+mn-cs"/>
-                <a:sym typeface="Calibri"/>
               </a:defRPr>
             </a:pPr>
           </a:p>
@@ -16118,8 +15118,8 @@
         </p:nvSpPr>
         <p:spPr>
           <a:xfrm>
-            <a:off x="868678" y="1453187"/>
-            <a:ext cx="3108962" cy="280798"/>
+            <a:off x="868677" y="1453186"/>
+            <a:ext cx="3108963" cy="280796"/>
           </a:xfrm>
           <a:prstGeom prst="rect">
             <a:avLst/>
@@ -16143,10 +15143,6 @@
                 <a:solidFill>
                   <a:srgbClr val="6B7B8D"/>
                 </a:solidFill>
-                <a:latin typeface="+mn-lt"/>
-                <a:ea typeface="+mn-ea"/>
-                <a:cs typeface="+mn-cs"/>
-                <a:sym typeface="Calibri"/>
               </a:defRPr>
             </a:lvl1pPr>
           </a:lstStyle>
@@ -16166,8 +15162,8 @@
         </p:nvSpPr>
         <p:spPr>
           <a:xfrm>
-            <a:off x="868678" y="1773228"/>
-            <a:ext cx="3108962" cy="850363"/>
+            <a:off x="868677" y="1773227"/>
+            <a:ext cx="3108963" cy="850362"/>
           </a:xfrm>
           <a:prstGeom prst="rect">
             <a:avLst/>
@@ -16191,10 +15187,6 @@
                 <a:solidFill>
                   <a:srgbClr val="2ECC71"/>
                 </a:solidFill>
-                <a:latin typeface="+mn-lt"/>
-                <a:ea typeface="+mn-ea"/>
-                <a:cs typeface="+mn-cs"/>
-                <a:sym typeface="Calibri"/>
               </a:defRPr>
             </a:lvl1pPr>
           </a:lstStyle>
@@ -16214,8 +15206,8 @@
         </p:nvSpPr>
         <p:spPr>
           <a:xfrm>
-            <a:off x="868678" y="2687628"/>
-            <a:ext cx="3108962" cy="248303"/>
+            <a:off x="868677" y="2687628"/>
+            <a:ext cx="3108963" cy="248301"/>
           </a:xfrm>
           <a:prstGeom prst="rect">
             <a:avLst/>
@@ -16239,10 +15231,6 @@
                 <a:solidFill>
                   <a:srgbClr val="6B7B8D"/>
                 </a:solidFill>
-                <a:latin typeface="+mn-lt"/>
-                <a:ea typeface="+mn-ea"/>
-                <a:cs typeface="+mn-cs"/>
-                <a:sym typeface="Calibri"/>
               </a:defRPr>
             </a:lvl1pPr>
           </a:lstStyle>
@@ -16263,7 +15251,7 @@
         <p:spPr>
           <a:xfrm>
             <a:off x="4389120" y="1280160"/>
-            <a:ext cx="3383282" cy="1828802"/>
+            <a:ext cx="3383282" cy="1828803"/>
           </a:xfrm>
           <a:prstGeom prst="rect">
             <a:avLst/>
@@ -16291,10 +15279,6 @@
                 <a:solidFill>
                   <a:srgbClr val="FFFFFF"/>
                 </a:solidFill>
-                <a:latin typeface="+mn-lt"/>
-                <a:ea typeface="+mn-ea"/>
-                <a:cs typeface="+mn-cs"/>
-                <a:sym typeface="Calibri"/>
               </a:defRPr>
             </a:pPr>
           </a:p>
@@ -16308,8 +15292,8 @@
         </p:nvSpPr>
         <p:spPr>
           <a:xfrm>
-            <a:off x="4526279" y="1453187"/>
-            <a:ext cx="3108962" cy="280798"/>
+            <a:off x="4526279" y="1453186"/>
+            <a:ext cx="3108963" cy="280796"/>
           </a:xfrm>
           <a:prstGeom prst="rect">
             <a:avLst/>
@@ -16333,10 +15317,6 @@
                 <a:solidFill>
                   <a:srgbClr val="6B7B8D"/>
                 </a:solidFill>
-                <a:latin typeface="+mn-lt"/>
-                <a:ea typeface="+mn-ea"/>
-                <a:cs typeface="+mn-cs"/>
-                <a:sym typeface="Calibri"/>
               </a:defRPr>
             </a:lvl1pPr>
           </a:lstStyle>
@@ -16356,8 +15336,8 @@
         </p:nvSpPr>
         <p:spPr>
           <a:xfrm>
-            <a:off x="4526279" y="1773228"/>
-            <a:ext cx="3108962" cy="850363"/>
+            <a:off x="4526279" y="1773227"/>
+            <a:ext cx="3108963" cy="850362"/>
           </a:xfrm>
           <a:prstGeom prst="rect">
             <a:avLst/>
@@ -16381,10 +15361,6 @@
                 <a:solidFill>
                   <a:srgbClr val="E74C3C"/>
                 </a:solidFill>
-                <a:latin typeface="+mn-lt"/>
-                <a:ea typeface="+mn-ea"/>
-                <a:cs typeface="+mn-cs"/>
-                <a:sym typeface="Calibri"/>
               </a:defRPr>
             </a:lvl1pPr>
           </a:lstStyle>
@@ -16405,7 +15381,7 @@
         <p:spPr>
           <a:xfrm>
             <a:off x="4526279" y="2687628"/>
-            <a:ext cx="3108962" cy="248303"/>
+            <a:ext cx="3108963" cy="248301"/>
           </a:xfrm>
           <a:prstGeom prst="rect">
             <a:avLst/>
@@ -16429,10 +15405,6 @@
                 <a:solidFill>
                   <a:srgbClr val="6B7B8D"/>
                 </a:solidFill>
-                <a:latin typeface="+mn-lt"/>
-                <a:ea typeface="+mn-ea"/>
-                <a:cs typeface="+mn-cs"/>
-                <a:sym typeface="Calibri"/>
               </a:defRPr>
             </a:lvl1pPr>
           </a:lstStyle>
@@ -16453,7 +15425,7 @@
         <p:spPr>
           <a:xfrm>
             <a:off x="8046718" y="1280160"/>
-            <a:ext cx="3383282" cy="1828802"/>
+            <a:ext cx="3383282" cy="1828803"/>
           </a:xfrm>
           <a:prstGeom prst="rect">
             <a:avLst/>
@@ -16481,10 +15453,6 @@
                 <a:solidFill>
                   <a:srgbClr val="FFFFFF"/>
                 </a:solidFill>
-                <a:latin typeface="+mn-lt"/>
-                <a:ea typeface="+mn-ea"/>
-                <a:cs typeface="+mn-cs"/>
-                <a:sym typeface="Calibri"/>
               </a:defRPr>
             </a:pPr>
           </a:p>
@@ -16498,8 +15466,8 @@
         </p:nvSpPr>
         <p:spPr>
           <a:xfrm>
-            <a:off x="8183878" y="1453187"/>
-            <a:ext cx="3108962" cy="280798"/>
+            <a:off x="8183877" y="1453186"/>
+            <a:ext cx="3108963" cy="280796"/>
           </a:xfrm>
           <a:prstGeom prst="rect">
             <a:avLst/>
@@ -16523,10 +15491,6 @@
                 <a:solidFill>
                   <a:srgbClr val="6B7B8D"/>
                 </a:solidFill>
-                <a:latin typeface="+mn-lt"/>
-                <a:ea typeface="+mn-ea"/>
-                <a:cs typeface="+mn-cs"/>
-                <a:sym typeface="Calibri"/>
               </a:defRPr>
             </a:lvl1pPr>
           </a:lstStyle>
@@ -16546,8 +15510,8 @@
         </p:nvSpPr>
         <p:spPr>
           <a:xfrm>
-            <a:off x="8183878" y="1773228"/>
-            <a:ext cx="3108962" cy="850363"/>
+            <a:off x="8183877" y="1773227"/>
+            <a:ext cx="3108963" cy="850362"/>
           </a:xfrm>
           <a:prstGeom prst="rect">
             <a:avLst/>
@@ -16571,10 +15535,6 @@
                 <a:solidFill>
                   <a:srgbClr val="2ECC71"/>
                 </a:solidFill>
-                <a:latin typeface="+mn-lt"/>
-                <a:ea typeface="+mn-ea"/>
-                <a:cs typeface="+mn-cs"/>
-                <a:sym typeface="Calibri"/>
               </a:defRPr>
             </a:lvl1pPr>
           </a:lstStyle>
@@ -16594,8 +15554,8 @@
         </p:nvSpPr>
         <p:spPr>
           <a:xfrm>
-            <a:off x="8183878" y="2687628"/>
-            <a:ext cx="3108962" cy="248303"/>
+            <a:off x="8183877" y="2687628"/>
+            <a:ext cx="3108963" cy="248301"/>
           </a:xfrm>
           <a:prstGeom prst="rect">
             <a:avLst/>
@@ -16619,10 +15579,6 @@
                 <a:solidFill>
                   <a:srgbClr val="6B7B8D"/>
                 </a:solidFill>
-                <a:latin typeface="+mn-lt"/>
-                <a:ea typeface="+mn-ea"/>
-                <a:cs typeface="+mn-cs"/>
-                <a:sym typeface="Calibri"/>
               </a:defRPr>
             </a:lvl1pPr>
           </a:lstStyle>
@@ -16643,7 +15599,7 @@
         <p:spPr>
           <a:xfrm>
             <a:off x="731519" y="3200399"/>
-            <a:ext cx="10698482" cy="548643"/>
+            <a:ext cx="10698482" cy="548644"/>
           </a:xfrm>
           <a:prstGeom prst="rect">
             <a:avLst/>
@@ -16671,10 +15627,6 @@
                 <a:solidFill>
                   <a:srgbClr val="FFFFFF"/>
                 </a:solidFill>
-                <a:latin typeface="+mn-lt"/>
-                <a:ea typeface="+mn-ea"/>
-                <a:cs typeface="+mn-cs"/>
-                <a:sym typeface="Calibri"/>
               </a:defRPr>
             </a:pPr>
           </a:p>
@@ -16688,8 +15640,8 @@
         </p:nvSpPr>
         <p:spPr>
           <a:xfrm>
-            <a:off x="1051558" y="3288601"/>
-            <a:ext cx="10058404" cy="280798"/>
+            <a:off x="1051558" y="3288600"/>
+            <a:ext cx="10058404" cy="280796"/>
           </a:xfrm>
           <a:prstGeom prst="rect">
             <a:avLst/>
@@ -16713,10 +15665,6 @@
                 <a:solidFill>
                   <a:srgbClr val="FFFFFF"/>
                 </a:solidFill>
-                <a:latin typeface="+mn-lt"/>
-                <a:ea typeface="+mn-ea"/>
-                <a:cs typeface="+mn-cs"/>
-                <a:sym typeface="Calibri"/>
               </a:defRPr>
             </a:lvl1pPr>
           </a:lstStyle>
@@ -16736,8 +15684,8 @@
         </p:nvSpPr>
         <p:spPr>
           <a:xfrm>
-            <a:off x="777239" y="3931921"/>
-            <a:ext cx="9052561" cy="340180"/>
+            <a:off x="777239" y="3931920"/>
+            <a:ext cx="9052561" cy="340179"/>
           </a:xfrm>
           <a:prstGeom prst="rect">
             <a:avLst/>
@@ -16761,10 +15709,6 @@
                 <a:solidFill>
                   <a:srgbClr val="1E2761"/>
                 </a:solidFill>
-                <a:latin typeface="+mn-lt"/>
-                <a:ea typeface="+mn-ea"/>
-                <a:cs typeface="+mn-cs"/>
-                <a:sym typeface="Calibri"/>
               </a:defRPr>
             </a:lvl1pPr>
           </a:lstStyle>
@@ -16784,7 +15728,7 @@
         </p:nvGraphicFramePr>
         <p:xfrm>
           <a:off x="731519" y="4480559"/>
-          <a:ext cx="10698482" cy="2103122"/>
+          <a:ext cx="10664092" cy="2103120"/>
         </p:xfrm>
         <a:graphic xmlns:a="http://schemas.openxmlformats.org/drawingml/2006/main">
           <a:graphicData uri="http://schemas.openxmlformats.org/drawingml/2006/table">
@@ -16796,7 +15740,7 @@
                 <a:gridCol w="1343917"/>
                 <a:gridCol w="1826804"/>
                 <a:gridCol w="1825164"/>
-                <a:gridCol w="1922387"/>
+                <a:gridCol w="1922386"/>
                 <a:gridCol w="1780861"/>
                 <a:gridCol w="1964958"/>
               </a:tblGrid>
@@ -17822,10 +16766,10 @@
             </a:solidFill>
             <a:effectLst/>
             <a:uFillTx/>
-            <a:latin typeface="+mj-lt"/>
-            <a:ea typeface="+mj-ea"/>
-            <a:cs typeface="+mj-cs"/>
-            <a:sym typeface="Helvetica"/>
+            <a:latin typeface="+mn-lt"/>
+            <a:ea typeface="+mn-ea"/>
+            <a:cs typeface="+mn-cs"/>
+            <a:sym typeface="Calibri"/>
           </a:defRPr>
         </a:defPPr>
         <a:lvl1pPr marL="0" marR="0" indent="0" algn="l" defTabSz="914400" rtl="0" fontAlgn="auto" latinLnBrk="1" hangingPunct="0">
@@ -18399,10 +17343,10 @@
             </a:solidFill>
             <a:effectLst/>
             <a:uFillTx/>
-            <a:latin typeface="+mj-lt"/>
-            <a:ea typeface="+mj-ea"/>
-            <a:cs typeface="+mj-cs"/>
-            <a:sym typeface="Helvetica"/>
+            <a:latin typeface="+mn-lt"/>
+            <a:ea typeface="+mn-ea"/>
+            <a:cs typeface="+mn-cs"/>
+            <a:sym typeface="Calibri"/>
           </a:defRPr>
         </a:defPPr>
         <a:lvl1pPr marL="0" marR="0" indent="0" algn="l" defTabSz="914400" rtl="0" fontAlgn="auto" latinLnBrk="1" hangingPunct="0">
@@ -18906,10 +17850,10 @@
             </a:solidFill>
             <a:effectLst/>
             <a:uFillTx/>
-            <a:latin typeface="+mj-lt"/>
-            <a:ea typeface="+mj-ea"/>
-            <a:cs typeface="+mj-cs"/>
-            <a:sym typeface="Helvetica"/>
+            <a:latin typeface="+mn-lt"/>
+            <a:ea typeface="+mn-ea"/>
+            <a:cs typeface="+mn-cs"/>
+            <a:sym typeface="Calibri"/>
           </a:defRPr>
         </a:defPPr>
         <a:lvl1pPr marL="0" marR="0" indent="0" algn="l" defTabSz="914400" rtl="0" fontAlgn="auto" latinLnBrk="1" hangingPunct="0">
@@ -19483,10 +18427,10 @@
             </a:solidFill>
             <a:effectLst/>
             <a:uFillTx/>
-            <a:latin typeface="+mj-lt"/>
-            <a:ea typeface="+mj-ea"/>
-            <a:cs typeface="+mj-cs"/>
-            <a:sym typeface="Helvetica"/>
+            <a:latin typeface="+mn-lt"/>
+            <a:ea typeface="+mn-ea"/>
+            <a:cs typeface="+mn-cs"/>
+            <a:sym typeface="Calibri"/>
           </a:defRPr>
         </a:defPPr>
         <a:lvl1pPr marL="0" marR="0" indent="0" algn="l" defTabSz="914400" rtl="0" fontAlgn="auto" latinLnBrk="1" hangingPunct="0">
